--- a/lessons/lesson-06/slides.pptx
+++ b/lessons/lesson-06/slides.pptx
@@ -2,33 +2,34 @@
 <file path=ppt/presentation.xml><?xml version="1.0" encoding="utf-8"?>
 <p:presentation xmlns:p="http://schemas.openxmlformats.org/presentationml/2006/main">
   <p:sldMasterIdLst>
-    <p:sldMasterId xmlns:r="http://schemas.openxmlformats.org/officeDocument/2006/relationships" id="2147483648" r:id="Rd60951491a3d49ab"/>
+    <p:sldMasterId xmlns:r="http://schemas.openxmlformats.org/officeDocument/2006/relationships" id="2147483648" r:id="R570d03ef8516411a"/>
   </p:sldMasterIdLst>
   <p:notesMasterIdLst>
-    <p:notesMasterId xmlns:r="http://schemas.openxmlformats.org/officeDocument/2006/relationships" r:id="R1293e2d8b5c14cd5"/>
+    <p:notesMasterId xmlns:r="http://schemas.openxmlformats.org/officeDocument/2006/relationships" r:id="Rc6c1dd61509e422c"/>
   </p:notesMasterIdLst>
   <p:sldIdLst>
-    <p:sldId xmlns:r="http://schemas.openxmlformats.org/officeDocument/2006/relationships" id="256" r:id="Ra5bddf74a63441d4"/>
-    <p:sldId xmlns:r="http://schemas.openxmlformats.org/officeDocument/2006/relationships" id="257" r:id="R539b9d282c3141dc"/>
-    <p:sldId xmlns:r="http://schemas.openxmlformats.org/officeDocument/2006/relationships" id="258" r:id="R7fde1e5fe245400c"/>
-    <p:sldId xmlns:r="http://schemas.openxmlformats.org/officeDocument/2006/relationships" id="259" r:id="Rd4f0b460edbb46fe"/>
-    <p:sldId xmlns:r="http://schemas.openxmlformats.org/officeDocument/2006/relationships" id="260" r:id="R370ff02ec9034ecc"/>
-    <p:sldId xmlns:r="http://schemas.openxmlformats.org/officeDocument/2006/relationships" id="261" r:id="R9e99889198d54486"/>
-    <p:sldId xmlns:r="http://schemas.openxmlformats.org/officeDocument/2006/relationships" id="262" r:id="R7c98a93cc39c48b0"/>
-    <p:sldId xmlns:r="http://schemas.openxmlformats.org/officeDocument/2006/relationships" id="263" r:id="R84a05ce0f1e24c1f"/>
-    <p:sldId xmlns:r="http://schemas.openxmlformats.org/officeDocument/2006/relationships" id="264" r:id="Rddbd91beead448d8"/>
-    <p:sldId xmlns:r="http://schemas.openxmlformats.org/officeDocument/2006/relationships" id="265" r:id="R3fde01f9020a4db0"/>
-    <p:sldId xmlns:r="http://schemas.openxmlformats.org/officeDocument/2006/relationships" id="266" r:id="R27745e85fb1e4277"/>
-    <p:sldId xmlns:r="http://schemas.openxmlformats.org/officeDocument/2006/relationships" id="267" r:id="R60eb8da8945346cb"/>
-    <p:sldId xmlns:r="http://schemas.openxmlformats.org/officeDocument/2006/relationships" id="268" r:id="Rd6ac9d7381174aea"/>
-    <p:sldId xmlns:r="http://schemas.openxmlformats.org/officeDocument/2006/relationships" id="269" r:id="R2388d7609f6949ba"/>
-    <p:sldId xmlns:r="http://schemas.openxmlformats.org/officeDocument/2006/relationships" id="270" r:id="Rfe33970768d8425c"/>
-    <p:sldId xmlns:r="http://schemas.openxmlformats.org/officeDocument/2006/relationships" id="271" r:id="Rab569dce266348e1"/>
-    <p:sldId xmlns:r="http://schemas.openxmlformats.org/officeDocument/2006/relationships" id="272" r:id="R7ca5279523f844eb"/>
-    <p:sldId xmlns:r="http://schemas.openxmlformats.org/officeDocument/2006/relationships" id="273" r:id="R9c203e59ce2840cc"/>
-    <p:sldId xmlns:r="http://schemas.openxmlformats.org/officeDocument/2006/relationships" id="274" r:id="Rdb3f48dcb60844b1"/>
-    <p:sldId xmlns:r="http://schemas.openxmlformats.org/officeDocument/2006/relationships" id="275" r:id="Ra33357ae404b477c"/>
-    <p:sldId xmlns:r="http://schemas.openxmlformats.org/officeDocument/2006/relationships" id="276" r:id="Rf9c15ed20c144f18"/>
+    <p:sldId xmlns:r="http://schemas.openxmlformats.org/officeDocument/2006/relationships" id="256" r:id="Rbaa97fd5e0e44d34"/>
+    <p:sldId xmlns:r="http://schemas.openxmlformats.org/officeDocument/2006/relationships" id="257" r:id="Rcab45398c134485f"/>
+    <p:sldId xmlns:r="http://schemas.openxmlformats.org/officeDocument/2006/relationships" id="258" r:id="R9ee8a58fcaaf4a82"/>
+    <p:sldId xmlns:r="http://schemas.openxmlformats.org/officeDocument/2006/relationships" id="259" r:id="R8f5e5a5ca8f94089"/>
+    <p:sldId xmlns:r="http://schemas.openxmlformats.org/officeDocument/2006/relationships" id="260" r:id="Rc7042cf006614f0c"/>
+    <p:sldId xmlns:r="http://schemas.openxmlformats.org/officeDocument/2006/relationships" id="261" r:id="Rdd6d50eadf0e4282"/>
+    <p:sldId xmlns:r="http://schemas.openxmlformats.org/officeDocument/2006/relationships" id="262" r:id="Rc5a5b1c281624644"/>
+    <p:sldId xmlns:r="http://schemas.openxmlformats.org/officeDocument/2006/relationships" id="263" r:id="R76f926da18a646bc"/>
+    <p:sldId xmlns:r="http://schemas.openxmlformats.org/officeDocument/2006/relationships" id="264" r:id="Rc8c5ab19d3d941c2"/>
+    <p:sldId xmlns:r="http://schemas.openxmlformats.org/officeDocument/2006/relationships" id="265" r:id="Raf967af8a26d4f6e"/>
+    <p:sldId xmlns:r="http://schemas.openxmlformats.org/officeDocument/2006/relationships" id="266" r:id="Rcdd4938aaba14f00"/>
+    <p:sldId xmlns:r="http://schemas.openxmlformats.org/officeDocument/2006/relationships" id="267" r:id="Rd35f19090b3d43d2"/>
+    <p:sldId xmlns:r="http://schemas.openxmlformats.org/officeDocument/2006/relationships" id="268" r:id="R1c1c840ad9c34258"/>
+    <p:sldId xmlns:r="http://schemas.openxmlformats.org/officeDocument/2006/relationships" id="269" r:id="R0e64e9fe90f04837"/>
+    <p:sldId xmlns:r="http://schemas.openxmlformats.org/officeDocument/2006/relationships" id="270" r:id="Re74c207424324a2e"/>
+    <p:sldId xmlns:r="http://schemas.openxmlformats.org/officeDocument/2006/relationships" id="271" r:id="R3aa7c356ed544c2d"/>
+    <p:sldId xmlns:r="http://schemas.openxmlformats.org/officeDocument/2006/relationships" id="272" r:id="Rb5f419c4f6b14806"/>
+    <p:sldId xmlns:r="http://schemas.openxmlformats.org/officeDocument/2006/relationships" id="273" r:id="Re027e438b563420a"/>
+    <p:sldId xmlns:r="http://schemas.openxmlformats.org/officeDocument/2006/relationships" id="274" r:id="Rb201e3e9025f403c"/>
+    <p:sldId xmlns:r="http://schemas.openxmlformats.org/officeDocument/2006/relationships" id="275" r:id="R53a49fe317194f4b"/>
+    <p:sldId xmlns:r="http://schemas.openxmlformats.org/officeDocument/2006/relationships" id="276" r:id="Rc72a42685b8f4e8a"/>
+    <p:sldId xmlns:r="http://schemas.openxmlformats.org/officeDocument/2006/relationships" id="277" r:id="R6b4624377828448d"/>
   </p:sldIdLst>
   <p:sldSz cx="12192000" cy="6858000"/>
   <p:notesSz cx="6858000" cy="9144000"/>
@@ -888,7 +889,7 @@
           <a:lstStyle xmlns:a="http://schemas.openxmlformats.org/drawingml/2006/main"/>
           <a:p xmlns:a="http://schemas.openxmlformats.org/drawingml/2006/main">
             <a:r>
-              <a:t>虚构教学样例｜非真实论文、检索或实证证据。四步推导依赖第 5 课证据地图，输出仍需外部证据检验。</a:t>
+              <a:t>本页把 L3-L5 的 MI 证据缺口压缩为一个问题和三条可区分假设：效率、鲁棒性、忠实性。这里不报告新实验结果，只定义后续 baseline 接口。</a:t>
             </a:r>
           </a:p>
           <a:p xmlns:a="http://schemas.openxmlformats.org/drawingml/2006/main">
@@ -903,12 +904,12 @@
           </a:p>
           <a:p xmlns:a="http://schemas.openxmlformats.org/drawingml/2006/main">
             <a:r>
-              <a:t>- /Users/bright/Projects/courses/graduate/lessons/lesson-06/handout.md</a:t>
-            </a:r>
-          </a:p>
-          <a:p xmlns:a="http://schemas.openxmlformats.org/drawingml/2006/main">
-            <a:r>
-              <a:t>- /Users/bright/Projects/courses/graduate/lessons/lesson-05/handout.md</a:t>
+              <a:t>- /Users/bright/Projects/courses/graduate/lessons/lesson-06/mi-problem-definition-demo.md</a:t>
+            </a:r>
+          </a:p>
+          <a:p xmlns:a="http://schemas.openxmlformats.org/drawingml/2006/main">
+            <a:r>
+              <a:t>- /Users/bright/Projects/courses/graduate/lessons/lesson-05/mi-evidence-map-demo.md</a:t>
             </a:r>
           </a:p>
           <a:p xmlns:a="http://schemas.openxmlformats.org/drawingml/2006/main">
@@ -983,7 +984,7 @@
           <a:lstStyle xmlns:a="http://schemas.openxmlformats.org/drawingml/2006/main"/>
           <a:p xmlns:a="http://schemas.openxmlformats.org/drawingml/2006/main">
             <a:r>
-              <a:t>逐项讲清八项权威条件。AI 偏差字段允许记录发现的问题，也允许记录已检查风险及核验依据，不得虚构错误。</a:t>
+              <a:t>逐项讲清九项权威条件。第 8 项要求记录真实失败或死路的原因、处理和回写位置；第 9 项保留 AI 使用与正式来源核验。</a:t>
             </a:r>
           </a:p>
           <a:p xmlns:a="http://schemas.openxmlformats.org/drawingml/2006/main">
@@ -1268,7 +1269,7 @@
           <a:lstStyle xmlns:a="http://schemas.openxmlformats.org/drawingml/2006/main"/>
           <a:p xmlns:a="http://schemas.openxmlformats.org/drawingml/2006/main">
             <a:r>
-              <a:t>43:00-60:00 停留本页。巡视只处理共同卡点；课前累计文献、精读卡和地图只核对状态，不重做。候选题池与选题理由是课程扩展字段，写入 problem-definition.md，不加入八项门条件。</a:t>
+              <a:t>43:00-60:00 停留本页。巡视只处理共同卡点；课前累计文献、精读卡和地图只核对状态，不重做。候选题池与选题理由是课程扩展字段，写入 problem-definition.md，不加入九项门条件。</a:t>
             </a:r>
           </a:p>
           <a:p xmlns:a="http://schemas.openxmlformats.org/drawingml/2006/main">
@@ -1363,7 +1364,7 @@
           <a:lstStyle xmlns:a="http://schemas.openxmlformats.org/drawingml/2006/main"/>
           <a:p xmlns:a="http://schemas.openxmlformats.org/drawingml/2006/main">
             <a:r>
-              <a:t>60:00-78:00 进行 2-3 人互查。按八项门条件提问，但不替作者改写或决定。</a:t>
+              <a:t>60:00-78:00 进行 2-3 人互查。按九项门条件提问，但不替作者改写或决定。</a:t>
             </a:r>
           </a:p>
           <a:p xmlns:a="http://schemas.openxmlformats.org/drawingml/2006/main">
@@ -1553,7 +1554,7 @@
           <a:lstStyle xmlns:a="http://schemas.openxmlformats.org/drawingml/2006/main"/>
           <a:p xmlns:a="http://schemas.openxmlformats.org/drawingml/2006/main">
             <a:r>
-              <a:t>提交方式、八项条件和未通过处理均以 assignments.md 为准。第一次未通过不直接扣重分，但未按期修订影响对应评分维度。候选题池与选题理由是课程扩展字段，不是门条件新增项。</a:t>
+              <a:t>回收本讲主链：从结构性问题出发，写出可证伪命题，再用基本约束推导待验证前提，最后按九项问题门条件核对。总结不替代提交说明。</a:t>
             </a:r>
           </a:p>
           <a:p xmlns:a="http://schemas.openxmlformats.org/drawingml/2006/main">
@@ -1568,12 +1569,17 @@
           </a:p>
           <a:p xmlns:a="http://schemas.openxmlformats.org/drawingml/2006/main">
             <a:r>
+              <a:t>- /Users/bright/Projects/courses/graduate/lessons/lesson-06/handout.md</a:t>
+            </a:r>
+          </a:p>
+          <a:p xmlns:a="http://schemas.openxmlformats.org/drawingml/2006/main">
+            <a:r>
+              <a:t>- /Users/bright/Projects/courses/graduate/lessons/lesson-06/slides.md</a:t>
+            </a:r>
+          </a:p>
+          <a:p xmlns:a="http://schemas.openxmlformats.org/drawingml/2006/main">
+            <a:r>
               <a:t>- /Users/bright/Projects/courses/graduate/course/assignments.md</a:t>
-            </a:r>
-          </a:p>
-          <a:p xmlns:a="http://schemas.openxmlformats.org/drawingml/2006/main">
-            <a:r>
-              <a:t>- /Users/bright/Projects/courses/graduate/course/assessment.md</a:t>
             </a:r>
           </a:p>
           <a:p xmlns:a="http://schemas.openxmlformats.org/drawingml/2006/main">
@@ -1609,6 +1615,101 @@
 </file>
 
 <file path=ppt/notesSlides/notesSlide21.xml><?xml version="1.0" encoding="utf-8"?>
+<p:notes xmlns:p="http://schemas.openxmlformats.org/presentationml/2006/main">
+  <p:cSld>
+    <p:spTree>
+      <p:nvGrpSpPr>
+        <p:cNvPr id="1" name=""/>
+        <p:cNvGrpSpPr/>
+        <p:nvPr/>
+      </p:nvGrpSpPr>
+      <p:grpSpPr>
+        <a:xfrm xmlns:a="http://schemas.openxmlformats.org/drawingml/2006/main"/>
+      </p:grpSpPr>
+      <p:sp>
+        <p:nvSpPr>
+          <p:cNvPr id="2" name="Slide Image Placeholder 1"/>
+          <p:cNvSpPr>
+            <a:spLocks xmlns:a="http://schemas.openxmlformats.org/drawingml/2006/main" noGrp="1"/>
+          </p:cNvSpPr>
+          <p:nvPr>
+            <p:ph type="sldImg" idx="0"/>
+          </p:nvPr>
+        </p:nvSpPr>
+        <p:spPr/>
+      </p:sp>
+      <p:sp>
+        <p:nvSpPr>
+          <p:cNvPr id="3" name="Notes Placeholder 2"/>
+          <p:cNvSpPr>
+            <a:spLocks xmlns:a="http://schemas.openxmlformats.org/drawingml/2006/main" noGrp="1"/>
+          </p:cNvSpPr>
+          <p:nvPr>
+            <p:ph type="body" idx="1"/>
+          </p:nvPr>
+        </p:nvSpPr>
+        <p:spPr/>
+        <p:txBody>
+          <a:bodyPr xmlns:a="http://schemas.openxmlformats.org/drawingml/2006/main"/>
+          <a:lstStyle xmlns:a="http://schemas.openxmlformats.org/drawingml/2006/main"/>
+          <a:p xmlns:a="http://schemas.openxmlformats.org/drawingml/2006/main">
+            <a:r>
+              <a:t>提交方式、九项条件和未通过处理均以 assignments.md 为准。第一次未通过不直接扣重分，但未按期修订影响对应评分维度。失败记录必须来自真实执行过程；候选题池与选题理由仍是课程扩展字段。</a:t>
+            </a:r>
+          </a:p>
+          <a:p xmlns:a="http://schemas.openxmlformats.org/drawingml/2006/main">
+            <a:r>
+              <a:t/>
+            </a:r>
+          </a:p>
+          <a:p xmlns:a="http://schemas.openxmlformats.org/drawingml/2006/main">
+            <a:r>
+              <a:t>[Sources]</a:t>
+            </a:r>
+          </a:p>
+          <a:p xmlns:a="http://schemas.openxmlformats.org/drawingml/2006/main">
+            <a:r>
+              <a:t>- /Users/bright/Projects/courses/graduate/course/assignments.md</a:t>
+            </a:r>
+          </a:p>
+          <a:p xmlns:a="http://schemas.openxmlformats.org/drawingml/2006/main">
+            <a:r>
+              <a:t>- /Users/bright/Projects/courses/graduate/course/assessment.md</a:t>
+            </a:r>
+          </a:p>
+          <a:p xmlns:a="http://schemas.openxmlformats.org/drawingml/2006/main">
+            <a:r>
+              <a:t>[/Sources]</a:t>
+            </a:r>
+          </a:p>
+        </p:txBody>
+      </p:sp>
+      <p:sp>
+        <p:nvSpPr>
+          <p:cNvPr id="4" name="Slide Number Placeholder 3"/>
+          <p:cNvSpPr>
+            <a:spLocks xmlns:a="http://schemas.openxmlformats.org/drawingml/2006/main" noGrp="1"/>
+          </p:cNvSpPr>
+          <p:nvPr>
+            <p:ph type="sldNum" idx="5"/>
+          </p:nvPr>
+        </p:nvSpPr>
+        <p:spPr/>
+        <p:txBody>
+          <a:bodyPr xmlns:a="http://schemas.openxmlformats.org/drawingml/2006/main"/>
+          <a:lstStyle xmlns:a="http://schemas.openxmlformats.org/drawingml/2006/main"/>
+          <a:p xmlns:a="http://schemas.openxmlformats.org/drawingml/2006/main"/>
+        </p:txBody>
+      </p:sp>
+    </p:spTree>
+  </p:cSld>
+  <p:clrMapOvr>
+    <a:masterClrMapping xmlns:a="http://schemas.openxmlformats.org/drawingml/2006/main"/>
+  </p:clrMapOvr>
+</p:notes>
+</file>
+
+<file path=ppt/notesSlides/notesSlide22.xml><?xml version="1.0" encoding="utf-8"?>
 <p:notes xmlns:p="http://schemas.openxmlformats.org/presentationml/2006/main">
   <p:cSld>
     <p:spTree>
@@ -2409,7 +2510,7 @@
           <p:nvPr/>
         </p:nvPicPr>
         <p:blipFill>
-          <a:blip xmlns:r="http://schemas.openxmlformats.org/officeDocument/2006/relationships" xmlns:a="http://schemas.openxmlformats.org/drawingml/2006/main" r:embed="Rf88a6eabd1d14388">
+          <a:blip xmlns:r="http://schemas.openxmlformats.org/officeDocument/2006/relationships" xmlns:a="http://schemas.openxmlformats.org/drawingml/2006/main" r:embed="R3a5af34cd44d4392">
             <a:duotone>
               <a:prstClr val="black"/>
               <a:schemeClr val="accent1">
@@ -2587,7 +2688,7 @@
           <p:nvPr/>
         </p:nvPicPr>
         <p:blipFill rotWithShape="1">
-          <a:blip xmlns:r="http://schemas.openxmlformats.org/officeDocument/2006/relationships" xmlns:a="http://schemas.openxmlformats.org/drawingml/2006/main" r:embed="R3f3a865838384f6d"/>
+          <a:blip xmlns:r="http://schemas.openxmlformats.org/officeDocument/2006/relationships" xmlns:a="http://schemas.openxmlformats.org/drawingml/2006/main" r:embed="R11ea15fd41c54945"/>
           <a:srcRect xmlns:a="http://schemas.openxmlformats.org/drawingml/2006/main" l="74359" t="0" r="1346" b="0"/>
           <a:stretch xmlns:a="http://schemas.openxmlformats.org/drawingml/2006/main"/>
         </p:blipFill>
@@ -2610,7 +2711,7 @@
           <p:nvPr/>
         </p:nvPicPr>
         <p:blipFill rotWithShape="1">
-          <a:blip xmlns:r="http://schemas.openxmlformats.org/officeDocument/2006/relationships" xmlns:a="http://schemas.openxmlformats.org/drawingml/2006/main" r:embed="R3c35b3c53a2f4bde">
+          <a:blip xmlns:r="http://schemas.openxmlformats.org/officeDocument/2006/relationships" xmlns:a="http://schemas.openxmlformats.org/drawingml/2006/main" r:embed="R09b9e7b1f6374532">
             <a:alphaModFix amt="35000"/>
           </a:blip>
           <a:srcRect xmlns:a="http://schemas.openxmlformats.org/drawingml/2006/main" l="0" t="9831" r="0" b="36385"/>
@@ -2872,7 +2973,7 @@
           <p:nvPr/>
         </p:nvPicPr>
         <p:blipFill>
-          <a:blip xmlns:r="http://schemas.openxmlformats.org/officeDocument/2006/relationships" xmlns:a="http://schemas.openxmlformats.org/drawingml/2006/main" r:embed="R627512fa96224084"/>
+          <a:blip xmlns:r="http://schemas.openxmlformats.org/officeDocument/2006/relationships" xmlns:a="http://schemas.openxmlformats.org/drawingml/2006/main" r:embed="Rae71a6e3867a474b"/>
           <a:srcRect xmlns:a="http://schemas.openxmlformats.org/drawingml/2006/main" l="0" t="0" r="54251" b="0"/>
           <a:stretch xmlns:a="http://schemas.openxmlformats.org/drawingml/2006/main"/>
         </p:blipFill>
@@ -3129,7 +3230,7 @@
           <p:nvPr/>
         </p:nvPicPr>
         <p:blipFill rotWithShape="1">
-          <a:blip xmlns:r="http://schemas.openxmlformats.org/officeDocument/2006/relationships" xmlns:a="http://schemas.openxmlformats.org/drawingml/2006/main" r:embed="Rcbfc9e5816484529"/>
+          <a:blip xmlns:r="http://schemas.openxmlformats.org/officeDocument/2006/relationships" xmlns:a="http://schemas.openxmlformats.org/drawingml/2006/main" r:embed="R96e6dc04bf9d4b8a"/>
           <a:srcRect xmlns:a="http://schemas.openxmlformats.org/drawingml/2006/main" l="0" t="0" r="1346" b="0"/>
           <a:stretch xmlns:a="http://schemas.openxmlformats.org/drawingml/2006/main"/>
         </p:blipFill>
@@ -3312,7 +3413,7 @@
           <p:nvPr/>
         </p:nvPicPr>
         <p:blipFill>
-          <a:blip xmlns:r="http://schemas.openxmlformats.org/officeDocument/2006/relationships" xmlns:a="http://schemas.openxmlformats.org/drawingml/2006/main" r:embed="R714bed7f8870444a"/>
+          <a:blip xmlns:r="http://schemas.openxmlformats.org/officeDocument/2006/relationships" xmlns:a="http://schemas.openxmlformats.org/drawingml/2006/main" r:embed="R395d72086c894872"/>
           <a:stretch xmlns:a="http://schemas.openxmlformats.org/drawingml/2006/main">
             <a:fillRect l="0" t="0" r="0" b="0"/>
           </a:stretch>
@@ -3408,7 +3509,7 @@
           <p:nvPr/>
         </p:nvPicPr>
         <p:blipFill>
-          <a:blip xmlns:r="http://schemas.openxmlformats.org/officeDocument/2006/relationships" xmlns:a="http://schemas.openxmlformats.org/drawingml/2006/main" r:embed="Rad6154452df64f56">
+          <a:blip xmlns:r="http://schemas.openxmlformats.org/officeDocument/2006/relationships" xmlns:a="http://schemas.openxmlformats.org/drawingml/2006/main" r:embed="R968acc4f357f481a">
             <a:duotone>
               <a:prstClr val="black"/>
               <a:schemeClr val="accent1">
@@ -3575,7 +3676,7 @@
           <p:nvPr/>
         </p:nvPicPr>
         <p:blipFill rotWithShape="1">
-          <a:blip xmlns:r="http://schemas.openxmlformats.org/officeDocument/2006/relationships" xmlns:a="http://schemas.openxmlformats.org/drawingml/2006/main" r:embed="Rd2f528c106574600">
+          <a:blip xmlns:r="http://schemas.openxmlformats.org/officeDocument/2006/relationships" xmlns:a="http://schemas.openxmlformats.org/drawingml/2006/main" r:embed="R97d7a47470eb40d0">
             <a:alphaModFix amt="20000"/>
             <a:duotone>
               <a:schemeClr val="accent4">
@@ -3673,10 +3774,10 @@
   </p:cSld>
   <p:clrMap bg1="lt1" tx1="dk1" bg2="lt2" tx2="dk2" accent1="accent1" accent2="accent2" accent3="accent3" accent4="accent4" accent5="accent5" accent6="accent6" hlink="hlink" folHlink="folHlink"/>
   <p:sldLayoutIdLst>
-    <p:sldLayoutId xmlns:r="http://schemas.openxmlformats.org/officeDocument/2006/relationships" id="2147483649" r:id="R210532d52230414c"/>
-    <p:sldLayoutId xmlns:r="http://schemas.openxmlformats.org/officeDocument/2006/relationships" id="2147483650" r:id="R46422e3e150a4b48"/>
-    <p:sldLayoutId xmlns:r="http://schemas.openxmlformats.org/officeDocument/2006/relationships" id="2147483651" r:id="Rfdffbf3b8af34bf3"/>
-    <p:sldLayoutId xmlns:r="http://schemas.openxmlformats.org/officeDocument/2006/relationships" id="2147483652" r:id="Rd839a2c08d754453"/>
+    <p:sldLayoutId xmlns:r="http://schemas.openxmlformats.org/officeDocument/2006/relationships" id="2147483649" r:id="Refbeddeaa0624edd"/>
+    <p:sldLayoutId xmlns:r="http://schemas.openxmlformats.org/officeDocument/2006/relationships" id="2147483650" r:id="R68482647a4434f71"/>
+    <p:sldLayoutId xmlns:r="http://schemas.openxmlformats.org/officeDocument/2006/relationships" id="2147483651" r:id="R9f1078d159914930"/>
+    <p:sldLayoutId xmlns:r="http://schemas.openxmlformats.org/officeDocument/2006/relationships" id="2147483652" r:id="Rcf6bdf8cca494898"/>
   </p:sldLayoutIdLst>
   <p:hf hdr="0" ftr="0" dt="0"/>
   <p:txStyles>
@@ -4209,120 +4310,6 @@
       </p:grpSpPr>
       <p:sp>
         <p:nvSpPr>
-          <p:cNvPr id="3" name="内容占位符 2">
-            <a:extLst xmlns:a="http://schemas.openxmlformats.org/drawingml/2006/main">
-              <a:ext uri="{FF2B5EF4-FFF2-40B4-BE49-F238E27FC236}">
-                <a16:creationId xmlns:a16="http://schemas.microsoft.com/office/drawing/2014/main" id="{D1D30E0E-D2D5-4C08-A919-2A1C2D5A8D02}"/>
-              </a:ext>
-            </a:extLst>
-          </p:cNvPr>
-          <p:cNvSpPr>
-            <a:spLocks xmlns:a="http://schemas.openxmlformats.org/drawingml/2006/main" noGrp="1"/>
-          </p:cNvSpPr>
-          <p:nvPr>
-            <p:ph idx="10"/>
-          </p:nvPr>
-        </p:nvSpPr>
-        <p:spPr>
-          <a:xfrm xmlns:a="http://schemas.openxmlformats.org/drawingml/2006/main">
-            <a:off x="1066800" y="3009900"/>
-            <a:ext cx="10058400" cy="2286000"/>
-          </a:xfrm>
-        </p:spPr>
-        <p:txBody>
-          <a:bodyPr xmlns:a="http://schemas.openxmlformats.org/drawingml/2006/main" lIns="0" tIns="0" rIns="0" bIns="0" anchor="ctr"/>
-          <a:lstStyle xmlns:a="http://schemas.openxmlformats.org/drawingml/2006/main"/>
-          <a:p xmlns:a="http://schemas.openxmlformats.org/drawingml/2006/main">
-            <a:pPr algn="ctr">
-              <a:lnSpc>
-                <a:spcPct val="124000"/>
-              </a:lnSpc>
-              <a:buNone/>
-            </a:pPr>
-            <a:r>
-              <a:rPr sz="1725" b="1">
-                <a:solidFill>
-                  <a:srgbClr val="18354E"/>
-                </a:solidFill>
-                <a:latin typeface="Microsoft YaHei"/>
-                <a:ea typeface="Microsoft YaHei"/>
-                <a:cs typeface="Microsoft YaHei"/>
-              </a:rPr>
-              <a:t>空白候选 → 结构性问题 → 第一性原理 → 问题门</a:t>
-            </a:r>
-            <a:endParaRPr>
-              <a:latin typeface="+mn-ea"/>
-              <a:ea typeface="+mn-ea"/>
-              <a:cs typeface="+mn-ea"/>
-            </a:endParaRPr>
-          </a:p>
-          <a:p xmlns:a="http://schemas.openxmlformats.org/drawingml/2006/main">
-            <a:r>
-              <a:rPr>
-                <a:latin typeface="+mn-ea"/>
-                <a:ea typeface="+mn-ea"/>
-                <a:cs typeface="+mn-ea"/>
-              </a:rPr>
-              <a:t/>
-            </a:r>
-            <a:endParaRPr>
-              <a:latin typeface="+mn-ea"/>
-              <a:ea typeface="+mn-ea"/>
-              <a:cs typeface="+mn-ea"/>
-            </a:endParaRPr>
-          </a:p>
-          <a:p xmlns:a="http://schemas.openxmlformats.org/drawingml/2006/main">
-            <a:pPr algn="ctr">
-              <a:lnSpc>
-                <a:spcPct val="124000"/>
-              </a:lnSpc>
-              <a:buNone/>
-            </a:pPr>
-            <a:r>
-              <a:rPr sz="1725" b="1">
-                <a:solidFill>
-                  <a:srgbClr val="18354E"/>
-                </a:solidFill>
-                <a:latin typeface="Microsoft YaHei"/>
-                <a:ea typeface="Microsoft YaHei"/>
-                <a:cs typeface="Microsoft YaHei"/>
-              </a:rPr>
-              <a:t>从“还没有人做过”转向“什么观察会推翻它”</a:t>
-            </a:r>
-            <a:endParaRPr>
-              <a:latin typeface="+mn-ea"/>
-              <a:ea typeface="+mn-ea"/>
-              <a:cs typeface="+mn-ea"/>
-            </a:endParaRPr>
-          </a:p>
-          <a:p xmlns:a="http://schemas.openxmlformats.org/drawingml/2006/main">
-            <a:pPr algn="ctr">
-              <a:lnSpc>
-                <a:spcPct val="124000"/>
-              </a:lnSpc>
-              <a:buNone/>
-            </a:pPr>
-            <a:r>
-              <a:rPr sz="1725" b="1">
-                <a:solidFill>
-                  <a:srgbClr val="18354E"/>
-                </a:solidFill>
-                <a:latin typeface="Microsoft YaHei"/>
-                <a:ea typeface="Microsoft YaHei"/>
-                <a:cs typeface="Microsoft YaHei"/>
-              </a:rPr>
-              <a:t>第六讲｜阶段一 + 阶段二 → 第一次正式提交</a:t>
-            </a:r>
-            <a:endParaRPr>
-              <a:latin typeface="+mn-ea"/>
-              <a:ea typeface="+mn-ea"/>
-              <a:cs typeface="+mn-ea"/>
-            </a:endParaRPr>
-          </a:p>
-        </p:txBody>
-      </p:sp>
-      <p:sp>
-        <p:nvSpPr>
           <p:cNvPr id="2" name="矩形 11">
             <a:extLst xmlns:a="http://schemas.openxmlformats.org/drawingml/2006/main">
               <a:ext uri="{FF2B5EF4-FFF2-40B4-BE49-F238E27FC236}">
@@ -4337,8 +4324,8 @@
         </p:nvSpPr>
         <p:spPr>
           <a:xfrm xmlns:a="http://schemas.openxmlformats.org/drawingml/2006/main">
-            <a:off x="1219200" y="1200150"/>
-            <a:ext cx="9753600" cy="1645920"/>
+            <a:off x="1143000" y="1790700"/>
+            <a:ext cx="9906000" cy="1645920"/>
           </a:xfrm>
           <a:prstGeom xmlns:a="http://schemas.openxmlformats.org/drawingml/2006/main" prst="rect">
             <a:avLst/>
@@ -4357,7 +4344,7 @@
               <a:buNone/>
             </a:pPr>
             <a:r>
-              <a:rPr sz="3000" b="1">
+              <a:rPr sz="3150" b="1">
                 <a:solidFill>
                   <a:srgbClr val="C8161E"/>
                 </a:solidFill>
@@ -4365,7 +4352,7 @@
                 <a:ea typeface="Microsoft YaHei"/>
                 <a:cs typeface="Microsoft YaHei"/>
               </a:rPr>
-              <a:t>问题定义、第一性原理与问题门</a:t>
+              <a:t>第6讲 研究问题、问题定义与第一性原理</a:t>
             </a:r>
             <a:endParaRPr sz="4000" b="1" kern="0" spc="20">
               <a:solidFill>
@@ -4475,7 +4462,7 @@
           <p:cNvPr id="6" name="p09-bad">
             <a:extLst xmlns:a="http://schemas.openxmlformats.org/drawingml/2006/main">
               <a:ext uri="{FF2B5EF4-FFF2-40B4-BE49-F238E27FC236}">
-                <a16:creationId xmlns:a16="http://schemas.microsoft.com/office/drawing/2014/main" id="{384A1ABD-A95F-4B1A-9A14-6C247C247102}"/>
+                <a16:creationId xmlns:a16="http://schemas.microsoft.com/office/drawing/2014/main" id="{C58B7109-DC52-4BE5-90D6-770D33B962B3}"/>
               </a:ext>
             </a:extLst>
           </p:cNvPr>
@@ -4554,7 +4541,7 @@
           <p:cNvPr id="7" name="p09-a">
             <a:extLst xmlns:a="http://schemas.openxmlformats.org/drawingml/2006/main">
               <a:ext uri="{FF2B5EF4-FFF2-40B4-BE49-F238E27FC236}">
-                <a16:creationId xmlns:a16="http://schemas.microsoft.com/office/drawing/2014/main" id="{EB380D32-B571-4920-A574-B103B0246E7C}"/>
+                <a16:creationId xmlns:a16="http://schemas.microsoft.com/office/drawing/2014/main" id="{2C81901C-993D-46B5-B3AB-0EE2C1A5811F}"/>
               </a:ext>
             </a:extLst>
           </p:cNvPr>
@@ -4607,7 +4594,7 @@
           <p:cNvPr id="8" name="p09-good">
             <a:extLst xmlns:a="http://schemas.openxmlformats.org/drawingml/2006/main">
               <a:ext uri="{FF2B5EF4-FFF2-40B4-BE49-F238E27FC236}">
-                <a16:creationId xmlns:a16="http://schemas.microsoft.com/office/drawing/2014/main" id="{19DF4620-BF3F-4AC0-A293-1FF997C0050E}"/>
+                <a16:creationId xmlns:a16="http://schemas.microsoft.com/office/drawing/2014/main" id="{BA6C6A23-2070-4A50-A6C2-6139709E3041}"/>
               </a:ext>
             </a:extLst>
           </p:cNvPr>
@@ -4694,7 +4681,7 @@
           <p:cNvPr id="9" name="p09-e0">
             <a:extLst xmlns:a="http://schemas.openxmlformats.org/drawingml/2006/main">
               <a:ext uri="{FF2B5EF4-FFF2-40B4-BE49-F238E27FC236}">
-                <a16:creationId xmlns:a16="http://schemas.microsoft.com/office/drawing/2014/main" id="{AE8E5DA8-1688-4D20-8755-DBAB04FA1B8C}"/>
+                <a16:creationId xmlns:a16="http://schemas.microsoft.com/office/drawing/2014/main" id="{70A201BF-29B1-4E2B-A5BB-EDCD7021F69B}"/>
               </a:ext>
             </a:extLst>
           </p:cNvPr>
@@ -4751,7 +4738,7 @@
           <p:cNvPr id="10" name="p09-e1">
             <a:extLst xmlns:a="http://schemas.openxmlformats.org/drawingml/2006/main">
               <a:ext uri="{FF2B5EF4-FFF2-40B4-BE49-F238E27FC236}">
-                <a16:creationId xmlns:a16="http://schemas.microsoft.com/office/drawing/2014/main" id="{68F90EFD-3884-404D-8BDB-80337D4E8922}"/>
+                <a16:creationId xmlns:a16="http://schemas.microsoft.com/office/drawing/2014/main" id="{51E4DBFD-EF07-46BD-94CE-6BE507C37349}"/>
               </a:ext>
             </a:extLst>
           </p:cNvPr>
@@ -4808,7 +4795,7 @@
           <p:cNvPr id="11" name="p09-e2">
             <a:extLst xmlns:a="http://schemas.openxmlformats.org/drawingml/2006/main">
               <a:ext uri="{FF2B5EF4-FFF2-40B4-BE49-F238E27FC236}">
-                <a16:creationId xmlns:a16="http://schemas.microsoft.com/office/drawing/2014/main" id="{133314F9-3BBB-4BD2-8559-85CFA17B2F06}"/>
+                <a16:creationId xmlns:a16="http://schemas.microsoft.com/office/drawing/2014/main" id="{779740E5-4AFB-484A-8767-930C5E496B90}"/>
               </a:ext>
             </a:extLst>
           </p:cNvPr>
@@ -4865,7 +4852,7 @@
           <p:cNvPr id="12" name="p09-e3">
             <a:extLst xmlns:a="http://schemas.openxmlformats.org/drawingml/2006/main">
               <a:ext uri="{FF2B5EF4-FFF2-40B4-BE49-F238E27FC236}">
-                <a16:creationId xmlns:a16="http://schemas.microsoft.com/office/drawing/2014/main" id="{F35F3769-4E9C-4C22-AC62-C2DEFFEC897B}"/>
+                <a16:creationId xmlns:a16="http://schemas.microsoft.com/office/drawing/2014/main" id="{4D277376-D155-4A86-8B1D-D0D22EDE931F}"/>
               </a:ext>
             </a:extLst>
           </p:cNvPr>
@@ -4922,7 +4909,7 @@
           <p:cNvPr id="13" name="p09-e4">
             <a:extLst xmlns:a="http://schemas.openxmlformats.org/drawingml/2006/main">
               <a:ext uri="{FF2B5EF4-FFF2-40B4-BE49-F238E27FC236}">
-                <a16:creationId xmlns:a16="http://schemas.microsoft.com/office/drawing/2014/main" id="{6F9892B9-56C6-4C17-8AF7-AE21F73BB69B}"/>
+                <a16:creationId xmlns:a16="http://schemas.microsoft.com/office/drawing/2014/main" id="{F197520F-81E0-42C5-8B2C-CE71EDFFB11A}"/>
               </a:ext>
             </a:extLst>
           </p:cNvPr>
@@ -4979,7 +4966,7 @@
           <p:cNvPr id="14" name="p09-bottom">
             <a:extLst xmlns:a="http://schemas.openxmlformats.org/drawingml/2006/main">
               <a:ext uri="{FF2B5EF4-FFF2-40B4-BE49-F238E27FC236}">
-                <a16:creationId xmlns:a16="http://schemas.microsoft.com/office/drawing/2014/main" id="{2810D2D8-CCDF-4B0F-A2F2-41CE53F29B9B}"/>
+                <a16:creationId xmlns:a16="http://schemas.microsoft.com/office/drawing/2014/main" id="{AD422704-AD86-49C0-8194-B9C030764AB1}"/>
               </a:ext>
             </a:extLst>
           </p:cNvPr>
@@ -5124,7 +5111,7 @@
           <p:cNvPr id="6" name="p10-h1-h">
             <a:extLst xmlns:a="http://schemas.openxmlformats.org/drawingml/2006/main">
               <a:ext uri="{FF2B5EF4-FFF2-40B4-BE49-F238E27FC236}">
-                <a16:creationId xmlns:a16="http://schemas.microsoft.com/office/drawing/2014/main" id="{3E9C9145-806C-41EC-8349-E514FD5259F2}"/>
+                <a16:creationId xmlns:a16="http://schemas.microsoft.com/office/drawing/2014/main" id="{32050575-977F-4FB3-81CF-4E67939E1A43}"/>
               </a:ext>
             </a:extLst>
           </p:cNvPr>
@@ -5181,7 +5168,7 @@
           <p:cNvPr id="7" name="p10-h1-d">
             <a:extLst xmlns:a="http://schemas.openxmlformats.org/drawingml/2006/main">
               <a:ext uri="{FF2B5EF4-FFF2-40B4-BE49-F238E27FC236}">
-                <a16:creationId xmlns:a16="http://schemas.microsoft.com/office/drawing/2014/main" id="{12825A3E-2A11-4D8E-BF85-2CCCEC55257B}"/>
+                <a16:creationId xmlns:a16="http://schemas.microsoft.com/office/drawing/2014/main" id="{B3C5E558-F106-438C-ABCD-DE0899F860F1}"/>
               </a:ext>
             </a:extLst>
           </p:cNvPr>
@@ -5292,7 +5279,7 @@
           <p:cNvPr id="8" name="p10-h2-h">
             <a:extLst xmlns:a="http://schemas.openxmlformats.org/drawingml/2006/main">
               <a:ext uri="{FF2B5EF4-FFF2-40B4-BE49-F238E27FC236}">
-                <a16:creationId xmlns:a16="http://schemas.microsoft.com/office/drawing/2014/main" id="{9815505C-447B-497C-9729-B98F09E161D9}"/>
+                <a16:creationId xmlns:a16="http://schemas.microsoft.com/office/drawing/2014/main" id="{475814D7-87EE-47B9-8172-7AF79B2972A9}"/>
               </a:ext>
             </a:extLst>
           </p:cNvPr>
@@ -5349,7 +5336,7 @@
           <p:cNvPr id="9" name="p10-h2-d">
             <a:extLst xmlns:a="http://schemas.openxmlformats.org/drawingml/2006/main">
               <a:ext uri="{FF2B5EF4-FFF2-40B4-BE49-F238E27FC236}">
-                <a16:creationId xmlns:a16="http://schemas.microsoft.com/office/drawing/2014/main" id="{8E4134B1-8FD8-47DB-9666-EE6C8845D4F9}"/>
+                <a16:creationId xmlns:a16="http://schemas.microsoft.com/office/drawing/2014/main" id="{2160A6CA-0482-436A-A65C-CABFB87BDAE8}"/>
               </a:ext>
             </a:extLst>
           </p:cNvPr>
@@ -5460,7 +5447,7 @@
           <p:cNvPr id="10" name="p10-test-h">
             <a:extLst xmlns:a="http://schemas.openxmlformats.org/drawingml/2006/main">
               <a:ext uri="{FF2B5EF4-FFF2-40B4-BE49-F238E27FC236}">
-                <a16:creationId xmlns:a16="http://schemas.microsoft.com/office/drawing/2014/main" id="{B890D79A-BFD2-42C4-BFC2-C923E0C9A8BE}"/>
+                <a16:creationId xmlns:a16="http://schemas.microsoft.com/office/drawing/2014/main" id="{CE81516B-DFEA-4B40-9AFD-847125F1A249}"/>
               </a:ext>
             </a:extLst>
           </p:cNvPr>
@@ -5517,7 +5504,7 @@
           <p:cNvPr id="11" name="p10-test-d">
             <a:extLst xmlns:a="http://schemas.openxmlformats.org/drawingml/2006/main">
               <a:ext uri="{FF2B5EF4-FFF2-40B4-BE49-F238E27FC236}">
-                <a16:creationId xmlns:a16="http://schemas.microsoft.com/office/drawing/2014/main" id="{63E8CA72-4B47-44A1-95B5-9C7493981665}"/>
+                <a16:creationId xmlns:a16="http://schemas.microsoft.com/office/drawing/2014/main" id="{80913E2B-0BBA-40A9-A9A9-99E8899A505D}"/>
               </a:ext>
             </a:extLst>
           </p:cNvPr>
@@ -5628,7 +5615,7 @@
           <p:cNvPr id="12" name="p10-a1">
             <a:extLst xmlns:a="http://schemas.openxmlformats.org/drawingml/2006/main">
               <a:ext uri="{FF2B5EF4-FFF2-40B4-BE49-F238E27FC236}">
-                <a16:creationId xmlns:a16="http://schemas.microsoft.com/office/drawing/2014/main" id="{E0C00CE1-9B8E-419F-8734-8056C843C5D2}"/>
+                <a16:creationId xmlns:a16="http://schemas.microsoft.com/office/drawing/2014/main" id="{E9B8504B-5A90-431D-B16A-D6B9BBBE8DEF}"/>
               </a:ext>
             </a:extLst>
           </p:cNvPr>
@@ -5685,7 +5672,7 @@
           <p:cNvPr id="13" name="p10-a2">
             <a:extLst xmlns:a="http://schemas.openxmlformats.org/drawingml/2006/main">
               <a:ext uri="{FF2B5EF4-FFF2-40B4-BE49-F238E27FC236}">
-                <a16:creationId xmlns:a16="http://schemas.microsoft.com/office/drawing/2014/main" id="{A85BECCF-7113-4A5A-B5C0-624955AC6F64}"/>
+                <a16:creationId xmlns:a16="http://schemas.microsoft.com/office/drawing/2014/main" id="{99811D5F-0334-4C08-BE43-492E023254ED}"/>
               </a:ext>
             </a:extLst>
           </p:cNvPr>
@@ -5742,7 +5729,7 @@
           <p:cNvPr id="14" name="p10-result">
             <a:extLst xmlns:a="http://schemas.openxmlformats.org/drawingml/2006/main">
               <a:ext uri="{FF2B5EF4-FFF2-40B4-BE49-F238E27FC236}">
-                <a16:creationId xmlns:a16="http://schemas.microsoft.com/office/drawing/2014/main" id="{82077D3A-8175-4FFF-9488-FF540AE9557F}"/>
+                <a16:creationId xmlns:a16="http://schemas.microsoft.com/office/drawing/2014/main" id="{7698766E-671A-4C42-BB27-3B23E782D94C}"/>
               </a:ext>
             </a:extLst>
           </p:cNvPr>
@@ -5893,7 +5880,7 @@
           <p:cNvPr id="6" name="p11-0-h">
             <a:extLst xmlns:a="http://schemas.openxmlformats.org/drawingml/2006/main">
               <a:ext uri="{FF2B5EF4-FFF2-40B4-BE49-F238E27FC236}">
-                <a16:creationId xmlns:a16="http://schemas.microsoft.com/office/drawing/2014/main" id="{454885E7-5A6D-43A9-8091-C209232AB0A1}"/>
+                <a16:creationId xmlns:a16="http://schemas.microsoft.com/office/drawing/2014/main" id="{9D499AB1-86B1-4EC0-A71D-86804B828B17}"/>
               </a:ext>
             </a:extLst>
           </p:cNvPr>
@@ -5950,7 +5937,7 @@
           <p:cNvPr id="7" name="p11-0-d">
             <a:extLst xmlns:a="http://schemas.openxmlformats.org/drawingml/2006/main">
               <a:ext uri="{FF2B5EF4-FFF2-40B4-BE49-F238E27FC236}">
-                <a16:creationId xmlns:a16="http://schemas.microsoft.com/office/drawing/2014/main" id="{68B2925B-5273-47FE-B810-574E36C90678}"/>
+                <a16:creationId xmlns:a16="http://schemas.microsoft.com/office/drawing/2014/main" id="{A8B703FC-A6A2-4176-B339-C79CA833A6AE}"/>
               </a:ext>
             </a:extLst>
           </p:cNvPr>
@@ -6013,7 +6000,7 @@
           <p:cNvPr id="8" name="p11-1-h">
             <a:extLst xmlns:a="http://schemas.openxmlformats.org/drawingml/2006/main">
               <a:ext uri="{FF2B5EF4-FFF2-40B4-BE49-F238E27FC236}">
-                <a16:creationId xmlns:a16="http://schemas.microsoft.com/office/drawing/2014/main" id="{7B8CD653-FDA9-4075-A559-699DCEB78F47}"/>
+                <a16:creationId xmlns:a16="http://schemas.microsoft.com/office/drawing/2014/main" id="{DC3E8DE3-3268-427C-95C7-9ED55C301CFB}"/>
               </a:ext>
             </a:extLst>
           </p:cNvPr>
@@ -6070,7 +6057,7 @@
           <p:cNvPr id="9" name="p11-1-d">
             <a:extLst xmlns:a="http://schemas.openxmlformats.org/drawingml/2006/main">
               <a:ext uri="{FF2B5EF4-FFF2-40B4-BE49-F238E27FC236}">
-                <a16:creationId xmlns:a16="http://schemas.microsoft.com/office/drawing/2014/main" id="{9BD966D6-BA59-4D51-BAB3-1EDBA3B105B8}"/>
+                <a16:creationId xmlns:a16="http://schemas.microsoft.com/office/drawing/2014/main" id="{11E3F39A-5056-4127-81F0-5E53051A9CF7}"/>
               </a:ext>
             </a:extLst>
           </p:cNvPr>
@@ -6133,7 +6120,7 @@
           <p:cNvPr id="10" name="p11-2-h">
             <a:extLst xmlns:a="http://schemas.openxmlformats.org/drawingml/2006/main">
               <a:ext uri="{FF2B5EF4-FFF2-40B4-BE49-F238E27FC236}">
-                <a16:creationId xmlns:a16="http://schemas.microsoft.com/office/drawing/2014/main" id="{6ACE72A1-6D2D-4009-9440-48CB5B70984C}"/>
+                <a16:creationId xmlns:a16="http://schemas.microsoft.com/office/drawing/2014/main" id="{FEE55136-C089-4C03-A295-5059AE03E21B}"/>
               </a:ext>
             </a:extLst>
           </p:cNvPr>
@@ -6190,7 +6177,7 @@
           <p:cNvPr id="11" name="p11-2-d">
             <a:extLst xmlns:a="http://schemas.openxmlformats.org/drawingml/2006/main">
               <a:ext uri="{FF2B5EF4-FFF2-40B4-BE49-F238E27FC236}">
-                <a16:creationId xmlns:a16="http://schemas.microsoft.com/office/drawing/2014/main" id="{D2C00A01-A844-4573-8748-544534B00022}"/>
+                <a16:creationId xmlns:a16="http://schemas.microsoft.com/office/drawing/2014/main" id="{3895EEBC-7DC2-4076-B05B-FFFD9F5D4F85}"/>
               </a:ext>
             </a:extLst>
           </p:cNvPr>
@@ -6253,7 +6240,7 @@
           <p:cNvPr id="12" name="p11-3-h">
             <a:extLst xmlns:a="http://schemas.openxmlformats.org/drawingml/2006/main">
               <a:ext uri="{FF2B5EF4-FFF2-40B4-BE49-F238E27FC236}">
-                <a16:creationId xmlns:a16="http://schemas.microsoft.com/office/drawing/2014/main" id="{6881F36B-A6EB-4D76-BB85-40CE3F3F39A4}"/>
+                <a16:creationId xmlns:a16="http://schemas.microsoft.com/office/drawing/2014/main" id="{C7BD4BEC-804E-482C-A4F3-B116B286951D}"/>
               </a:ext>
             </a:extLst>
           </p:cNvPr>
@@ -6310,7 +6297,7 @@
           <p:cNvPr id="13" name="p11-3-d">
             <a:extLst xmlns:a="http://schemas.openxmlformats.org/drawingml/2006/main">
               <a:ext uri="{FF2B5EF4-FFF2-40B4-BE49-F238E27FC236}">
-                <a16:creationId xmlns:a16="http://schemas.microsoft.com/office/drawing/2014/main" id="{0CB6DD04-090E-429A-BD07-340B053BEF59}"/>
+                <a16:creationId xmlns:a16="http://schemas.microsoft.com/office/drawing/2014/main" id="{9FBA66AA-EEAC-476E-9968-74CB948AC4F8}"/>
               </a:ext>
             </a:extLst>
           </p:cNvPr>
@@ -6373,7 +6360,7 @@
           <p:cNvPr id="14" name="p11-loop">
             <a:extLst xmlns:a="http://schemas.openxmlformats.org/drawingml/2006/main">
               <a:ext uri="{FF2B5EF4-FFF2-40B4-BE49-F238E27FC236}">
-                <a16:creationId xmlns:a16="http://schemas.microsoft.com/office/drawing/2014/main" id="{A03993F1-39F5-4AF2-B48C-209A9693ECDB}"/>
+                <a16:creationId xmlns:a16="http://schemas.microsoft.com/office/drawing/2014/main" id="{5B72626D-B5D3-4302-AE6C-E393DD74107F}"/>
               </a:ext>
             </a:extLst>
           </p:cNvPr>
@@ -6518,7 +6505,7 @@
           <p:cNvPr id="6" name="p12-n0">
             <a:extLst xmlns:a="http://schemas.openxmlformats.org/drawingml/2006/main">
               <a:ext uri="{FF2B5EF4-FFF2-40B4-BE49-F238E27FC236}">
-                <a16:creationId xmlns:a16="http://schemas.microsoft.com/office/drawing/2014/main" id="{5F328C03-C34F-4B3C-BDFC-B74B56D79B7A}"/>
+                <a16:creationId xmlns:a16="http://schemas.microsoft.com/office/drawing/2014/main" id="{34D57A6E-EFA3-40D1-9AA5-B3E95250065C}"/>
               </a:ext>
             </a:extLst>
           </p:cNvPr>
@@ -6575,7 +6562,7 @@
           <p:cNvPr id="7" name="p12-h0">
             <a:extLst xmlns:a="http://schemas.openxmlformats.org/drawingml/2006/main">
               <a:ext uri="{FF2B5EF4-FFF2-40B4-BE49-F238E27FC236}">
-                <a16:creationId xmlns:a16="http://schemas.microsoft.com/office/drawing/2014/main" id="{9672EB13-D1A0-477F-8B84-A250F9FDB4F5}"/>
+                <a16:creationId xmlns:a16="http://schemas.microsoft.com/office/drawing/2014/main" id="{517A6B31-66F5-4280-8B89-2A9A8A6E67E2}"/>
               </a:ext>
             </a:extLst>
           </p:cNvPr>
@@ -6632,7 +6619,7 @@
           <p:cNvPr id="8" name="p12-d0">
             <a:extLst xmlns:a="http://schemas.openxmlformats.org/drawingml/2006/main">
               <a:ext uri="{FF2B5EF4-FFF2-40B4-BE49-F238E27FC236}">
-                <a16:creationId xmlns:a16="http://schemas.microsoft.com/office/drawing/2014/main" id="{C4AC0435-E43C-46A2-A97D-359421DB6C85}"/>
+                <a16:creationId xmlns:a16="http://schemas.microsoft.com/office/drawing/2014/main" id="{043635B2-94BC-4678-AE22-F51CD1BFF920}"/>
               </a:ext>
             </a:extLst>
           </p:cNvPr>
@@ -6691,7 +6678,7 @@
           <p:cNvPr id="9" name="p12-n1">
             <a:extLst xmlns:a="http://schemas.openxmlformats.org/drawingml/2006/main">
               <a:ext uri="{FF2B5EF4-FFF2-40B4-BE49-F238E27FC236}">
-                <a16:creationId xmlns:a16="http://schemas.microsoft.com/office/drawing/2014/main" id="{D045FC7D-7E48-4355-B89C-856DE6990F84}"/>
+                <a16:creationId xmlns:a16="http://schemas.microsoft.com/office/drawing/2014/main" id="{3CD40E68-30B4-4A48-B52C-CC69FEDED4B6}"/>
               </a:ext>
             </a:extLst>
           </p:cNvPr>
@@ -6748,7 +6735,7 @@
           <p:cNvPr id="10" name="p12-h1">
             <a:extLst xmlns:a="http://schemas.openxmlformats.org/drawingml/2006/main">
               <a:ext uri="{FF2B5EF4-FFF2-40B4-BE49-F238E27FC236}">
-                <a16:creationId xmlns:a16="http://schemas.microsoft.com/office/drawing/2014/main" id="{41B3C051-73BA-4D50-B742-58E80E153A4D}"/>
+                <a16:creationId xmlns:a16="http://schemas.microsoft.com/office/drawing/2014/main" id="{2E30DE30-EE38-48FE-85A3-3C3C41ED9F6A}"/>
               </a:ext>
             </a:extLst>
           </p:cNvPr>
@@ -6805,7 +6792,7 @@
           <p:cNvPr id="11" name="p12-d1">
             <a:extLst xmlns:a="http://schemas.openxmlformats.org/drawingml/2006/main">
               <a:ext uri="{FF2B5EF4-FFF2-40B4-BE49-F238E27FC236}">
-                <a16:creationId xmlns:a16="http://schemas.microsoft.com/office/drawing/2014/main" id="{DD805905-80FE-4B34-BAE1-DF5ADB2648CE}"/>
+                <a16:creationId xmlns:a16="http://schemas.microsoft.com/office/drawing/2014/main" id="{5EE3D66D-67A9-4A5A-A5A3-62824029EB19}"/>
               </a:ext>
             </a:extLst>
           </p:cNvPr>
@@ -6864,7 +6851,7 @@
           <p:cNvPr id="12" name="p12-n2">
             <a:extLst xmlns:a="http://schemas.openxmlformats.org/drawingml/2006/main">
               <a:ext uri="{FF2B5EF4-FFF2-40B4-BE49-F238E27FC236}">
-                <a16:creationId xmlns:a16="http://schemas.microsoft.com/office/drawing/2014/main" id="{1E5FA346-D632-465B-833E-C46CD65DD0AE}"/>
+                <a16:creationId xmlns:a16="http://schemas.microsoft.com/office/drawing/2014/main" id="{0DEB341B-1E04-401B-B084-44F072328572}"/>
               </a:ext>
             </a:extLst>
           </p:cNvPr>
@@ -6921,7 +6908,7 @@
           <p:cNvPr id="13" name="p12-h2">
             <a:extLst xmlns:a="http://schemas.openxmlformats.org/drawingml/2006/main">
               <a:ext uri="{FF2B5EF4-FFF2-40B4-BE49-F238E27FC236}">
-                <a16:creationId xmlns:a16="http://schemas.microsoft.com/office/drawing/2014/main" id="{B43F8820-DB6B-4AB8-AA23-AF82F8323ED1}"/>
+                <a16:creationId xmlns:a16="http://schemas.microsoft.com/office/drawing/2014/main" id="{97C0EEC4-B376-4186-B8D0-E4EC4CABC711}"/>
               </a:ext>
             </a:extLst>
           </p:cNvPr>
@@ -6978,7 +6965,7 @@
           <p:cNvPr id="14" name="p12-d2">
             <a:extLst xmlns:a="http://schemas.openxmlformats.org/drawingml/2006/main">
               <a:ext uri="{FF2B5EF4-FFF2-40B4-BE49-F238E27FC236}">
-                <a16:creationId xmlns:a16="http://schemas.microsoft.com/office/drawing/2014/main" id="{997B02CE-DDD4-4AF4-938F-F055AD3E079D}"/>
+                <a16:creationId xmlns:a16="http://schemas.microsoft.com/office/drawing/2014/main" id="{B4321484-F927-4981-BB9E-D90993DB69BC}"/>
               </a:ext>
             </a:extLst>
           </p:cNvPr>
@@ -7037,7 +7024,7 @@
           <p:cNvPr id="15" name="p12-n3">
             <a:extLst xmlns:a="http://schemas.openxmlformats.org/drawingml/2006/main">
               <a:ext uri="{FF2B5EF4-FFF2-40B4-BE49-F238E27FC236}">
-                <a16:creationId xmlns:a16="http://schemas.microsoft.com/office/drawing/2014/main" id="{2589B9AC-233A-459B-844E-3466141C24F8}"/>
+                <a16:creationId xmlns:a16="http://schemas.microsoft.com/office/drawing/2014/main" id="{502AF7E2-CDA7-4B50-8F30-085908F56979}"/>
               </a:ext>
             </a:extLst>
           </p:cNvPr>
@@ -7094,7 +7081,7 @@
           <p:cNvPr id="16" name="p12-h3">
             <a:extLst xmlns:a="http://schemas.openxmlformats.org/drawingml/2006/main">
               <a:ext uri="{FF2B5EF4-FFF2-40B4-BE49-F238E27FC236}">
-                <a16:creationId xmlns:a16="http://schemas.microsoft.com/office/drawing/2014/main" id="{5929F937-99E1-4950-85DF-40E0A34EA743}"/>
+                <a16:creationId xmlns:a16="http://schemas.microsoft.com/office/drawing/2014/main" id="{AE867A44-B9A3-49B1-AD2F-C694460316E3}"/>
               </a:ext>
             </a:extLst>
           </p:cNvPr>
@@ -7151,7 +7138,7 @@
           <p:cNvPr id="17" name="p12-d3">
             <a:extLst xmlns:a="http://schemas.openxmlformats.org/drawingml/2006/main">
               <a:ext uri="{FF2B5EF4-FFF2-40B4-BE49-F238E27FC236}">
-                <a16:creationId xmlns:a16="http://schemas.microsoft.com/office/drawing/2014/main" id="{F111268B-CB9E-4931-B540-9F377AB44122}"/>
+                <a16:creationId xmlns:a16="http://schemas.microsoft.com/office/drawing/2014/main" id="{A923418D-F4F2-43CE-AA8F-C5BF0E6E3AEB}"/>
               </a:ext>
             </a:extLst>
           </p:cNvPr>
@@ -7210,7 +7197,7 @@
           <p:cNvPr id="18" name="p12-bottom">
             <a:extLst xmlns:a="http://schemas.openxmlformats.org/drawingml/2006/main">
               <a:ext uri="{FF2B5EF4-FFF2-40B4-BE49-F238E27FC236}">
-                <a16:creationId xmlns:a16="http://schemas.microsoft.com/office/drawing/2014/main" id="{14F71FA8-16F8-4C64-BB9C-F519B442E671}"/>
+                <a16:creationId xmlns:a16="http://schemas.microsoft.com/office/drawing/2014/main" id="{A3DABF17-CC8C-4D94-B066-3FAB7090614E}"/>
               </a:ext>
             </a:extLst>
           </p:cNvPr>
@@ -7316,7 +7303,7 @@
                 <a:ea typeface="Microsoft YaHei"/>
                 <a:cs typeface="Microsoft YaHei"/>
               </a:rPr>
-              <a:t>推导示范：从约束到待验证前提</a:t>
+              <a:t>MI 示范：从证据缺口到 baseline 接口</a:t>
             </a:r>
             <a:endParaRPr/>
           </a:p>
@@ -7352,30 +7339,30 @@
       </p:sp>
       <p:sp>
         <p:nvSpPr>
-          <p:cNvPr id="6" name="p13-virtual">
-            <a:extLst xmlns:a="http://schemas.openxmlformats.org/drawingml/2006/main">
-              <a:ext uri="{FF2B5EF4-FFF2-40B4-BE49-F238E27FC236}">
-                <a16:creationId xmlns:a16="http://schemas.microsoft.com/office/drawing/2014/main" id="{B678B9E5-8B3D-4208-9A6C-E61069A62562}"/>
-              </a:ext>
-            </a:extLst>
-          </p:cNvPr>
-          <p:cNvSpPr>
-            <a:spLocks xmlns:a="http://schemas.openxmlformats.org/drawingml/2006/main" noGrp="1"/>
-          </p:cNvSpPr>
-          <p:nvPr/>
-        </p:nvSpPr>
-        <p:spPr>
-          <a:xfrm xmlns:a="http://schemas.openxmlformats.org/drawingml/2006/main">
-            <a:off x="2381250" y="876300"/>
-            <a:ext cx="7429500" cy="361950"/>
+          <p:cNvPr id="6" name="p14-real">
+            <a:extLst xmlns:a="http://schemas.openxmlformats.org/drawingml/2006/main">
+              <a:ext uri="{FF2B5EF4-FFF2-40B4-BE49-F238E27FC236}">
+                <a16:creationId xmlns:a16="http://schemas.microsoft.com/office/drawing/2014/main" id="{AB12B853-FAA7-4EA0-AF81-7ABF1961B506}"/>
+              </a:ext>
+            </a:extLst>
+          </p:cNvPr>
+          <p:cNvSpPr>
+            <a:spLocks xmlns:a="http://schemas.openxmlformats.org/drawingml/2006/main" noGrp="1"/>
+          </p:cNvSpPr>
+          <p:nvPr/>
+        </p:nvSpPr>
+        <p:spPr>
+          <a:xfrm xmlns:a="http://schemas.openxmlformats.org/drawingml/2006/main">
+            <a:off x="3000375" y="838200"/>
+            <a:ext cx="6191250" cy="323850"/>
           </a:xfrm>
           <a:prstGeom xmlns:a="http://schemas.openxmlformats.org/drawingml/2006/main" prst="roundRect">
             <a:avLst>
-              <a:gd name="adj" fmla="val 21053"/>
+              <a:gd name="adj" fmla="val 23529"/>
             </a:avLst>
           </a:prstGeom>
           <a:solidFill xmlns:a="http://schemas.openxmlformats.org/drawingml/2006/main">
-            <a:srgbClr val="F8E9EA"/>
+            <a:srgbClr val="C8161E"/>
           </a:solidFill>
           <a:ln xmlns:a="http://schemas.openxmlformats.org/drawingml/2006/main" w="0">
             <a:noFill/>
@@ -7389,50 +7376,70 @@
             <a:pPr algn="ctr">
               <a:defRPr sz="1350" b="1">
                 <a:solidFill>
-                  <a:srgbClr val="C8161E"/>
+                  <a:srgbClr val="FFFFFF"/>
                 </a:solidFill>
               </a:defRPr>
             </a:pPr>
             <a:r>
               <a:rPr sz="1350" b="1">
                 <a:solidFill>
-                  <a:srgbClr val="C8161E"/>
-                </a:solidFill>
-                <a:latin typeface="Microsoft YaHei"/>
-                <a:ea typeface="Microsoft YaHei"/>
-                <a:cs typeface="Microsoft YaHei"/>
-              </a:rPr>
-              <a:t>虚构教学样例｜非真实论文、检索或实证证据</a:t>
-            </a:r>
-          </a:p>
-        </p:txBody>
-      </p:sp>
-      <p:sp>
-        <p:nvSpPr>
-          <p:cNvPr id="7" name="p13-0-h">
-            <a:extLst xmlns:a="http://schemas.openxmlformats.org/drawingml/2006/main">
-              <a:ext uri="{FF2B5EF4-FFF2-40B4-BE49-F238E27FC236}">
-                <a16:creationId xmlns:a16="http://schemas.microsoft.com/office/drawing/2014/main" id="{8FB517DF-85C8-41C7-96DD-4789F1ED4069}"/>
-              </a:ext>
-            </a:extLst>
-          </p:cNvPr>
-          <p:cNvSpPr>
-            <a:spLocks xmlns:a="http://schemas.openxmlformats.org/drawingml/2006/main" noGrp="1"/>
-          </p:cNvSpPr>
-          <p:nvPr/>
-        </p:nvSpPr>
-        <p:spPr>
-          <a:xfrm xmlns:a="http://schemas.openxmlformats.org/drawingml/2006/main">
-            <a:off x="523875" y="1524000"/>
-            <a:ext cx="2667000" cy="400050"/>
-          </a:xfrm>
-          <a:prstGeom xmlns:a="http://schemas.openxmlformats.org/drawingml/2006/main" prst="roundRect">
-            <a:avLst>
-              <a:gd name="adj" fmla="val 19048"/>
-            </a:avLst>
-          </a:prstGeom>
-          <a:solidFill xmlns:a="http://schemas.openxmlformats.org/drawingml/2006/main">
-            <a:srgbClr val="18354E"/>
+                  <a:srgbClr val="FFFFFF"/>
+                </a:solidFill>
+                <a:latin typeface="Microsoft YaHei"/>
+                <a:ea typeface="Microsoft YaHei"/>
+                <a:cs typeface="Microsoft YaHei"/>
+              </a:rPr>
+              <a:t>真实论文证据驱动｜实验尚未执行</a:t>
+            </a:r>
+          </a:p>
+        </p:txBody>
+      </p:sp>
+      <p:pic>
+        <p:nvPicPr>
+          <p:cNvPr id="12" name="p14-mi-interface"/>
+          <p:cNvPicPr>
+            <a:picLocks xmlns:a="http://schemas.openxmlformats.org/drawingml/2006/main" noChangeAspect="1"/>
+          </p:cNvPicPr>
+          <p:nvPr/>
+        </p:nvPicPr>
+        <p:blipFill>
+          <a:blip xmlns:r="http://schemas.openxmlformats.org/officeDocument/2006/relationships" xmlns:a="http://schemas.openxmlformats.org/drawingml/2006/main" r:embed="R677c1e9425514092"/>
+          <a:stretch xmlns:a="http://schemas.openxmlformats.org/drawingml/2006/main"/>
+        </p:blipFill>
+        <p:spPr>
+          <a:xfrm xmlns:a="http://schemas.openxmlformats.org/drawingml/2006/main">
+            <a:off x="1767840" y="1200150"/>
+            <a:ext cx="8656320" cy="4057650"/>
+          </a:xfrm>
+          <a:prstGeom xmlns:a="http://schemas.openxmlformats.org/drawingml/2006/main" prst="rect">
+            <a:avLst/>
+          </a:prstGeom>
+        </p:spPr>
+      </p:pic>
+      <p:sp>
+        <p:nvSpPr>
+          <p:cNvPr id="8" name="p14-bottom">
+            <a:extLst xmlns:a="http://schemas.openxmlformats.org/drawingml/2006/main">
+              <a:ext uri="{FF2B5EF4-FFF2-40B4-BE49-F238E27FC236}">
+                <a16:creationId xmlns:a16="http://schemas.microsoft.com/office/drawing/2014/main" id="{91C4B158-B23D-4605-B038-FD44A7DF86EE}"/>
+              </a:ext>
+            </a:extLst>
+          </p:cNvPr>
+          <p:cNvSpPr>
+            <a:spLocks xmlns:a="http://schemas.openxmlformats.org/drawingml/2006/main" noGrp="1"/>
+          </p:cNvSpPr>
+          <p:nvPr/>
+        </p:nvSpPr>
+        <p:spPr>
+          <a:xfrm xmlns:a="http://schemas.openxmlformats.org/drawingml/2006/main">
+            <a:off x="1428750" y="5295900"/>
+            <a:ext cx="9334500" cy="400050"/>
+          </a:xfrm>
+          <a:prstGeom xmlns:a="http://schemas.openxmlformats.org/drawingml/2006/main" prst="rect">
+            <a:avLst/>
+          </a:prstGeom>
+          <a:solidFill xmlns:a="http://schemas.openxmlformats.org/drawingml/2006/main">
+            <a:srgbClr val="F8E9EA"/>
           </a:solidFill>
           <a:ln xmlns:a="http://schemas.openxmlformats.org/drawingml/2006/main" w="0">
             <a:noFill/>
@@ -7444,817 +7451,14 @@
           <a:lstStyle xmlns:a="http://schemas.openxmlformats.org/drawingml/2006/main"/>
           <a:p xmlns:a="http://schemas.openxmlformats.org/drawingml/2006/main">
             <a:pPr algn="ctr">
-              <a:defRPr sz="1500" b="1">
-                <a:solidFill>
-                  <a:srgbClr val="FFFFFF"/>
-                </a:solidFill>
-              </a:defRPr>
-            </a:pPr>
-            <a:r>
-              <a:rPr sz="1500" b="1">
-                <a:solidFill>
-                  <a:srgbClr val="FFFFFF"/>
-                </a:solidFill>
-                <a:latin typeface="Microsoft YaHei"/>
-                <a:ea typeface="Microsoft YaHei"/>
-                <a:cs typeface="Microsoft YaHei"/>
-              </a:rPr>
-              <a:t>基本约束</a:t>
-            </a:r>
-          </a:p>
-        </p:txBody>
-      </p:sp>
-      <p:sp>
-        <p:nvSpPr>
-          <p:cNvPr id="8" name="p13-0-d">
-            <a:extLst xmlns:a="http://schemas.openxmlformats.org/drawingml/2006/main">
-              <a:ext uri="{FF2B5EF4-FFF2-40B4-BE49-F238E27FC236}">
-                <a16:creationId xmlns:a16="http://schemas.microsoft.com/office/drawing/2014/main" id="{8BA989DF-89AC-4A20-BFD8-F4BD7E5D6145}"/>
-              </a:ext>
-            </a:extLst>
-          </p:cNvPr>
-          <p:cNvSpPr>
-            <a:spLocks xmlns:a="http://schemas.openxmlformats.org/drawingml/2006/main" noGrp="1"/>
-          </p:cNvSpPr>
-          <p:nvPr/>
-        </p:nvSpPr>
-        <p:spPr>
-          <a:xfrm xmlns:a="http://schemas.openxmlformats.org/drawingml/2006/main">
-            <a:off x="523875" y="1962150"/>
-            <a:ext cx="2667000" cy="2228850"/>
-          </a:xfrm>
-          <a:prstGeom xmlns:a="http://schemas.openxmlformats.org/drawingml/2006/main" prst="roundRect">
-            <a:avLst>
-              <a:gd name="adj" fmla="val 3419"/>
-            </a:avLst>
-          </a:prstGeom>
-          <a:solidFill xmlns:a="http://schemas.openxmlformats.org/drawingml/2006/main">
-            <a:srgbClr val="E8F0F6"/>
-          </a:solidFill>
-          <a:ln xmlns:a="http://schemas.openxmlformats.org/drawingml/2006/main" w="9525">
-            <a:solidFill>
-              <a:srgbClr val="D6DDE2"/>
-            </a:solidFill>
-            <a:prstDash val="solid"/>
-          </a:ln>
-        </p:spPr>
-        <p:txBody>
-          <a:bodyPr xmlns:a="http://schemas.openxmlformats.org/drawingml/2006/main" lIns="76200" tIns="38100" rIns="76200" bIns="38100" anchor="ctr"/>
-          <a:lstStyle xmlns:a="http://schemas.openxmlformats.org/drawingml/2006/main"/>
-          <a:p xmlns:a="http://schemas.openxmlformats.org/drawingml/2006/main">
-            <a:pPr algn="ctr">
-              <a:lnSpc>
-                <a:spcPct val="108000"/>
-              </a:lnSpc>
-              <a:buNone/>
-              <a:defRPr sz="1425" b="0">
-                <a:solidFill>
-                  <a:srgbClr val="263746"/>
-                </a:solidFill>
-              </a:defRPr>
-            </a:pPr>
-            <a:r>
-              <a:rPr sz="1425" b="0">
-                <a:solidFill>
-                  <a:srgbClr val="263746"/>
-                </a:solidFill>
-                <a:latin typeface="Microsoft YaHei"/>
-                <a:ea typeface="Microsoft YaHei"/>
-                <a:cs typeface="Microsoft YaHei"/>
-              </a:rPr>
-              <a:t>主张可定位</a:t>
-            </a:r>
-          </a:p>
-          <a:p xmlns:a="http://schemas.openxmlformats.org/drawingml/2006/main">
-            <a:pPr algn="ctr">
-              <a:lnSpc>
-                <a:spcPct val="108000"/>
-              </a:lnSpc>
-              <a:buNone/>
-              <a:defRPr sz="1425" b="0">
-                <a:solidFill>
-                  <a:srgbClr val="263746"/>
-                </a:solidFill>
-              </a:defRPr>
-            </a:pPr>
-            <a:r>
-              <a:rPr sz="1425" b="0">
-                <a:solidFill>
-                  <a:srgbClr val="263746"/>
-                </a:solidFill>
-                <a:latin typeface="Microsoft YaHei"/>
-                <a:ea typeface="Microsoft YaHei"/>
-                <a:cs typeface="Microsoft YaHei"/>
-              </a:rPr>
-              <a:t>来源含支持内容</a:t>
-            </a:r>
-          </a:p>
-          <a:p xmlns:a="http://schemas.openxmlformats.org/drawingml/2006/main">
-            <a:pPr algn="ctr">
-              <a:lnSpc>
-                <a:spcPct val="108000"/>
-              </a:lnSpc>
-              <a:buNone/>
-              <a:defRPr sz="1425" b="0">
-                <a:solidFill>
-                  <a:srgbClr val="263746"/>
-                </a:solidFill>
-              </a:defRPr>
-            </a:pPr>
-            <a:r>
-              <a:rPr sz="1425" b="0">
-                <a:solidFill>
-                  <a:srgbClr val="263746"/>
-                </a:solidFill>
-                <a:latin typeface="Microsoft YaHei"/>
-                <a:ea typeface="Microsoft YaHei"/>
-                <a:cs typeface="Microsoft YaHei"/>
-              </a:rPr>
-              <a:t>核验者可区分新增</a:t>
-            </a:r>
-          </a:p>
-        </p:txBody>
-      </p:sp>
-      <p:sp>
-        <p:nvSpPr>
-          <p:cNvPr id="9" name="p13-1-h">
-            <a:extLst xmlns:a="http://schemas.openxmlformats.org/drawingml/2006/main">
-              <a:ext uri="{FF2B5EF4-FFF2-40B4-BE49-F238E27FC236}">
-                <a16:creationId xmlns:a16="http://schemas.microsoft.com/office/drawing/2014/main" id="{8A9F4C41-2B61-4A60-98F9-C3CE98746FA0}"/>
-              </a:ext>
-            </a:extLst>
-          </p:cNvPr>
-          <p:cNvSpPr>
-            <a:spLocks xmlns:a="http://schemas.openxmlformats.org/drawingml/2006/main" noGrp="1"/>
-          </p:cNvSpPr>
-          <p:nvPr/>
-        </p:nvSpPr>
-        <p:spPr>
-          <a:xfrm xmlns:a="http://schemas.openxmlformats.org/drawingml/2006/main">
-            <a:off x="3429000" y="1524000"/>
-            <a:ext cx="2667000" cy="400050"/>
-          </a:xfrm>
-          <a:prstGeom xmlns:a="http://schemas.openxmlformats.org/drawingml/2006/main" prst="roundRect">
-            <a:avLst>
-              <a:gd name="adj" fmla="val 19048"/>
-            </a:avLst>
-          </a:prstGeom>
-          <a:solidFill xmlns:a="http://schemas.openxmlformats.org/drawingml/2006/main">
-            <a:srgbClr val="2F638A"/>
-          </a:solidFill>
-          <a:ln xmlns:a="http://schemas.openxmlformats.org/drawingml/2006/main" w="0">
-            <a:noFill/>
-            <a:prstDash val="solid"/>
-          </a:ln>
-        </p:spPr>
-        <p:txBody>
-          <a:bodyPr xmlns:a="http://schemas.openxmlformats.org/drawingml/2006/main" lIns="76200" tIns="38100" rIns="76200" bIns="38100" anchor="ctr"/>
-          <a:lstStyle xmlns:a="http://schemas.openxmlformats.org/drawingml/2006/main"/>
-          <a:p xmlns:a="http://schemas.openxmlformats.org/drawingml/2006/main">
-            <a:pPr algn="ctr">
-              <a:defRPr sz="1500" b="1">
-                <a:solidFill>
-                  <a:srgbClr val="FFFFFF"/>
-                </a:solidFill>
-              </a:defRPr>
-            </a:pPr>
-            <a:r>
-              <a:rPr sz="1500" b="1">
-                <a:solidFill>
-                  <a:srgbClr val="FFFFFF"/>
-                </a:solidFill>
-                <a:latin typeface="Microsoft YaHei"/>
-                <a:ea typeface="Microsoft YaHei"/>
-                <a:cs typeface="Microsoft YaHei"/>
-              </a:rPr>
-              <a:t>作用机制</a:t>
-            </a:r>
-          </a:p>
-        </p:txBody>
-      </p:sp>
-      <p:sp>
-        <p:nvSpPr>
-          <p:cNvPr id="10" name="p13-1-d">
-            <a:extLst xmlns:a="http://schemas.openxmlformats.org/drawingml/2006/main">
-              <a:ext uri="{FF2B5EF4-FFF2-40B4-BE49-F238E27FC236}">
-                <a16:creationId xmlns:a16="http://schemas.microsoft.com/office/drawing/2014/main" id="{FA1BD7A8-6FC3-4C0E-A266-34FE32A45017}"/>
-              </a:ext>
-            </a:extLst>
-          </p:cNvPr>
-          <p:cNvSpPr>
-            <a:spLocks xmlns:a="http://schemas.openxmlformats.org/drawingml/2006/main" noGrp="1"/>
-          </p:cNvSpPr>
-          <p:nvPr/>
-        </p:nvSpPr>
-        <p:spPr>
-          <a:xfrm xmlns:a="http://schemas.openxmlformats.org/drawingml/2006/main">
-            <a:off x="3429000" y="1962150"/>
-            <a:ext cx="2667000" cy="2228850"/>
-          </a:xfrm>
-          <a:prstGeom xmlns:a="http://schemas.openxmlformats.org/drawingml/2006/main" prst="roundRect">
-            <a:avLst>
-              <a:gd name="adj" fmla="val 3419"/>
-            </a:avLst>
-          </a:prstGeom>
-          <a:solidFill xmlns:a="http://schemas.openxmlformats.org/drawingml/2006/main">
-            <a:srgbClr val="E8F0F6"/>
-          </a:solidFill>
-          <a:ln xmlns:a="http://schemas.openxmlformats.org/drawingml/2006/main" w="9525">
-            <a:solidFill>
-              <a:srgbClr val="D6DDE2"/>
-            </a:solidFill>
-            <a:prstDash val="solid"/>
-          </a:ln>
-        </p:spPr>
-        <p:txBody>
-          <a:bodyPr xmlns:a="http://schemas.openxmlformats.org/drawingml/2006/main" lIns="76200" tIns="38100" rIns="76200" bIns="38100" anchor="ctr"/>
-          <a:lstStyle xmlns:a="http://schemas.openxmlformats.org/drawingml/2006/main"/>
-          <a:p xmlns:a="http://schemas.openxmlformats.org/drawingml/2006/main">
-            <a:pPr algn="ctr">
-              <a:lnSpc>
-                <a:spcPct val="108000"/>
-              </a:lnSpc>
-              <a:buNone/>
-              <a:defRPr sz="1425" b="0">
-                <a:solidFill>
-                  <a:srgbClr val="263746"/>
-                </a:solidFill>
-              </a:defRPr>
-            </a:pPr>
-            <a:r>
-              <a:rPr sz="1425" b="0">
-                <a:solidFill>
-                  <a:srgbClr val="263746"/>
-                </a:solidFill>
-                <a:latin typeface="Microsoft YaHei"/>
-                <a:ea typeface="Microsoft YaHei"/>
-                <a:cs typeface="Microsoft YaHei"/>
-              </a:rPr>
-              <a:t>分栏记录任务 / 设置 / 结果 / 局限</a:t>
-            </a:r>
-          </a:p>
-          <a:p xmlns:a="http://schemas.openxmlformats.org/drawingml/2006/main">
-            <a:pPr algn="ctr">
-              <a:lnSpc>
-                <a:spcPct val="108000"/>
-              </a:lnSpc>
-              <a:buNone/>
-              <a:defRPr sz="1425" b="0">
-                <a:solidFill>
-                  <a:srgbClr val="263746"/>
-                </a:solidFill>
-              </a:defRPr>
-            </a:pPr>
-            <a:r>
-              <a:rPr sz="1425" b="0">
-                <a:solidFill>
-                  <a:srgbClr val="263746"/>
-                </a:solidFill>
-                <a:latin typeface="Microsoft YaHei"/>
-                <a:ea typeface="Microsoft YaHei"/>
-                <a:cs typeface="Microsoft YaHei"/>
-              </a:rPr>
-              <a:t>使主张绑定来源</a:t>
-            </a:r>
-          </a:p>
-        </p:txBody>
-      </p:sp>
-      <p:sp>
-        <p:nvSpPr>
-          <p:cNvPr id="11" name="p13-2-h">
-            <a:extLst xmlns:a="http://schemas.openxmlformats.org/drawingml/2006/main">
-              <a:ext uri="{FF2B5EF4-FFF2-40B4-BE49-F238E27FC236}">
-                <a16:creationId xmlns:a16="http://schemas.microsoft.com/office/drawing/2014/main" id="{760E5707-FEC8-4C1F-B147-816FB6B49B0E}"/>
-              </a:ext>
-            </a:extLst>
-          </p:cNvPr>
-          <p:cNvSpPr>
-            <a:spLocks xmlns:a="http://schemas.openxmlformats.org/drawingml/2006/main" noGrp="1"/>
-          </p:cNvSpPr>
-          <p:nvPr/>
-        </p:nvSpPr>
-        <p:spPr>
-          <a:xfrm xmlns:a="http://schemas.openxmlformats.org/drawingml/2006/main">
-            <a:off x="6334125" y="1524000"/>
-            <a:ext cx="2667000" cy="400050"/>
-          </a:xfrm>
-          <a:prstGeom xmlns:a="http://schemas.openxmlformats.org/drawingml/2006/main" prst="roundRect">
-            <a:avLst>
-              <a:gd name="adj" fmla="val 19048"/>
-            </a:avLst>
-          </a:prstGeom>
-          <a:solidFill xmlns:a="http://schemas.openxmlformats.org/drawingml/2006/main">
-            <a:srgbClr val="A86C12"/>
-          </a:solidFill>
-          <a:ln xmlns:a="http://schemas.openxmlformats.org/drawingml/2006/main" w="0">
-            <a:noFill/>
-            <a:prstDash val="solid"/>
-          </a:ln>
-        </p:spPr>
-        <p:txBody>
-          <a:bodyPr xmlns:a="http://schemas.openxmlformats.org/drawingml/2006/main" lIns="76200" tIns="38100" rIns="76200" bIns="38100" anchor="ctr"/>
-          <a:lstStyle xmlns:a="http://schemas.openxmlformats.org/drawingml/2006/main"/>
-          <a:p xmlns:a="http://schemas.openxmlformats.org/drawingml/2006/main">
-            <a:pPr algn="ctr">
-              <a:defRPr sz="1500" b="1">
-                <a:solidFill>
-                  <a:srgbClr val="FFFFFF"/>
-                </a:solidFill>
-              </a:defRPr>
-            </a:pPr>
-            <a:r>
-              <a:rPr sz="1500" b="1">
-                <a:solidFill>
-                  <a:srgbClr val="FFFFFF"/>
-                </a:solidFill>
-                <a:latin typeface="Microsoft YaHei"/>
-                <a:ea typeface="Microsoft YaHei"/>
-                <a:cs typeface="Microsoft YaHei"/>
-              </a:rPr>
-              <a:t>不可违背</a:t>
-            </a:r>
-          </a:p>
-        </p:txBody>
-      </p:sp>
-      <p:sp>
-        <p:nvSpPr>
-          <p:cNvPr id="12" name="p13-2-d">
-            <a:extLst xmlns:a="http://schemas.openxmlformats.org/drawingml/2006/main">
-              <a:ext uri="{FF2B5EF4-FFF2-40B4-BE49-F238E27FC236}">
-                <a16:creationId xmlns:a16="http://schemas.microsoft.com/office/drawing/2014/main" id="{4D3F8B2B-BC9C-4DED-A998-BC56895A09B8}"/>
-              </a:ext>
-            </a:extLst>
-          </p:cNvPr>
-          <p:cNvSpPr>
-            <a:spLocks xmlns:a="http://schemas.openxmlformats.org/drawingml/2006/main" noGrp="1"/>
-          </p:cNvSpPr>
-          <p:nvPr/>
-        </p:nvSpPr>
-        <p:spPr>
-          <a:xfrm xmlns:a="http://schemas.openxmlformats.org/drawingml/2006/main">
-            <a:off x="6334125" y="1962150"/>
-            <a:ext cx="2667000" cy="2228850"/>
-          </a:xfrm>
-          <a:prstGeom xmlns:a="http://schemas.openxmlformats.org/drawingml/2006/main" prst="roundRect">
-            <a:avLst>
-              <a:gd name="adj" fmla="val 3419"/>
-            </a:avLst>
-          </a:prstGeom>
-          <a:solidFill xmlns:a="http://schemas.openxmlformats.org/drawingml/2006/main">
-            <a:srgbClr val="FAF0DD"/>
-          </a:solidFill>
-          <a:ln xmlns:a="http://schemas.openxmlformats.org/drawingml/2006/main" w="9525">
-            <a:solidFill>
-              <a:srgbClr val="D6DDE2"/>
-            </a:solidFill>
-            <a:prstDash val="solid"/>
-          </a:ln>
-        </p:spPr>
-        <p:txBody>
-          <a:bodyPr xmlns:a="http://schemas.openxmlformats.org/drawingml/2006/main" lIns="76200" tIns="38100" rIns="76200" bIns="38100" anchor="ctr"/>
-          <a:lstStyle xmlns:a="http://schemas.openxmlformats.org/drawingml/2006/main"/>
-          <a:p xmlns:a="http://schemas.openxmlformats.org/drawingml/2006/main">
-            <a:pPr algn="ctr">
-              <a:lnSpc>
-                <a:spcPct val="108000"/>
-              </a:lnSpc>
-              <a:buNone/>
-              <a:defRPr sz="1425" b="0">
-                <a:solidFill>
-                  <a:srgbClr val="263746"/>
-                </a:solidFill>
-              </a:defRPr>
-            </a:pPr>
-            <a:r>
-              <a:rPr sz="1425" b="0">
-                <a:solidFill>
-                  <a:srgbClr val="263746"/>
-                </a:solidFill>
-                <a:latin typeface="Microsoft YaHei"/>
-                <a:ea typeface="Microsoft YaHei"/>
-                <a:cs typeface="Microsoft YaHei"/>
-              </a:rPr>
-              <a:t>同论文、同模型</a:t>
-            </a:r>
-          </a:p>
-          <a:p xmlns:a="http://schemas.openxmlformats.org/drawingml/2006/main">
-            <a:pPr algn="ctr">
-              <a:lnSpc>
-                <a:spcPct val="108000"/>
-              </a:lnSpc>
-              <a:buNone/>
-              <a:defRPr sz="1425" b="0">
-                <a:solidFill>
-                  <a:srgbClr val="263746"/>
-                </a:solidFill>
-              </a:defRPr>
-            </a:pPr>
-            <a:r>
-              <a:rPr sz="1425" b="0">
-                <a:solidFill>
-                  <a:srgbClr val="263746"/>
-                </a:solidFill>
-                <a:latin typeface="Microsoft YaHei"/>
-                <a:ea typeface="Microsoft YaHei"/>
-                <a:cs typeface="Microsoft YaHei"/>
-              </a:rPr>
-              <a:t>固定 rubric、盲评</a:t>
-            </a:r>
-          </a:p>
-          <a:p xmlns:a="http://schemas.openxmlformats.org/drawingml/2006/main">
-            <a:pPr algn="ctr">
-              <a:lnSpc>
-                <a:spcPct val="108000"/>
-              </a:lnSpc>
-              <a:buNone/>
-              <a:defRPr sz="1425" b="0">
-                <a:solidFill>
-                  <a:srgbClr val="263746"/>
-                </a:solidFill>
-              </a:defRPr>
-            </a:pPr>
-            <a:r>
-              <a:rPr sz="1425" b="0">
-                <a:solidFill>
-                  <a:srgbClr val="263746"/>
-                </a:solidFill>
-                <a:latin typeface="Microsoft YaHei"/>
-                <a:ea typeface="Microsoft YaHei"/>
-                <a:cs typeface="Microsoft YaHei"/>
-              </a:rPr>
-              <a:t>遗漏有定义</a:t>
-            </a:r>
-          </a:p>
-        </p:txBody>
-      </p:sp>
-      <p:sp>
-        <p:nvSpPr>
-          <p:cNvPr id="13" name="p13-3-h">
-            <a:extLst xmlns:a="http://schemas.openxmlformats.org/drawingml/2006/main">
-              <a:ext uri="{FF2B5EF4-FFF2-40B4-BE49-F238E27FC236}">
-                <a16:creationId xmlns:a16="http://schemas.microsoft.com/office/drawing/2014/main" id="{2932B90E-AF03-497A-B1A4-E160AD3CF121}"/>
-              </a:ext>
-            </a:extLst>
-          </p:cNvPr>
-          <p:cNvSpPr>
-            <a:spLocks xmlns:a="http://schemas.openxmlformats.org/drawingml/2006/main" noGrp="1"/>
-          </p:cNvSpPr>
-          <p:nvPr/>
-        </p:nvSpPr>
-        <p:spPr>
-          <a:xfrm xmlns:a="http://schemas.openxmlformats.org/drawingml/2006/main">
-            <a:off x="9239250" y="1524000"/>
-            <a:ext cx="2667000" cy="400050"/>
-          </a:xfrm>
-          <a:prstGeom xmlns:a="http://schemas.openxmlformats.org/drawingml/2006/main" prst="roundRect">
-            <a:avLst>
-              <a:gd name="adj" fmla="val 19048"/>
-            </a:avLst>
-          </a:prstGeom>
-          <a:solidFill xmlns:a="http://schemas.openxmlformats.org/drawingml/2006/main">
-            <a:srgbClr val="C8161E"/>
-          </a:solidFill>
-          <a:ln xmlns:a="http://schemas.openxmlformats.org/drawingml/2006/main" w="0">
-            <a:noFill/>
-            <a:prstDash val="solid"/>
-          </a:ln>
-        </p:spPr>
-        <p:txBody>
-          <a:bodyPr xmlns:a="http://schemas.openxmlformats.org/drawingml/2006/main" lIns="76200" tIns="38100" rIns="76200" bIns="38100" anchor="ctr"/>
-          <a:lstStyle xmlns:a="http://schemas.openxmlformats.org/drawingml/2006/main"/>
-          <a:p xmlns:a="http://schemas.openxmlformats.org/drawingml/2006/main">
-            <a:pPr algn="ctr">
-              <a:defRPr sz="1500" b="1">
-                <a:solidFill>
-                  <a:srgbClr val="FFFFFF"/>
-                </a:solidFill>
-              </a:defRPr>
-            </a:pPr>
-            <a:r>
-              <a:rPr sz="1500" b="1">
-                <a:solidFill>
-                  <a:srgbClr val="FFFFFF"/>
-                </a:solidFill>
-                <a:latin typeface="Microsoft YaHei"/>
-                <a:ea typeface="Microsoft YaHei"/>
-                <a:cs typeface="Microsoft YaHei"/>
-              </a:rPr>
-              <a:t>待验证前提</a:t>
-            </a:r>
-          </a:p>
-        </p:txBody>
-      </p:sp>
-      <p:sp>
-        <p:nvSpPr>
-          <p:cNvPr id="14" name="p13-3-d">
-            <a:extLst xmlns:a="http://schemas.openxmlformats.org/drawingml/2006/main">
-              <a:ext uri="{FF2B5EF4-FFF2-40B4-BE49-F238E27FC236}">
-                <a16:creationId xmlns:a16="http://schemas.microsoft.com/office/drawing/2014/main" id="{9499355E-38ED-44FE-8670-3EDC26DFCF03}"/>
-              </a:ext>
-            </a:extLst>
-          </p:cNvPr>
-          <p:cNvSpPr>
-            <a:spLocks xmlns:a="http://schemas.openxmlformats.org/drawingml/2006/main" noGrp="1"/>
-          </p:cNvSpPr>
-          <p:nvPr/>
-        </p:nvSpPr>
-        <p:spPr>
-          <a:xfrm xmlns:a="http://schemas.openxmlformats.org/drawingml/2006/main">
-            <a:off x="9239250" y="1962150"/>
-            <a:ext cx="2667000" cy="2228850"/>
-          </a:xfrm>
-          <a:prstGeom xmlns:a="http://schemas.openxmlformats.org/drawingml/2006/main" prst="roundRect">
-            <a:avLst>
-              <a:gd name="adj" fmla="val 3419"/>
-            </a:avLst>
-          </a:prstGeom>
-          <a:solidFill xmlns:a="http://schemas.openxmlformats.org/drawingml/2006/main">
-            <a:srgbClr val="F8E9EA"/>
-          </a:solidFill>
-          <a:ln xmlns:a="http://schemas.openxmlformats.org/drawingml/2006/main" w="9525">
-            <a:solidFill>
-              <a:srgbClr val="D6DDE2"/>
-            </a:solidFill>
-            <a:prstDash val="solid"/>
-          </a:ln>
-        </p:spPr>
-        <p:txBody>
-          <a:bodyPr xmlns:a="http://schemas.openxmlformats.org/drawingml/2006/main" lIns="76200" tIns="38100" rIns="76200" bIns="38100" anchor="ctr"/>
-          <a:lstStyle xmlns:a="http://schemas.openxmlformats.org/drawingml/2006/main"/>
-          <a:p xmlns:a="http://schemas.openxmlformats.org/drawingml/2006/main">
-            <a:pPr algn="ctr">
-              <a:lnSpc>
-                <a:spcPct val="108000"/>
-              </a:lnSpc>
-              <a:buNone/>
-              <a:defRPr sz="1425" b="0">
-                <a:solidFill>
-                  <a:srgbClr val="263746"/>
-                </a:solidFill>
-              </a:defRPr>
-            </a:pPr>
-            <a:r>
-              <a:rPr sz="1425" b="0">
-                <a:solidFill>
-                  <a:srgbClr val="263746"/>
-                </a:solidFill>
-                <a:latin typeface="Microsoft YaHei"/>
-                <a:ea typeface="Microsoft YaHei"/>
-                <a:cs typeface="Microsoft YaHei"/>
-              </a:rPr>
-              <a:t>若定位原文且标准固定</a:t>
-            </a:r>
-          </a:p>
-          <a:p xmlns:a="http://schemas.openxmlformats.org/drawingml/2006/main">
-            <a:pPr algn="ctr">
-              <a:lnSpc>
-                <a:spcPct val="108000"/>
-              </a:lnSpc>
-              <a:buNone/>
-              <a:defRPr sz="1425" b="0">
-                <a:solidFill>
-                  <a:srgbClr val="263746"/>
-                </a:solidFill>
-              </a:defRPr>
-            </a:pPr>
-            <a:r>
-              <a:rPr sz="1425" b="0">
-                <a:solidFill>
-                  <a:srgbClr val="263746"/>
-                </a:solidFill>
-                <a:latin typeface="Microsoft YaHei"/>
-                <a:ea typeface="Microsoft YaHei"/>
-                <a:cs typeface="Microsoft YaHei"/>
-              </a:rPr>
-              <a:t>则遗漏率可测</a:t>
-            </a:r>
-          </a:p>
-          <a:p xmlns:a="http://schemas.openxmlformats.org/drawingml/2006/main">
-            <a:pPr algn="ctr">
-              <a:lnSpc>
-                <a:spcPct val="108000"/>
-              </a:lnSpc>
-              <a:buNone/>
-              <a:defRPr sz="1425" b="0">
-                <a:solidFill>
-                  <a:srgbClr val="263746"/>
-                </a:solidFill>
-              </a:defRPr>
-            </a:pPr>
-            <a:r>
-              <a:rPr sz="1425" b="0">
-                <a:solidFill>
-                  <a:srgbClr val="263746"/>
-                </a:solidFill>
-                <a:latin typeface="Microsoft YaHei"/>
-                <a:ea typeface="Microsoft YaHei"/>
-                <a:cs typeface="Microsoft YaHei"/>
-              </a:rPr>
-              <a:t>差异可归因</a:t>
-            </a:r>
-          </a:p>
-        </p:txBody>
-      </p:sp>
-      <p:sp>
-        <p:nvSpPr>
-          <p:cNvPr id="15" name="p13-a0">
-            <a:extLst xmlns:a="http://schemas.openxmlformats.org/drawingml/2006/main">
-              <a:ext uri="{FF2B5EF4-FFF2-40B4-BE49-F238E27FC236}">
-                <a16:creationId xmlns:a16="http://schemas.microsoft.com/office/drawing/2014/main" id="{9EF3B1EC-04FB-48C5-84CB-0E1693563C0C}"/>
-              </a:ext>
-            </a:extLst>
-          </p:cNvPr>
-          <p:cNvSpPr>
-            <a:spLocks xmlns:a="http://schemas.openxmlformats.org/drawingml/2006/main" noGrp="1"/>
-          </p:cNvSpPr>
-          <p:nvPr/>
-        </p:nvSpPr>
-        <p:spPr>
-          <a:xfrm xmlns:a="http://schemas.openxmlformats.org/drawingml/2006/main">
-            <a:off x="3143250" y="2619375"/>
-            <a:ext cx="400050" cy="381000"/>
-          </a:xfrm>
-          <a:prstGeom xmlns:a="http://schemas.openxmlformats.org/drawingml/2006/main" prst="rect">
-            <a:avLst/>
-          </a:prstGeom>
-          <a:noFill xmlns:a="http://schemas.openxmlformats.org/drawingml/2006/main"/>
-          <a:ln xmlns:a="http://schemas.openxmlformats.org/drawingml/2006/main" w="0">
-            <a:noFill/>
-            <a:prstDash val="solid"/>
-          </a:ln>
-        </p:spPr>
-        <p:txBody>
-          <a:bodyPr xmlns:a="http://schemas.openxmlformats.org/drawingml/2006/main" lIns="76200" tIns="38100" rIns="76200" bIns="38100" anchor="ctr"/>
-          <a:lstStyle xmlns:a="http://schemas.openxmlformats.org/drawingml/2006/main"/>
-          <a:p xmlns:a="http://schemas.openxmlformats.org/drawingml/2006/main">
-            <a:pPr algn="ctr">
-              <a:defRPr sz="2175" b="1">
-                <a:solidFill>
-                  <a:srgbClr val="667684"/>
-                </a:solidFill>
-              </a:defRPr>
-            </a:pPr>
-            <a:r>
-              <a:rPr sz="2175" b="1">
-                <a:solidFill>
-                  <a:srgbClr val="667684"/>
-                </a:solidFill>
-                <a:latin typeface="Arial"/>
-                <a:ea typeface="Arial"/>
-                <a:cs typeface="Arial"/>
-              </a:rPr>
-              <a:t>→</a:t>
-            </a:r>
-          </a:p>
-        </p:txBody>
-      </p:sp>
-      <p:sp>
-        <p:nvSpPr>
-          <p:cNvPr id="16" name="p13-a1">
-            <a:extLst xmlns:a="http://schemas.openxmlformats.org/drawingml/2006/main">
-              <a:ext uri="{FF2B5EF4-FFF2-40B4-BE49-F238E27FC236}">
-                <a16:creationId xmlns:a16="http://schemas.microsoft.com/office/drawing/2014/main" id="{F4686A01-66FE-46E7-9101-8C68E1C5B5F3}"/>
-              </a:ext>
-            </a:extLst>
-          </p:cNvPr>
-          <p:cNvSpPr>
-            <a:spLocks xmlns:a="http://schemas.openxmlformats.org/drawingml/2006/main" noGrp="1"/>
-          </p:cNvSpPr>
-          <p:nvPr/>
-        </p:nvSpPr>
-        <p:spPr>
-          <a:xfrm xmlns:a="http://schemas.openxmlformats.org/drawingml/2006/main">
-            <a:off x="6048375" y="2619375"/>
-            <a:ext cx="400050" cy="381000"/>
-          </a:xfrm>
-          <a:prstGeom xmlns:a="http://schemas.openxmlformats.org/drawingml/2006/main" prst="rect">
-            <a:avLst/>
-          </a:prstGeom>
-          <a:noFill xmlns:a="http://schemas.openxmlformats.org/drawingml/2006/main"/>
-          <a:ln xmlns:a="http://schemas.openxmlformats.org/drawingml/2006/main" w="0">
-            <a:noFill/>
-            <a:prstDash val="solid"/>
-          </a:ln>
-        </p:spPr>
-        <p:txBody>
-          <a:bodyPr xmlns:a="http://schemas.openxmlformats.org/drawingml/2006/main" lIns="76200" tIns="38100" rIns="76200" bIns="38100" anchor="ctr"/>
-          <a:lstStyle xmlns:a="http://schemas.openxmlformats.org/drawingml/2006/main"/>
-          <a:p xmlns:a="http://schemas.openxmlformats.org/drawingml/2006/main">
-            <a:pPr algn="ctr">
-              <a:defRPr sz="2175" b="1">
-                <a:solidFill>
-                  <a:srgbClr val="667684"/>
-                </a:solidFill>
-              </a:defRPr>
-            </a:pPr>
-            <a:r>
-              <a:rPr sz="2175" b="1">
-                <a:solidFill>
-                  <a:srgbClr val="667684"/>
-                </a:solidFill>
-                <a:latin typeface="Arial"/>
-                <a:ea typeface="Arial"/>
-                <a:cs typeface="Arial"/>
-              </a:rPr>
-              <a:t>→</a:t>
-            </a:r>
-          </a:p>
-        </p:txBody>
-      </p:sp>
-      <p:sp>
-        <p:nvSpPr>
-          <p:cNvPr id="17" name="p13-a2">
-            <a:extLst xmlns:a="http://schemas.openxmlformats.org/drawingml/2006/main">
-              <a:ext uri="{FF2B5EF4-FFF2-40B4-BE49-F238E27FC236}">
-                <a16:creationId xmlns:a16="http://schemas.microsoft.com/office/drawing/2014/main" id="{7715CED7-1ECD-4DFB-A4AE-A9104235D526}"/>
-              </a:ext>
-            </a:extLst>
-          </p:cNvPr>
-          <p:cNvSpPr>
-            <a:spLocks xmlns:a="http://schemas.openxmlformats.org/drawingml/2006/main" noGrp="1"/>
-          </p:cNvSpPr>
-          <p:nvPr/>
-        </p:nvSpPr>
-        <p:spPr>
-          <a:xfrm xmlns:a="http://schemas.openxmlformats.org/drawingml/2006/main">
-            <a:off x="8953500" y="2619375"/>
-            <a:ext cx="400050" cy="381000"/>
-          </a:xfrm>
-          <a:prstGeom xmlns:a="http://schemas.openxmlformats.org/drawingml/2006/main" prst="rect">
-            <a:avLst/>
-          </a:prstGeom>
-          <a:noFill xmlns:a="http://schemas.openxmlformats.org/drawingml/2006/main"/>
-          <a:ln xmlns:a="http://schemas.openxmlformats.org/drawingml/2006/main" w="0">
-            <a:noFill/>
-            <a:prstDash val="solid"/>
-          </a:ln>
-        </p:spPr>
-        <p:txBody>
-          <a:bodyPr xmlns:a="http://schemas.openxmlformats.org/drawingml/2006/main" lIns="76200" tIns="38100" rIns="76200" bIns="38100" anchor="ctr"/>
-          <a:lstStyle xmlns:a="http://schemas.openxmlformats.org/drawingml/2006/main"/>
-          <a:p xmlns:a="http://schemas.openxmlformats.org/drawingml/2006/main">
-            <a:pPr algn="ctr">
-              <a:defRPr sz="2175" b="1">
-                <a:solidFill>
-                  <a:srgbClr val="667684"/>
-                </a:solidFill>
-              </a:defRPr>
-            </a:pPr>
-            <a:r>
-              <a:rPr sz="2175" b="1">
-                <a:solidFill>
-                  <a:srgbClr val="667684"/>
-                </a:solidFill>
-                <a:latin typeface="Arial"/>
-                <a:ea typeface="Arial"/>
-                <a:cs typeface="Arial"/>
-              </a:rPr>
-              <a:t>→</a:t>
-            </a:r>
-          </a:p>
-        </p:txBody>
-      </p:sp>
-      <p:sp>
-        <p:nvSpPr>
-          <p:cNvPr id="18" name="p13-bottom">
-            <a:extLst xmlns:a="http://schemas.openxmlformats.org/drawingml/2006/main">
-              <a:ext uri="{FF2B5EF4-FFF2-40B4-BE49-F238E27FC236}">
-                <a16:creationId xmlns:a16="http://schemas.microsoft.com/office/drawing/2014/main" id="{FB7BD820-AE29-4A5E-A920-E1EB1C1569F2}"/>
-              </a:ext>
-            </a:extLst>
-          </p:cNvPr>
-          <p:cNvSpPr>
-            <a:spLocks xmlns:a="http://schemas.openxmlformats.org/drawingml/2006/main" noGrp="1"/>
-          </p:cNvSpPr>
-          <p:nvPr/>
-        </p:nvSpPr>
-        <p:spPr>
-          <a:xfrm xmlns:a="http://schemas.openxmlformats.org/drawingml/2006/main">
-            <a:off x="1714500" y="4810125"/>
-            <a:ext cx="8763000" cy="552450"/>
-          </a:xfrm>
-          <a:prstGeom xmlns:a="http://schemas.openxmlformats.org/drawingml/2006/main" prst="rect">
-            <a:avLst/>
-          </a:prstGeom>
-          <a:noFill xmlns:a="http://schemas.openxmlformats.org/drawingml/2006/main"/>
-          <a:ln xmlns:a="http://schemas.openxmlformats.org/drawingml/2006/main" w="0">
-            <a:noFill/>
-            <a:prstDash val="solid"/>
-          </a:ln>
-        </p:spPr>
-        <p:txBody>
-          <a:bodyPr xmlns:a="http://schemas.openxmlformats.org/drawingml/2006/main" lIns="76200" tIns="38100" rIns="76200" bIns="38100" anchor="ctr"/>
-          <a:lstStyle xmlns:a="http://schemas.openxmlformats.org/drawingml/2006/main"/>
-          <a:p xmlns:a="http://schemas.openxmlformats.org/drawingml/2006/main">
-            <a:pPr algn="ctr">
-              <a:defRPr sz="1800" b="1">
+              <a:defRPr sz="1575" b="1">
                 <a:solidFill>
                   <a:srgbClr val="C8161E"/>
                 </a:solidFill>
               </a:defRPr>
             </a:pPr>
             <a:r>
-              <a:rPr sz="1800" b="1">
+              <a:rPr sz="1575" b="1">
                 <a:solidFill>
                   <a:srgbClr val="C8161E"/>
                 </a:solidFill>
@@ -8262,7 +7466,7 @@
                 <a:ea typeface="Microsoft YaHei"/>
                 <a:cs typeface="Microsoft YaHei"/>
               </a:rPr>
-              <a:t>输出是待验证前提，不是实证结论；第 7 课再转成机制假设。</a:t>
+              <a:t>L6 锁定问题与判据；L7 定机制假设，L8 做预演，L9 才固化实验规格。</a:t>
             </a:r>
           </a:p>
         </p:txBody>
@@ -8325,7 +7529,7 @@
                 <a:ea typeface="Microsoft YaHei"/>
                 <a:cs typeface="Microsoft YaHei"/>
               </a:rPr>
-              <a:t>问题门八项条件自查</a:t>
+              <a:t>问题门九项条件自查</a:t>
             </a:r>
             <a:endParaRPr/>
           </a:p>
@@ -8364,23 +7568,23 @@
           <p:cNvPr id="6" name="p14-n0">
             <a:extLst xmlns:a="http://schemas.openxmlformats.org/drawingml/2006/main">
               <a:ext uri="{FF2B5EF4-FFF2-40B4-BE49-F238E27FC236}">
-                <a16:creationId xmlns:a16="http://schemas.microsoft.com/office/drawing/2014/main" id="{19559B68-D68A-4168-AA57-3D63B0EFE994}"/>
-              </a:ext>
-            </a:extLst>
-          </p:cNvPr>
-          <p:cNvSpPr>
-            <a:spLocks xmlns:a="http://schemas.openxmlformats.org/drawingml/2006/main" noGrp="1"/>
-          </p:cNvSpPr>
-          <p:nvPr/>
-        </p:nvSpPr>
-        <p:spPr>
-          <a:xfrm xmlns:a="http://schemas.openxmlformats.org/drawingml/2006/main">
-            <a:off x="523875" y="1047750"/>
-            <a:ext cx="438150" cy="438150"/>
+                <a16:creationId xmlns:a16="http://schemas.microsoft.com/office/drawing/2014/main" id="{34F0F926-ECD4-4CAD-AE51-C253EBAB04AF}"/>
+              </a:ext>
+            </a:extLst>
+          </p:cNvPr>
+          <p:cNvSpPr>
+            <a:spLocks xmlns:a="http://schemas.openxmlformats.org/drawingml/2006/main" noGrp="1"/>
+          </p:cNvSpPr>
+          <p:nvPr/>
+        </p:nvSpPr>
+        <p:spPr>
+          <a:xfrm xmlns:a="http://schemas.openxmlformats.org/drawingml/2006/main">
+            <a:off x="438150" y="1000125"/>
+            <a:ext cx="400050" cy="400050"/>
           </a:xfrm>
           <a:prstGeom xmlns:a="http://schemas.openxmlformats.org/drawingml/2006/main" prst="roundRect">
             <a:avLst>
-              <a:gd name="adj" fmla="val 17391"/>
+              <a:gd name="adj" fmla="val 19048"/>
             </a:avLst>
           </a:prstGeom>
           <a:solidFill xmlns:a="http://schemas.openxmlformats.org/drawingml/2006/main">
@@ -8421,23 +7625,23 @@
           <p:cNvPr id="7" name="p14-g0">
             <a:extLst xmlns:a="http://schemas.openxmlformats.org/drawingml/2006/main">
               <a:ext uri="{FF2B5EF4-FFF2-40B4-BE49-F238E27FC236}">
-                <a16:creationId xmlns:a16="http://schemas.microsoft.com/office/drawing/2014/main" id="{DD0C2E4E-123C-4A15-B611-F3412F6EB919}"/>
-              </a:ext>
-            </a:extLst>
-          </p:cNvPr>
-          <p:cNvSpPr>
-            <a:spLocks xmlns:a="http://schemas.openxmlformats.org/drawingml/2006/main" noGrp="1"/>
-          </p:cNvSpPr>
-          <p:nvPr/>
-        </p:nvSpPr>
-        <p:spPr>
-          <a:xfrm xmlns:a="http://schemas.openxmlformats.org/drawingml/2006/main">
-            <a:off x="1076325" y="981075"/>
-            <a:ext cx="5095875" cy="609600"/>
+                <a16:creationId xmlns:a16="http://schemas.microsoft.com/office/drawing/2014/main" id="{800AD36F-6C3A-40E5-87D5-44CD9DB08D35}"/>
+              </a:ext>
+            </a:extLst>
+          </p:cNvPr>
+          <p:cNvSpPr>
+            <a:spLocks xmlns:a="http://schemas.openxmlformats.org/drawingml/2006/main" noGrp="1"/>
+          </p:cNvSpPr>
+          <p:nvPr/>
+        </p:nvSpPr>
+        <p:spPr>
+          <a:xfrm xmlns:a="http://schemas.openxmlformats.org/drawingml/2006/main">
+            <a:off x="914400" y="933450"/>
+            <a:ext cx="3333750" cy="838200"/>
           </a:xfrm>
           <a:prstGeom xmlns:a="http://schemas.openxmlformats.org/drawingml/2006/main" prst="roundRect">
             <a:avLst>
-              <a:gd name="adj" fmla="val 12500"/>
+              <a:gd name="adj" fmla="val 9091"/>
             </a:avLst>
           </a:prstGeom>
           <a:solidFill xmlns:a="http://schemas.openxmlformats.org/drawingml/2006/main">
@@ -8456,7 +7660,7 @@
           <a:p xmlns:a="http://schemas.openxmlformats.org/drawingml/2006/main">
             <a:pPr algn="ctr">
               <a:lnSpc>
-                <a:spcPct val="102000"/>
+                <a:spcPct val="100000"/>
               </a:lnSpc>
               <a:buNone/>
               <a:defRPr sz="1350" b="1">
@@ -8484,23 +7688,23 @@
           <p:cNvPr id="8" name="p14-n1">
             <a:extLst xmlns:a="http://schemas.openxmlformats.org/drawingml/2006/main">
               <a:ext uri="{FF2B5EF4-FFF2-40B4-BE49-F238E27FC236}">
-                <a16:creationId xmlns:a16="http://schemas.microsoft.com/office/drawing/2014/main" id="{4FE28715-780E-46A2-88A1-49823D65B2FB}"/>
-              </a:ext>
-            </a:extLst>
-          </p:cNvPr>
-          <p:cNvSpPr>
-            <a:spLocks xmlns:a="http://schemas.openxmlformats.org/drawingml/2006/main" noGrp="1"/>
-          </p:cNvSpPr>
-          <p:nvPr/>
-        </p:nvSpPr>
-        <p:spPr>
-          <a:xfrm xmlns:a="http://schemas.openxmlformats.org/drawingml/2006/main">
-            <a:off x="6334125" y="1047750"/>
-            <a:ext cx="438150" cy="438150"/>
+                <a16:creationId xmlns:a16="http://schemas.microsoft.com/office/drawing/2014/main" id="{EC9FCBA7-38C1-4E47-A5CD-9CDF7AE9B127}"/>
+              </a:ext>
+            </a:extLst>
+          </p:cNvPr>
+          <p:cNvSpPr>
+            <a:spLocks xmlns:a="http://schemas.openxmlformats.org/drawingml/2006/main" noGrp="1"/>
+          </p:cNvSpPr>
+          <p:nvPr/>
+        </p:nvSpPr>
+        <p:spPr>
+          <a:xfrm xmlns:a="http://schemas.openxmlformats.org/drawingml/2006/main">
+            <a:off x="4343400" y="1000125"/>
+            <a:ext cx="400050" cy="400050"/>
           </a:xfrm>
           <a:prstGeom xmlns:a="http://schemas.openxmlformats.org/drawingml/2006/main" prst="roundRect">
             <a:avLst>
-              <a:gd name="adj" fmla="val 17391"/>
+              <a:gd name="adj" fmla="val 19048"/>
             </a:avLst>
           </a:prstGeom>
           <a:solidFill xmlns:a="http://schemas.openxmlformats.org/drawingml/2006/main">
@@ -8541,23 +7745,23 @@
           <p:cNvPr id="9" name="p14-g1">
             <a:extLst xmlns:a="http://schemas.openxmlformats.org/drawingml/2006/main">
               <a:ext uri="{FF2B5EF4-FFF2-40B4-BE49-F238E27FC236}">
-                <a16:creationId xmlns:a16="http://schemas.microsoft.com/office/drawing/2014/main" id="{1F94FF83-49A7-4BF6-A9B5-A31139F8575A}"/>
-              </a:ext>
-            </a:extLst>
-          </p:cNvPr>
-          <p:cNvSpPr>
-            <a:spLocks xmlns:a="http://schemas.openxmlformats.org/drawingml/2006/main" noGrp="1"/>
-          </p:cNvSpPr>
-          <p:nvPr/>
-        </p:nvSpPr>
-        <p:spPr>
-          <a:xfrm xmlns:a="http://schemas.openxmlformats.org/drawingml/2006/main">
-            <a:off x="6886575" y="981075"/>
-            <a:ext cx="5095875" cy="609600"/>
+                <a16:creationId xmlns:a16="http://schemas.microsoft.com/office/drawing/2014/main" id="{68D1D381-8BD8-48CD-9EAA-69C180CFB8CC}"/>
+              </a:ext>
+            </a:extLst>
+          </p:cNvPr>
+          <p:cNvSpPr>
+            <a:spLocks xmlns:a="http://schemas.openxmlformats.org/drawingml/2006/main" noGrp="1"/>
+          </p:cNvSpPr>
+          <p:nvPr/>
+        </p:nvSpPr>
+        <p:spPr>
+          <a:xfrm xmlns:a="http://schemas.openxmlformats.org/drawingml/2006/main">
+            <a:off x="4819650" y="933450"/>
+            <a:ext cx="3333750" cy="838200"/>
           </a:xfrm>
           <a:prstGeom xmlns:a="http://schemas.openxmlformats.org/drawingml/2006/main" prst="roundRect">
             <a:avLst>
-              <a:gd name="adj" fmla="val 12500"/>
+              <a:gd name="adj" fmla="val 9091"/>
             </a:avLst>
           </a:prstGeom>
           <a:solidFill xmlns:a="http://schemas.openxmlformats.org/drawingml/2006/main">
@@ -8576,7 +7780,7 @@
           <a:p xmlns:a="http://schemas.openxmlformats.org/drawingml/2006/main">
             <a:pPr algn="ctr">
               <a:lnSpc>
-                <a:spcPct val="102000"/>
+                <a:spcPct val="100000"/>
               </a:lnSpc>
               <a:buNone/>
               <a:defRPr sz="1350" b="1">
@@ -8604,23 +7808,23 @@
           <p:cNvPr id="10" name="p14-n2">
             <a:extLst xmlns:a="http://schemas.openxmlformats.org/drawingml/2006/main">
               <a:ext uri="{FF2B5EF4-FFF2-40B4-BE49-F238E27FC236}">
-                <a16:creationId xmlns:a16="http://schemas.microsoft.com/office/drawing/2014/main" id="{21674778-5E6F-48D8-99D5-9A239110412F}"/>
-              </a:ext>
-            </a:extLst>
-          </p:cNvPr>
-          <p:cNvSpPr>
-            <a:spLocks xmlns:a="http://schemas.openxmlformats.org/drawingml/2006/main" noGrp="1"/>
-          </p:cNvSpPr>
-          <p:nvPr/>
-        </p:nvSpPr>
-        <p:spPr>
-          <a:xfrm xmlns:a="http://schemas.openxmlformats.org/drawingml/2006/main">
-            <a:off x="523875" y="2152650"/>
-            <a:ext cx="438150" cy="438150"/>
+                <a16:creationId xmlns:a16="http://schemas.microsoft.com/office/drawing/2014/main" id="{6BC959A8-BF2A-4C6B-8274-81227D4381B3}"/>
+              </a:ext>
+            </a:extLst>
+          </p:cNvPr>
+          <p:cNvSpPr>
+            <a:spLocks xmlns:a="http://schemas.openxmlformats.org/drawingml/2006/main" noGrp="1"/>
+          </p:cNvSpPr>
+          <p:nvPr/>
+        </p:nvSpPr>
+        <p:spPr>
+          <a:xfrm xmlns:a="http://schemas.openxmlformats.org/drawingml/2006/main">
+            <a:off x="8248650" y="1000125"/>
+            <a:ext cx="400050" cy="400050"/>
           </a:xfrm>
           <a:prstGeom xmlns:a="http://schemas.openxmlformats.org/drawingml/2006/main" prst="roundRect">
             <a:avLst>
-              <a:gd name="adj" fmla="val 17391"/>
+              <a:gd name="adj" fmla="val 19048"/>
             </a:avLst>
           </a:prstGeom>
           <a:solidFill xmlns:a="http://schemas.openxmlformats.org/drawingml/2006/main">
@@ -8661,23 +7865,23 @@
           <p:cNvPr id="11" name="p14-g2">
             <a:extLst xmlns:a="http://schemas.openxmlformats.org/drawingml/2006/main">
               <a:ext uri="{FF2B5EF4-FFF2-40B4-BE49-F238E27FC236}">
-                <a16:creationId xmlns:a16="http://schemas.microsoft.com/office/drawing/2014/main" id="{948857F5-84D0-4295-926D-56471FC0C244}"/>
-              </a:ext>
-            </a:extLst>
-          </p:cNvPr>
-          <p:cNvSpPr>
-            <a:spLocks xmlns:a="http://schemas.openxmlformats.org/drawingml/2006/main" noGrp="1"/>
-          </p:cNvSpPr>
-          <p:nvPr/>
-        </p:nvSpPr>
-        <p:spPr>
-          <a:xfrm xmlns:a="http://schemas.openxmlformats.org/drawingml/2006/main">
-            <a:off x="1076325" y="2085975"/>
-            <a:ext cx="5095875" cy="609600"/>
+                <a16:creationId xmlns:a16="http://schemas.microsoft.com/office/drawing/2014/main" id="{22DEDCB3-B6BB-4ACB-8987-35AF7EEABAD0}"/>
+              </a:ext>
+            </a:extLst>
+          </p:cNvPr>
+          <p:cNvSpPr>
+            <a:spLocks xmlns:a="http://schemas.openxmlformats.org/drawingml/2006/main" noGrp="1"/>
+          </p:cNvSpPr>
+          <p:nvPr/>
+        </p:nvSpPr>
+        <p:spPr>
+          <a:xfrm xmlns:a="http://schemas.openxmlformats.org/drawingml/2006/main">
+            <a:off x="8724900" y="933450"/>
+            <a:ext cx="3333750" cy="838200"/>
           </a:xfrm>
           <a:prstGeom xmlns:a="http://schemas.openxmlformats.org/drawingml/2006/main" prst="roundRect">
             <a:avLst>
-              <a:gd name="adj" fmla="val 12500"/>
+              <a:gd name="adj" fmla="val 9091"/>
             </a:avLst>
           </a:prstGeom>
           <a:solidFill xmlns:a="http://schemas.openxmlformats.org/drawingml/2006/main">
@@ -8696,7 +7900,7 @@
           <a:p xmlns:a="http://schemas.openxmlformats.org/drawingml/2006/main">
             <a:pPr algn="ctr">
               <a:lnSpc>
-                <a:spcPct val="102000"/>
+                <a:spcPct val="100000"/>
               </a:lnSpc>
               <a:buNone/>
               <a:defRPr sz="1350" b="1">
@@ -8724,23 +7928,23 @@
           <p:cNvPr id="12" name="p14-n3">
             <a:extLst xmlns:a="http://schemas.openxmlformats.org/drawingml/2006/main">
               <a:ext uri="{FF2B5EF4-FFF2-40B4-BE49-F238E27FC236}">
-                <a16:creationId xmlns:a16="http://schemas.microsoft.com/office/drawing/2014/main" id="{B0A45D9B-04BD-4435-958B-B09DE4E5E080}"/>
-              </a:ext>
-            </a:extLst>
-          </p:cNvPr>
-          <p:cNvSpPr>
-            <a:spLocks xmlns:a="http://schemas.openxmlformats.org/drawingml/2006/main" noGrp="1"/>
-          </p:cNvSpPr>
-          <p:nvPr/>
-        </p:nvSpPr>
-        <p:spPr>
-          <a:xfrm xmlns:a="http://schemas.openxmlformats.org/drawingml/2006/main">
-            <a:off x="6334125" y="2152650"/>
-            <a:ext cx="438150" cy="438150"/>
+                <a16:creationId xmlns:a16="http://schemas.microsoft.com/office/drawing/2014/main" id="{C9134A7C-E812-4DD1-8B10-CDAF78DFA2B0}"/>
+              </a:ext>
+            </a:extLst>
+          </p:cNvPr>
+          <p:cNvSpPr>
+            <a:spLocks xmlns:a="http://schemas.openxmlformats.org/drawingml/2006/main" noGrp="1"/>
+          </p:cNvSpPr>
+          <p:nvPr/>
+        </p:nvSpPr>
+        <p:spPr>
+          <a:xfrm xmlns:a="http://schemas.openxmlformats.org/drawingml/2006/main">
+            <a:off x="438150" y="2362200"/>
+            <a:ext cx="400050" cy="400050"/>
           </a:xfrm>
           <a:prstGeom xmlns:a="http://schemas.openxmlformats.org/drawingml/2006/main" prst="roundRect">
             <a:avLst>
-              <a:gd name="adj" fmla="val 17391"/>
+              <a:gd name="adj" fmla="val 19048"/>
             </a:avLst>
           </a:prstGeom>
           <a:solidFill xmlns:a="http://schemas.openxmlformats.org/drawingml/2006/main">
@@ -8781,23 +7985,23 @@
           <p:cNvPr id="13" name="p14-g3">
             <a:extLst xmlns:a="http://schemas.openxmlformats.org/drawingml/2006/main">
               <a:ext uri="{FF2B5EF4-FFF2-40B4-BE49-F238E27FC236}">
-                <a16:creationId xmlns:a16="http://schemas.microsoft.com/office/drawing/2014/main" id="{5FCA33EE-D2A9-41AD-998C-B5D2CBD27FE7}"/>
-              </a:ext>
-            </a:extLst>
-          </p:cNvPr>
-          <p:cNvSpPr>
-            <a:spLocks xmlns:a="http://schemas.openxmlformats.org/drawingml/2006/main" noGrp="1"/>
-          </p:cNvSpPr>
-          <p:nvPr/>
-        </p:nvSpPr>
-        <p:spPr>
-          <a:xfrm xmlns:a="http://schemas.openxmlformats.org/drawingml/2006/main">
-            <a:off x="6886575" y="2085975"/>
-            <a:ext cx="5095875" cy="609600"/>
+                <a16:creationId xmlns:a16="http://schemas.microsoft.com/office/drawing/2014/main" id="{B58F9F05-6AAB-462E-B123-ACB79BCDDA42}"/>
+              </a:ext>
+            </a:extLst>
+          </p:cNvPr>
+          <p:cNvSpPr>
+            <a:spLocks xmlns:a="http://schemas.openxmlformats.org/drawingml/2006/main" noGrp="1"/>
+          </p:cNvSpPr>
+          <p:nvPr/>
+        </p:nvSpPr>
+        <p:spPr>
+          <a:xfrm xmlns:a="http://schemas.openxmlformats.org/drawingml/2006/main">
+            <a:off x="914400" y="2295525"/>
+            <a:ext cx="3333750" cy="838200"/>
           </a:xfrm>
           <a:prstGeom xmlns:a="http://schemas.openxmlformats.org/drawingml/2006/main" prst="roundRect">
             <a:avLst>
-              <a:gd name="adj" fmla="val 12500"/>
+              <a:gd name="adj" fmla="val 9091"/>
             </a:avLst>
           </a:prstGeom>
           <a:solidFill xmlns:a="http://schemas.openxmlformats.org/drawingml/2006/main">
@@ -8816,7 +8020,7 @@
           <a:p xmlns:a="http://schemas.openxmlformats.org/drawingml/2006/main">
             <a:pPr algn="ctr">
               <a:lnSpc>
-                <a:spcPct val="102000"/>
+                <a:spcPct val="100000"/>
               </a:lnSpc>
               <a:buNone/>
               <a:defRPr sz="1350" b="1">
@@ -8844,23 +8048,23 @@
           <p:cNvPr id="14" name="p14-n4">
             <a:extLst xmlns:a="http://schemas.openxmlformats.org/drawingml/2006/main">
               <a:ext uri="{FF2B5EF4-FFF2-40B4-BE49-F238E27FC236}">
-                <a16:creationId xmlns:a16="http://schemas.microsoft.com/office/drawing/2014/main" id="{7D33F2BF-1FF0-42BB-AF4C-1145C05708FF}"/>
-              </a:ext>
-            </a:extLst>
-          </p:cNvPr>
-          <p:cNvSpPr>
-            <a:spLocks xmlns:a="http://schemas.openxmlformats.org/drawingml/2006/main" noGrp="1"/>
-          </p:cNvSpPr>
-          <p:nvPr/>
-        </p:nvSpPr>
-        <p:spPr>
-          <a:xfrm xmlns:a="http://schemas.openxmlformats.org/drawingml/2006/main">
-            <a:off x="523875" y="3257550"/>
-            <a:ext cx="438150" cy="438150"/>
+                <a16:creationId xmlns:a16="http://schemas.microsoft.com/office/drawing/2014/main" id="{F6A34CD4-A293-488F-8041-DA288AD34EE7}"/>
+              </a:ext>
+            </a:extLst>
+          </p:cNvPr>
+          <p:cNvSpPr>
+            <a:spLocks xmlns:a="http://schemas.openxmlformats.org/drawingml/2006/main" noGrp="1"/>
+          </p:cNvSpPr>
+          <p:nvPr/>
+        </p:nvSpPr>
+        <p:spPr>
+          <a:xfrm xmlns:a="http://schemas.openxmlformats.org/drawingml/2006/main">
+            <a:off x="4343400" y="2362200"/>
+            <a:ext cx="400050" cy="400050"/>
           </a:xfrm>
           <a:prstGeom xmlns:a="http://schemas.openxmlformats.org/drawingml/2006/main" prst="roundRect">
             <a:avLst>
-              <a:gd name="adj" fmla="val 17391"/>
+              <a:gd name="adj" fmla="val 19048"/>
             </a:avLst>
           </a:prstGeom>
           <a:solidFill xmlns:a="http://schemas.openxmlformats.org/drawingml/2006/main">
@@ -8901,23 +8105,23 @@
           <p:cNvPr id="15" name="p14-g4">
             <a:extLst xmlns:a="http://schemas.openxmlformats.org/drawingml/2006/main">
               <a:ext uri="{FF2B5EF4-FFF2-40B4-BE49-F238E27FC236}">
-                <a16:creationId xmlns:a16="http://schemas.microsoft.com/office/drawing/2014/main" id="{1B6F6C6E-413B-41C0-9215-6E47E191C301}"/>
-              </a:ext>
-            </a:extLst>
-          </p:cNvPr>
-          <p:cNvSpPr>
-            <a:spLocks xmlns:a="http://schemas.openxmlformats.org/drawingml/2006/main" noGrp="1"/>
-          </p:cNvSpPr>
-          <p:nvPr/>
-        </p:nvSpPr>
-        <p:spPr>
-          <a:xfrm xmlns:a="http://schemas.openxmlformats.org/drawingml/2006/main">
-            <a:off x="1076325" y="3190875"/>
-            <a:ext cx="5095875" cy="609600"/>
+                <a16:creationId xmlns:a16="http://schemas.microsoft.com/office/drawing/2014/main" id="{D9E5F0E4-A474-4D5C-A878-599D67C7AA09}"/>
+              </a:ext>
+            </a:extLst>
+          </p:cNvPr>
+          <p:cNvSpPr>
+            <a:spLocks xmlns:a="http://schemas.openxmlformats.org/drawingml/2006/main" noGrp="1"/>
+          </p:cNvSpPr>
+          <p:nvPr/>
+        </p:nvSpPr>
+        <p:spPr>
+          <a:xfrm xmlns:a="http://schemas.openxmlformats.org/drawingml/2006/main">
+            <a:off x="4819650" y="2295525"/>
+            <a:ext cx="3333750" cy="838200"/>
           </a:xfrm>
           <a:prstGeom xmlns:a="http://schemas.openxmlformats.org/drawingml/2006/main" prst="roundRect">
             <a:avLst>
-              <a:gd name="adj" fmla="val 12500"/>
+              <a:gd name="adj" fmla="val 9091"/>
             </a:avLst>
           </a:prstGeom>
           <a:solidFill xmlns:a="http://schemas.openxmlformats.org/drawingml/2006/main">
@@ -8936,7 +8140,7 @@
           <a:p xmlns:a="http://schemas.openxmlformats.org/drawingml/2006/main">
             <a:pPr algn="ctr">
               <a:lnSpc>
-                <a:spcPct val="102000"/>
+                <a:spcPct val="100000"/>
               </a:lnSpc>
               <a:buNone/>
               <a:defRPr sz="1350" b="1">
@@ -8964,23 +8168,23 @@
           <p:cNvPr id="16" name="p14-n5">
             <a:extLst xmlns:a="http://schemas.openxmlformats.org/drawingml/2006/main">
               <a:ext uri="{FF2B5EF4-FFF2-40B4-BE49-F238E27FC236}">
-                <a16:creationId xmlns:a16="http://schemas.microsoft.com/office/drawing/2014/main" id="{BB23667D-3D9D-429F-9A58-51D8EA2BE7E7}"/>
-              </a:ext>
-            </a:extLst>
-          </p:cNvPr>
-          <p:cNvSpPr>
-            <a:spLocks xmlns:a="http://schemas.openxmlformats.org/drawingml/2006/main" noGrp="1"/>
-          </p:cNvSpPr>
-          <p:nvPr/>
-        </p:nvSpPr>
-        <p:spPr>
-          <a:xfrm xmlns:a="http://schemas.openxmlformats.org/drawingml/2006/main">
-            <a:off x="6334125" y="3257550"/>
-            <a:ext cx="438150" cy="438150"/>
+                <a16:creationId xmlns:a16="http://schemas.microsoft.com/office/drawing/2014/main" id="{9F6BDEAD-121F-4E2C-A9F0-3127BE8BB6FA}"/>
+              </a:ext>
+            </a:extLst>
+          </p:cNvPr>
+          <p:cNvSpPr>
+            <a:spLocks xmlns:a="http://schemas.openxmlformats.org/drawingml/2006/main" noGrp="1"/>
+          </p:cNvSpPr>
+          <p:nvPr/>
+        </p:nvSpPr>
+        <p:spPr>
+          <a:xfrm xmlns:a="http://schemas.openxmlformats.org/drawingml/2006/main">
+            <a:off x="8248650" y="2362200"/>
+            <a:ext cx="400050" cy="400050"/>
           </a:xfrm>
           <a:prstGeom xmlns:a="http://schemas.openxmlformats.org/drawingml/2006/main" prst="roundRect">
             <a:avLst>
-              <a:gd name="adj" fmla="val 17391"/>
+              <a:gd name="adj" fmla="val 19048"/>
             </a:avLst>
           </a:prstGeom>
           <a:solidFill xmlns:a="http://schemas.openxmlformats.org/drawingml/2006/main">
@@ -9021,23 +8225,23 @@
           <p:cNvPr id="17" name="p14-g5">
             <a:extLst xmlns:a="http://schemas.openxmlformats.org/drawingml/2006/main">
               <a:ext uri="{FF2B5EF4-FFF2-40B4-BE49-F238E27FC236}">
-                <a16:creationId xmlns:a16="http://schemas.microsoft.com/office/drawing/2014/main" id="{22B3D4F5-120A-49F6-AA8F-325F17E8F618}"/>
-              </a:ext>
-            </a:extLst>
-          </p:cNvPr>
-          <p:cNvSpPr>
-            <a:spLocks xmlns:a="http://schemas.openxmlformats.org/drawingml/2006/main" noGrp="1"/>
-          </p:cNvSpPr>
-          <p:nvPr/>
-        </p:nvSpPr>
-        <p:spPr>
-          <a:xfrm xmlns:a="http://schemas.openxmlformats.org/drawingml/2006/main">
-            <a:off x="6886575" y="3190875"/>
-            <a:ext cx="5095875" cy="609600"/>
+                <a16:creationId xmlns:a16="http://schemas.microsoft.com/office/drawing/2014/main" id="{A5D3CF00-D860-4738-AA96-CD8C7F7C49DC}"/>
+              </a:ext>
+            </a:extLst>
+          </p:cNvPr>
+          <p:cNvSpPr>
+            <a:spLocks xmlns:a="http://schemas.openxmlformats.org/drawingml/2006/main" noGrp="1"/>
+          </p:cNvSpPr>
+          <p:nvPr/>
+        </p:nvSpPr>
+        <p:spPr>
+          <a:xfrm xmlns:a="http://schemas.openxmlformats.org/drawingml/2006/main">
+            <a:off x="8724900" y="2295525"/>
+            <a:ext cx="3333750" cy="838200"/>
           </a:xfrm>
           <a:prstGeom xmlns:a="http://schemas.openxmlformats.org/drawingml/2006/main" prst="roundRect">
             <a:avLst>
-              <a:gd name="adj" fmla="val 12500"/>
+              <a:gd name="adj" fmla="val 9091"/>
             </a:avLst>
           </a:prstGeom>
           <a:solidFill xmlns:a="http://schemas.openxmlformats.org/drawingml/2006/main">
@@ -9056,7 +8260,7 @@
           <a:p xmlns:a="http://schemas.openxmlformats.org/drawingml/2006/main">
             <a:pPr algn="ctr">
               <a:lnSpc>
-                <a:spcPct val="102000"/>
+                <a:spcPct val="100000"/>
               </a:lnSpc>
               <a:buNone/>
               <a:defRPr sz="1350" b="1">
@@ -9084,23 +8288,23 @@
           <p:cNvPr id="18" name="p14-n6">
             <a:extLst xmlns:a="http://schemas.openxmlformats.org/drawingml/2006/main">
               <a:ext uri="{FF2B5EF4-FFF2-40B4-BE49-F238E27FC236}">
-                <a16:creationId xmlns:a16="http://schemas.microsoft.com/office/drawing/2014/main" id="{46762010-AD6B-42B1-ACC8-374BBD923D1E}"/>
-              </a:ext>
-            </a:extLst>
-          </p:cNvPr>
-          <p:cNvSpPr>
-            <a:spLocks xmlns:a="http://schemas.openxmlformats.org/drawingml/2006/main" noGrp="1"/>
-          </p:cNvSpPr>
-          <p:nvPr/>
-        </p:nvSpPr>
-        <p:spPr>
-          <a:xfrm xmlns:a="http://schemas.openxmlformats.org/drawingml/2006/main">
-            <a:off x="523875" y="4362450"/>
-            <a:ext cx="438150" cy="438150"/>
+                <a16:creationId xmlns:a16="http://schemas.microsoft.com/office/drawing/2014/main" id="{41846B60-665C-44D3-BD7E-415ED7D7266C}"/>
+              </a:ext>
+            </a:extLst>
+          </p:cNvPr>
+          <p:cNvSpPr>
+            <a:spLocks xmlns:a="http://schemas.openxmlformats.org/drawingml/2006/main" noGrp="1"/>
+          </p:cNvSpPr>
+          <p:nvPr/>
+        </p:nvSpPr>
+        <p:spPr>
+          <a:xfrm xmlns:a="http://schemas.openxmlformats.org/drawingml/2006/main">
+            <a:off x="438150" y="3724275"/>
+            <a:ext cx="400050" cy="400050"/>
           </a:xfrm>
           <a:prstGeom xmlns:a="http://schemas.openxmlformats.org/drawingml/2006/main" prst="roundRect">
             <a:avLst>
-              <a:gd name="adj" fmla="val 17391"/>
+              <a:gd name="adj" fmla="val 19048"/>
             </a:avLst>
           </a:prstGeom>
           <a:solidFill xmlns:a="http://schemas.openxmlformats.org/drawingml/2006/main">
@@ -9141,23 +8345,23 @@
           <p:cNvPr id="19" name="p14-g6">
             <a:extLst xmlns:a="http://schemas.openxmlformats.org/drawingml/2006/main">
               <a:ext uri="{FF2B5EF4-FFF2-40B4-BE49-F238E27FC236}">
-                <a16:creationId xmlns:a16="http://schemas.microsoft.com/office/drawing/2014/main" id="{3E51EFF3-1D51-4D6F-953B-F3CA80EF04F2}"/>
-              </a:ext>
-            </a:extLst>
-          </p:cNvPr>
-          <p:cNvSpPr>
-            <a:spLocks xmlns:a="http://schemas.openxmlformats.org/drawingml/2006/main" noGrp="1"/>
-          </p:cNvSpPr>
-          <p:nvPr/>
-        </p:nvSpPr>
-        <p:spPr>
-          <a:xfrm xmlns:a="http://schemas.openxmlformats.org/drawingml/2006/main">
-            <a:off x="1076325" y="4295775"/>
-            <a:ext cx="5095875" cy="609600"/>
+                <a16:creationId xmlns:a16="http://schemas.microsoft.com/office/drawing/2014/main" id="{E25F78F4-B410-46F6-8421-8F44876E6EE7}"/>
+              </a:ext>
+            </a:extLst>
+          </p:cNvPr>
+          <p:cNvSpPr>
+            <a:spLocks xmlns:a="http://schemas.openxmlformats.org/drawingml/2006/main" noGrp="1"/>
+          </p:cNvSpPr>
+          <p:nvPr/>
+        </p:nvSpPr>
+        <p:spPr>
+          <a:xfrm xmlns:a="http://schemas.openxmlformats.org/drawingml/2006/main">
+            <a:off x="914400" y="3657600"/>
+            <a:ext cx="3333750" cy="838200"/>
           </a:xfrm>
           <a:prstGeom xmlns:a="http://schemas.openxmlformats.org/drawingml/2006/main" prst="roundRect">
             <a:avLst>
-              <a:gd name="adj" fmla="val 12500"/>
+              <a:gd name="adj" fmla="val 9091"/>
             </a:avLst>
           </a:prstGeom>
           <a:solidFill xmlns:a="http://schemas.openxmlformats.org/drawingml/2006/main">
@@ -9176,7 +8380,7 @@
           <a:p xmlns:a="http://schemas.openxmlformats.org/drawingml/2006/main">
             <a:pPr algn="ctr">
               <a:lnSpc>
-                <a:spcPct val="102000"/>
+                <a:spcPct val="100000"/>
               </a:lnSpc>
               <a:buNone/>
               <a:defRPr sz="1350" b="1">
@@ -9204,27 +8408,27 @@
           <p:cNvPr id="20" name="p14-n7">
             <a:extLst xmlns:a="http://schemas.openxmlformats.org/drawingml/2006/main">
               <a:ext uri="{FF2B5EF4-FFF2-40B4-BE49-F238E27FC236}">
-                <a16:creationId xmlns:a16="http://schemas.microsoft.com/office/drawing/2014/main" id="{4921D696-8005-4991-A6AD-ECDC02EF0B3C}"/>
-              </a:ext>
-            </a:extLst>
-          </p:cNvPr>
-          <p:cNvSpPr>
-            <a:spLocks xmlns:a="http://schemas.openxmlformats.org/drawingml/2006/main" noGrp="1"/>
-          </p:cNvSpPr>
-          <p:nvPr/>
-        </p:nvSpPr>
-        <p:spPr>
-          <a:xfrm xmlns:a="http://schemas.openxmlformats.org/drawingml/2006/main">
-            <a:off x="6334125" y="4362450"/>
-            <a:ext cx="438150" cy="438150"/>
+                <a16:creationId xmlns:a16="http://schemas.microsoft.com/office/drawing/2014/main" id="{3A2E1A3F-1341-4956-BECF-2E743267C62C}"/>
+              </a:ext>
+            </a:extLst>
+          </p:cNvPr>
+          <p:cNvSpPr>
+            <a:spLocks xmlns:a="http://schemas.openxmlformats.org/drawingml/2006/main" noGrp="1"/>
+          </p:cNvSpPr>
+          <p:nvPr/>
+        </p:nvSpPr>
+        <p:spPr>
+          <a:xfrm xmlns:a="http://schemas.openxmlformats.org/drawingml/2006/main">
+            <a:off x="4343400" y="3724275"/>
+            <a:ext cx="400050" cy="400050"/>
           </a:xfrm>
           <a:prstGeom xmlns:a="http://schemas.openxmlformats.org/drawingml/2006/main" prst="roundRect">
             <a:avLst>
-              <a:gd name="adj" fmla="val 17391"/>
+              <a:gd name="adj" fmla="val 19048"/>
             </a:avLst>
           </a:prstGeom>
           <a:solidFill xmlns:a="http://schemas.openxmlformats.org/drawingml/2006/main">
-            <a:srgbClr val="18354E"/>
+            <a:srgbClr val="C8161E"/>
           </a:solidFill>
           <a:ln xmlns:a="http://schemas.openxmlformats.org/drawingml/2006/main" w="0">
             <a:noFill/>
@@ -9261,27 +8465,27 @@
           <p:cNvPr id="21" name="p14-g7">
             <a:extLst xmlns:a="http://schemas.openxmlformats.org/drawingml/2006/main">
               <a:ext uri="{FF2B5EF4-FFF2-40B4-BE49-F238E27FC236}">
-                <a16:creationId xmlns:a16="http://schemas.microsoft.com/office/drawing/2014/main" id="{1CB2E711-AF6A-4DFD-AA9E-E75C728E7D2F}"/>
-              </a:ext>
-            </a:extLst>
-          </p:cNvPr>
-          <p:cNvSpPr>
-            <a:spLocks xmlns:a="http://schemas.openxmlformats.org/drawingml/2006/main" noGrp="1"/>
-          </p:cNvSpPr>
-          <p:nvPr/>
-        </p:nvSpPr>
-        <p:spPr>
-          <a:xfrm xmlns:a="http://schemas.openxmlformats.org/drawingml/2006/main">
-            <a:off x="6886575" y="4295775"/>
-            <a:ext cx="5095875" cy="609600"/>
+                <a16:creationId xmlns:a16="http://schemas.microsoft.com/office/drawing/2014/main" id="{2DDAC4F5-4509-4E89-B0B8-B4975D32093C}"/>
+              </a:ext>
+            </a:extLst>
+          </p:cNvPr>
+          <p:cNvSpPr>
+            <a:spLocks xmlns:a="http://schemas.openxmlformats.org/drawingml/2006/main" noGrp="1"/>
+          </p:cNvSpPr>
+          <p:nvPr/>
+        </p:nvSpPr>
+        <p:spPr>
+          <a:xfrm xmlns:a="http://schemas.openxmlformats.org/drawingml/2006/main">
+            <a:off x="4819650" y="3657600"/>
+            <a:ext cx="3333750" cy="838200"/>
           </a:xfrm>
           <a:prstGeom xmlns:a="http://schemas.openxmlformats.org/drawingml/2006/main" prst="roundRect">
             <a:avLst>
-              <a:gd name="adj" fmla="val 12500"/>
+              <a:gd name="adj" fmla="val 9091"/>
             </a:avLst>
           </a:prstGeom>
           <a:solidFill xmlns:a="http://schemas.openxmlformats.org/drawingml/2006/main">
-            <a:srgbClr val="F3F6F7"/>
+            <a:srgbClr val="F8E9EA"/>
           </a:solidFill>
           <a:ln xmlns:a="http://schemas.openxmlformats.org/drawingml/2006/main" w="9525">
             <a:solidFill>
@@ -9296,11 +8500,131 @@
           <a:p xmlns:a="http://schemas.openxmlformats.org/drawingml/2006/main">
             <a:pPr algn="ctr">
               <a:lnSpc>
-                <a:spcPct val="102000"/>
+                <a:spcPct val="100000"/>
               </a:lnSpc>
               <a:buNone/>
               <a:defRPr sz="1350" b="1">
                 <a:solidFill>
+                  <a:srgbClr val="C8161E"/>
+                </a:solidFill>
+              </a:defRPr>
+            </a:pPr>
+            <a:r>
+              <a:rPr sz="1350" b="1">
+                <a:solidFill>
+                  <a:srgbClr val="C8161E"/>
+                </a:solidFill>
+                <a:latin typeface="Microsoft YaHei"/>
+                <a:ea typeface="Microsoft YaHei"/>
+                <a:cs typeface="Microsoft YaHei"/>
+              </a:rPr>
+              <a:t>≥1 条真实失败 / 死路：原因、处理、回写位置</a:t>
+            </a:r>
+          </a:p>
+        </p:txBody>
+      </p:sp>
+      <p:sp>
+        <p:nvSpPr>
+          <p:cNvPr id="22" name="p14-n8">
+            <a:extLst xmlns:a="http://schemas.openxmlformats.org/drawingml/2006/main">
+              <a:ext uri="{FF2B5EF4-FFF2-40B4-BE49-F238E27FC236}">
+                <a16:creationId xmlns:a16="http://schemas.microsoft.com/office/drawing/2014/main" id="{80D3B784-B7BA-438A-B7BE-44E8AAD41FF0}"/>
+              </a:ext>
+            </a:extLst>
+          </p:cNvPr>
+          <p:cNvSpPr>
+            <a:spLocks xmlns:a="http://schemas.openxmlformats.org/drawingml/2006/main" noGrp="1"/>
+          </p:cNvSpPr>
+          <p:nvPr/>
+        </p:nvSpPr>
+        <p:spPr>
+          <a:xfrm xmlns:a="http://schemas.openxmlformats.org/drawingml/2006/main">
+            <a:off x="8248650" y="3724275"/>
+            <a:ext cx="400050" cy="400050"/>
+          </a:xfrm>
+          <a:prstGeom xmlns:a="http://schemas.openxmlformats.org/drawingml/2006/main" prst="roundRect">
+            <a:avLst>
+              <a:gd name="adj" fmla="val 19048"/>
+            </a:avLst>
+          </a:prstGeom>
+          <a:solidFill xmlns:a="http://schemas.openxmlformats.org/drawingml/2006/main">
+            <a:srgbClr val="18354E"/>
+          </a:solidFill>
+          <a:ln xmlns:a="http://schemas.openxmlformats.org/drawingml/2006/main" w="0">
+            <a:noFill/>
+            <a:prstDash val="solid"/>
+          </a:ln>
+        </p:spPr>
+        <p:txBody>
+          <a:bodyPr xmlns:a="http://schemas.openxmlformats.org/drawingml/2006/main" lIns="76200" tIns="38100" rIns="76200" bIns="38100" anchor="ctr"/>
+          <a:lstStyle xmlns:a="http://schemas.openxmlformats.org/drawingml/2006/main"/>
+          <a:p xmlns:a="http://schemas.openxmlformats.org/drawingml/2006/main">
+            <a:pPr algn="ctr">
+              <a:defRPr sz="1350" b="1">
+                <a:solidFill>
+                  <a:srgbClr val="FFFFFF"/>
+                </a:solidFill>
+              </a:defRPr>
+            </a:pPr>
+            <a:r>
+              <a:rPr sz="1350" b="1">
+                <a:solidFill>
+                  <a:srgbClr val="FFFFFF"/>
+                </a:solidFill>
+                <a:latin typeface="Microsoft YaHei"/>
+                <a:ea typeface="Microsoft YaHei"/>
+                <a:cs typeface="Microsoft YaHei"/>
+              </a:rPr>
+              <a:t>9</a:t>
+            </a:r>
+          </a:p>
+        </p:txBody>
+      </p:sp>
+      <p:sp>
+        <p:nvSpPr>
+          <p:cNvPr id="23" name="p14-g8">
+            <a:extLst xmlns:a="http://schemas.openxmlformats.org/drawingml/2006/main">
+              <a:ext uri="{FF2B5EF4-FFF2-40B4-BE49-F238E27FC236}">
+                <a16:creationId xmlns:a16="http://schemas.microsoft.com/office/drawing/2014/main" id="{B5CC7623-D980-4D69-B2E1-931BC046B374}"/>
+              </a:ext>
+            </a:extLst>
+          </p:cNvPr>
+          <p:cNvSpPr>
+            <a:spLocks xmlns:a="http://schemas.openxmlformats.org/drawingml/2006/main" noGrp="1"/>
+          </p:cNvSpPr>
+          <p:nvPr/>
+        </p:nvSpPr>
+        <p:spPr>
+          <a:xfrm xmlns:a="http://schemas.openxmlformats.org/drawingml/2006/main">
+            <a:off x="8724900" y="3657600"/>
+            <a:ext cx="3333750" cy="838200"/>
+          </a:xfrm>
+          <a:prstGeom xmlns:a="http://schemas.openxmlformats.org/drawingml/2006/main" prst="roundRect">
+            <a:avLst>
+              <a:gd name="adj" fmla="val 9091"/>
+            </a:avLst>
+          </a:prstGeom>
+          <a:solidFill xmlns:a="http://schemas.openxmlformats.org/drawingml/2006/main">
+            <a:srgbClr val="F3F6F7"/>
+          </a:solidFill>
+          <a:ln xmlns:a="http://schemas.openxmlformats.org/drawingml/2006/main" w="9525">
+            <a:solidFill>
+              <a:srgbClr val="D6DDE2"/>
+            </a:solidFill>
+            <a:prstDash val="solid"/>
+          </a:ln>
+        </p:spPr>
+        <p:txBody>
+          <a:bodyPr xmlns:a="http://schemas.openxmlformats.org/drawingml/2006/main" lIns="76200" tIns="38100" rIns="76200" bIns="38100" anchor="ctr"/>
+          <a:lstStyle xmlns:a="http://schemas.openxmlformats.org/drawingml/2006/main"/>
+          <a:p xmlns:a="http://schemas.openxmlformats.org/drawingml/2006/main">
+            <a:pPr algn="ctr">
+              <a:lnSpc>
+                <a:spcPct val="100000"/>
+              </a:lnSpc>
+              <a:buNone/>
+              <a:defRPr sz="1350" b="1">
+                <a:solidFill>
                   <a:srgbClr val="263746"/>
                 </a:solidFill>
               </a:defRPr>
@@ -9321,22 +8645,22 @@
       </p:sp>
       <p:sp>
         <p:nvSpPr>
-          <p:cNvPr id="22" name="p14-bottom">
-            <a:extLst xmlns:a="http://schemas.openxmlformats.org/drawingml/2006/main">
-              <a:ext uri="{FF2B5EF4-FFF2-40B4-BE49-F238E27FC236}">
-                <a16:creationId xmlns:a16="http://schemas.microsoft.com/office/drawing/2014/main" id="{E5825408-26E6-40B8-9546-52BF8A572B83}"/>
-              </a:ext>
-            </a:extLst>
-          </p:cNvPr>
-          <p:cNvSpPr>
-            <a:spLocks xmlns:a="http://schemas.openxmlformats.org/drawingml/2006/main" noGrp="1"/>
-          </p:cNvSpPr>
-          <p:nvPr/>
-        </p:nvSpPr>
-        <p:spPr>
-          <a:xfrm xmlns:a="http://schemas.openxmlformats.org/drawingml/2006/main">
-            <a:off x="1381125" y="5400675"/>
-            <a:ext cx="9429750" cy="381000"/>
+          <p:cNvPr id="24" name="p14-bottom">
+            <a:extLst xmlns:a="http://schemas.openxmlformats.org/drawingml/2006/main">
+              <a:ext uri="{FF2B5EF4-FFF2-40B4-BE49-F238E27FC236}">
+                <a16:creationId xmlns:a16="http://schemas.microsoft.com/office/drawing/2014/main" id="{8D127D14-6999-4238-BC2D-54EC69202A3F}"/>
+              </a:ext>
+            </a:extLst>
+          </p:cNvPr>
+          <p:cNvSpPr>
+            <a:spLocks xmlns:a="http://schemas.openxmlformats.org/drawingml/2006/main" noGrp="1"/>
+          </p:cNvSpPr>
+          <p:nvPr/>
+        </p:nvSpPr>
+        <p:spPr>
+          <a:xfrm xmlns:a="http://schemas.openxmlformats.org/drawingml/2006/main">
+            <a:off x="1381125" y="5257800"/>
+            <a:ext cx="9429750" cy="419100"/>
           </a:xfrm>
           <a:prstGeom xmlns:a="http://schemas.openxmlformats.org/drawingml/2006/main" prst="rect">
             <a:avLst/>
@@ -9367,7 +8691,7 @@
                 <a:ea typeface="Microsoft YaHei"/>
                 <a:cs typeface="Microsoft YaHei"/>
               </a:rPr>
-              <a:t>第 1-5 课工件持续累计；本课重点补第 5-7 项，并继续回写第 8 项。</a:t>
+              <a:t>本课重点补第 5-8 项；第 8 项必须是真实发生的失败或放弃方向。</a:t>
             </a:r>
           </a:p>
         </p:txBody>
@@ -9469,7 +8793,7 @@
           <p:cNvPr id="6" name="p15-virtual">
             <a:extLst xmlns:a="http://schemas.openxmlformats.org/drawingml/2006/main">
               <a:ext uri="{FF2B5EF4-FFF2-40B4-BE49-F238E27FC236}">
-                <a16:creationId xmlns:a16="http://schemas.microsoft.com/office/drawing/2014/main" id="{660D34BE-5D9F-412B-B964-D627627B96F6}"/>
+                <a16:creationId xmlns:a16="http://schemas.microsoft.com/office/drawing/2014/main" id="{A00DB5F5-57BA-4749-BB48-310FFF5EAD12}"/>
               </a:ext>
             </a:extLst>
           </p:cNvPr>
@@ -9526,7 +8850,7 @@
           <p:cNvPr id="7" name="p15-h0">
             <a:extLst xmlns:a="http://schemas.openxmlformats.org/drawingml/2006/main">
               <a:ext uri="{FF2B5EF4-FFF2-40B4-BE49-F238E27FC236}">
-                <a16:creationId xmlns:a16="http://schemas.microsoft.com/office/drawing/2014/main" id="{0596F7CB-38A0-4F01-B8FB-76B56F115052}"/>
+                <a16:creationId xmlns:a16="http://schemas.microsoft.com/office/drawing/2014/main" id="{05CE116E-36CA-48A6-9A77-87BDF240A9CE}"/>
               </a:ext>
             </a:extLst>
           </p:cNvPr>
@@ -9581,7 +8905,7 @@
           <p:cNvPr id="8" name="p15-h1">
             <a:extLst xmlns:a="http://schemas.openxmlformats.org/drawingml/2006/main">
               <a:ext uri="{FF2B5EF4-FFF2-40B4-BE49-F238E27FC236}">
-                <a16:creationId xmlns:a16="http://schemas.microsoft.com/office/drawing/2014/main" id="{7EEB47DB-F71B-402E-B9AE-06A965169539}"/>
+                <a16:creationId xmlns:a16="http://schemas.microsoft.com/office/drawing/2014/main" id="{B985DC6A-C251-467D-8C63-071AF10EBE46}"/>
               </a:ext>
             </a:extLst>
           </p:cNvPr>
@@ -9636,7 +8960,7 @@
           <p:cNvPr id="9" name="p15-h2">
             <a:extLst xmlns:a="http://schemas.openxmlformats.org/drawingml/2006/main">
               <a:ext uri="{FF2B5EF4-FFF2-40B4-BE49-F238E27FC236}">
-                <a16:creationId xmlns:a16="http://schemas.microsoft.com/office/drawing/2014/main" id="{F451899C-44F4-4991-B36F-221DBBAF39EC}"/>
+                <a16:creationId xmlns:a16="http://schemas.microsoft.com/office/drawing/2014/main" id="{8A2BB0F8-51D4-4D33-B0DE-CC37AD1595EA}"/>
               </a:ext>
             </a:extLst>
           </p:cNvPr>
@@ -9691,7 +9015,7 @@
           <p:cNvPr id="10" name="p15-r0-0">
             <a:extLst xmlns:a="http://schemas.openxmlformats.org/drawingml/2006/main">
               <a:ext uri="{FF2B5EF4-FFF2-40B4-BE49-F238E27FC236}">
-                <a16:creationId xmlns:a16="http://schemas.microsoft.com/office/drawing/2014/main" id="{1CDA4BCF-4AEB-4653-A9C2-56415891BB0F}"/>
+                <a16:creationId xmlns:a16="http://schemas.microsoft.com/office/drawing/2014/main" id="{A4F23964-334F-4EA5-8641-459BD124068F}"/>
               </a:ext>
             </a:extLst>
           </p:cNvPr>
@@ -9752,7 +9076,7 @@
           <p:cNvPr id="11" name="p15-r0-1">
             <a:extLst xmlns:a="http://schemas.openxmlformats.org/drawingml/2006/main">
               <a:ext uri="{FF2B5EF4-FFF2-40B4-BE49-F238E27FC236}">
-                <a16:creationId xmlns:a16="http://schemas.microsoft.com/office/drawing/2014/main" id="{26A91580-6CA0-4D76-B937-B44ED1BD6B1C}"/>
+                <a16:creationId xmlns:a16="http://schemas.microsoft.com/office/drawing/2014/main" id="{7329F5BA-EBA9-4B5B-A543-3A858808D24B}"/>
               </a:ext>
             </a:extLst>
           </p:cNvPr>
@@ -9813,7 +9137,7 @@
           <p:cNvPr id="12" name="p15-r0-2">
             <a:extLst xmlns:a="http://schemas.openxmlformats.org/drawingml/2006/main">
               <a:ext uri="{FF2B5EF4-FFF2-40B4-BE49-F238E27FC236}">
-                <a16:creationId xmlns:a16="http://schemas.microsoft.com/office/drawing/2014/main" id="{0201884E-1885-4EFC-AB91-4290FE5B8A8B}"/>
+                <a16:creationId xmlns:a16="http://schemas.microsoft.com/office/drawing/2014/main" id="{C6BFBEEF-AE72-422E-94A0-094BE2658F0E}"/>
               </a:ext>
             </a:extLst>
           </p:cNvPr>
@@ -9874,7 +9198,7 @@
           <p:cNvPr id="13" name="p15-r1-0">
             <a:extLst xmlns:a="http://schemas.openxmlformats.org/drawingml/2006/main">
               <a:ext uri="{FF2B5EF4-FFF2-40B4-BE49-F238E27FC236}">
-                <a16:creationId xmlns:a16="http://schemas.microsoft.com/office/drawing/2014/main" id="{1CFE7109-70D8-4177-A6BB-246697DCCF53}"/>
+                <a16:creationId xmlns:a16="http://schemas.microsoft.com/office/drawing/2014/main" id="{6A1FA972-6E6F-4D91-A617-48178757B630}"/>
               </a:ext>
             </a:extLst>
           </p:cNvPr>
@@ -9935,7 +9259,7 @@
           <p:cNvPr id="14" name="p15-r1-1">
             <a:extLst xmlns:a="http://schemas.openxmlformats.org/drawingml/2006/main">
               <a:ext uri="{FF2B5EF4-FFF2-40B4-BE49-F238E27FC236}">
-                <a16:creationId xmlns:a16="http://schemas.microsoft.com/office/drawing/2014/main" id="{3F9A3E4D-B0AA-44EF-AC34-1FA392BE1822}"/>
+                <a16:creationId xmlns:a16="http://schemas.microsoft.com/office/drawing/2014/main" id="{0EB18799-95F6-4C1D-9673-5007589ABCDA}"/>
               </a:ext>
             </a:extLst>
           </p:cNvPr>
@@ -9996,7 +9320,7 @@
           <p:cNvPr id="15" name="p15-r1-2">
             <a:extLst xmlns:a="http://schemas.openxmlformats.org/drawingml/2006/main">
               <a:ext uri="{FF2B5EF4-FFF2-40B4-BE49-F238E27FC236}">
-                <a16:creationId xmlns:a16="http://schemas.microsoft.com/office/drawing/2014/main" id="{2667FAC9-07EA-453E-B229-0FA4FA9144C5}"/>
+                <a16:creationId xmlns:a16="http://schemas.microsoft.com/office/drawing/2014/main" id="{F0810198-6E9C-4E5D-83EA-27EE975FD828}"/>
               </a:ext>
             </a:extLst>
           </p:cNvPr>
@@ -10057,7 +9381,7 @@
           <p:cNvPr id="16" name="p15-r2-0">
             <a:extLst xmlns:a="http://schemas.openxmlformats.org/drawingml/2006/main">
               <a:ext uri="{FF2B5EF4-FFF2-40B4-BE49-F238E27FC236}">
-                <a16:creationId xmlns:a16="http://schemas.microsoft.com/office/drawing/2014/main" id="{893C7C4E-059D-4F98-85D2-EEC317376454}"/>
+                <a16:creationId xmlns:a16="http://schemas.microsoft.com/office/drawing/2014/main" id="{72365281-61DA-4839-8742-36ECDCEBD23E}"/>
               </a:ext>
             </a:extLst>
           </p:cNvPr>
@@ -10118,7 +9442,7 @@
           <p:cNvPr id="17" name="p15-r2-1">
             <a:extLst xmlns:a="http://schemas.openxmlformats.org/drawingml/2006/main">
               <a:ext uri="{FF2B5EF4-FFF2-40B4-BE49-F238E27FC236}">
-                <a16:creationId xmlns:a16="http://schemas.microsoft.com/office/drawing/2014/main" id="{71CBE099-965F-4A75-A336-4C66C2DC2F8D}"/>
+                <a16:creationId xmlns:a16="http://schemas.microsoft.com/office/drawing/2014/main" id="{5274B674-0B4B-440E-8B33-B94CFDFD8DE6}"/>
               </a:ext>
             </a:extLst>
           </p:cNvPr>
@@ -10179,7 +9503,7 @@
           <p:cNvPr id="18" name="p15-r2-2">
             <a:extLst xmlns:a="http://schemas.openxmlformats.org/drawingml/2006/main">
               <a:ext uri="{FF2B5EF4-FFF2-40B4-BE49-F238E27FC236}">
-                <a16:creationId xmlns:a16="http://schemas.microsoft.com/office/drawing/2014/main" id="{87FCA5A8-6E51-4215-9F5F-990365F05796}"/>
+                <a16:creationId xmlns:a16="http://schemas.microsoft.com/office/drawing/2014/main" id="{A35F8E5C-C88F-4608-AC78-323C07F37164}"/>
               </a:ext>
             </a:extLst>
           </p:cNvPr>
@@ -10240,7 +9564,7 @@
           <p:cNvPr id="19" name="p15-r3-0">
             <a:extLst xmlns:a="http://schemas.openxmlformats.org/drawingml/2006/main">
               <a:ext uri="{FF2B5EF4-FFF2-40B4-BE49-F238E27FC236}">
-                <a16:creationId xmlns:a16="http://schemas.microsoft.com/office/drawing/2014/main" id="{4A9E2FF3-CE82-415F-AA99-2AA08335FFAB}"/>
+                <a16:creationId xmlns:a16="http://schemas.microsoft.com/office/drawing/2014/main" id="{E5CA89AA-BDA1-4CD6-BED3-005826CC9F64}"/>
               </a:ext>
             </a:extLst>
           </p:cNvPr>
@@ -10301,7 +9625,7 @@
           <p:cNvPr id="20" name="p15-r3-1">
             <a:extLst xmlns:a="http://schemas.openxmlformats.org/drawingml/2006/main">
               <a:ext uri="{FF2B5EF4-FFF2-40B4-BE49-F238E27FC236}">
-                <a16:creationId xmlns:a16="http://schemas.microsoft.com/office/drawing/2014/main" id="{AAED1AC1-9371-4228-8CBF-6D5360447E1B}"/>
+                <a16:creationId xmlns:a16="http://schemas.microsoft.com/office/drawing/2014/main" id="{5B393DF0-DC99-45F9-B21C-DEF13D38E2C7}"/>
               </a:ext>
             </a:extLst>
           </p:cNvPr>
@@ -10362,7 +9686,7 @@
           <p:cNvPr id="21" name="p15-r3-2">
             <a:extLst xmlns:a="http://schemas.openxmlformats.org/drawingml/2006/main">
               <a:ext uri="{FF2B5EF4-FFF2-40B4-BE49-F238E27FC236}">
-                <a16:creationId xmlns:a16="http://schemas.microsoft.com/office/drawing/2014/main" id="{E3A4EAB0-535B-4C3F-8905-DFF8D6864428}"/>
+                <a16:creationId xmlns:a16="http://schemas.microsoft.com/office/drawing/2014/main" id="{BD85348C-965A-448B-B4E1-667B7C1C84B2}"/>
               </a:ext>
             </a:extLst>
           </p:cNvPr>
@@ -10423,23 +9747,23 @@
           <p:cNvPr id="22" name="p15-now0">
             <a:extLst xmlns:a="http://schemas.openxmlformats.org/drawingml/2006/main">
               <a:ext uri="{FF2B5EF4-FFF2-40B4-BE49-F238E27FC236}">
-                <a16:creationId xmlns:a16="http://schemas.microsoft.com/office/drawing/2014/main" id="{CA4DFB44-62C9-41EB-86F7-CBC3F82F7F6A}"/>
-              </a:ext>
-            </a:extLst>
-          </p:cNvPr>
-          <p:cNvSpPr>
-            <a:spLocks xmlns:a="http://schemas.openxmlformats.org/drawingml/2006/main" noGrp="1"/>
-          </p:cNvSpPr>
-          <p:nvPr/>
-        </p:nvSpPr>
-        <p:spPr>
-          <a:xfrm xmlns:a="http://schemas.openxmlformats.org/drawingml/2006/main">
-            <a:off x="762000" y="4476750"/>
-            <a:ext cx="2571750" cy="552450"/>
+                <a16:creationId xmlns:a16="http://schemas.microsoft.com/office/drawing/2014/main" id="{90896310-2F37-48FD-B27D-D0B9A10A5C09}"/>
+              </a:ext>
+            </a:extLst>
+          </p:cNvPr>
+          <p:cNvSpPr>
+            <a:spLocks xmlns:a="http://schemas.openxmlformats.org/drawingml/2006/main" noGrp="1"/>
+          </p:cNvSpPr>
+          <p:nvPr/>
+        </p:nvSpPr>
+        <p:spPr>
+          <a:xfrm xmlns:a="http://schemas.openxmlformats.org/drawingml/2006/main">
+            <a:off x="857250" y="4305300"/>
+            <a:ext cx="3333750" cy="476250"/>
           </a:xfrm>
           <a:prstGeom xmlns:a="http://schemas.openxmlformats.org/drawingml/2006/main" prst="roundRect">
             <a:avLst>
-              <a:gd name="adj" fmla="val 13793"/>
+              <a:gd name="adj" fmla="val 16000"/>
             </a:avLst>
           </a:prstGeom>
           <a:solidFill xmlns:a="http://schemas.openxmlformats.org/drawingml/2006/main">
@@ -10482,23 +9806,23 @@
           <p:cNvPr id="23" name="p15-now1">
             <a:extLst xmlns:a="http://schemas.openxmlformats.org/drawingml/2006/main">
               <a:ext uri="{FF2B5EF4-FFF2-40B4-BE49-F238E27FC236}">
-                <a16:creationId xmlns:a16="http://schemas.microsoft.com/office/drawing/2014/main" id="{A11ED6E6-3168-4839-B281-2494D2A4FCE4}"/>
-              </a:ext>
-            </a:extLst>
-          </p:cNvPr>
-          <p:cNvSpPr>
-            <a:spLocks xmlns:a="http://schemas.openxmlformats.org/drawingml/2006/main" noGrp="1"/>
-          </p:cNvSpPr>
-          <p:nvPr/>
-        </p:nvSpPr>
-        <p:spPr>
-          <a:xfrm xmlns:a="http://schemas.openxmlformats.org/drawingml/2006/main">
-            <a:off x="3524250" y="4476750"/>
-            <a:ext cx="2571750" cy="552450"/>
+                <a16:creationId xmlns:a16="http://schemas.microsoft.com/office/drawing/2014/main" id="{5BDBC653-4EA3-4D8C-8C05-F8076A7FC6E9}"/>
+              </a:ext>
+            </a:extLst>
+          </p:cNvPr>
+          <p:cNvSpPr>
+            <a:spLocks xmlns:a="http://schemas.openxmlformats.org/drawingml/2006/main" noGrp="1"/>
+          </p:cNvSpPr>
+          <p:nvPr/>
+        </p:nvSpPr>
+        <p:spPr>
+          <a:xfrm xmlns:a="http://schemas.openxmlformats.org/drawingml/2006/main">
+            <a:off x="4429125" y="4305300"/>
+            <a:ext cx="3333750" cy="476250"/>
           </a:xfrm>
           <a:prstGeom xmlns:a="http://schemas.openxmlformats.org/drawingml/2006/main" prst="roundRect">
             <a:avLst>
-              <a:gd name="adj" fmla="val 13793"/>
+              <a:gd name="adj" fmla="val 16000"/>
             </a:avLst>
           </a:prstGeom>
           <a:solidFill xmlns:a="http://schemas.openxmlformats.org/drawingml/2006/main">
@@ -10541,23 +9865,23 @@
           <p:cNvPr id="24" name="p15-now2">
             <a:extLst xmlns:a="http://schemas.openxmlformats.org/drawingml/2006/main">
               <a:ext uri="{FF2B5EF4-FFF2-40B4-BE49-F238E27FC236}">
-                <a16:creationId xmlns:a16="http://schemas.microsoft.com/office/drawing/2014/main" id="{5D82C353-D122-4CAF-81B5-DB0450A84BC5}"/>
-              </a:ext>
-            </a:extLst>
-          </p:cNvPr>
-          <p:cNvSpPr>
-            <a:spLocks xmlns:a="http://schemas.openxmlformats.org/drawingml/2006/main" noGrp="1"/>
-          </p:cNvSpPr>
-          <p:nvPr/>
-        </p:nvSpPr>
-        <p:spPr>
-          <a:xfrm xmlns:a="http://schemas.openxmlformats.org/drawingml/2006/main">
-            <a:off x="6286500" y="4476750"/>
-            <a:ext cx="2571750" cy="552450"/>
+                <a16:creationId xmlns:a16="http://schemas.microsoft.com/office/drawing/2014/main" id="{95E3AEA0-98B1-42F7-A22E-2F3C785938B8}"/>
+              </a:ext>
+            </a:extLst>
+          </p:cNvPr>
+          <p:cNvSpPr>
+            <a:spLocks xmlns:a="http://schemas.openxmlformats.org/drawingml/2006/main" noGrp="1"/>
+          </p:cNvSpPr>
+          <p:nvPr/>
+        </p:nvSpPr>
+        <p:spPr>
+          <a:xfrm xmlns:a="http://schemas.openxmlformats.org/drawingml/2006/main">
+            <a:off x="8001000" y="4305300"/>
+            <a:ext cx="3333750" cy="476250"/>
           </a:xfrm>
           <a:prstGeom xmlns:a="http://schemas.openxmlformats.org/drawingml/2006/main" prst="roundRect">
             <a:avLst>
-              <a:gd name="adj" fmla="val 13793"/>
+              <a:gd name="adj" fmla="val 16000"/>
             </a:avLst>
           </a:prstGeom>
           <a:solidFill xmlns:a="http://schemas.openxmlformats.org/drawingml/2006/main">
@@ -10600,27 +9924,27 @@
           <p:cNvPr id="25" name="p15-now3">
             <a:extLst xmlns:a="http://schemas.openxmlformats.org/drawingml/2006/main">
               <a:ext uri="{FF2B5EF4-FFF2-40B4-BE49-F238E27FC236}">
-                <a16:creationId xmlns:a16="http://schemas.microsoft.com/office/drawing/2014/main" id="{ADC8BC23-0E6F-4900-A971-CB242E04A4FD}"/>
-              </a:ext>
-            </a:extLst>
-          </p:cNvPr>
-          <p:cNvSpPr>
-            <a:spLocks xmlns:a="http://schemas.openxmlformats.org/drawingml/2006/main" noGrp="1"/>
-          </p:cNvSpPr>
-          <p:nvPr/>
-        </p:nvSpPr>
-        <p:spPr>
-          <a:xfrm xmlns:a="http://schemas.openxmlformats.org/drawingml/2006/main">
-            <a:off x="9048750" y="4476750"/>
-            <a:ext cx="2571750" cy="552450"/>
+                <a16:creationId xmlns:a16="http://schemas.microsoft.com/office/drawing/2014/main" id="{E49D4971-3BAF-4A10-B3EE-2D4A060FF48F}"/>
+              </a:ext>
+            </a:extLst>
+          </p:cNvPr>
+          <p:cNvSpPr>
+            <a:spLocks xmlns:a="http://schemas.openxmlformats.org/drawingml/2006/main" noGrp="1"/>
+          </p:cNvSpPr>
+          <p:nvPr/>
+        </p:nvSpPr>
+        <p:spPr>
+          <a:xfrm xmlns:a="http://schemas.openxmlformats.org/drawingml/2006/main">
+            <a:off x="2619375" y="4933950"/>
+            <a:ext cx="3333750" cy="476250"/>
           </a:xfrm>
           <a:prstGeom xmlns:a="http://schemas.openxmlformats.org/drawingml/2006/main" prst="roundRect">
             <a:avLst>
-              <a:gd name="adj" fmla="val 13793"/>
+              <a:gd name="adj" fmla="val 16000"/>
             </a:avLst>
           </a:prstGeom>
           <a:solidFill xmlns:a="http://schemas.openxmlformats.org/drawingml/2006/main">
-            <a:srgbClr val="E8F0F6"/>
+            <a:srgbClr val="F8E9EA"/>
           </a:solidFill>
           <a:ln xmlns:a="http://schemas.openxmlformats.org/drawingml/2006/main" w="9525">
             <a:solidFill>
@@ -10636,6 +9960,65 @@
             <a:pPr algn="ctr">
               <a:defRPr sz="1350" b="1">
                 <a:solidFill>
+                  <a:srgbClr val="C8161E"/>
+                </a:solidFill>
+              </a:defRPr>
+            </a:pPr>
+            <a:r>
+              <a:rPr sz="1350" b="1">
+                <a:solidFill>
+                  <a:srgbClr val="C8161E"/>
+                </a:solidFill>
+                <a:latin typeface="Microsoft YaHei"/>
+                <a:ea typeface="Microsoft YaHei"/>
+                <a:cs typeface="Microsoft YaHei"/>
+              </a:rPr>
+              <a:t>8  真实失败记录</a:t>
+            </a:r>
+          </a:p>
+        </p:txBody>
+      </p:sp>
+      <p:sp>
+        <p:nvSpPr>
+          <p:cNvPr id="26" name="p15-now4">
+            <a:extLst xmlns:a="http://schemas.openxmlformats.org/drawingml/2006/main">
+              <a:ext uri="{FF2B5EF4-FFF2-40B4-BE49-F238E27FC236}">
+                <a16:creationId xmlns:a16="http://schemas.microsoft.com/office/drawing/2014/main" id="{8091DBFC-03E3-4DC5-8651-A6EC0585C470}"/>
+              </a:ext>
+            </a:extLst>
+          </p:cNvPr>
+          <p:cNvSpPr>
+            <a:spLocks xmlns:a="http://schemas.openxmlformats.org/drawingml/2006/main" noGrp="1"/>
+          </p:cNvSpPr>
+          <p:nvPr/>
+        </p:nvSpPr>
+        <p:spPr>
+          <a:xfrm xmlns:a="http://schemas.openxmlformats.org/drawingml/2006/main">
+            <a:off x="6191250" y="4933950"/>
+            <a:ext cx="3333750" cy="476250"/>
+          </a:xfrm>
+          <a:prstGeom xmlns:a="http://schemas.openxmlformats.org/drawingml/2006/main" prst="roundRect">
+            <a:avLst>
+              <a:gd name="adj" fmla="val 16000"/>
+            </a:avLst>
+          </a:prstGeom>
+          <a:solidFill xmlns:a="http://schemas.openxmlformats.org/drawingml/2006/main">
+            <a:srgbClr val="E8F0F6"/>
+          </a:solidFill>
+          <a:ln xmlns:a="http://schemas.openxmlformats.org/drawingml/2006/main" w="9525">
+            <a:solidFill>
+              <a:srgbClr val="D6DDE2"/>
+            </a:solidFill>
+            <a:prstDash val="solid"/>
+          </a:ln>
+        </p:spPr>
+        <p:txBody>
+          <a:bodyPr xmlns:a="http://schemas.openxmlformats.org/drawingml/2006/main" lIns="76200" tIns="38100" rIns="76200" bIns="38100" anchor="ctr"/>
+          <a:lstStyle xmlns:a="http://schemas.openxmlformats.org/drawingml/2006/main"/>
+          <a:p xmlns:a="http://schemas.openxmlformats.org/drawingml/2006/main">
+            <a:pPr algn="ctr">
+              <a:defRPr sz="1350" b="1">
+                <a:solidFill>
                   <a:srgbClr val="18354E"/>
                 </a:solidFill>
               </a:defRPr>
@@ -10649,29 +10032,29 @@
                 <a:ea typeface="Microsoft YaHei"/>
                 <a:cs typeface="Microsoft YaHei"/>
               </a:rPr>
-              <a:t>8  AI 记录持续回写</a:t>
-            </a:r>
-          </a:p>
-        </p:txBody>
-      </p:sp>
-      <p:sp>
-        <p:nvSpPr>
-          <p:cNvPr id="26" name="p15-bottom">
-            <a:extLst xmlns:a="http://schemas.openxmlformats.org/drawingml/2006/main">
-              <a:ext uri="{FF2B5EF4-FFF2-40B4-BE49-F238E27FC236}">
-                <a16:creationId xmlns:a16="http://schemas.microsoft.com/office/drawing/2014/main" id="{0F017460-2F03-4BDD-91E4-B7F97D154B15}"/>
-              </a:ext>
-            </a:extLst>
-          </p:cNvPr>
-          <p:cNvSpPr>
-            <a:spLocks xmlns:a="http://schemas.openxmlformats.org/drawingml/2006/main" noGrp="1"/>
-          </p:cNvSpPr>
-          <p:nvPr/>
-        </p:nvSpPr>
-        <p:spPr>
-          <a:xfrm xmlns:a="http://schemas.openxmlformats.org/drawingml/2006/main">
-            <a:off x="1666875" y="5257800"/>
-            <a:ext cx="8858250" cy="400050"/>
+              <a:t>9  AI 记录</a:t>
+            </a:r>
+          </a:p>
+        </p:txBody>
+      </p:sp>
+      <p:sp>
+        <p:nvSpPr>
+          <p:cNvPr id="27" name="p15-bottom">
+            <a:extLst xmlns:a="http://schemas.openxmlformats.org/drawingml/2006/main">
+              <a:ext uri="{FF2B5EF4-FFF2-40B4-BE49-F238E27FC236}">
+                <a16:creationId xmlns:a16="http://schemas.microsoft.com/office/drawing/2014/main" id="{5A73E4B2-14DB-465A-887B-0479AB01704B}"/>
+              </a:ext>
+            </a:extLst>
+          </p:cNvPr>
+          <p:cNvSpPr>
+            <a:spLocks xmlns:a="http://schemas.openxmlformats.org/drawingml/2006/main" noGrp="1"/>
+          </p:cNvSpPr>
+          <p:nvPr/>
+        </p:nvSpPr>
+        <p:spPr>
+          <a:xfrm xmlns:a="http://schemas.openxmlformats.org/drawingml/2006/main">
+            <a:off x="1666875" y="5486400"/>
+            <a:ext cx="8858250" cy="304800"/>
           </a:xfrm>
           <a:prstGeom xmlns:a="http://schemas.openxmlformats.org/drawingml/2006/main" prst="rect">
             <a:avLst/>
@@ -10687,14 +10070,14 @@
           <a:lstStyle xmlns:a="http://schemas.openxmlformats.org/drawingml/2006/main"/>
           <a:p xmlns:a="http://schemas.openxmlformats.org/drawingml/2006/main">
             <a:pPr algn="ctr">
-              <a:defRPr sz="1500" b="1">
+              <a:defRPr sz="1350" b="1">
                 <a:solidFill>
                   <a:srgbClr val="C8161E"/>
                 </a:solidFill>
               </a:defRPr>
             </a:pPr>
             <a:r>
-              <a:rPr sz="1500" b="1">
+              <a:rPr sz="1350" b="1">
                 <a:solidFill>
                   <a:srgbClr val="C8161E"/>
                 </a:solidFill>
@@ -10702,7 +10085,7 @@
                 <a:ea typeface="Microsoft YaHei"/>
                 <a:cs typeface="Microsoft YaHei"/>
               </a:rPr>
-              <a:t>自查是诚实标记已满足 / 待补全 / 未满足，不是把样例写成“全部完成”。</a:t>
+              <a:t>自查要诚实标记已满足 / 待补全 / 未满足；失败记录不能预先编造。</a:t>
             </a:r>
           </a:p>
         </p:txBody>
@@ -10804,7 +10187,7 @@
           <p:cNvPr id="6" name="p16-n0">
             <a:extLst xmlns:a="http://schemas.openxmlformats.org/drawingml/2006/main">
               <a:ext uri="{FF2B5EF4-FFF2-40B4-BE49-F238E27FC236}">
-                <a16:creationId xmlns:a16="http://schemas.microsoft.com/office/drawing/2014/main" id="{120EF2D2-98CF-4638-B04A-A72111C56990}"/>
+                <a16:creationId xmlns:a16="http://schemas.microsoft.com/office/drawing/2014/main" id="{0F446C2A-C09B-4CC3-8B11-0FE3E9FF1672}"/>
               </a:ext>
             </a:extLst>
           </p:cNvPr>
@@ -10861,7 +10244,7 @@
           <p:cNvPr id="7" name="p16-t0">
             <a:extLst xmlns:a="http://schemas.openxmlformats.org/drawingml/2006/main">
               <a:ext uri="{FF2B5EF4-FFF2-40B4-BE49-F238E27FC236}">
-                <a16:creationId xmlns:a16="http://schemas.microsoft.com/office/drawing/2014/main" id="{05895F85-E848-42F9-A181-1DBD17B5ADB5}"/>
+                <a16:creationId xmlns:a16="http://schemas.microsoft.com/office/drawing/2014/main" id="{A530524E-0763-41B0-BB98-7B10E6560C25}"/>
               </a:ext>
             </a:extLst>
           </p:cNvPr>
@@ -10920,7 +10303,7 @@
           <p:cNvPr id="8" name="p16-n1">
             <a:extLst xmlns:a="http://schemas.openxmlformats.org/drawingml/2006/main">
               <a:ext uri="{FF2B5EF4-FFF2-40B4-BE49-F238E27FC236}">
-                <a16:creationId xmlns:a16="http://schemas.microsoft.com/office/drawing/2014/main" id="{E24B18C8-7953-4444-954C-BD08A546E777}"/>
+                <a16:creationId xmlns:a16="http://schemas.microsoft.com/office/drawing/2014/main" id="{4B4E4305-7C6F-4D50-80FF-4EB328585AAE}"/>
               </a:ext>
             </a:extLst>
           </p:cNvPr>
@@ -10977,7 +10360,7 @@
           <p:cNvPr id="9" name="p16-t1">
             <a:extLst xmlns:a="http://schemas.openxmlformats.org/drawingml/2006/main">
               <a:ext uri="{FF2B5EF4-FFF2-40B4-BE49-F238E27FC236}">
-                <a16:creationId xmlns:a16="http://schemas.microsoft.com/office/drawing/2014/main" id="{71BC9E73-5532-4274-BFE0-2A25A7CE2956}"/>
+                <a16:creationId xmlns:a16="http://schemas.microsoft.com/office/drawing/2014/main" id="{5CE5E277-E4AE-4785-B6D8-4CE5B176E0D8}"/>
               </a:ext>
             </a:extLst>
           </p:cNvPr>
@@ -11036,7 +10419,7 @@
           <p:cNvPr id="10" name="p16-n2">
             <a:extLst xmlns:a="http://schemas.openxmlformats.org/drawingml/2006/main">
               <a:ext uri="{FF2B5EF4-FFF2-40B4-BE49-F238E27FC236}">
-                <a16:creationId xmlns:a16="http://schemas.microsoft.com/office/drawing/2014/main" id="{A87C729B-B7D2-4987-BFD5-FD19AC29A7E3}"/>
+                <a16:creationId xmlns:a16="http://schemas.microsoft.com/office/drawing/2014/main" id="{F07C6249-CBCA-48FA-89E7-AB4FA99B60CB}"/>
               </a:ext>
             </a:extLst>
           </p:cNvPr>
@@ -11093,7 +10476,7 @@
           <p:cNvPr id="11" name="p16-t2">
             <a:extLst xmlns:a="http://schemas.openxmlformats.org/drawingml/2006/main">
               <a:ext uri="{FF2B5EF4-FFF2-40B4-BE49-F238E27FC236}">
-                <a16:creationId xmlns:a16="http://schemas.microsoft.com/office/drawing/2014/main" id="{3285C2A2-2357-4F4F-A435-3D16812C4867}"/>
+                <a16:creationId xmlns:a16="http://schemas.microsoft.com/office/drawing/2014/main" id="{58C8C270-CAB0-420F-871F-B5D7B748438B}"/>
               </a:ext>
             </a:extLst>
           </p:cNvPr>
@@ -11152,7 +10535,7 @@
           <p:cNvPr id="12" name="p16-n3">
             <a:extLst xmlns:a="http://schemas.openxmlformats.org/drawingml/2006/main">
               <a:ext uri="{FF2B5EF4-FFF2-40B4-BE49-F238E27FC236}">
-                <a16:creationId xmlns:a16="http://schemas.microsoft.com/office/drawing/2014/main" id="{62A08014-ED7E-4059-931E-E6915F4871AD}"/>
+                <a16:creationId xmlns:a16="http://schemas.microsoft.com/office/drawing/2014/main" id="{7D530D94-EB2F-4005-9C49-2BD03EC78F35}"/>
               </a:ext>
             </a:extLst>
           </p:cNvPr>
@@ -11209,7 +10592,7 @@
           <p:cNvPr id="13" name="p16-t3">
             <a:extLst xmlns:a="http://schemas.openxmlformats.org/drawingml/2006/main">
               <a:ext uri="{FF2B5EF4-FFF2-40B4-BE49-F238E27FC236}">
-                <a16:creationId xmlns:a16="http://schemas.microsoft.com/office/drawing/2014/main" id="{B5704CFC-E1F1-4E29-A785-28DF70C38E34}"/>
+                <a16:creationId xmlns:a16="http://schemas.microsoft.com/office/drawing/2014/main" id="{2A09CEC1-205A-4BD6-B404-85208412C4C3}"/>
               </a:ext>
             </a:extLst>
           </p:cNvPr>
@@ -11268,7 +10651,7 @@
           <p:cNvPr id="14" name="p16-n4">
             <a:extLst xmlns:a="http://schemas.openxmlformats.org/drawingml/2006/main">
               <a:ext uri="{FF2B5EF4-FFF2-40B4-BE49-F238E27FC236}">
-                <a16:creationId xmlns:a16="http://schemas.microsoft.com/office/drawing/2014/main" id="{8A8BA561-ABAA-4A9B-97AE-46C744E948F7}"/>
+                <a16:creationId xmlns:a16="http://schemas.microsoft.com/office/drawing/2014/main" id="{8E3FF70F-DECC-44B8-8C91-6803FAFB5B8F}"/>
               </a:ext>
             </a:extLst>
           </p:cNvPr>
@@ -11325,7 +10708,7 @@
           <p:cNvPr id="15" name="p16-t4">
             <a:extLst xmlns:a="http://schemas.openxmlformats.org/drawingml/2006/main">
               <a:ext uri="{FF2B5EF4-FFF2-40B4-BE49-F238E27FC236}">
-                <a16:creationId xmlns:a16="http://schemas.microsoft.com/office/drawing/2014/main" id="{92453B22-E925-4050-ACC7-F5E11F6C4D98}"/>
+                <a16:creationId xmlns:a16="http://schemas.microsoft.com/office/drawing/2014/main" id="{6FC2A7A6-E3BC-4CE9-86BC-768A8FF764CB}"/>
               </a:ext>
             </a:extLst>
           </p:cNvPr>
@@ -11384,7 +10767,7 @@
           <p:cNvPr id="16" name="p16-n5">
             <a:extLst xmlns:a="http://schemas.openxmlformats.org/drawingml/2006/main">
               <a:ext uri="{FF2B5EF4-FFF2-40B4-BE49-F238E27FC236}">
-                <a16:creationId xmlns:a16="http://schemas.microsoft.com/office/drawing/2014/main" id="{97D5991E-2836-4622-8E07-AF342CA3FE9E}"/>
+                <a16:creationId xmlns:a16="http://schemas.microsoft.com/office/drawing/2014/main" id="{6466DF9C-B6A1-43CB-AFDC-6BBD50C9455F}"/>
               </a:ext>
             </a:extLst>
           </p:cNvPr>
@@ -11441,7 +10824,7 @@
           <p:cNvPr id="17" name="p16-t5">
             <a:extLst xmlns:a="http://schemas.openxmlformats.org/drawingml/2006/main">
               <a:ext uri="{FF2B5EF4-FFF2-40B4-BE49-F238E27FC236}">
-                <a16:creationId xmlns:a16="http://schemas.microsoft.com/office/drawing/2014/main" id="{2483EED6-2F8C-4039-B2DA-2236AA8AE904}"/>
+                <a16:creationId xmlns:a16="http://schemas.microsoft.com/office/drawing/2014/main" id="{B41B5C98-4019-4EB7-8F39-353EF4DC9DF9}"/>
               </a:ext>
             </a:extLst>
           </p:cNvPr>
@@ -11500,7 +10883,7 @@
           <p:cNvPr id="18" name="p16-n6">
             <a:extLst xmlns:a="http://schemas.openxmlformats.org/drawingml/2006/main">
               <a:ext uri="{FF2B5EF4-FFF2-40B4-BE49-F238E27FC236}">
-                <a16:creationId xmlns:a16="http://schemas.microsoft.com/office/drawing/2014/main" id="{FA23F46A-CE1A-4A36-83F3-921577ECC163}"/>
+                <a16:creationId xmlns:a16="http://schemas.microsoft.com/office/drawing/2014/main" id="{5F82BE2F-E557-4EF2-8DFF-502259D33280}"/>
               </a:ext>
             </a:extLst>
           </p:cNvPr>
@@ -11557,7 +10940,7 @@
           <p:cNvPr id="19" name="p16-t6">
             <a:extLst xmlns:a="http://schemas.openxmlformats.org/drawingml/2006/main">
               <a:ext uri="{FF2B5EF4-FFF2-40B4-BE49-F238E27FC236}">
-                <a16:creationId xmlns:a16="http://schemas.microsoft.com/office/drawing/2014/main" id="{0336DC01-F174-44D6-A653-4B822563951D}"/>
+                <a16:creationId xmlns:a16="http://schemas.microsoft.com/office/drawing/2014/main" id="{DF17B41E-EBD8-48D3-BBC4-0BB11E65714B}"/>
               </a:ext>
             </a:extLst>
           </p:cNvPr>
@@ -11606,7 +10989,7 @@
                 <a:ea typeface="Microsoft YaHei"/>
                 <a:cs typeface="Microsoft YaHei"/>
               </a:rPr>
-              <a:t>标八项状态</a:t>
+              <a:t>标九项状态</a:t>
             </a:r>
           </a:p>
         </p:txBody>
@@ -11616,7 +10999,7 @@
           <p:cNvPr id="20" name="p16-order">
             <a:extLst xmlns:a="http://schemas.openxmlformats.org/drawingml/2006/main">
               <a:ext uri="{FF2B5EF4-FFF2-40B4-BE49-F238E27FC236}">
-                <a16:creationId xmlns:a16="http://schemas.microsoft.com/office/drawing/2014/main" id="{131D64AE-74F0-4DC0-BA16-37895A3ECDA3}"/>
+                <a16:creationId xmlns:a16="http://schemas.microsoft.com/office/drawing/2014/main" id="{E3E49464-BB67-46C7-BFCE-A6A49112C14F}"/>
               </a:ext>
             </a:extLst>
           </p:cNvPr>
@@ -11675,7 +11058,7 @@
           <p:cNvPr id="21" name="p16-poolhint">
             <a:extLst xmlns:a="http://schemas.openxmlformats.org/drawingml/2006/main">
               <a:ext uri="{FF2B5EF4-FFF2-40B4-BE49-F238E27FC236}">
-                <a16:creationId xmlns:a16="http://schemas.microsoft.com/office/drawing/2014/main" id="{AB7E47E6-1998-43AC-9CFB-715B1F60995A}"/>
+                <a16:creationId xmlns:a16="http://schemas.microsoft.com/office/drawing/2014/main" id="{356EA48D-D42D-40BF-90B9-9531A5CB018A}"/>
               </a:ext>
             </a:extLst>
           </p:cNvPr>
@@ -11730,7 +11113,7 @@
           <p:cNvPr id="22" name="p16-write">
             <a:extLst xmlns:a="http://schemas.openxmlformats.org/drawingml/2006/main">
               <a:ext uri="{FF2B5EF4-FFF2-40B4-BE49-F238E27FC236}">
-                <a16:creationId xmlns:a16="http://schemas.microsoft.com/office/drawing/2014/main" id="{56449C38-1DBD-4AB8-BF67-E3EC832A0645}"/>
+                <a16:creationId xmlns:a16="http://schemas.microsoft.com/office/drawing/2014/main" id="{FB6E154E-3274-4536-A4A1-102D973D5229}"/>
               </a:ext>
             </a:extLst>
           </p:cNvPr>
@@ -11875,7 +11258,7 @@
           <p:cNvPr id="6" name="p17-time">
             <a:extLst xmlns:a="http://schemas.openxmlformats.org/drawingml/2006/main">
               <a:ext uri="{FF2B5EF4-FFF2-40B4-BE49-F238E27FC236}">
-                <a16:creationId xmlns:a16="http://schemas.microsoft.com/office/drawing/2014/main" id="{B9BA4A50-7B18-4A15-943E-A746140E04BB}"/>
+                <a16:creationId xmlns:a16="http://schemas.microsoft.com/office/drawing/2014/main" id="{220C858A-6E24-4E02-8412-158BEF7BA062}"/>
               </a:ext>
             </a:extLst>
           </p:cNvPr>
@@ -11930,7 +11313,7 @@
           <p:cNvPr id="7" name="p17-0-h">
             <a:extLst xmlns:a="http://schemas.openxmlformats.org/drawingml/2006/main">
               <a:ext uri="{FF2B5EF4-FFF2-40B4-BE49-F238E27FC236}">
-                <a16:creationId xmlns:a16="http://schemas.microsoft.com/office/drawing/2014/main" id="{4C47726E-DA2A-443A-A3E6-476BF64B84E8}"/>
+                <a16:creationId xmlns:a16="http://schemas.microsoft.com/office/drawing/2014/main" id="{B0225651-6B76-4A04-91AF-3DEEE12B3E37}"/>
               </a:ext>
             </a:extLst>
           </p:cNvPr>
@@ -11987,7 +11370,7 @@
           <p:cNvPr id="8" name="p17-0-d">
             <a:extLst xmlns:a="http://schemas.openxmlformats.org/drawingml/2006/main">
               <a:ext uri="{FF2B5EF4-FFF2-40B4-BE49-F238E27FC236}">
-                <a16:creationId xmlns:a16="http://schemas.microsoft.com/office/drawing/2014/main" id="{53BC41F6-A414-42AE-819F-41D78321F11A}"/>
+                <a16:creationId xmlns:a16="http://schemas.microsoft.com/office/drawing/2014/main" id="{59C0A6B8-6386-492F-A616-F1CFD25A36AB}"/>
               </a:ext>
             </a:extLst>
           </p:cNvPr>
@@ -12074,7 +11457,7 @@
           <p:cNvPr id="9" name="p17-1-h">
             <a:extLst xmlns:a="http://schemas.openxmlformats.org/drawingml/2006/main">
               <a:ext uri="{FF2B5EF4-FFF2-40B4-BE49-F238E27FC236}">
-                <a16:creationId xmlns:a16="http://schemas.microsoft.com/office/drawing/2014/main" id="{2EA5643A-D6CC-419D-9940-E6D1177AAC51}"/>
+                <a16:creationId xmlns:a16="http://schemas.microsoft.com/office/drawing/2014/main" id="{BC246840-B072-47F0-B19B-06694BDAD8E7}"/>
               </a:ext>
             </a:extLst>
           </p:cNvPr>
@@ -12131,7 +11514,7 @@
           <p:cNvPr id="10" name="p17-1-d">
             <a:extLst xmlns:a="http://schemas.openxmlformats.org/drawingml/2006/main">
               <a:ext uri="{FF2B5EF4-FFF2-40B4-BE49-F238E27FC236}">
-                <a16:creationId xmlns:a16="http://schemas.microsoft.com/office/drawing/2014/main" id="{9C689EFE-0A37-47B4-8192-9F1D49654802}"/>
+                <a16:creationId xmlns:a16="http://schemas.microsoft.com/office/drawing/2014/main" id="{D58C7971-EEE3-44AC-B8C3-89EC756DB5F9}"/>
               </a:ext>
             </a:extLst>
           </p:cNvPr>
@@ -12218,7 +11601,7 @@
           <p:cNvPr id="11" name="p17-2-h">
             <a:extLst xmlns:a="http://schemas.openxmlformats.org/drawingml/2006/main">
               <a:ext uri="{FF2B5EF4-FFF2-40B4-BE49-F238E27FC236}">
-                <a16:creationId xmlns:a16="http://schemas.microsoft.com/office/drawing/2014/main" id="{38A3DCD7-EC06-43C8-A1B1-51461ED44FCF}"/>
+                <a16:creationId xmlns:a16="http://schemas.microsoft.com/office/drawing/2014/main" id="{A0AE20D4-9714-435C-8BEA-C8AE9759F8D5}"/>
               </a:ext>
             </a:extLst>
           </p:cNvPr>
@@ -12275,7 +11658,7 @@
           <p:cNvPr id="12" name="p17-2-d">
             <a:extLst xmlns:a="http://schemas.openxmlformats.org/drawingml/2006/main">
               <a:ext uri="{FF2B5EF4-FFF2-40B4-BE49-F238E27FC236}">
-                <a16:creationId xmlns:a16="http://schemas.microsoft.com/office/drawing/2014/main" id="{33E3011D-4B49-4E9B-8436-48AFDEDE87A0}"/>
+                <a16:creationId xmlns:a16="http://schemas.microsoft.com/office/drawing/2014/main" id="{D20124F8-3325-4DFD-B2B4-C9431AAF5E7B}"/>
               </a:ext>
             </a:extLst>
           </p:cNvPr>
@@ -12362,7 +11745,7 @@
           <p:cNvPr id="13" name="p17-3-h">
             <a:extLst xmlns:a="http://schemas.openxmlformats.org/drawingml/2006/main">
               <a:ext uri="{FF2B5EF4-FFF2-40B4-BE49-F238E27FC236}">
-                <a16:creationId xmlns:a16="http://schemas.microsoft.com/office/drawing/2014/main" id="{2BCB9911-C188-4E2C-B58C-AFEFED93B535}"/>
+                <a16:creationId xmlns:a16="http://schemas.microsoft.com/office/drawing/2014/main" id="{541EB345-A3AA-4A74-8705-41FE8D511864}"/>
               </a:ext>
             </a:extLst>
           </p:cNvPr>
@@ -12419,7 +11802,7 @@
           <p:cNvPr id="14" name="p17-3-d">
             <a:extLst xmlns:a="http://schemas.openxmlformats.org/drawingml/2006/main">
               <a:ext uri="{FF2B5EF4-FFF2-40B4-BE49-F238E27FC236}">
-                <a16:creationId xmlns:a16="http://schemas.microsoft.com/office/drawing/2014/main" id="{24E3B470-03A1-40FA-8189-8F72ABF35C8A}"/>
+                <a16:creationId xmlns:a16="http://schemas.microsoft.com/office/drawing/2014/main" id="{E98E921B-7705-4175-A3F8-FDA921FD91EE}"/>
               </a:ext>
             </a:extLst>
           </p:cNvPr>
@@ -12496,7 +11879,7 @@
                 <a:ea typeface="Microsoft YaHei"/>
                 <a:cs typeface="Microsoft YaHei"/>
               </a:rPr>
-              <a:t>八项：满足 / 待补 / 未满足</a:t>
+              <a:t>九项：满足 / 待补 / 未满足</a:t>
             </a:r>
           </a:p>
         </p:txBody>
@@ -12506,7 +11889,7 @@
           <p:cNvPr id="15" name="p17-save">
             <a:extLst xmlns:a="http://schemas.openxmlformats.org/drawingml/2006/main">
               <a:ext uri="{FF2B5EF4-FFF2-40B4-BE49-F238E27FC236}">
-                <a16:creationId xmlns:a16="http://schemas.microsoft.com/office/drawing/2014/main" id="{D83E5B8F-0017-4E8B-B8D4-E216DCDA5BC6}"/>
+                <a16:creationId xmlns:a16="http://schemas.microsoft.com/office/drawing/2014/main" id="{B133D299-4C7E-4CAE-96C5-A7F915FE7EF3}"/>
               </a:ext>
             </a:extLst>
           </p:cNvPr>
@@ -12651,7 +12034,7 @@
           <p:cNvPr id="6" name="p18-n0">
             <a:extLst xmlns:a="http://schemas.openxmlformats.org/drawingml/2006/main">
               <a:ext uri="{FF2B5EF4-FFF2-40B4-BE49-F238E27FC236}">
-                <a16:creationId xmlns:a16="http://schemas.microsoft.com/office/drawing/2014/main" id="{EEA262D2-1129-44EB-8AD9-0A64040EDC57}"/>
+                <a16:creationId xmlns:a16="http://schemas.microsoft.com/office/drawing/2014/main" id="{B0BCC920-C856-4364-BBFD-AA258833CFE1}"/>
               </a:ext>
             </a:extLst>
           </p:cNvPr>
@@ -12708,7 +12091,7 @@
           <p:cNvPr id="7" name="p18-q0">
             <a:extLst xmlns:a="http://schemas.openxmlformats.org/drawingml/2006/main">
               <a:ext uri="{FF2B5EF4-FFF2-40B4-BE49-F238E27FC236}">
-                <a16:creationId xmlns:a16="http://schemas.microsoft.com/office/drawing/2014/main" id="{BFDCD5E3-4A5C-4066-8B8D-9F0E259A53D6}"/>
+                <a16:creationId xmlns:a16="http://schemas.microsoft.com/office/drawing/2014/main" id="{68EB946F-D1A6-4547-A2DE-ABE5016CE5C4}"/>
               </a:ext>
             </a:extLst>
           </p:cNvPr>
@@ -12767,7 +12150,7 @@
           <p:cNvPr id="8" name="p18-n1">
             <a:extLst xmlns:a="http://schemas.openxmlformats.org/drawingml/2006/main">
               <a:ext uri="{FF2B5EF4-FFF2-40B4-BE49-F238E27FC236}">
-                <a16:creationId xmlns:a16="http://schemas.microsoft.com/office/drawing/2014/main" id="{7CABE49C-4E77-4DDF-86CC-B2673BC6F9CB}"/>
+                <a16:creationId xmlns:a16="http://schemas.microsoft.com/office/drawing/2014/main" id="{4069C1F8-48BE-4D38-8520-56DDEA32A896}"/>
               </a:ext>
             </a:extLst>
           </p:cNvPr>
@@ -12824,7 +12207,7 @@
           <p:cNvPr id="9" name="p18-q1">
             <a:extLst xmlns:a="http://schemas.openxmlformats.org/drawingml/2006/main">
               <a:ext uri="{FF2B5EF4-FFF2-40B4-BE49-F238E27FC236}">
-                <a16:creationId xmlns:a16="http://schemas.microsoft.com/office/drawing/2014/main" id="{2026FE2E-A48F-4D85-80BA-B54D12024535}"/>
+                <a16:creationId xmlns:a16="http://schemas.microsoft.com/office/drawing/2014/main" id="{44FCE09B-7F0C-4D5C-9BB3-DE3A0183CEC9}"/>
               </a:ext>
             </a:extLst>
           </p:cNvPr>
@@ -12883,7 +12266,7 @@
           <p:cNvPr id="10" name="p18-n2">
             <a:extLst xmlns:a="http://schemas.openxmlformats.org/drawingml/2006/main">
               <a:ext uri="{FF2B5EF4-FFF2-40B4-BE49-F238E27FC236}">
-                <a16:creationId xmlns:a16="http://schemas.microsoft.com/office/drawing/2014/main" id="{1F5E1C4E-2C69-4DED-9A5A-7EE0A1832844}"/>
+                <a16:creationId xmlns:a16="http://schemas.microsoft.com/office/drawing/2014/main" id="{4752B1D9-C65A-4529-9ECE-58950A386B56}"/>
               </a:ext>
             </a:extLst>
           </p:cNvPr>
@@ -12940,7 +12323,7 @@
           <p:cNvPr id="11" name="p18-q2">
             <a:extLst xmlns:a="http://schemas.openxmlformats.org/drawingml/2006/main">
               <a:ext uri="{FF2B5EF4-FFF2-40B4-BE49-F238E27FC236}">
-                <a16:creationId xmlns:a16="http://schemas.microsoft.com/office/drawing/2014/main" id="{56E8E483-CE27-4931-866F-B1ACCBA61862}"/>
+                <a16:creationId xmlns:a16="http://schemas.microsoft.com/office/drawing/2014/main" id="{C1D19BCC-418E-4AED-AD8E-5BCCCA0ABD87}"/>
               </a:ext>
             </a:extLst>
           </p:cNvPr>
@@ -12999,7 +12382,7 @@
           <p:cNvPr id="12" name="p18-n3">
             <a:extLst xmlns:a="http://schemas.openxmlformats.org/drawingml/2006/main">
               <a:ext uri="{FF2B5EF4-FFF2-40B4-BE49-F238E27FC236}">
-                <a16:creationId xmlns:a16="http://schemas.microsoft.com/office/drawing/2014/main" id="{284F72D3-1CC4-44CF-B451-32C6CD7EA851}"/>
+                <a16:creationId xmlns:a16="http://schemas.microsoft.com/office/drawing/2014/main" id="{29474D51-8B89-4C9A-B9CF-9ACDB60E6CDB}"/>
               </a:ext>
             </a:extLst>
           </p:cNvPr>
@@ -13056,7 +12439,7 @@
           <p:cNvPr id="13" name="p18-q3">
             <a:extLst xmlns:a="http://schemas.openxmlformats.org/drawingml/2006/main">
               <a:ext uri="{FF2B5EF4-FFF2-40B4-BE49-F238E27FC236}">
-                <a16:creationId xmlns:a16="http://schemas.microsoft.com/office/drawing/2014/main" id="{9CA2E7AA-123E-46E7-A5F5-9AC30F7A1272}"/>
+                <a16:creationId xmlns:a16="http://schemas.microsoft.com/office/drawing/2014/main" id="{FD6A051C-1EF1-47A1-9429-0EABCF983E96}"/>
               </a:ext>
             </a:extLst>
           </p:cNvPr>
@@ -13115,7 +12498,7 @@
           <p:cNvPr id="14" name="p18-n4">
             <a:extLst xmlns:a="http://schemas.openxmlformats.org/drawingml/2006/main">
               <a:ext uri="{FF2B5EF4-FFF2-40B4-BE49-F238E27FC236}">
-                <a16:creationId xmlns:a16="http://schemas.microsoft.com/office/drawing/2014/main" id="{786F5FC7-2565-4D58-BC6D-D796389FF55F}"/>
+                <a16:creationId xmlns:a16="http://schemas.microsoft.com/office/drawing/2014/main" id="{009F304D-B904-440F-A8BB-4C285CF11EFD}"/>
               </a:ext>
             </a:extLst>
           </p:cNvPr>
@@ -13172,7 +12555,7 @@
           <p:cNvPr id="15" name="p18-q4">
             <a:extLst xmlns:a="http://schemas.openxmlformats.org/drawingml/2006/main">
               <a:ext uri="{FF2B5EF4-FFF2-40B4-BE49-F238E27FC236}">
-                <a16:creationId xmlns:a16="http://schemas.microsoft.com/office/drawing/2014/main" id="{4D77D3D6-645D-468D-9ED4-F78DE68CF935}"/>
+                <a16:creationId xmlns:a16="http://schemas.microsoft.com/office/drawing/2014/main" id="{9E6D2EDC-E1AC-4E8A-8197-BE39ED5CB2BE}"/>
               </a:ext>
             </a:extLst>
           </p:cNvPr>
@@ -13221,7 +12604,7 @@
                 <a:ea typeface="Microsoft YaHei"/>
                 <a:cs typeface="Microsoft YaHei"/>
               </a:rPr>
-              <a:t>八项中最可能缺哪项？</a:t>
+              <a:t>九项中最可能缺哪项？</a:t>
             </a:r>
           </a:p>
         </p:txBody>
@@ -13231,7 +12614,7 @@
           <p:cNvPr id="16" name="p18-author">
             <a:extLst xmlns:a="http://schemas.openxmlformats.org/drawingml/2006/main">
               <a:ext uri="{FF2B5EF4-FFF2-40B4-BE49-F238E27FC236}">
-                <a16:creationId xmlns:a16="http://schemas.microsoft.com/office/drawing/2014/main" id="{4A4CD276-1FD0-489A-8EFB-91441A016C5B}"/>
+                <a16:creationId xmlns:a16="http://schemas.microsoft.com/office/drawing/2014/main" id="{1694844B-01A1-4386-874F-F04B99B512AB}"/>
               </a:ext>
             </a:extLst>
           </p:cNvPr>
@@ -13286,7 +12669,7 @@
           <p:cNvPr id="17" name="p18-s0">
             <a:extLst xmlns:a="http://schemas.openxmlformats.org/drawingml/2006/main">
               <a:ext uri="{FF2B5EF4-FFF2-40B4-BE49-F238E27FC236}">
-                <a16:creationId xmlns:a16="http://schemas.microsoft.com/office/drawing/2014/main" id="{1DFE39A1-996D-42CA-9A73-B4F2AD30F4C1}"/>
+                <a16:creationId xmlns:a16="http://schemas.microsoft.com/office/drawing/2014/main" id="{AC4BC94D-23CB-42A1-B84F-83492B45F90D}"/>
               </a:ext>
             </a:extLst>
           </p:cNvPr>
@@ -13343,7 +12726,7 @@
           <p:cNvPr id="18" name="p18-s1">
             <a:extLst xmlns:a="http://schemas.openxmlformats.org/drawingml/2006/main">
               <a:ext uri="{FF2B5EF4-FFF2-40B4-BE49-F238E27FC236}">
-                <a16:creationId xmlns:a16="http://schemas.microsoft.com/office/drawing/2014/main" id="{EF12086E-06E4-408D-885F-99C1C0F40F91}"/>
+                <a16:creationId xmlns:a16="http://schemas.microsoft.com/office/drawing/2014/main" id="{401E2358-C6FF-4E74-BA70-5AB24E2F535E}"/>
               </a:ext>
             </a:extLst>
           </p:cNvPr>
@@ -13400,7 +12783,7 @@
           <p:cNvPr id="19" name="p18-s2">
             <a:extLst xmlns:a="http://schemas.openxmlformats.org/drawingml/2006/main">
               <a:ext uri="{FF2B5EF4-FFF2-40B4-BE49-F238E27FC236}">
-                <a16:creationId xmlns:a16="http://schemas.microsoft.com/office/drawing/2014/main" id="{167D1690-0FE5-4601-BD3C-DC0A02852A5D}"/>
+                <a16:creationId xmlns:a16="http://schemas.microsoft.com/office/drawing/2014/main" id="{86E83D40-BE55-4ABD-9561-4424CC9013ED}"/>
               </a:ext>
             </a:extLst>
           </p:cNvPr>
@@ -13457,7 +12840,7 @@
           <p:cNvPr id="20" name="p18-bottom">
             <a:extLst xmlns:a="http://schemas.openxmlformats.org/drawingml/2006/main">
               <a:ext uri="{FF2B5EF4-FFF2-40B4-BE49-F238E27FC236}">
-                <a16:creationId xmlns:a16="http://schemas.microsoft.com/office/drawing/2014/main" id="{F23370A3-A081-46F5-B511-5C35D7F34F42}"/>
+                <a16:creationId xmlns:a16="http://schemas.microsoft.com/office/drawing/2014/main" id="{F7973832-B699-4902-80B0-D98D915E7BCB}"/>
               </a:ext>
             </a:extLst>
           </p:cNvPr>
@@ -13602,7 +12985,7 @@
           <p:cNvPr id="6" name="p02-have">
             <a:extLst xmlns:a="http://schemas.openxmlformats.org/drawingml/2006/main">
               <a:ext uri="{FF2B5EF4-FFF2-40B4-BE49-F238E27FC236}">
-                <a16:creationId xmlns:a16="http://schemas.microsoft.com/office/drawing/2014/main" id="{383323F9-105D-4C69-9744-F96ADE572B4E}"/>
+                <a16:creationId xmlns:a16="http://schemas.microsoft.com/office/drawing/2014/main" id="{1922D77A-36B2-49F9-BB3F-F27D50D7A54F}"/>
               </a:ext>
             </a:extLst>
           </p:cNvPr>
@@ -13657,7 +13040,7 @@
           <p:cNvPr id="7" name="p02-h0">
             <a:extLst xmlns:a="http://schemas.openxmlformats.org/drawingml/2006/main">
               <a:ext uri="{FF2B5EF4-FFF2-40B4-BE49-F238E27FC236}">
-                <a16:creationId xmlns:a16="http://schemas.microsoft.com/office/drawing/2014/main" id="{AB84AC11-DCEC-487E-B242-77505B60D6A7}"/>
+                <a16:creationId xmlns:a16="http://schemas.microsoft.com/office/drawing/2014/main" id="{C1402596-AF68-49DB-86A3-871FCE23C90A}"/>
               </a:ext>
             </a:extLst>
           </p:cNvPr>
@@ -13716,7 +13099,7 @@
           <p:cNvPr id="8" name="p02-h1">
             <a:extLst xmlns:a="http://schemas.openxmlformats.org/drawingml/2006/main">
               <a:ext uri="{FF2B5EF4-FFF2-40B4-BE49-F238E27FC236}">
-                <a16:creationId xmlns:a16="http://schemas.microsoft.com/office/drawing/2014/main" id="{8D8E4841-AE41-4792-BFC4-E4E496287013}"/>
+                <a16:creationId xmlns:a16="http://schemas.microsoft.com/office/drawing/2014/main" id="{5BAEADD2-3B1D-40DA-B291-7C33CF11CBED}"/>
               </a:ext>
             </a:extLst>
           </p:cNvPr>
@@ -13775,7 +13158,7 @@
           <p:cNvPr id="9" name="p02-a">
             <a:extLst xmlns:a="http://schemas.openxmlformats.org/drawingml/2006/main">
               <a:ext uri="{FF2B5EF4-FFF2-40B4-BE49-F238E27FC236}">
-                <a16:creationId xmlns:a16="http://schemas.microsoft.com/office/drawing/2014/main" id="{492CCB01-6084-4075-B414-FD8985516C7A}"/>
+                <a16:creationId xmlns:a16="http://schemas.microsoft.com/office/drawing/2014/main" id="{74A1660C-08C1-44DA-8474-4C74737478B0}"/>
               </a:ext>
             </a:extLst>
           </p:cNvPr>
@@ -13828,7 +13211,7 @@
           <p:cNvPr id="10" name="p02-miss">
             <a:extLst xmlns:a="http://schemas.openxmlformats.org/drawingml/2006/main">
               <a:ext uri="{FF2B5EF4-FFF2-40B4-BE49-F238E27FC236}">
-                <a16:creationId xmlns:a16="http://schemas.microsoft.com/office/drawing/2014/main" id="{C649CCA6-CABD-47BB-B5C7-2DA4F9950F54}"/>
+                <a16:creationId xmlns:a16="http://schemas.microsoft.com/office/drawing/2014/main" id="{505166DB-DAA4-4E3B-A17F-7D8DBD64AEAF}"/>
               </a:ext>
             </a:extLst>
           </p:cNvPr>
@@ -13883,7 +13266,7 @@
           <p:cNvPr id="11" name="p02-m0">
             <a:extLst xmlns:a="http://schemas.openxmlformats.org/drawingml/2006/main">
               <a:ext uri="{FF2B5EF4-FFF2-40B4-BE49-F238E27FC236}">
-                <a16:creationId xmlns:a16="http://schemas.microsoft.com/office/drawing/2014/main" id="{9800D25B-8CFE-47F6-8DE7-257AC09D75BF}"/>
+                <a16:creationId xmlns:a16="http://schemas.microsoft.com/office/drawing/2014/main" id="{1A1622A8-1085-44C2-9EF3-4A33DE35312E}"/>
               </a:ext>
             </a:extLst>
           </p:cNvPr>
@@ -13942,7 +13325,7 @@
           <p:cNvPr id="12" name="p02-m1">
             <a:extLst xmlns:a="http://schemas.openxmlformats.org/drawingml/2006/main">
               <a:ext uri="{FF2B5EF4-FFF2-40B4-BE49-F238E27FC236}">
-                <a16:creationId xmlns:a16="http://schemas.microsoft.com/office/drawing/2014/main" id="{E67F842D-4476-46F8-950C-65829558A7CD}"/>
+                <a16:creationId xmlns:a16="http://schemas.microsoft.com/office/drawing/2014/main" id="{EC13EF39-4836-4C7B-AB3D-5959B348DE1C}"/>
               </a:ext>
             </a:extLst>
           </p:cNvPr>
@@ -14001,7 +13384,7 @@
           <p:cNvPr id="13" name="p02-m2">
             <a:extLst xmlns:a="http://schemas.openxmlformats.org/drawingml/2006/main">
               <a:ext uri="{FF2B5EF4-FFF2-40B4-BE49-F238E27FC236}">
-                <a16:creationId xmlns:a16="http://schemas.microsoft.com/office/drawing/2014/main" id="{C5B6DA2C-226D-4BF7-B421-4E0B2BB0EA3E}"/>
+                <a16:creationId xmlns:a16="http://schemas.microsoft.com/office/drawing/2014/main" id="{2175992E-B3D0-433E-8499-756ACFCD8F80}"/>
               </a:ext>
             </a:extLst>
           </p:cNvPr>
@@ -14060,7 +13443,7 @@
           <p:cNvPr id="14" name="p02-bottom">
             <a:extLst xmlns:a="http://schemas.openxmlformats.org/drawingml/2006/main">
               <a:ext uri="{FF2B5EF4-FFF2-40B4-BE49-F238E27FC236}">
-                <a16:creationId xmlns:a16="http://schemas.microsoft.com/office/drawing/2014/main" id="{8CF73826-8C61-4B17-9148-C4F33D962809}"/>
+                <a16:creationId xmlns:a16="http://schemas.microsoft.com/office/drawing/2014/main" id="{461C023B-0EAC-49EB-9750-F55BCDA5C9B0}"/>
               </a:ext>
             </a:extLst>
           </p:cNvPr>
@@ -14168,7 +13551,7 @@
                 <a:ea typeface="Microsoft YaHei"/>
                 <a:cs typeface="Microsoft YaHei"/>
               </a:rPr>
-              <a:t>问题门提交与失败回退路径</a:t>
+              <a:t>本讲知识点总结</a:t>
             </a:r>
             <a:endParaRPr/>
           </a:p>
@@ -14204,30 +13587,30 @@
       </p:sp>
       <p:sp>
         <p:nvSpPr>
-          <p:cNvPr id="6" name="p19-submit">
-            <a:extLst xmlns:a="http://schemas.openxmlformats.org/drawingml/2006/main">
-              <a:ext uri="{FF2B5EF4-FFF2-40B4-BE49-F238E27FC236}">
-                <a16:creationId xmlns:a16="http://schemas.microsoft.com/office/drawing/2014/main" id="{CBFAC7CC-B005-4B8A-B9C1-A8876C42FE17}"/>
-              </a:ext>
-            </a:extLst>
-          </p:cNvPr>
-          <p:cNvSpPr>
-            <a:spLocks xmlns:a="http://schemas.openxmlformats.org/drawingml/2006/main" noGrp="1"/>
-          </p:cNvSpPr>
-          <p:nvPr/>
-        </p:nvSpPr>
-        <p:spPr>
-          <a:xfrm xmlns:a="http://schemas.openxmlformats.org/drawingml/2006/main">
-            <a:off x="666750" y="1095375"/>
-            <a:ext cx="2095500" cy="533400"/>
+          <p:cNvPr id="6" name="p20-n0">
+            <a:extLst xmlns:a="http://schemas.openxmlformats.org/drawingml/2006/main">
+              <a:ext uri="{FF2B5EF4-FFF2-40B4-BE49-F238E27FC236}">
+                <a16:creationId xmlns:a16="http://schemas.microsoft.com/office/drawing/2014/main" id="{2CC28FD0-1ACA-4E80-BFF3-BC71B43B7150}"/>
+              </a:ext>
+            </a:extLst>
+          </p:cNvPr>
+          <p:cNvSpPr>
+            <a:spLocks xmlns:a="http://schemas.openxmlformats.org/drawingml/2006/main" noGrp="1"/>
+          </p:cNvSpPr>
+          <p:nvPr/>
+        </p:nvSpPr>
+        <p:spPr>
+          <a:xfrm xmlns:a="http://schemas.openxmlformats.org/drawingml/2006/main">
+            <a:off x="495300" y="1104900"/>
+            <a:ext cx="476250" cy="476250"/>
           </a:xfrm>
           <a:prstGeom xmlns:a="http://schemas.openxmlformats.org/drawingml/2006/main" prst="roundRect">
             <a:avLst>
-              <a:gd name="adj" fmla="val 14286"/>
+              <a:gd name="adj" fmla="val 16000"/>
             </a:avLst>
           </a:prstGeom>
           <a:solidFill xmlns:a="http://schemas.openxmlformats.org/drawingml/2006/main">
-            <a:srgbClr val="28745A"/>
+            <a:srgbClr val="18354E"/>
           </a:solidFill>
           <a:ln xmlns:a="http://schemas.openxmlformats.org/drawingml/2006/main" w="0">
             <a:noFill/>
@@ -14239,14 +13622,14 @@
           <a:lstStyle xmlns:a="http://schemas.openxmlformats.org/drawingml/2006/main"/>
           <a:p xmlns:a="http://schemas.openxmlformats.org/drawingml/2006/main">
             <a:pPr algn="ctr">
-              <a:defRPr sz="1800" b="1">
+              <a:defRPr sz="1500" b="1">
                 <a:solidFill>
                   <a:srgbClr val="FFFFFF"/>
                 </a:solidFill>
               </a:defRPr>
             </a:pPr>
             <a:r>
-              <a:rPr sz="1800" b="1">
+              <a:rPr sz="1500" b="1">
                 <a:solidFill>
                   <a:srgbClr val="FFFFFF"/>
                 </a:solidFill>
@@ -14254,37 +13637,94 @@
                 <a:ea typeface="Microsoft YaHei"/>
                 <a:cs typeface="Microsoft YaHei"/>
               </a:rPr>
-              <a:t>一次提交</a:t>
-            </a:r>
-          </a:p>
-        </p:txBody>
-      </p:sp>
-      <p:sp>
-        <p:nvSpPr>
-          <p:cNvPr id="7" name="p19-how">
-            <a:extLst xmlns:a="http://schemas.openxmlformats.org/drawingml/2006/main">
-              <a:ext uri="{FF2B5EF4-FFF2-40B4-BE49-F238E27FC236}">
-                <a16:creationId xmlns:a16="http://schemas.microsoft.com/office/drawing/2014/main" id="{EFE503B0-CEDF-404C-A76F-3B3154F43131}"/>
-              </a:ext>
-            </a:extLst>
-          </p:cNvPr>
-          <p:cNvSpPr>
-            <a:spLocks xmlns:a="http://schemas.openxmlformats.org/drawingml/2006/main" noGrp="1"/>
-          </p:cNvSpPr>
-          <p:nvPr/>
-        </p:nvSpPr>
-        <p:spPr>
-          <a:xfrm xmlns:a="http://schemas.openxmlformats.org/drawingml/2006/main">
-            <a:off x="3048000" y="1000125"/>
-            <a:ext cx="3238500" cy="838200"/>
+              <a:t>1</a:t>
+            </a:r>
+          </a:p>
+        </p:txBody>
+      </p:sp>
+      <p:sp>
+        <p:nvSpPr>
+          <p:cNvPr id="7" name="p20-h0">
+            <a:extLst xmlns:a="http://schemas.openxmlformats.org/drawingml/2006/main">
+              <a:ext uri="{FF2B5EF4-FFF2-40B4-BE49-F238E27FC236}">
+                <a16:creationId xmlns:a16="http://schemas.microsoft.com/office/drawing/2014/main" id="{6389CA5F-C124-4D97-AF49-8B42D65DE2E3}"/>
+              </a:ext>
+            </a:extLst>
+          </p:cNvPr>
+          <p:cNvSpPr>
+            <a:spLocks xmlns:a="http://schemas.openxmlformats.org/drawingml/2006/main" noGrp="1"/>
+          </p:cNvSpPr>
+          <p:nvPr/>
+        </p:nvSpPr>
+        <p:spPr>
+          <a:xfrm xmlns:a="http://schemas.openxmlformats.org/drawingml/2006/main">
+            <a:off x="1066800" y="1047750"/>
+            <a:ext cx="2047875" cy="571500"/>
           </a:xfrm>
           <a:prstGeom xmlns:a="http://schemas.openxmlformats.org/drawingml/2006/main" prst="roundRect">
             <a:avLst>
-              <a:gd name="adj" fmla="val 9091"/>
+              <a:gd name="adj" fmla="val 13333"/>
             </a:avLst>
           </a:prstGeom>
           <a:solidFill xmlns:a="http://schemas.openxmlformats.org/drawingml/2006/main">
-            <a:srgbClr val="E7F2ED"/>
+            <a:srgbClr val="E8F0F6"/>
+          </a:solidFill>
+          <a:ln xmlns:a="http://schemas.openxmlformats.org/drawingml/2006/main" w="0">
+            <a:noFill/>
+            <a:prstDash val="solid"/>
+          </a:ln>
+        </p:spPr>
+        <p:txBody>
+          <a:bodyPr xmlns:a="http://schemas.openxmlformats.org/drawingml/2006/main" lIns="76200" tIns="38100" rIns="76200" bIns="38100" anchor="ctr"/>
+          <a:lstStyle xmlns:a="http://schemas.openxmlformats.org/drawingml/2006/main"/>
+          <a:p xmlns:a="http://schemas.openxmlformats.org/drawingml/2006/main">
+            <a:pPr algn="ctr">
+              <a:defRPr sz="1650" b="1">
+                <a:solidFill>
+                  <a:srgbClr val="18354E"/>
+                </a:solidFill>
+              </a:defRPr>
+            </a:pPr>
+            <a:r>
+              <a:rPr sz="1650" b="1">
+                <a:solidFill>
+                  <a:srgbClr val="18354E"/>
+                </a:solidFill>
+                <a:latin typeface="Microsoft YaHei"/>
+                <a:ea typeface="Microsoft YaHei"/>
+                <a:cs typeface="Microsoft YaHei"/>
+              </a:rPr>
+              <a:t>结构性问题</a:t>
+            </a:r>
+          </a:p>
+        </p:txBody>
+      </p:sp>
+      <p:sp>
+        <p:nvSpPr>
+          <p:cNvPr id="8" name="p20-d0">
+            <a:extLst xmlns:a="http://schemas.openxmlformats.org/drawingml/2006/main">
+              <a:ext uri="{FF2B5EF4-FFF2-40B4-BE49-F238E27FC236}">
+                <a16:creationId xmlns:a16="http://schemas.microsoft.com/office/drawing/2014/main" id="{48F49CA6-B1D1-4FF8-BD47-E9AF80058F07}"/>
+              </a:ext>
+            </a:extLst>
+          </p:cNvPr>
+          <p:cNvSpPr>
+            <a:spLocks xmlns:a="http://schemas.openxmlformats.org/drawingml/2006/main" noGrp="1"/>
+          </p:cNvSpPr>
+          <p:nvPr/>
+        </p:nvSpPr>
+        <p:spPr>
+          <a:xfrm xmlns:a="http://schemas.openxmlformats.org/drawingml/2006/main">
+            <a:off x="495300" y="1905000"/>
+            <a:ext cx="2638425" cy="1524000"/>
+          </a:xfrm>
+          <a:prstGeom xmlns:a="http://schemas.openxmlformats.org/drawingml/2006/main" prst="roundRect">
+            <a:avLst>
+              <a:gd name="adj" fmla="val 5000"/>
+            </a:avLst>
+          </a:prstGeom>
+          <a:solidFill xmlns:a="http://schemas.openxmlformats.org/drawingml/2006/main">
+            <a:srgbClr val="FFFFFF"/>
           </a:solidFill>
           <a:ln xmlns:a="http://schemas.openxmlformats.org/drawingml/2006/main" w="9525">
             <a:solidFill>
@@ -14298,176 +13738,48 @@
           <a:lstStyle xmlns:a="http://schemas.openxmlformats.org/drawingml/2006/main"/>
           <a:p xmlns:a="http://schemas.openxmlformats.org/drawingml/2006/main">
             <a:pPr algn="ctr">
-              <a:defRPr sz="1725" b="1">
-                <a:solidFill>
-                  <a:srgbClr val="18354E"/>
-                </a:solidFill>
-              </a:defRPr>
-            </a:pPr>
-            <a:r>
-              <a:rPr sz="1725" b="1">
-                <a:solidFill>
-                  <a:srgbClr val="18354E"/>
-                </a:solidFill>
-                <a:latin typeface="Microsoft YaHei"/>
-                <a:ea typeface="Microsoft YaHei"/>
-                <a:cs typeface="Microsoft YaHei"/>
-              </a:rPr>
-              <a:t>当前个人项目版本</a:t>
-            </a:r>
-          </a:p>
-          <a:p xmlns:a="http://schemas.openxmlformats.org/drawingml/2006/main">
-            <a:pPr algn="ctr">
-              <a:defRPr sz="1725" b="1">
-                <a:solidFill>
-                  <a:srgbClr val="18354E"/>
-                </a:solidFill>
-              </a:defRPr>
-            </a:pPr>
-            <a:r>
-              <a:rPr sz="1725" b="1">
-                <a:solidFill>
-                  <a:srgbClr val="18354E"/>
-                </a:solidFill>
-                <a:latin typeface="Microsoft YaHei"/>
-                <a:ea typeface="Microsoft YaHei"/>
-                <a:cs typeface="Microsoft YaHei"/>
-              </a:rPr>
-              <a:t>链接 / tag / 压缩包</a:t>
-            </a:r>
-          </a:p>
-        </p:txBody>
-      </p:sp>
-      <p:sp>
-        <p:nvSpPr>
-          <p:cNvPr id="8" name="p19-no">
-            <a:extLst xmlns:a="http://schemas.openxmlformats.org/drawingml/2006/main">
-              <a:ext uri="{FF2B5EF4-FFF2-40B4-BE49-F238E27FC236}">
-                <a16:creationId xmlns:a16="http://schemas.microsoft.com/office/drawing/2014/main" id="{D042AE8D-64E9-46B6-B266-7827AE9A82A9}"/>
-              </a:ext>
-            </a:extLst>
-          </p:cNvPr>
-          <p:cNvSpPr>
-            <a:spLocks xmlns:a="http://schemas.openxmlformats.org/drawingml/2006/main" noGrp="1"/>
-          </p:cNvSpPr>
-          <p:nvPr/>
-        </p:nvSpPr>
-        <p:spPr>
-          <a:xfrm xmlns:a="http://schemas.openxmlformats.org/drawingml/2006/main">
-            <a:off x="6667500" y="1095375"/>
-            <a:ext cx="4762500" cy="533400"/>
-          </a:xfrm>
-          <a:prstGeom xmlns:a="http://schemas.openxmlformats.org/drawingml/2006/main" prst="rect">
-            <a:avLst/>
-          </a:prstGeom>
-          <a:solidFill xmlns:a="http://schemas.openxmlformats.org/drawingml/2006/main">
-            <a:srgbClr val="F8E9EA"/>
-          </a:solidFill>
-          <a:ln xmlns:a="http://schemas.openxmlformats.org/drawingml/2006/main" w="0">
-            <a:noFill/>
-            <a:prstDash val="solid"/>
-          </a:ln>
-        </p:spPr>
-        <p:txBody>
-          <a:bodyPr xmlns:a="http://schemas.openxmlformats.org/drawingml/2006/main" lIns="76200" tIns="38100" rIns="76200" bIns="38100" anchor="ctr"/>
-          <a:lstStyle xmlns:a="http://schemas.openxmlformats.org/drawingml/2006/main"/>
-          <a:p xmlns:a="http://schemas.openxmlformats.org/drawingml/2006/main">
-            <a:pPr algn="ctr">
-              <a:defRPr sz="1650" b="1">
-                <a:solidFill>
-                  <a:srgbClr val="C8161E"/>
-                </a:solidFill>
-              </a:defRPr>
-            </a:pPr>
-            <a:r>
-              <a:rPr sz="1650" b="1">
-                <a:solidFill>
-                  <a:srgbClr val="C8161E"/>
-                </a:solidFill>
-                <a:latin typeface="Microsoft YaHei"/>
-                <a:ea typeface="Microsoft YaHei"/>
-                <a:cs typeface="Microsoft YaHei"/>
-              </a:rPr>
-              <a:t>不重复制作与项目分离的汇报文档</a:t>
-            </a:r>
-          </a:p>
-        </p:txBody>
-      </p:sp>
-      <p:sp>
-        <p:nvSpPr>
-          <p:cNvPr id="9" name="p19-h0">
-            <a:extLst xmlns:a="http://schemas.openxmlformats.org/drawingml/2006/main">
-              <a:ext uri="{FF2B5EF4-FFF2-40B4-BE49-F238E27FC236}">
-                <a16:creationId xmlns:a16="http://schemas.microsoft.com/office/drawing/2014/main" id="{EB4C93A7-9770-44EF-A38C-EA411F41E9A4}"/>
-              </a:ext>
-            </a:extLst>
-          </p:cNvPr>
-          <p:cNvSpPr>
-            <a:spLocks xmlns:a="http://schemas.openxmlformats.org/drawingml/2006/main" noGrp="1"/>
-          </p:cNvSpPr>
-          <p:nvPr/>
-        </p:nvSpPr>
-        <p:spPr>
-          <a:xfrm xmlns:a="http://schemas.openxmlformats.org/drawingml/2006/main">
-            <a:off x="714375" y="2143125"/>
-            <a:ext cx="2381250" cy="457200"/>
-          </a:xfrm>
-          <a:prstGeom xmlns:a="http://schemas.openxmlformats.org/drawingml/2006/main" prst="roundRect">
-            <a:avLst>
-              <a:gd name="adj" fmla="val 16667"/>
-            </a:avLst>
-          </a:prstGeom>
-          <a:solidFill xmlns:a="http://schemas.openxmlformats.org/drawingml/2006/main">
-            <a:srgbClr val="F8E9EA"/>
-          </a:solidFill>
-          <a:ln xmlns:a="http://schemas.openxmlformats.org/drawingml/2006/main" w="0">
-            <a:noFill/>
-            <a:prstDash val="solid"/>
-          </a:ln>
-        </p:spPr>
-        <p:txBody>
-          <a:bodyPr xmlns:a="http://schemas.openxmlformats.org/drawingml/2006/main" lIns="76200" tIns="38100" rIns="76200" bIns="38100" anchor="ctr"/>
-          <a:lstStyle xmlns:a="http://schemas.openxmlformats.org/drawingml/2006/main"/>
-          <a:p xmlns:a="http://schemas.openxmlformats.org/drawingml/2006/main">
-            <a:pPr algn="ctr">
-              <a:defRPr sz="1425" b="1">
-                <a:solidFill>
-                  <a:srgbClr val="C8161E"/>
-                </a:solidFill>
-              </a:defRPr>
-            </a:pPr>
-            <a:r>
-              <a:rPr sz="1425" b="1">
-                <a:solidFill>
-                  <a:srgbClr val="C8161E"/>
-                </a:solidFill>
-                <a:latin typeface="Microsoft YaHei"/>
-                <a:ea typeface="Microsoft YaHei"/>
-                <a:cs typeface="Microsoft YaHei"/>
-              </a:rPr>
-              <a:t>缺直接证据</a:t>
-            </a:r>
-          </a:p>
-        </p:txBody>
-      </p:sp>
-      <p:sp>
-        <p:nvSpPr>
-          <p:cNvPr id="10" name="p19-a0">
-            <a:extLst xmlns:a="http://schemas.openxmlformats.org/drawingml/2006/main">
-              <a:ext uri="{FF2B5EF4-FFF2-40B4-BE49-F238E27FC236}">
-                <a16:creationId xmlns:a16="http://schemas.microsoft.com/office/drawing/2014/main" id="{17AC3E7B-34E5-4BDD-A85B-4CABF45467D2}"/>
-              </a:ext>
-            </a:extLst>
-          </p:cNvPr>
-          <p:cNvSpPr>
-            <a:spLocks xmlns:a="http://schemas.openxmlformats.org/drawingml/2006/main" noGrp="1"/>
-          </p:cNvSpPr>
-          <p:nvPr/>
-        </p:nvSpPr>
-        <p:spPr>
-          <a:xfrm xmlns:a="http://schemas.openxmlformats.org/drawingml/2006/main">
-            <a:off x="3286125" y="2190750"/>
-            <a:ext cx="523875" cy="381000"/>
+              <a:lnSpc>
+                <a:spcPct val="116000"/>
+              </a:lnSpc>
+              <a:buNone/>
+              <a:defRPr sz="1500" b="1">
+                <a:solidFill>
+                  <a:srgbClr val="263746"/>
+                </a:solidFill>
+              </a:defRPr>
+            </a:pPr>
+            <a:r>
+              <a:rPr sz="1500" b="1">
+                <a:solidFill>
+                  <a:srgbClr val="263746"/>
+                </a:solidFill>
+                <a:latin typeface="Microsoft YaHei"/>
+                <a:ea typeface="Microsoft YaHei"/>
+                <a:cs typeface="Microsoft YaHei"/>
+              </a:rPr>
+              <a:t>写清条件、对象、干预与结果</a:t>
+            </a:r>
+          </a:p>
+        </p:txBody>
+      </p:sp>
+      <p:sp>
+        <p:nvSpPr>
+          <p:cNvPr id="9" name="p20-arrow0">
+            <a:extLst xmlns:a="http://schemas.openxmlformats.org/drawingml/2006/main">
+              <a:ext uri="{FF2B5EF4-FFF2-40B4-BE49-F238E27FC236}">
+                <a16:creationId xmlns:a16="http://schemas.microsoft.com/office/drawing/2014/main" id="{DD3AFD90-518C-4F5D-964B-C327AB1322DB}"/>
+              </a:ext>
+            </a:extLst>
+          </p:cNvPr>
+          <p:cNvSpPr>
+            <a:spLocks xmlns:a="http://schemas.openxmlformats.org/drawingml/2006/main" noGrp="1"/>
+          </p:cNvSpPr>
+          <p:nvPr/>
+        </p:nvSpPr>
+        <p:spPr>
+          <a:xfrm xmlns:a="http://schemas.openxmlformats.org/drawingml/2006/main">
+            <a:off x="3143250" y="2438400"/>
+            <a:ext cx="285750" cy="381000"/>
           </a:xfrm>
           <a:prstGeom xmlns:a="http://schemas.openxmlformats.org/drawingml/2006/main" prst="rect">
             <a:avLst/>
@@ -14505,26 +13817,140 @@
       </p:sp>
       <p:sp>
         <p:nvSpPr>
-          <p:cNvPr id="11" name="p19-d0">
-            <a:extLst xmlns:a="http://schemas.openxmlformats.org/drawingml/2006/main">
-              <a:ext uri="{FF2B5EF4-FFF2-40B4-BE49-F238E27FC236}">
-                <a16:creationId xmlns:a16="http://schemas.microsoft.com/office/drawing/2014/main" id="{16E5D437-241A-4ABA-81D5-3014E5C90C74}"/>
-              </a:ext>
-            </a:extLst>
-          </p:cNvPr>
-          <p:cNvSpPr>
-            <a:spLocks xmlns:a="http://schemas.openxmlformats.org/drawingml/2006/main" noGrp="1"/>
-          </p:cNvSpPr>
-          <p:nvPr/>
-        </p:nvSpPr>
-        <p:spPr>
-          <a:xfrm xmlns:a="http://schemas.openxmlformats.org/drawingml/2006/main">
-            <a:off x="4000500" y="2143125"/>
-            <a:ext cx="6667500" cy="457200"/>
+          <p:cNvPr id="10" name="p20-n1">
+            <a:extLst xmlns:a="http://schemas.openxmlformats.org/drawingml/2006/main">
+              <a:ext uri="{FF2B5EF4-FFF2-40B4-BE49-F238E27FC236}">
+                <a16:creationId xmlns:a16="http://schemas.microsoft.com/office/drawing/2014/main" id="{B08B5469-8086-46C3-AAEB-610BB3C7DBEC}"/>
+              </a:ext>
+            </a:extLst>
+          </p:cNvPr>
+          <p:cNvSpPr>
+            <a:spLocks xmlns:a="http://schemas.openxmlformats.org/drawingml/2006/main" noGrp="1"/>
+          </p:cNvSpPr>
+          <p:nvPr/>
+        </p:nvSpPr>
+        <p:spPr>
+          <a:xfrm xmlns:a="http://schemas.openxmlformats.org/drawingml/2006/main">
+            <a:off x="3419475" y="1104900"/>
+            <a:ext cx="476250" cy="476250"/>
           </a:xfrm>
           <a:prstGeom xmlns:a="http://schemas.openxmlformats.org/drawingml/2006/main" prst="roundRect">
             <a:avLst>
-              <a:gd name="adj" fmla="val 16667"/>
+              <a:gd name="adj" fmla="val 16000"/>
+            </a:avLst>
+          </a:prstGeom>
+          <a:solidFill xmlns:a="http://schemas.openxmlformats.org/drawingml/2006/main">
+            <a:srgbClr val="2F638A"/>
+          </a:solidFill>
+          <a:ln xmlns:a="http://schemas.openxmlformats.org/drawingml/2006/main" w="0">
+            <a:noFill/>
+            <a:prstDash val="solid"/>
+          </a:ln>
+        </p:spPr>
+        <p:txBody>
+          <a:bodyPr xmlns:a="http://schemas.openxmlformats.org/drawingml/2006/main" lIns="76200" tIns="38100" rIns="76200" bIns="38100" anchor="ctr"/>
+          <a:lstStyle xmlns:a="http://schemas.openxmlformats.org/drawingml/2006/main"/>
+          <a:p xmlns:a="http://schemas.openxmlformats.org/drawingml/2006/main">
+            <a:pPr algn="ctr">
+              <a:defRPr sz="1500" b="1">
+                <a:solidFill>
+                  <a:srgbClr val="FFFFFF"/>
+                </a:solidFill>
+              </a:defRPr>
+            </a:pPr>
+            <a:r>
+              <a:rPr sz="1500" b="1">
+                <a:solidFill>
+                  <a:srgbClr val="FFFFFF"/>
+                </a:solidFill>
+                <a:latin typeface="Microsoft YaHei"/>
+                <a:ea typeface="Microsoft YaHei"/>
+                <a:cs typeface="Microsoft YaHei"/>
+              </a:rPr>
+              <a:t>2</a:t>
+            </a:r>
+          </a:p>
+        </p:txBody>
+      </p:sp>
+      <p:sp>
+        <p:nvSpPr>
+          <p:cNvPr id="11" name="p20-h1">
+            <a:extLst xmlns:a="http://schemas.openxmlformats.org/drawingml/2006/main">
+              <a:ext uri="{FF2B5EF4-FFF2-40B4-BE49-F238E27FC236}">
+                <a16:creationId xmlns:a16="http://schemas.microsoft.com/office/drawing/2014/main" id="{658666A6-4E1D-4AC8-B2EE-7A1F93C041AD}"/>
+              </a:ext>
+            </a:extLst>
+          </p:cNvPr>
+          <p:cNvSpPr>
+            <a:spLocks xmlns:a="http://schemas.openxmlformats.org/drawingml/2006/main" noGrp="1"/>
+          </p:cNvSpPr>
+          <p:nvPr/>
+        </p:nvSpPr>
+        <p:spPr>
+          <a:xfrm xmlns:a="http://schemas.openxmlformats.org/drawingml/2006/main">
+            <a:off x="3990975" y="1047750"/>
+            <a:ext cx="2047875" cy="571500"/>
+          </a:xfrm>
+          <a:prstGeom xmlns:a="http://schemas.openxmlformats.org/drawingml/2006/main" prst="roundRect">
+            <a:avLst>
+              <a:gd name="adj" fmla="val 13333"/>
+            </a:avLst>
+          </a:prstGeom>
+          <a:solidFill xmlns:a="http://schemas.openxmlformats.org/drawingml/2006/main">
+            <a:srgbClr val="E8F0F6"/>
+          </a:solidFill>
+          <a:ln xmlns:a="http://schemas.openxmlformats.org/drawingml/2006/main" w="0">
+            <a:noFill/>
+            <a:prstDash val="solid"/>
+          </a:ln>
+        </p:spPr>
+        <p:txBody>
+          <a:bodyPr xmlns:a="http://schemas.openxmlformats.org/drawingml/2006/main" lIns="76200" tIns="38100" rIns="76200" bIns="38100" anchor="ctr"/>
+          <a:lstStyle xmlns:a="http://schemas.openxmlformats.org/drawingml/2006/main"/>
+          <a:p xmlns:a="http://schemas.openxmlformats.org/drawingml/2006/main">
+            <a:pPr algn="ctr">
+              <a:defRPr sz="1650" b="1">
+                <a:solidFill>
+                  <a:srgbClr val="2F638A"/>
+                </a:solidFill>
+              </a:defRPr>
+            </a:pPr>
+            <a:r>
+              <a:rPr sz="1650" b="1">
+                <a:solidFill>
+                  <a:srgbClr val="2F638A"/>
+                </a:solidFill>
+                <a:latin typeface="Microsoft YaHei"/>
+                <a:ea typeface="Microsoft YaHei"/>
+                <a:cs typeface="Microsoft YaHei"/>
+              </a:rPr>
+              <a:t>可证伪命题</a:t>
+            </a:r>
+          </a:p>
+        </p:txBody>
+      </p:sp>
+      <p:sp>
+        <p:nvSpPr>
+          <p:cNvPr id="12" name="p20-d1">
+            <a:extLst xmlns:a="http://schemas.openxmlformats.org/drawingml/2006/main">
+              <a:ext uri="{FF2B5EF4-FFF2-40B4-BE49-F238E27FC236}">
+                <a16:creationId xmlns:a16="http://schemas.microsoft.com/office/drawing/2014/main" id="{32BF98BB-63EA-43ED-9A39-F084D8EB4858}"/>
+              </a:ext>
+            </a:extLst>
+          </p:cNvPr>
+          <p:cNvSpPr>
+            <a:spLocks xmlns:a="http://schemas.openxmlformats.org/drawingml/2006/main" noGrp="1"/>
+          </p:cNvSpPr>
+          <p:nvPr/>
+        </p:nvSpPr>
+        <p:spPr>
+          <a:xfrm xmlns:a="http://schemas.openxmlformats.org/drawingml/2006/main">
+            <a:off x="3419475" y="1905000"/>
+            <a:ext cx="2638425" cy="1524000"/>
+          </a:xfrm>
+          <a:prstGeom xmlns:a="http://schemas.openxmlformats.org/drawingml/2006/main" prst="roundRect">
+            <a:avLst>
+              <a:gd name="adj" fmla="val 5000"/>
             </a:avLst>
           </a:prstGeom>
           <a:solidFill xmlns:a="http://schemas.openxmlformats.org/drawingml/2006/main">
@@ -14541,15 +13967,19 @@
           <a:bodyPr xmlns:a="http://schemas.openxmlformats.org/drawingml/2006/main" lIns="76200" tIns="38100" rIns="76200" bIns="38100" anchor="ctr"/>
           <a:lstStyle xmlns:a="http://schemas.openxmlformats.org/drawingml/2006/main"/>
           <a:p xmlns:a="http://schemas.openxmlformats.org/drawingml/2006/main">
-            <a:pPr algn="l">
-              <a:defRPr sz="1425" b="1">
+            <a:pPr algn="ctr">
+              <a:lnSpc>
+                <a:spcPct val="116000"/>
+              </a:lnSpc>
+              <a:buNone/>
+              <a:defRPr sz="1500" b="1">
                 <a:solidFill>
                   <a:srgbClr val="263746"/>
                 </a:solidFill>
               </a:defRPr>
             </a:pPr>
             <a:r>
-              <a:rPr sz="1425" b="1">
+              <a:rPr sz="1500" b="1">
                 <a:solidFill>
                   <a:srgbClr val="263746"/>
                 </a:solidFill>
@@ -14557,86 +13987,29 @@
                 <a:ea typeface="Microsoft YaHei"/>
                 <a:cs typeface="Microsoft YaHei"/>
               </a:rPr>
-              <a:t>回第 3-4 课：检索 / 精读</a:t>
-            </a:r>
-          </a:p>
-        </p:txBody>
-      </p:sp>
-      <p:sp>
-        <p:nvSpPr>
-          <p:cNvPr id="12" name="p19-h1">
-            <a:extLst xmlns:a="http://schemas.openxmlformats.org/drawingml/2006/main">
-              <a:ext uri="{FF2B5EF4-FFF2-40B4-BE49-F238E27FC236}">
-                <a16:creationId xmlns:a16="http://schemas.microsoft.com/office/drawing/2014/main" id="{5217E737-D9B3-4FD1-A2D3-E6C86B4EB8D0}"/>
-              </a:ext>
-            </a:extLst>
-          </p:cNvPr>
-          <p:cNvSpPr>
-            <a:spLocks xmlns:a="http://schemas.openxmlformats.org/drawingml/2006/main" noGrp="1"/>
-          </p:cNvSpPr>
-          <p:nvPr/>
-        </p:nvSpPr>
-        <p:spPr>
-          <a:xfrm xmlns:a="http://schemas.openxmlformats.org/drawingml/2006/main">
-            <a:off x="714375" y="2733675"/>
-            <a:ext cx="2381250" cy="457200"/>
-          </a:xfrm>
-          <a:prstGeom xmlns:a="http://schemas.openxmlformats.org/drawingml/2006/main" prst="roundRect">
-            <a:avLst>
-              <a:gd name="adj" fmla="val 16667"/>
-            </a:avLst>
-          </a:prstGeom>
-          <a:solidFill xmlns:a="http://schemas.openxmlformats.org/drawingml/2006/main">
-            <a:srgbClr val="F8E9EA"/>
-          </a:solidFill>
-          <a:ln xmlns:a="http://schemas.openxmlformats.org/drawingml/2006/main" w="0">
-            <a:noFill/>
-            <a:prstDash val="solid"/>
-          </a:ln>
-        </p:spPr>
-        <p:txBody>
-          <a:bodyPr xmlns:a="http://schemas.openxmlformats.org/drawingml/2006/main" lIns="76200" tIns="38100" rIns="76200" bIns="38100" anchor="ctr"/>
-          <a:lstStyle xmlns:a="http://schemas.openxmlformats.org/drawingml/2006/main"/>
-          <a:p xmlns:a="http://schemas.openxmlformats.org/drawingml/2006/main">
-            <a:pPr algn="ctr">
-              <a:defRPr sz="1425" b="1">
-                <a:solidFill>
-                  <a:srgbClr val="C8161E"/>
-                </a:solidFill>
-              </a:defRPr>
-            </a:pPr>
-            <a:r>
-              <a:rPr sz="1425" b="1">
-                <a:solidFill>
-                  <a:srgbClr val="C8161E"/>
-                </a:solidFill>
-                <a:latin typeface="Microsoft YaHei"/>
-                <a:ea typeface="Microsoft YaHei"/>
-                <a:cs typeface="Microsoft YaHei"/>
-              </a:rPr>
-              <a:t>问题过大</a:t>
-            </a:r>
-          </a:p>
-        </p:txBody>
-      </p:sp>
-      <p:sp>
-        <p:nvSpPr>
-          <p:cNvPr id="13" name="p19-a1">
-            <a:extLst xmlns:a="http://schemas.openxmlformats.org/drawingml/2006/main">
-              <a:ext uri="{FF2B5EF4-FFF2-40B4-BE49-F238E27FC236}">
-                <a16:creationId xmlns:a16="http://schemas.microsoft.com/office/drawing/2014/main" id="{9EC887A6-EB68-4A3E-A9C2-EB991B6F7BA7}"/>
-              </a:ext>
-            </a:extLst>
-          </p:cNvPr>
-          <p:cNvSpPr>
-            <a:spLocks xmlns:a="http://schemas.openxmlformats.org/drawingml/2006/main" noGrp="1"/>
-          </p:cNvSpPr>
-          <p:nvPr/>
-        </p:nvSpPr>
-        <p:spPr>
-          <a:xfrm xmlns:a="http://schemas.openxmlformats.org/drawingml/2006/main">
-            <a:off x="3286125" y="2781300"/>
-            <a:ext cx="523875" cy="381000"/>
+              <a:t>明确对照、指标与推翻条件</a:t>
+            </a:r>
+          </a:p>
+        </p:txBody>
+      </p:sp>
+      <p:sp>
+        <p:nvSpPr>
+          <p:cNvPr id="13" name="p20-arrow1">
+            <a:extLst xmlns:a="http://schemas.openxmlformats.org/drawingml/2006/main">
+              <a:ext uri="{FF2B5EF4-FFF2-40B4-BE49-F238E27FC236}">
+                <a16:creationId xmlns:a16="http://schemas.microsoft.com/office/drawing/2014/main" id="{1769F5E1-6C79-49CD-9492-54FA2EF6D9F9}"/>
+              </a:ext>
+            </a:extLst>
+          </p:cNvPr>
+          <p:cNvSpPr>
+            <a:spLocks xmlns:a="http://schemas.openxmlformats.org/drawingml/2006/main" noGrp="1"/>
+          </p:cNvSpPr>
+          <p:nvPr/>
+        </p:nvSpPr>
+        <p:spPr>
+          <a:xfrm xmlns:a="http://schemas.openxmlformats.org/drawingml/2006/main">
+            <a:off x="6067425" y="2438400"/>
+            <a:ext cx="285750" cy="381000"/>
           </a:xfrm>
           <a:prstGeom xmlns:a="http://schemas.openxmlformats.org/drawingml/2006/main" prst="rect">
             <a:avLst/>
@@ -14674,26 +14047,140 @@
       </p:sp>
       <p:sp>
         <p:nvSpPr>
-          <p:cNvPr id="14" name="p19-d1">
-            <a:extLst xmlns:a="http://schemas.openxmlformats.org/drawingml/2006/main">
-              <a:ext uri="{FF2B5EF4-FFF2-40B4-BE49-F238E27FC236}">
-                <a16:creationId xmlns:a16="http://schemas.microsoft.com/office/drawing/2014/main" id="{52C8C2EB-E601-4D09-BA5A-71621E261423}"/>
-              </a:ext>
-            </a:extLst>
-          </p:cNvPr>
-          <p:cNvSpPr>
-            <a:spLocks xmlns:a="http://schemas.openxmlformats.org/drawingml/2006/main" noGrp="1"/>
-          </p:cNvSpPr>
-          <p:nvPr/>
-        </p:nvSpPr>
-        <p:spPr>
-          <a:xfrm xmlns:a="http://schemas.openxmlformats.org/drawingml/2006/main">
-            <a:off x="4000500" y="2733675"/>
-            <a:ext cx="6667500" cy="457200"/>
+          <p:cNvPr id="14" name="p20-n2">
+            <a:extLst xmlns:a="http://schemas.openxmlformats.org/drawingml/2006/main">
+              <a:ext uri="{FF2B5EF4-FFF2-40B4-BE49-F238E27FC236}">
+                <a16:creationId xmlns:a16="http://schemas.microsoft.com/office/drawing/2014/main" id="{12528EE3-ED43-4788-8B1F-BEC4D19BF91E}"/>
+              </a:ext>
+            </a:extLst>
+          </p:cNvPr>
+          <p:cNvSpPr>
+            <a:spLocks xmlns:a="http://schemas.openxmlformats.org/drawingml/2006/main" noGrp="1"/>
+          </p:cNvSpPr>
+          <p:nvPr/>
+        </p:nvSpPr>
+        <p:spPr>
+          <a:xfrm xmlns:a="http://schemas.openxmlformats.org/drawingml/2006/main">
+            <a:off x="6343650" y="1104900"/>
+            <a:ext cx="476250" cy="476250"/>
           </a:xfrm>
           <a:prstGeom xmlns:a="http://schemas.openxmlformats.org/drawingml/2006/main" prst="roundRect">
             <a:avLst>
-              <a:gd name="adj" fmla="val 16667"/>
+              <a:gd name="adj" fmla="val 16000"/>
+            </a:avLst>
+          </a:prstGeom>
+          <a:solidFill xmlns:a="http://schemas.openxmlformats.org/drawingml/2006/main">
+            <a:srgbClr val="28745A"/>
+          </a:solidFill>
+          <a:ln xmlns:a="http://schemas.openxmlformats.org/drawingml/2006/main" w="0">
+            <a:noFill/>
+            <a:prstDash val="solid"/>
+          </a:ln>
+        </p:spPr>
+        <p:txBody>
+          <a:bodyPr xmlns:a="http://schemas.openxmlformats.org/drawingml/2006/main" lIns="76200" tIns="38100" rIns="76200" bIns="38100" anchor="ctr"/>
+          <a:lstStyle xmlns:a="http://schemas.openxmlformats.org/drawingml/2006/main"/>
+          <a:p xmlns:a="http://schemas.openxmlformats.org/drawingml/2006/main">
+            <a:pPr algn="ctr">
+              <a:defRPr sz="1500" b="1">
+                <a:solidFill>
+                  <a:srgbClr val="FFFFFF"/>
+                </a:solidFill>
+              </a:defRPr>
+            </a:pPr>
+            <a:r>
+              <a:rPr sz="1500" b="1">
+                <a:solidFill>
+                  <a:srgbClr val="FFFFFF"/>
+                </a:solidFill>
+                <a:latin typeface="Microsoft YaHei"/>
+                <a:ea typeface="Microsoft YaHei"/>
+                <a:cs typeface="Microsoft YaHei"/>
+              </a:rPr>
+              <a:t>3</a:t>
+            </a:r>
+          </a:p>
+        </p:txBody>
+      </p:sp>
+      <p:sp>
+        <p:nvSpPr>
+          <p:cNvPr id="15" name="p20-h2">
+            <a:extLst xmlns:a="http://schemas.openxmlformats.org/drawingml/2006/main">
+              <a:ext uri="{FF2B5EF4-FFF2-40B4-BE49-F238E27FC236}">
+                <a16:creationId xmlns:a16="http://schemas.microsoft.com/office/drawing/2014/main" id="{9E0C18BC-B705-4FB6-9F12-FB33D4987562}"/>
+              </a:ext>
+            </a:extLst>
+          </p:cNvPr>
+          <p:cNvSpPr>
+            <a:spLocks xmlns:a="http://schemas.openxmlformats.org/drawingml/2006/main" noGrp="1"/>
+          </p:cNvSpPr>
+          <p:nvPr/>
+        </p:nvSpPr>
+        <p:spPr>
+          <a:xfrm xmlns:a="http://schemas.openxmlformats.org/drawingml/2006/main">
+            <a:off x="6915150" y="1047750"/>
+            <a:ext cx="2047875" cy="571500"/>
+          </a:xfrm>
+          <a:prstGeom xmlns:a="http://schemas.openxmlformats.org/drawingml/2006/main" prst="roundRect">
+            <a:avLst>
+              <a:gd name="adj" fmla="val 13333"/>
+            </a:avLst>
+          </a:prstGeom>
+          <a:solidFill xmlns:a="http://schemas.openxmlformats.org/drawingml/2006/main">
+            <a:srgbClr val="E7F2ED"/>
+          </a:solidFill>
+          <a:ln xmlns:a="http://schemas.openxmlformats.org/drawingml/2006/main" w="0">
+            <a:noFill/>
+            <a:prstDash val="solid"/>
+          </a:ln>
+        </p:spPr>
+        <p:txBody>
+          <a:bodyPr xmlns:a="http://schemas.openxmlformats.org/drawingml/2006/main" lIns="76200" tIns="38100" rIns="76200" bIns="38100" anchor="ctr"/>
+          <a:lstStyle xmlns:a="http://schemas.openxmlformats.org/drawingml/2006/main"/>
+          <a:p xmlns:a="http://schemas.openxmlformats.org/drawingml/2006/main">
+            <a:pPr algn="ctr">
+              <a:defRPr sz="1650" b="1">
+                <a:solidFill>
+                  <a:srgbClr val="28745A"/>
+                </a:solidFill>
+              </a:defRPr>
+            </a:pPr>
+            <a:r>
+              <a:rPr sz="1650" b="1">
+                <a:solidFill>
+                  <a:srgbClr val="28745A"/>
+                </a:solidFill>
+                <a:latin typeface="Microsoft YaHei"/>
+                <a:ea typeface="Microsoft YaHei"/>
+                <a:cs typeface="Microsoft YaHei"/>
+              </a:rPr>
+              <a:t>第一性原理</a:t>
+            </a:r>
+          </a:p>
+        </p:txBody>
+      </p:sp>
+      <p:sp>
+        <p:nvSpPr>
+          <p:cNvPr id="16" name="p20-d2">
+            <a:extLst xmlns:a="http://schemas.openxmlformats.org/drawingml/2006/main">
+              <a:ext uri="{FF2B5EF4-FFF2-40B4-BE49-F238E27FC236}">
+                <a16:creationId xmlns:a16="http://schemas.microsoft.com/office/drawing/2014/main" id="{BDBE9E26-9186-483F-B528-B68D3BCB70B7}"/>
+              </a:ext>
+            </a:extLst>
+          </p:cNvPr>
+          <p:cNvSpPr>
+            <a:spLocks xmlns:a="http://schemas.openxmlformats.org/drawingml/2006/main" noGrp="1"/>
+          </p:cNvSpPr>
+          <p:nvPr/>
+        </p:nvSpPr>
+        <p:spPr>
+          <a:xfrm xmlns:a="http://schemas.openxmlformats.org/drawingml/2006/main">
+            <a:off x="6343650" y="1905000"/>
+            <a:ext cx="2638425" cy="1524000"/>
+          </a:xfrm>
+          <a:prstGeom xmlns:a="http://schemas.openxmlformats.org/drawingml/2006/main" prst="roundRect">
+            <a:avLst>
+              <a:gd name="adj" fmla="val 5000"/>
             </a:avLst>
           </a:prstGeom>
           <a:solidFill xmlns:a="http://schemas.openxmlformats.org/drawingml/2006/main">
@@ -14710,15 +14197,19 @@
           <a:bodyPr xmlns:a="http://schemas.openxmlformats.org/drawingml/2006/main" lIns="76200" tIns="38100" rIns="76200" bIns="38100" anchor="ctr"/>
           <a:lstStyle xmlns:a="http://schemas.openxmlformats.org/drawingml/2006/main"/>
           <a:p xmlns:a="http://schemas.openxmlformats.org/drawingml/2006/main">
-            <a:pPr algn="l">
-              <a:defRPr sz="1425" b="1">
+            <a:pPr algn="ctr">
+              <a:lnSpc>
+                <a:spcPct val="116000"/>
+              </a:lnSpc>
+              <a:buNone/>
+              <a:defRPr sz="1500" b="1">
                 <a:solidFill>
                   <a:srgbClr val="263746"/>
                 </a:solidFill>
               </a:defRPr>
             </a:pPr>
             <a:r>
-              <a:rPr sz="1425" b="1">
+              <a:rPr sz="1500" b="1">
                 <a:solidFill>
                   <a:srgbClr val="263746"/>
                 </a:solidFill>
@@ -14726,86 +14217,29 @@
                 <a:ea typeface="Microsoft YaHei"/>
                 <a:cs typeface="Microsoft YaHei"/>
               </a:rPr>
-              <a:t>回本课：问题重写 / 非例</a:t>
-            </a:r>
-          </a:p>
-        </p:txBody>
-      </p:sp>
-      <p:sp>
-        <p:nvSpPr>
-          <p:cNvPr id="15" name="p19-h2">
-            <a:extLst xmlns:a="http://schemas.openxmlformats.org/drawingml/2006/main">
-              <a:ext uri="{FF2B5EF4-FFF2-40B4-BE49-F238E27FC236}">
-                <a16:creationId xmlns:a16="http://schemas.microsoft.com/office/drawing/2014/main" id="{F7F4146A-9454-44D2-A0E7-2369E1953853}"/>
-              </a:ext>
-            </a:extLst>
-          </p:cNvPr>
-          <p:cNvSpPr>
-            <a:spLocks xmlns:a="http://schemas.openxmlformats.org/drawingml/2006/main" noGrp="1"/>
-          </p:cNvSpPr>
-          <p:nvPr/>
-        </p:nvSpPr>
-        <p:spPr>
-          <a:xfrm xmlns:a="http://schemas.openxmlformats.org/drawingml/2006/main">
-            <a:off x="714375" y="3324225"/>
-            <a:ext cx="2381250" cy="457200"/>
-          </a:xfrm>
-          <a:prstGeom xmlns:a="http://schemas.openxmlformats.org/drawingml/2006/main" prst="roundRect">
-            <a:avLst>
-              <a:gd name="adj" fmla="val 16667"/>
-            </a:avLst>
-          </a:prstGeom>
-          <a:solidFill xmlns:a="http://schemas.openxmlformats.org/drawingml/2006/main">
-            <a:srgbClr val="F8E9EA"/>
-          </a:solidFill>
-          <a:ln xmlns:a="http://schemas.openxmlformats.org/drawingml/2006/main" w="0">
-            <a:noFill/>
-            <a:prstDash val="solid"/>
-          </a:ln>
-        </p:spPr>
-        <p:txBody>
-          <a:bodyPr xmlns:a="http://schemas.openxmlformats.org/drawingml/2006/main" lIns="76200" tIns="38100" rIns="76200" bIns="38100" anchor="ctr"/>
-          <a:lstStyle xmlns:a="http://schemas.openxmlformats.org/drawingml/2006/main"/>
-          <a:p xmlns:a="http://schemas.openxmlformats.org/drawingml/2006/main">
-            <a:pPr algn="ctr">
-              <a:defRPr sz="1425" b="1">
-                <a:solidFill>
-                  <a:srgbClr val="C8161E"/>
-                </a:solidFill>
-              </a:defRPr>
-            </a:pPr>
-            <a:r>
-              <a:rPr sz="1425" b="1">
-                <a:solidFill>
-                  <a:srgbClr val="C8161E"/>
-                </a:solidFill>
-                <a:latin typeface="Microsoft YaHei"/>
-                <a:ea typeface="Microsoft YaHei"/>
-                <a:cs typeface="Microsoft YaHei"/>
-              </a:rPr>
-              <a:t>命题不可证伪</a:t>
-            </a:r>
-          </a:p>
-        </p:txBody>
-      </p:sp>
-      <p:sp>
-        <p:nvSpPr>
-          <p:cNvPr id="16" name="p19-a2">
-            <a:extLst xmlns:a="http://schemas.openxmlformats.org/drawingml/2006/main">
-              <a:ext uri="{FF2B5EF4-FFF2-40B4-BE49-F238E27FC236}">
-                <a16:creationId xmlns:a16="http://schemas.microsoft.com/office/drawing/2014/main" id="{5D70794B-E6B8-4541-89AC-7482FE9B5BB5}"/>
-              </a:ext>
-            </a:extLst>
-          </p:cNvPr>
-          <p:cNvSpPr>
-            <a:spLocks xmlns:a="http://schemas.openxmlformats.org/drawingml/2006/main" noGrp="1"/>
-          </p:cNvSpPr>
-          <p:nvPr/>
-        </p:nvSpPr>
-        <p:spPr>
-          <a:xfrm xmlns:a="http://schemas.openxmlformats.org/drawingml/2006/main">
-            <a:off x="3286125" y="3371850"/>
-            <a:ext cx="523875" cy="381000"/>
+              <a:t>由约束推导待验证前提</a:t>
+            </a:r>
+          </a:p>
+        </p:txBody>
+      </p:sp>
+      <p:sp>
+        <p:nvSpPr>
+          <p:cNvPr id="17" name="p20-arrow2">
+            <a:extLst xmlns:a="http://schemas.openxmlformats.org/drawingml/2006/main">
+              <a:ext uri="{FF2B5EF4-FFF2-40B4-BE49-F238E27FC236}">
+                <a16:creationId xmlns:a16="http://schemas.microsoft.com/office/drawing/2014/main" id="{27B33DE0-5DDF-443B-8A70-9E3FB6BD1AE2}"/>
+              </a:ext>
+            </a:extLst>
+          </p:cNvPr>
+          <p:cNvSpPr>
+            <a:spLocks xmlns:a="http://schemas.openxmlformats.org/drawingml/2006/main" noGrp="1"/>
+          </p:cNvSpPr>
+          <p:nvPr/>
+        </p:nvSpPr>
+        <p:spPr>
+          <a:xfrm xmlns:a="http://schemas.openxmlformats.org/drawingml/2006/main">
+            <a:off x="8991600" y="2438400"/>
+            <a:ext cx="285750" cy="381000"/>
           </a:xfrm>
           <a:prstGeom xmlns:a="http://schemas.openxmlformats.org/drawingml/2006/main" prst="rect">
             <a:avLst/>
@@ -14843,26 +14277,140 @@
       </p:sp>
       <p:sp>
         <p:nvSpPr>
-          <p:cNvPr id="17" name="p19-d2">
-            <a:extLst xmlns:a="http://schemas.openxmlformats.org/drawingml/2006/main">
-              <a:ext uri="{FF2B5EF4-FFF2-40B4-BE49-F238E27FC236}">
-                <a16:creationId xmlns:a16="http://schemas.microsoft.com/office/drawing/2014/main" id="{5C3EEE12-5705-462D-89D5-9C46384DE66E}"/>
-              </a:ext>
-            </a:extLst>
-          </p:cNvPr>
-          <p:cNvSpPr>
-            <a:spLocks xmlns:a="http://schemas.openxmlformats.org/drawingml/2006/main" noGrp="1"/>
-          </p:cNvSpPr>
-          <p:nvPr/>
-        </p:nvSpPr>
-        <p:spPr>
-          <a:xfrm xmlns:a="http://schemas.openxmlformats.org/drawingml/2006/main">
-            <a:off x="4000500" y="3324225"/>
-            <a:ext cx="6667500" cy="457200"/>
+          <p:cNvPr id="18" name="p20-n3">
+            <a:extLst xmlns:a="http://schemas.openxmlformats.org/drawingml/2006/main">
+              <a:ext uri="{FF2B5EF4-FFF2-40B4-BE49-F238E27FC236}">
+                <a16:creationId xmlns:a16="http://schemas.microsoft.com/office/drawing/2014/main" id="{F6D30852-C208-4AD7-931C-340254012A03}"/>
+              </a:ext>
+            </a:extLst>
+          </p:cNvPr>
+          <p:cNvSpPr>
+            <a:spLocks xmlns:a="http://schemas.openxmlformats.org/drawingml/2006/main" noGrp="1"/>
+          </p:cNvSpPr>
+          <p:nvPr/>
+        </p:nvSpPr>
+        <p:spPr>
+          <a:xfrm xmlns:a="http://schemas.openxmlformats.org/drawingml/2006/main">
+            <a:off x="9267825" y="1104900"/>
+            <a:ext cx="476250" cy="476250"/>
           </a:xfrm>
           <a:prstGeom xmlns:a="http://schemas.openxmlformats.org/drawingml/2006/main" prst="roundRect">
             <a:avLst>
-              <a:gd name="adj" fmla="val 16667"/>
+              <a:gd name="adj" fmla="val 16000"/>
+            </a:avLst>
+          </a:prstGeom>
+          <a:solidFill xmlns:a="http://schemas.openxmlformats.org/drawingml/2006/main">
+            <a:srgbClr val="C8161E"/>
+          </a:solidFill>
+          <a:ln xmlns:a="http://schemas.openxmlformats.org/drawingml/2006/main" w="0">
+            <a:noFill/>
+            <a:prstDash val="solid"/>
+          </a:ln>
+        </p:spPr>
+        <p:txBody>
+          <a:bodyPr xmlns:a="http://schemas.openxmlformats.org/drawingml/2006/main" lIns="76200" tIns="38100" rIns="76200" bIns="38100" anchor="ctr"/>
+          <a:lstStyle xmlns:a="http://schemas.openxmlformats.org/drawingml/2006/main"/>
+          <a:p xmlns:a="http://schemas.openxmlformats.org/drawingml/2006/main">
+            <a:pPr algn="ctr">
+              <a:defRPr sz="1500" b="1">
+                <a:solidFill>
+                  <a:srgbClr val="FFFFFF"/>
+                </a:solidFill>
+              </a:defRPr>
+            </a:pPr>
+            <a:r>
+              <a:rPr sz="1500" b="1">
+                <a:solidFill>
+                  <a:srgbClr val="FFFFFF"/>
+                </a:solidFill>
+                <a:latin typeface="Microsoft YaHei"/>
+                <a:ea typeface="Microsoft YaHei"/>
+                <a:cs typeface="Microsoft YaHei"/>
+              </a:rPr>
+              <a:t>4</a:t>
+            </a:r>
+          </a:p>
+        </p:txBody>
+      </p:sp>
+      <p:sp>
+        <p:nvSpPr>
+          <p:cNvPr id="19" name="p20-h3">
+            <a:extLst xmlns:a="http://schemas.openxmlformats.org/drawingml/2006/main">
+              <a:ext uri="{FF2B5EF4-FFF2-40B4-BE49-F238E27FC236}">
+                <a16:creationId xmlns:a16="http://schemas.microsoft.com/office/drawing/2014/main" id="{609FA61F-B46D-40C0-8AF0-E800B1352D34}"/>
+              </a:ext>
+            </a:extLst>
+          </p:cNvPr>
+          <p:cNvSpPr>
+            <a:spLocks xmlns:a="http://schemas.openxmlformats.org/drawingml/2006/main" noGrp="1"/>
+          </p:cNvSpPr>
+          <p:nvPr/>
+        </p:nvSpPr>
+        <p:spPr>
+          <a:xfrm xmlns:a="http://schemas.openxmlformats.org/drawingml/2006/main">
+            <a:off x="9839325" y="1047750"/>
+            <a:ext cx="2047875" cy="571500"/>
+          </a:xfrm>
+          <a:prstGeom xmlns:a="http://schemas.openxmlformats.org/drawingml/2006/main" prst="roundRect">
+            <a:avLst>
+              <a:gd name="adj" fmla="val 13333"/>
+            </a:avLst>
+          </a:prstGeom>
+          <a:solidFill xmlns:a="http://schemas.openxmlformats.org/drawingml/2006/main">
+            <a:srgbClr val="F8E9EA"/>
+          </a:solidFill>
+          <a:ln xmlns:a="http://schemas.openxmlformats.org/drawingml/2006/main" w="0">
+            <a:noFill/>
+            <a:prstDash val="solid"/>
+          </a:ln>
+        </p:spPr>
+        <p:txBody>
+          <a:bodyPr xmlns:a="http://schemas.openxmlformats.org/drawingml/2006/main" lIns="76200" tIns="38100" rIns="76200" bIns="38100" anchor="ctr"/>
+          <a:lstStyle xmlns:a="http://schemas.openxmlformats.org/drawingml/2006/main"/>
+          <a:p xmlns:a="http://schemas.openxmlformats.org/drawingml/2006/main">
+            <a:pPr algn="ctr">
+              <a:defRPr sz="1650" b="1">
+                <a:solidFill>
+                  <a:srgbClr val="C8161E"/>
+                </a:solidFill>
+              </a:defRPr>
+            </a:pPr>
+            <a:r>
+              <a:rPr sz="1650" b="1">
+                <a:solidFill>
+                  <a:srgbClr val="C8161E"/>
+                </a:solidFill>
+                <a:latin typeface="Microsoft YaHei"/>
+                <a:ea typeface="Microsoft YaHei"/>
+                <a:cs typeface="Microsoft YaHei"/>
+              </a:rPr>
+              <a:t>问题门自查</a:t>
+            </a:r>
+          </a:p>
+        </p:txBody>
+      </p:sp>
+      <p:sp>
+        <p:nvSpPr>
+          <p:cNvPr id="20" name="p20-d3">
+            <a:extLst xmlns:a="http://schemas.openxmlformats.org/drawingml/2006/main">
+              <a:ext uri="{FF2B5EF4-FFF2-40B4-BE49-F238E27FC236}">
+                <a16:creationId xmlns:a16="http://schemas.microsoft.com/office/drawing/2014/main" id="{7AD6827F-B345-41B2-8247-7184600D9F8C}"/>
+              </a:ext>
+            </a:extLst>
+          </p:cNvPr>
+          <p:cNvSpPr>
+            <a:spLocks xmlns:a="http://schemas.openxmlformats.org/drawingml/2006/main" noGrp="1"/>
+          </p:cNvSpPr>
+          <p:nvPr/>
+        </p:nvSpPr>
+        <p:spPr>
+          <a:xfrm xmlns:a="http://schemas.openxmlformats.org/drawingml/2006/main">
+            <a:off x="9267825" y="1905000"/>
+            <a:ext cx="2638425" cy="1524000"/>
+          </a:xfrm>
+          <a:prstGeom xmlns:a="http://schemas.openxmlformats.org/drawingml/2006/main" prst="roundRect">
+            <a:avLst>
+              <a:gd name="adj" fmla="val 5000"/>
             </a:avLst>
           </a:prstGeom>
           <a:solidFill xmlns:a="http://schemas.openxmlformats.org/drawingml/2006/main">
@@ -14879,15 +14427,19 @@
           <a:bodyPr xmlns:a="http://schemas.openxmlformats.org/drawingml/2006/main" lIns="76200" tIns="38100" rIns="76200" bIns="38100" anchor="ctr"/>
           <a:lstStyle xmlns:a="http://schemas.openxmlformats.org/drawingml/2006/main"/>
           <a:p xmlns:a="http://schemas.openxmlformats.org/drawingml/2006/main">
-            <a:pPr algn="l">
-              <a:defRPr sz="1425" b="1">
+            <a:pPr algn="ctr">
+              <a:lnSpc>
+                <a:spcPct val="116000"/>
+              </a:lnSpc>
+              <a:buNone/>
+              <a:defRPr sz="1500" b="1">
                 <a:solidFill>
                   <a:srgbClr val="263746"/>
                 </a:solidFill>
               </a:defRPr>
             </a:pPr>
             <a:r>
-              <a:rPr sz="1425" b="1">
+              <a:rPr sz="1500" b="1">
                 <a:solidFill>
                   <a:srgbClr val="263746"/>
                 </a:solidFill>
@@ -14895,33 +14447,33 @@
                 <a:ea typeface="Microsoft YaHei"/>
                 <a:cs typeface="Microsoft YaHei"/>
               </a:rPr>
-              <a:t>补对照 / 指标 / 推翻条件</a:t>
-            </a:r>
-          </a:p>
-        </p:txBody>
-      </p:sp>
-      <p:sp>
-        <p:nvSpPr>
-          <p:cNvPr id="18" name="p19-h3">
-            <a:extLst xmlns:a="http://schemas.openxmlformats.org/drawingml/2006/main">
-              <a:ext uri="{FF2B5EF4-FFF2-40B4-BE49-F238E27FC236}">
-                <a16:creationId xmlns:a16="http://schemas.microsoft.com/office/drawing/2014/main" id="{0919ECCF-6CBD-4748-A6DA-C2A272D83CD6}"/>
-              </a:ext>
-            </a:extLst>
-          </p:cNvPr>
-          <p:cNvSpPr>
-            <a:spLocks xmlns:a="http://schemas.openxmlformats.org/drawingml/2006/main" noGrp="1"/>
-          </p:cNvSpPr>
-          <p:nvPr/>
-        </p:nvSpPr>
-        <p:spPr>
-          <a:xfrm xmlns:a="http://schemas.openxmlformats.org/drawingml/2006/main">
-            <a:off x="714375" y="3914775"/>
-            <a:ext cx="2381250" cy="457200"/>
+              <a:t>核对九项条件与真实失败记录</a:t>
+            </a:r>
+          </a:p>
+        </p:txBody>
+      </p:sp>
+      <p:sp>
+        <p:nvSpPr>
+          <p:cNvPr id="21" name="p20-boundary">
+            <a:extLst xmlns:a="http://schemas.openxmlformats.org/drawingml/2006/main">
+              <a:ext uri="{FF2B5EF4-FFF2-40B4-BE49-F238E27FC236}">
+                <a16:creationId xmlns:a16="http://schemas.microsoft.com/office/drawing/2014/main" id="{2CAF2323-BFFF-4FC5-BBAE-355B768FDDEF}"/>
+              </a:ext>
+            </a:extLst>
+          </p:cNvPr>
+          <p:cNvSpPr>
+            <a:spLocks xmlns:a="http://schemas.openxmlformats.org/drawingml/2006/main" noGrp="1"/>
+          </p:cNvSpPr>
+          <p:nvPr/>
+        </p:nvSpPr>
+        <p:spPr>
+          <a:xfrm xmlns:a="http://schemas.openxmlformats.org/drawingml/2006/main">
+            <a:off x="1190625" y="4143375"/>
+            <a:ext cx="9810750" cy="819150"/>
           </a:xfrm>
           <a:prstGeom xmlns:a="http://schemas.openxmlformats.org/drawingml/2006/main" prst="roundRect">
             <a:avLst>
-              <a:gd name="adj" fmla="val 16667"/>
+              <a:gd name="adj" fmla="val 9302"/>
             </a:avLst>
           </a:prstGeom>
           <a:solidFill xmlns:a="http://schemas.openxmlformats.org/drawingml/2006/main">
@@ -14937,14 +14489,18 @@
           <a:lstStyle xmlns:a="http://schemas.openxmlformats.org/drawingml/2006/main"/>
           <a:p xmlns:a="http://schemas.openxmlformats.org/drawingml/2006/main">
             <a:pPr algn="ctr">
-              <a:defRPr sz="1425" b="1">
+              <a:lnSpc>
+                <a:spcPct val="115000"/>
+              </a:lnSpc>
+              <a:buNone/>
+              <a:defRPr sz="1800" b="1">
                 <a:solidFill>
                   <a:srgbClr val="C8161E"/>
                 </a:solidFill>
               </a:defRPr>
             </a:pPr>
             <a:r>
-              <a:rPr sz="1425" b="1">
+              <a:rPr sz="1800" b="1">
                 <a:solidFill>
                   <a:srgbClr val="C8161E"/>
                 </a:solidFill>
@@ -14952,396 +14508,7 @@
                 <a:ea typeface="Microsoft YaHei"/>
                 <a:cs typeface="Microsoft YaHei"/>
               </a:rPr>
-              <a:t>推导脱离文献</a:t>
-            </a:r>
-          </a:p>
-        </p:txBody>
-      </p:sp>
-      <p:sp>
-        <p:nvSpPr>
-          <p:cNvPr id="19" name="p19-a3">
-            <a:extLst xmlns:a="http://schemas.openxmlformats.org/drawingml/2006/main">
-              <a:ext uri="{FF2B5EF4-FFF2-40B4-BE49-F238E27FC236}">
-                <a16:creationId xmlns:a16="http://schemas.microsoft.com/office/drawing/2014/main" id="{3BBE72B3-B9D0-474D-BEB0-55B17359F58C}"/>
-              </a:ext>
-            </a:extLst>
-          </p:cNvPr>
-          <p:cNvSpPr>
-            <a:spLocks xmlns:a="http://schemas.openxmlformats.org/drawingml/2006/main" noGrp="1"/>
-          </p:cNvSpPr>
-          <p:nvPr/>
-        </p:nvSpPr>
-        <p:spPr>
-          <a:xfrm xmlns:a="http://schemas.openxmlformats.org/drawingml/2006/main">
-            <a:off x="3286125" y="3962400"/>
-            <a:ext cx="523875" cy="381000"/>
-          </a:xfrm>
-          <a:prstGeom xmlns:a="http://schemas.openxmlformats.org/drawingml/2006/main" prst="rect">
-            <a:avLst/>
-          </a:prstGeom>
-          <a:noFill xmlns:a="http://schemas.openxmlformats.org/drawingml/2006/main"/>
-          <a:ln xmlns:a="http://schemas.openxmlformats.org/drawingml/2006/main" w="0">
-            <a:noFill/>
-            <a:prstDash val="solid"/>
-          </a:ln>
-        </p:spPr>
-        <p:txBody>
-          <a:bodyPr xmlns:a="http://schemas.openxmlformats.org/drawingml/2006/main" lIns="76200" tIns="38100" rIns="76200" bIns="38100" anchor="ctr"/>
-          <a:lstStyle xmlns:a="http://schemas.openxmlformats.org/drawingml/2006/main"/>
-          <a:p xmlns:a="http://schemas.openxmlformats.org/drawingml/2006/main">
-            <a:pPr algn="ctr">
-              <a:defRPr sz="2175" b="1">
-                <a:solidFill>
-                  <a:srgbClr val="667684"/>
-                </a:solidFill>
-              </a:defRPr>
-            </a:pPr>
-            <a:r>
-              <a:rPr sz="2175" b="1">
-                <a:solidFill>
-                  <a:srgbClr val="667684"/>
-                </a:solidFill>
-                <a:latin typeface="Arial"/>
-                <a:ea typeface="Arial"/>
-                <a:cs typeface="Arial"/>
-              </a:rPr>
-              <a:t>→</a:t>
-            </a:r>
-          </a:p>
-        </p:txBody>
-      </p:sp>
-      <p:sp>
-        <p:nvSpPr>
-          <p:cNvPr id="20" name="p19-d3">
-            <a:extLst xmlns:a="http://schemas.openxmlformats.org/drawingml/2006/main">
-              <a:ext uri="{FF2B5EF4-FFF2-40B4-BE49-F238E27FC236}">
-                <a16:creationId xmlns:a16="http://schemas.microsoft.com/office/drawing/2014/main" id="{972E9CA3-1A31-4EEF-AEB8-D14D94946070}"/>
-              </a:ext>
-            </a:extLst>
-          </p:cNvPr>
-          <p:cNvSpPr>
-            <a:spLocks xmlns:a="http://schemas.openxmlformats.org/drawingml/2006/main" noGrp="1"/>
-          </p:cNvSpPr>
-          <p:nvPr/>
-        </p:nvSpPr>
-        <p:spPr>
-          <a:xfrm xmlns:a="http://schemas.openxmlformats.org/drawingml/2006/main">
-            <a:off x="4000500" y="3914775"/>
-            <a:ext cx="6667500" cy="457200"/>
-          </a:xfrm>
-          <a:prstGeom xmlns:a="http://schemas.openxmlformats.org/drawingml/2006/main" prst="roundRect">
-            <a:avLst>
-              <a:gd name="adj" fmla="val 16667"/>
-            </a:avLst>
-          </a:prstGeom>
-          <a:solidFill xmlns:a="http://schemas.openxmlformats.org/drawingml/2006/main">
-            <a:srgbClr val="FFFFFF"/>
-          </a:solidFill>
-          <a:ln xmlns:a="http://schemas.openxmlformats.org/drawingml/2006/main" w="9525">
-            <a:solidFill>
-              <a:srgbClr val="D6DDE2"/>
-            </a:solidFill>
-            <a:prstDash val="solid"/>
-          </a:ln>
-        </p:spPr>
-        <p:txBody>
-          <a:bodyPr xmlns:a="http://schemas.openxmlformats.org/drawingml/2006/main" lIns="76200" tIns="38100" rIns="76200" bIns="38100" anchor="ctr"/>
-          <a:lstStyle xmlns:a="http://schemas.openxmlformats.org/drawingml/2006/main"/>
-          <a:p xmlns:a="http://schemas.openxmlformats.org/drawingml/2006/main">
-            <a:pPr algn="l">
-              <a:defRPr sz="1425" b="1">
-                <a:solidFill>
-                  <a:srgbClr val="263746"/>
-                </a:solidFill>
-              </a:defRPr>
-            </a:pPr>
-            <a:r>
-              <a:rPr sz="1425" b="1">
-                <a:solidFill>
-                  <a:srgbClr val="263746"/>
-                </a:solidFill>
-                <a:latin typeface="Microsoft YaHei"/>
-                <a:ea typeface="Microsoft YaHei"/>
-                <a:cs typeface="Microsoft YaHei"/>
-              </a:rPr>
-              <a:t>回第 5 课证据地图</a:t>
-            </a:r>
-          </a:p>
-        </p:txBody>
-      </p:sp>
-      <p:sp>
-        <p:nvSpPr>
-          <p:cNvPr id="21" name="p19-h4">
-            <a:extLst xmlns:a="http://schemas.openxmlformats.org/drawingml/2006/main">
-              <a:ext uri="{FF2B5EF4-FFF2-40B4-BE49-F238E27FC236}">
-                <a16:creationId xmlns:a16="http://schemas.microsoft.com/office/drawing/2014/main" id="{21925752-EA1F-45CF-9656-84AC56BA09F3}"/>
-              </a:ext>
-            </a:extLst>
-          </p:cNvPr>
-          <p:cNvSpPr>
-            <a:spLocks xmlns:a="http://schemas.openxmlformats.org/drawingml/2006/main" noGrp="1"/>
-          </p:cNvSpPr>
-          <p:nvPr/>
-        </p:nvSpPr>
-        <p:spPr>
-          <a:xfrm xmlns:a="http://schemas.openxmlformats.org/drawingml/2006/main">
-            <a:off x="714375" y="4505325"/>
-            <a:ext cx="2381250" cy="457200"/>
-          </a:xfrm>
-          <a:prstGeom xmlns:a="http://schemas.openxmlformats.org/drawingml/2006/main" prst="roundRect">
-            <a:avLst>
-              <a:gd name="adj" fmla="val 16667"/>
-            </a:avLst>
-          </a:prstGeom>
-          <a:solidFill xmlns:a="http://schemas.openxmlformats.org/drawingml/2006/main">
-            <a:srgbClr val="F8E9EA"/>
-          </a:solidFill>
-          <a:ln xmlns:a="http://schemas.openxmlformats.org/drawingml/2006/main" w="0">
-            <a:noFill/>
-            <a:prstDash val="solid"/>
-          </a:ln>
-        </p:spPr>
-        <p:txBody>
-          <a:bodyPr xmlns:a="http://schemas.openxmlformats.org/drawingml/2006/main" lIns="76200" tIns="38100" rIns="76200" bIns="38100" anchor="ctr"/>
-          <a:lstStyle xmlns:a="http://schemas.openxmlformats.org/drawingml/2006/main"/>
-          <a:p xmlns:a="http://schemas.openxmlformats.org/drawingml/2006/main">
-            <a:pPr algn="ctr">
-              <a:defRPr sz="1425" b="1">
-                <a:solidFill>
-                  <a:srgbClr val="C8161E"/>
-                </a:solidFill>
-              </a:defRPr>
-            </a:pPr>
-            <a:r>
-              <a:rPr sz="1425" b="1">
-                <a:solidFill>
-                  <a:srgbClr val="C8161E"/>
-                </a:solidFill>
-                <a:latin typeface="Microsoft YaHei"/>
-                <a:ea typeface="Microsoft YaHei"/>
-                <a:cs typeface="Microsoft YaHei"/>
-              </a:rPr>
-              <a:t>选题理由缺失</a:t>
-            </a:r>
-          </a:p>
-        </p:txBody>
-      </p:sp>
-      <p:sp>
-        <p:nvSpPr>
-          <p:cNvPr id="22" name="p19-a4">
-            <a:extLst xmlns:a="http://schemas.openxmlformats.org/drawingml/2006/main">
-              <a:ext uri="{FF2B5EF4-FFF2-40B4-BE49-F238E27FC236}">
-                <a16:creationId xmlns:a16="http://schemas.microsoft.com/office/drawing/2014/main" id="{18DFB1B6-9186-43F7-9507-7969561B2F86}"/>
-              </a:ext>
-            </a:extLst>
-          </p:cNvPr>
-          <p:cNvSpPr>
-            <a:spLocks xmlns:a="http://schemas.openxmlformats.org/drawingml/2006/main" noGrp="1"/>
-          </p:cNvSpPr>
-          <p:nvPr/>
-        </p:nvSpPr>
-        <p:spPr>
-          <a:xfrm xmlns:a="http://schemas.openxmlformats.org/drawingml/2006/main">
-            <a:off x="3286125" y="4552950"/>
-            <a:ext cx="523875" cy="381000"/>
-          </a:xfrm>
-          <a:prstGeom xmlns:a="http://schemas.openxmlformats.org/drawingml/2006/main" prst="rect">
-            <a:avLst/>
-          </a:prstGeom>
-          <a:noFill xmlns:a="http://schemas.openxmlformats.org/drawingml/2006/main"/>
-          <a:ln xmlns:a="http://schemas.openxmlformats.org/drawingml/2006/main" w="0">
-            <a:noFill/>
-            <a:prstDash val="solid"/>
-          </a:ln>
-        </p:spPr>
-        <p:txBody>
-          <a:bodyPr xmlns:a="http://schemas.openxmlformats.org/drawingml/2006/main" lIns="76200" tIns="38100" rIns="76200" bIns="38100" anchor="ctr"/>
-          <a:lstStyle xmlns:a="http://schemas.openxmlformats.org/drawingml/2006/main"/>
-          <a:p xmlns:a="http://schemas.openxmlformats.org/drawingml/2006/main">
-            <a:pPr algn="ctr">
-              <a:defRPr sz="2175" b="1">
-                <a:solidFill>
-                  <a:srgbClr val="667684"/>
-                </a:solidFill>
-              </a:defRPr>
-            </a:pPr>
-            <a:r>
-              <a:rPr sz="2175" b="1">
-                <a:solidFill>
-                  <a:srgbClr val="667684"/>
-                </a:solidFill>
-                <a:latin typeface="Arial"/>
-                <a:ea typeface="Arial"/>
-                <a:cs typeface="Arial"/>
-              </a:rPr>
-              <a:t>→</a:t>
-            </a:r>
-          </a:p>
-        </p:txBody>
-      </p:sp>
-      <p:sp>
-        <p:nvSpPr>
-          <p:cNvPr id="23" name="p19-d4">
-            <a:extLst xmlns:a="http://schemas.openxmlformats.org/drawingml/2006/main">
-              <a:ext uri="{FF2B5EF4-FFF2-40B4-BE49-F238E27FC236}">
-                <a16:creationId xmlns:a16="http://schemas.microsoft.com/office/drawing/2014/main" id="{6D60E1F2-B317-43FF-9445-CD9163924594}"/>
-              </a:ext>
-            </a:extLst>
-          </p:cNvPr>
-          <p:cNvSpPr>
-            <a:spLocks xmlns:a="http://schemas.openxmlformats.org/drawingml/2006/main" noGrp="1"/>
-          </p:cNvSpPr>
-          <p:nvPr/>
-        </p:nvSpPr>
-        <p:spPr>
-          <a:xfrm xmlns:a="http://schemas.openxmlformats.org/drawingml/2006/main">
-            <a:off x="4000500" y="4505325"/>
-            <a:ext cx="6667500" cy="457200"/>
-          </a:xfrm>
-          <a:prstGeom xmlns:a="http://schemas.openxmlformats.org/drawingml/2006/main" prst="roundRect">
-            <a:avLst>
-              <a:gd name="adj" fmla="val 16667"/>
-            </a:avLst>
-          </a:prstGeom>
-          <a:solidFill xmlns:a="http://schemas.openxmlformats.org/drawingml/2006/main">
-            <a:srgbClr val="FFFFFF"/>
-          </a:solidFill>
-          <a:ln xmlns:a="http://schemas.openxmlformats.org/drawingml/2006/main" w="9525">
-            <a:solidFill>
-              <a:srgbClr val="D6DDE2"/>
-            </a:solidFill>
-            <a:prstDash val="solid"/>
-          </a:ln>
-        </p:spPr>
-        <p:txBody>
-          <a:bodyPr xmlns:a="http://schemas.openxmlformats.org/drawingml/2006/main" lIns="76200" tIns="38100" rIns="76200" bIns="38100" anchor="ctr"/>
-          <a:lstStyle xmlns:a="http://schemas.openxmlformats.org/drawingml/2006/main"/>
-          <a:p xmlns:a="http://schemas.openxmlformats.org/drawingml/2006/main">
-            <a:pPr algn="l">
-              <a:defRPr sz="1425" b="1">
-                <a:solidFill>
-                  <a:srgbClr val="263746"/>
-                </a:solidFill>
-              </a:defRPr>
-            </a:pPr>
-            <a:r>
-              <a:rPr sz="1425" b="1">
-                <a:solidFill>
-                  <a:srgbClr val="263746"/>
-                </a:solidFill>
-                <a:latin typeface="Microsoft YaHei"/>
-                <a:ea typeface="Microsoft YaHei"/>
-                <a:cs typeface="Microsoft YaHei"/>
-              </a:rPr>
-              <a:t>回本课 P07：候选题池四维比较</a:t>
-            </a:r>
-          </a:p>
-        </p:txBody>
-      </p:sp>
-      <p:sp>
-        <p:nvSpPr>
-          <p:cNvPr id="24" name="p19-check">
-            <a:extLst xmlns:a="http://schemas.openxmlformats.org/drawingml/2006/main">
-              <a:ext uri="{FF2B5EF4-FFF2-40B4-BE49-F238E27FC236}">
-                <a16:creationId xmlns:a16="http://schemas.microsoft.com/office/drawing/2014/main" id="{BEF0B24A-94B5-445C-92BF-FD5A8F4C5C42}"/>
-              </a:ext>
-            </a:extLst>
-          </p:cNvPr>
-          <p:cNvSpPr>
-            <a:spLocks xmlns:a="http://schemas.openxmlformats.org/drawingml/2006/main" noGrp="1"/>
-          </p:cNvSpPr>
-          <p:nvPr/>
-        </p:nvSpPr>
-        <p:spPr>
-          <a:xfrm xmlns:a="http://schemas.openxmlformats.org/drawingml/2006/main">
-            <a:off x="1047750" y="5191125"/>
-            <a:ext cx="10096500" cy="285750"/>
-          </a:xfrm>
-          <a:prstGeom xmlns:a="http://schemas.openxmlformats.org/drawingml/2006/main" prst="rect">
-            <a:avLst/>
-          </a:prstGeom>
-          <a:solidFill xmlns:a="http://schemas.openxmlformats.org/drawingml/2006/main">
-            <a:srgbClr val="E8F0F6"/>
-          </a:solidFill>
-          <a:ln xmlns:a="http://schemas.openxmlformats.org/drawingml/2006/main" w="0">
-            <a:noFill/>
-            <a:prstDash val="solid"/>
-          </a:ln>
-        </p:spPr>
-        <p:txBody>
-          <a:bodyPr xmlns:a="http://schemas.openxmlformats.org/drawingml/2006/main" lIns="76200" tIns="38100" rIns="76200" bIns="38100" anchor="ctr"/>
-          <a:lstStyle xmlns:a="http://schemas.openxmlformats.org/drawingml/2006/main"/>
-          <a:p xmlns:a="http://schemas.openxmlformats.org/drawingml/2006/main">
-            <a:pPr algn="ctr">
-              <a:defRPr sz="1350" b="1">
-                <a:solidFill>
-                  <a:srgbClr val="18354E"/>
-                </a:solidFill>
-              </a:defRPr>
-            </a:pPr>
-            <a:r>
-              <a:rPr sz="1350" b="1">
-                <a:solidFill>
-                  <a:srgbClr val="18354E"/>
-                </a:solidFill>
-                <a:latin typeface="Microsoft YaHei"/>
-                <a:ea typeface="Microsoft YaHei"/>
-                <a:cs typeface="Microsoft YaHei"/>
-              </a:rPr>
-              <a:t>提交核对：problem-definition.md 是否含候选题池与选题理由字段（课程扩展；门条件 8 项不变）</a:t>
-            </a:r>
-          </a:p>
-        </p:txBody>
-      </p:sp>
-      <p:sp>
-        <p:nvSpPr>
-          <p:cNvPr id="25" name="p19-bottom">
-            <a:extLst xmlns:a="http://schemas.openxmlformats.org/drawingml/2006/main">
-              <a:ext uri="{FF2B5EF4-FFF2-40B4-BE49-F238E27FC236}">
-                <a16:creationId xmlns:a16="http://schemas.microsoft.com/office/drawing/2014/main" id="{6E5E3C08-DB8C-4E1C-99F7-3EB7074EC277}"/>
-              </a:ext>
-            </a:extLst>
-          </p:cNvPr>
-          <p:cNvSpPr>
-            <a:spLocks xmlns:a="http://schemas.openxmlformats.org/drawingml/2006/main" noGrp="1"/>
-          </p:cNvSpPr>
-          <p:nvPr/>
-        </p:nvSpPr>
-        <p:spPr>
-          <a:xfrm xmlns:a="http://schemas.openxmlformats.org/drawingml/2006/main">
-            <a:off x="1666875" y="5543550"/>
-            <a:ext cx="8858250" cy="266700"/>
-          </a:xfrm>
-          <a:prstGeom xmlns:a="http://schemas.openxmlformats.org/drawingml/2006/main" prst="rect">
-            <a:avLst/>
-          </a:prstGeom>
-          <a:noFill xmlns:a="http://schemas.openxmlformats.org/drawingml/2006/main"/>
-          <a:ln xmlns:a="http://schemas.openxmlformats.org/drawingml/2006/main" w="0">
-            <a:noFill/>
-            <a:prstDash val="solid"/>
-          </a:ln>
-        </p:spPr>
-        <p:txBody>
-          <a:bodyPr xmlns:a="http://schemas.openxmlformats.org/drawingml/2006/main" lIns="76200" tIns="38100" rIns="76200" bIns="38100" anchor="ctr"/>
-          <a:lstStyle xmlns:a="http://schemas.openxmlformats.org/drawingml/2006/main"/>
-          <a:p xmlns:a="http://schemas.openxmlformats.org/drawingml/2006/main">
-            <a:pPr algn="ctr">
-              <a:defRPr sz="1350" b="1">
-                <a:solidFill>
-                  <a:srgbClr val="C8161E"/>
-                </a:solidFill>
-              </a:defRPr>
-            </a:pPr>
-            <a:r>
-              <a:rPr sz="1350" b="1">
-                <a:solidFill>
-                  <a:srgbClr val="C8161E"/>
-                </a:solidFill>
-                <a:latin typeface="Microsoft YaHei"/>
-                <a:ea typeface="Microsoft YaHei"/>
-                <a:cs typeface="Microsoft YaHei"/>
-              </a:rPr>
-              <a:t>未通过：只修复缺失条件，一周内重新检查；不重交无关材料。</a:t>
+              <a:t>关键边界：第一性原理推导得到的是待验证前提，不是结论；问题门检查当前项目是否具备继续研究的条件。</a:t>
             </a:r>
           </a:p>
         </p:txBody>
@@ -15404,7 +14571,7 @@
                 <a:ea typeface="Microsoft YaHei"/>
                 <a:cs typeface="Microsoft YaHei"/>
               </a:rPr>
-              <a:t>退出卡与第 7 课预告</a:t>
+              <a:t>问题门提交与失败回退路径</a:t>
             </a:r>
             <a:endParaRPr/>
           </a:p>
@@ -15440,10 +14607,1246 @@
       </p:sp>
       <p:sp>
         <p:nvSpPr>
+          <p:cNvPr id="6" name="p21-submit">
+            <a:extLst xmlns:a="http://schemas.openxmlformats.org/drawingml/2006/main">
+              <a:ext uri="{FF2B5EF4-FFF2-40B4-BE49-F238E27FC236}">
+                <a16:creationId xmlns:a16="http://schemas.microsoft.com/office/drawing/2014/main" id="{468D3194-6A5F-4AF7-A745-E0D9AFE69565}"/>
+              </a:ext>
+            </a:extLst>
+          </p:cNvPr>
+          <p:cNvSpPr>
+            <a:spLocks xmlns:a="http://schemas.openxmlformats.org/drawingml/2006/main" noGrp="1"/>
+          </p:cNvSpPr>
+          <p:nvPr/>
+        </p:nvSpPr>
+        <p:spPr>
+          <a:xfrm xmlns:a="http://schemas.openxmlformats.org/drawingml/2006/main">
+            <a:off x="666750" y="1095375"/>
+            <a:ext cx="2095500" cy="533400"/>
+          </a:xfrm>
+          <a:prstGeom xmlns:a="http://schemas.openxmlformats.org/drawingml/2006/main" prst="roundRect">
+            <a:avLst>
+              <a:gd name="adj" fmla="val 14286"/>
+            </a:avLst>
+          </a:prstGeom>
+          <a:solidFill xmlns:a="http://schemas.openxmlformats.org/drawingml/2006/main">
+            <a:srgbClr val="28745A"/>
+          </a:solidFill>
+          <a:ln xmlns:a="http://schemas.openxmlformats.org/drawingml/2006/main" w="0">
+            <a:noFill/>
+            <a:prstDash val="solid"/>
+          </a:ln>
+        </p:spPr>
+        <p:txBody>
+          <a:bodyPr xmlns:a="http://schemas.openxmlformats.org/drawingml/2006/main" lIns="76200" tIns="38100" rIns="76200" bIns="38100" anchor="ctr"/>
+          <a:lstStyle xmlns:a="http://schemas.openxmlformats.org/drawingml/2006/main"/>
+          <a:p xmlns:a="http://schemas.openxmlformats.org/drawingml/2006/main">
+            <a:pPr algn="ctr">
+              <a:defRPr sz="1800" b="1">
+                <a:solidFill>
+                  <a:srgbClr val="FFFFFF"/>
+                </a:solidFill>
+              </a:defRPr>
+            </a:pPr>
+            <a:r>
+              <a:rPr sz="1800" b="1">
+                <a:solidFill>
+                  <a:srgbClr val="FFFFFF"/>
+                </a:solidFill>
+                <a:latin typeface="Microsoft YaHei"/>
+                <a:ea typeface="Microsoft YaHei"/>
+                <a:cs typeface="Microsoft YaHei"/>
+              </a:rPr>
+              <a:t>一次提交</a:t>
+            </a:r>
+          </a:p>
+        </p:txBody>
+      </p:sp>
+      <p:sp>
+        <p:nvSpPr>
+          <p:cNvPr id="7" name="p19-how">
+            <a:extLst xmlns:a="http://schemas.openxmlformats.org/drawingml/2006/main">
+              <a:ext uri="{FF2B5EF4-FFF2-40B4-BE49-F238E27FC236}">
+                <a16:creationId xmlns:a16="http://schemas.microsoft.com/office/drawing/2014/main" id="{1ACE192D-7449-4EF1-91D1-F43FA0E7C5A8}"/>
+              </a:ext>
+            </a:extLst>
+          </p:cNvPr>
+          <p:cNvSpPr>
+            <a:spLocks xmlns:a="http://schemas.openxmlformats.org/drawingml/2006/main" noGrp="1"/>
+          </p:cNvSpPr>
+          <p:nvPr/>
+        </p:nvSpPr>
+        <p:spPr>
+          <a:xfrm xmlns:a="http://schemas.openxmlformats.org/drawingml/2006/main">
+            <a:off x="3048000" y="1000125"/>
+            <a:ext cx="3238500" cy="838200"/>
+          </a:xfrm>
+          <a:prstGeom xmlns:a="http://schemas.openxmlformats.org/drawingml/2006/main" prst="roundRect">
+            <a:avLst>
+              <a:gd name="adj" fmla="val 9091"/>
+            </a:avLst>
+          </a:prstGeom>
+          <a:solidFill xmlns:a="http://schemas.openxmlformats.org/drawingml/2006/main">
+            <a:srgbClr val="E7F2ED"/>
+          </a:solidFill>
+          <a:ln xmlns:a="http://schemas.openxmlformats.org/drawingml/2006/main" w="9525">
+            <a:solidFill>
+              <a:srgbClr val="D6DDE2"/>
+            </a:solidFill>
+            <a:prstDash val="solid"/>
+          </a:ln>
+        </p:spPr>
+        <p:txBody>
+          <a:bodyPr xmlns:a="http://schemas.openxmlformats.org/drawingml/2006/main" lIns="76200" tIns="38100" rIns="76200" bIns="38100" anchor="ctr"/>
+          <a:lstStyle xmlns:a="http://schemas.openxmlformats.org/drawingml/2006/main"/>
+          <a:p xmlns:a="http://schemas.openxmlformats.org/drawingml/2006/main">
+            <a:pPr algn="ctr">
+              <a:defRPr sz="1725" b="1">
+                <a:solidFill>
+                  <a:srgbClr val="18354E"/>
+                </a:solidFill>
+              </a:defRPr>
+            </a:pPr>
+            <a:r>
+              <a:rPr sz="1725" b="1">
+                <a:solidFill>
+                  <a:srgbClr val="18354E"/>
+                </a:solidFill>
+                <a:latin typeface="Microsoft YaHei"/>
+                <a:ea typeface="Microsoft YaHei"/>
+                <a:cs typeface="Microsoft YaHei"/>
+              </a:rPr>
+              <a:t>当前个人项目版本</a:t>
+            </a:r>
+          </a:p>
+          <a:p xmlns:a="http://schemas.openxmlformats.org/drawingml/2006/main">
+            <a:pPr algn="ctr">
+              <a:defRPr sz="1725" b="1">
+                <a:solidFill>
+                  <a:srgbClr val="18354E"/>
+                </a:solidFill>
+              </a:defRPr>
+            </a:pPr>
+            <a:r>
+              <a:rPr sz="1725" b="1">
+                <a:solidFill>
+                  <a:srgbClr val="18354E"/>
+                </a:solidFill>
+                <a:latin typeface="Microsoft YaHei"/>
+                <a:ea typeface="Microsoft YaHei"/>
+                <a:cs typeface="Microsoft YaHei"/>
+              </a:rPr>
+              <a:t>链接 / tag / 压缩包</a:t>
+            </a:r>
+          </a:p>
+        </p:txBody>
+      </p:sp>
+      <p:sp>
+        <p:nvSpPr>
+          <p:cNvPr id="8" name="p19-no">
+            <a:extLst xmlns:a="http://schemas.openxmlformats.org/drawingml/2006/main">
+              <a:ext uri="{FF2B5EF4-FFF2-40B4-BE49-F238E27FC236}">
+                <a16:creationId xmlns:a16="http://schemas.microsoft.com/office/drawing/2014/main" id="{6C22B6E3-1BA4-4E70-B16F-5F50633FF9DF}"/>
+              </a:ext>
+            </a:extLst>
+          </p:cNvPr>
+          <p:cNvSpPr>
+            <a:spLocks xmlns:a="http://schemas.openxmlformats.org/drawingml/2006/main" noGrp="1"/>
+          </p:cNvSpPr>
+          <p:nvPr/>
+        </p:nvSpPr>
+        <p:spPr>
+          <a:xfrm xmlns:a="http://schemas.openxmlformats.org/drawingml/2006/main">
+            <a:off x="6667500" y="1095375"/>
+            <a:ext cx="4762500" cy="533400"/>
+          </a:xfrm>
+          <a:prstGeom xmlns:a="http://schemas.openxmlformats.org/drawingml/2006/main" prst="rect">
+            <a:avLst/>
+          </a:prstGeom>
+          <a:solidFill xmlns:a="http://schemas.openxmlformats.org/drawingml/2006/main">
+            <a:srgbClr val="F8E9EA"/>
+          </a:solidFill>
+          <a:ln xmlns:a="http://schemas.openxmlformats.org/drawingml/2006/main" w="0">
+            <a:noFill/>
+            <a:prstDash val="solid"/>
+          </a:ln>
+        </p:spPr>
+        <p:txBody>
+          <a:bodyPr xmlns:a="http://schemas.openxmlformats.org/drawingml/2006/main" lIns="76200" tIns="38100" rIns="76200" bIns="38100" anchor="ctr"/>
+          <a:lstStyle xmlns:a="http://schemas.openxmlformats.org/drawingml/2006/main"/>
+          <a:p xmlns:a="http://schemas.openxmlformats.org/drawingml/2006/main">
+            <a:pPr algn="ctr">
+              <a:defRPr sz="1650" b="1">
+                <a:solidFill>
+                  <a:srgbClr val="C8161E"/>
+                </a:solidFill>
+              </a:defRPr>
+            </a:pPr>
+            <a:r>
+              <a:rPr sz="1650" b="1">
+                <a:solidFill>
+                  <a:srgbClr val="C8161E"/>
+                </a:solidFill>
+                <a:latin typeface="Microsoft YaHei"/>
+                <a:ea typeface="Microsoft YaHei"/>
+                <a:cs typeface="Microsoft YaHei"/>
+              </a:rPr>
+              <a:t>不重复制作与项目分离的汇报文档</a:t>
+            </a:r>
+          </a:p>
+        </p:txBody>
+      </p:sp>
+      <p:sp>
+        <p:nvSpPr>
+          <p:cNvPr id="9" name="p19-h0">
+            <a:extLst xmlns:a="http://schemas.openxmlformats.org/drawingml/2006/main">
+              <a:ext uri="{FF2B5EF4-FFF2-40B4-BE49-F238E27FC236}">
+                <a16:creationId xmlns:a16="http://schemas.microsoft.com/office/drawing/2014/main" id="{CC3427D4-B235-4DC6-AE7B-AB894E14116A}"/>
+              </a:ext>
+            </a:extLst>
+          </p:cNvPr>
+          <p:cNvSpPr>
+            <a:spLocks xmlns:a="http://schemas.openxmlformats.org/drawingml/2006/main" noGrp="1"/>
+          </p:cNvSpPr>
+          <p:nvPr/>
+        </p:nvSpPr>
+        <p:spPr>
+          <a:xfrm xmlns:a="http://schemas.openxmlformats.org/drawingml/2006/main">
+            <a:off x="714375" y="2143125"/>
+            <a:ext cx="2381250" cy="457200"/>
+          </a:xfrm>
+          <a:prstGeom xmlns:a="http://schemas.openxmlformats.org/drawingml/2006/main" prst="roundRect">
+            <a:avLst>
+              <a:gd name="adj" fmla="val 16667"/>
+            </a:avLst>
+          </a:prstGeom>
+          <a:solidFill xmlns:a="http://schemas.openxmlformats.org/drawingml/2006/main">
+            <a:srgbClr val="F8E9EA"/>
+          </a:solidFill>
+          <a:ln xmlns:a="http://schemas.openxmlformats.org/drawingml/2006/main" w="0">
+            <a:noFill/>
+            <a:prstDash val="solid"/>
+          </a:ln>
+        </p:spPr>
+        <p:txBody>
+          <a:bodyPr xmlns:a="http://schemas.openxmlformats.org/drawingml/2006/main" lIns="76200" tIns="38100" rIns="76200" bIns="38100" anchor="ctr"/>
+          <a:lstStyle xmlns:a="http://schemas.openxmlformats.org/drawingml/2006/main"/>
+          <a:p xmlns:a="http://schemas.openxmlformats.org/drawingml/2006/main">
+            <a:pPr algn="ctr">
+              <a:defRPr sz="1425" b="1">
+                <a:solidFill>
+                  <a:srgbClr val="C8161E"/>
+                </a:solidFill>
+              </a:defRPr>
+            </a:pPr>
+            <a:r>
+              <a:rPr sz="1425" b="1">
+                <a:solidFill>
+                  <a:srgbClr val="C8161E"/>
+                </a:solidFill>
+                <a:latin typeface="Microsoft YaHei"/>
+                <a:ea typeface="Microsoft YaHei"/>
+                <a:cs typeface="Microsoft YaHei"/>
+              </a:rPr>
+              <a:t>缺直接证据</a:t>
+            </a:r>
+          </a:p>
+        </p:txBody>
+      </p:sp>
+      <p:sp>
+        <p:nvSpPr>
+          <p:cNvPr id="10" name="p19-a0">
+            <a:extLst xmlns:a="http://schemas.openxmlformats.org/drawingml/2006/main">
+              <a:ext uri="{FF2B5EF4-FFF2-40B4-BE49-F238E27FC236}">
+                <a16:creationId xmlns:a16="http://schemas.microsoft.com/office/drawing/2014/main" id="{9B93406C-25E7-43C6-970D-E0889113908D}"/>
+              </a:ext>
+            </a:extLst>
+          </p:cNvPr>
+          <p:cNvSpPr>
+            <a:spLocks xmlns:a="http://schemas.openxmlformats.org/drawingml/2006/main" noGrp="1"/>
+          </p:cNvSpPr>
+          <p:nvPr/>
+        </p:nvSpPr>
+        <p:spPr>
+          <a:xfrm xmlns:a="http://schemas.openxmlformats.org/drawingml/2006/main">
+            <a:off x="3286125" y="2190750"/>
+            <a:ext cx="523875" cy="381000"/>
+          </a:xfrm>
+          <a:prstGeom xmlns:a="http://schemas.openxmlformats.org/drawingml/2006/main" prst="rect">
+            <a:avLst/>
+          </a:prstGeom>
+          <a:noFill xmlns:a="http://schemas.openxmlformats.org/drawingml/2006/main"/>
+          <a:ln xmlns:a="http://schemas.openxmlformats.org/drawingml/2006/main" w="0">
+            <a:noFill/>
+            <a:prstDash val="solid"/>
+          </a:ln>
+        </p:spPr>
+        <p:txBody>
+          <a:bodyPr xmlns:a="http://schemas.openxmlformats.org/drawingml/2006/main" lIns="76200" tIns="38100" rIns="76200" bIns="38100" anchor="ctr"/>
+          <a:lstStyle xmlns:a="http://schemas.openxmlformats.org/drawingml/2006/main"/>
+          <a:p xmlns:a="http://schemas.openxmlformats.org/drawingml/2006/main">
+            <a:pPr algn="ctr">
+              <a:defRPr sz="2175" b="1">
+                <a:solidFill>
+                  <a:srgbClr val="667684"/>
+                </a:solidFill>
+              </a:defRPr>
+            </a:pPr>
+            <a:r>
+              <a:rPr sz="2175" b="1">
+                <a:solidFill>
+                  <a:srgbClr val="667684"/>
+                </a:solidFill>
+                <a:latin typeface="Arial"/>
+                <a:ea typeface="Arial"/>
+                <a:cs typeface="Arial"/>
+              </a:rPr>
+              <a:t>→</a:t>
+            </a:r>
+          </a:p>
+        </p:txBody>
+      </p:sp>
+      <p:sp>
+        <p:nvSpPr>
+          <p:cNvPr id="11" name="p19-d0">
+            <a:extLst xmlns:a="http://schemas.openxmlformats.org/drawingml/2006/main">
+              <a:ext uri="{FF2B5EF4-FFF2-40B4-BE49-F238E27FC236}">
+                <a16:creationId xmlns:a16="http://schemas.microsoft.com/office/drawing/2014/main" id="{70219681-87AE-4886-9173-83B716AB7FB5}"/>
+              </a:ext>
+            </a:extLst>
+          </p:cNvPr>
+          <p:cNvSpPr>
+            <a:spLocks xmlns:a="http://schemas.openxmlformats.org/drawingml/2006/main" noGrp="1"/>
+          </p:cNvSpPr>
+          <p:nvPr/>
+        </p:nvSpPr>
+        <p:spPr>
+          <a:xfrm xmlns:a="http://schemas.openxmlformats.org/drawingml/2006/main">
+            <a:off x="4000500" y="2143125"/>
+            <a:ext cx="6667500" cy="457200"/>
+          </a:xfrm>
+          <a:prstGeom xmlns:a="http://schemas.openxmlformats.org/drawingml/2006/main" prst="roundRect">
+            <a:avLst>
+              <a:gd name="adj" fmla="val 16667"/>
+            </a:avLst>
+          </a:prstGeom>
+          <a:solidFill xmlns:a="http://schemas.openxmlformats.org/drawingml/2006/main">
+            <a:srgbClr val="FFFFFF"/>
+          </a:solidFill>
+          <a:ln xmlns:a="http://schemas.openxmlformats.org/drawingml/2006/main" w="9525">
+            <a:solidFill>
+              <a:srgbClr val="D6DDE2"/>
+            </a:solidFill>
+            <a:prstDash val="solid"/>
+          </a:ln>
+        </p:spPr>
+        <p:txBody>
+          <a:bodyPr xmlns:a="http://schemas.openxmlformats.org/drawingml/2006/main" lIns="76200" tIns="38100" rIns="76200" bIns="38100" anchor="ctr"/>
+          <a:lstStyle xmlns:a="http://schemas.openxmlformats.org/drawingml/2006/main"/>
+          <a:p xmlns:a="http://schemas.openxmlformats.org/drawingml/2006/main">
+            <a:pPr algn="l">
+              <a:defRPr sz="1425" b="1">
+                <a:solidFill>
+                  <a:srgbClr val="263746"/>
+                </a:solidFill>
+              </a:defRPr>
+            </a:pPr>
+            <a:r>
+              <a:rPr sz="1425" b="1">
+                <a:solidFill>
+                  <a:srgbClr val="263746"/>
+                </a:solidFill>
+                <a:latin typeface="Microsoft YaHei"/>
+                <a:ea typeface="Microsoft YaHei"/>
+                <a:cs typeface="Microsoft YaHei"/>
+              </a:rPr>
+              <a:t>回第 3-4 课：检索 / 精读</a:t>
+            </a:r>
+          </a:p>
+        </p:txBody>
+      </p:sp>
+      <p:sp>
+        <p:nvSpPr>
+          <p:cNvPr id="12" name="p19-h1">
+            <a:extLst xmlns:a="http://schemas.openxmlformats.org/drawingml/2006/main">
+              <a:ext uri="{FF2B5EF4-FFF2-40B4-BE49-F238E27FC236}">
+                <a16:creationId xmlns:a16="http://schemas.microsoft.com/office/drawing/2014/main" id="{506A29FD-9A71-4C8C-B12D-8A3950C92D1C}"/>
+              </a:ext>
+            </a:extLst>
+          </p:cNvPr>
+          <p:cNvSpPr>
+            <a:spLocks xmlns:a="http://schemas.openxmlformats.org/drawingml/2006/main" noGrp="1"/>
+          </p:cNvSpPr>
+          <p:nvPr/>
+        </p:nvSpPr>
+        <p:spPr>
+          <a:xfrm xmlns:a="http://schemas.openxmlformats.org/drawingml/2006/main">
+            <a:off x="714375" y="2733675"/>
+            <a:ext cx="2381250" cy="457200"/>
+          </a:xfrm>
+          <a:prstGeom xmlns:a="http://schemas.openxmlformats.org/drawingml/2006/main" prst="roundRect">
+            <a:avLst>
+              <a:gd name="adj" fmla="val 16667"/>
+            </a:avLst>
+          </a:prstGeom>
+          <a:solidFill xmlns:a="http://schemas.openxmlformats.org/drawingml/2006/main">
+            <a:srgbClr val="F8E9EA"/>
+          </a:solidFill>
+          <a:ln xmlns:a="http://schemas.openxmlformats.org/drawingml/2006/main" w="0">
+            <a:noFill/>
+            <a:prstDash val="solid"/>
+          </a:ln>
+        </p:spPr>
+        <p:txBody>
+          <a:bodyPr xmlns:a="http://schemas.openxmlformats.org/drawingml/2006/main" lIns="76200" tIns="38100" rIns="76200" bIns="38100" anchor="ctr"/>
+          <a:lstStyle xmlns:a="http://schemas.openxmlformats.org/drawingml/2006/main"/>
+          <a:p xmlns:a="http://schemas.openxmlformats.org/drawingml/2006/main">
+            <a:pPr algn="ctr">
+              <a:defRPr sz="1425" b="1">
+                <a:solidFill>
+                  <a:srgbClr val="C8161E"/>
+                </a:solidFill>
+              </a:defRPr>
+            </a:pPr>
+            <a:r>
+              <a:rPr sz="1425" b="1">
+                <a:solidFill>
+                  <a:srgbClr val="C8161E"/>
+                </a:solidFill>
+                <a:latin typeface="Microsoft YaHei"/>
+                <a:ea typeface="Microsoft YaHei"/>
+                <a:cs typeface="Microsoft YaHei"/>
+              </a:rPr>
+              <a:t>问题过大</a:t>
+            </a:r>
+          </a:p>
+        </p:txBody>
+      </p:sp>
+      <p:sp>
+        <p:nvSpPr>
+          <p:cNvPr id="13" name="p19-a1">
+            <a:extLst xmlns:a="http://schemas.openxmlformats.org/drawingml/2006/main">
+              <a:ext uri="{FF2B5EF4-FFF2-40B4-BE49-F238E27FC236}">
+                <a16:creationId xmlns:a16="http://schemas.microsoft.com/office/drawing/2014/main" id="{7083B93A-4287-46AF-BA86-A09B66B27CD0}"/>
+              </a:ext>
+            </a:extLst>
+          </p:cNvPr>
+          <p:cNvSpPr>
+            <a:spLocks xmlns:a="http://schemas.openxmlformats.org/drawingml/2006/main" noGrp="1"/>
+          </p:cNvSpPr>
+          <p:nvPr/>
+        </p:nvSpPr>
+        <p:spPr>
+          <a:xfrm xmlns:a="http://schemas.openxmlformats.org/drawingml/2006/main">
+            <a:off x="3286125" y="2781300"/>
+            <a:ext cx="523875" cy="381000"/>
+          </a:xfrm>
+          <a:prstGeom xmlns:a="http://schemas.openxmlformats.org/drawingml/2006/main" prst="rect">
+            <a:avLst/>
+          </a:prstGeom>
+          <a:noFill xmlns:a="http://schemas.openxmlformats.org/drawingml/2006/main"/>
+          <a:ln xmlns:a="http://schemas.openxmlformats.org/drawingml/2006/main" w="0">
+            <a:noFill/>
+            <a:prstDash val="solid"/>
+          </a:ln>
+        </p:spPr>
+        <p:txBody>
+          <a:bodyPr xmlns:a="http://schemas.openxmlformats.org/drawingml/2006/main" lIns="76200" tIns="38100" rIns="76200" bIns="38100" anchor="ctr"/>
+          <a:lstStyle xmlns:a="http://schemas.openxmlformats.org/drawingml/2006/main"/>
+          <a:p xmlns:a="http://schemas.openxmlformats.org/drawingml/2006/main">
+            <a:pPr algn="ctr">
+              <a:defRPr sz="2175" b="1">
+                <a:solidFill>
+                  <a:srgbClr val="667684"/>
+                </a:solidFill>
+              </a:defRPr>
+            </a:pPr>
+            <a:r>
+              <a:rPr sz="2175" b="1">
+                <a:solidFill>
+                  <a:srgbClr val="667684"/>
+                </a:solidFill>
+                <a:latin typeface="Arial"/>
+                <a:ea typeface="Arial"/>
+                <a:cs typeface="Arial"/>
+              </a:rPr>
+              <a:t>→</a:t>
+            </a:r>
+          </a:p>
+        </p:txBody>
+      </p:sp>
+      <p:sp>
+        <p:nvSpPr>
+          <p:cNvPr id="14" name="p19-d1">
+            <a:extLst xmlns:a="http://schemas.openxmlformats.org/drawingml/2006/main">
+              <a:ext uri="{FF2B5EF4-FFF2-40B4-BE49-F238E27FC236}">
+                <a16:creationId xmlns:a16="http://schemas.microsoft.com/office/drawing/2014/main" id="{8FE2C5F8-3A6A-41FE-A363-C68796BB0275}"/>
+              </a:ext>
+            </a:extLst>
+          </p:cNvPr>
+          <p:cNvSpPr>
+            <a:spLocks xmlns:a="http://schemas.openxmlformats.org/drawingml/2006/main" noGrp="1"/>
+          </p:cNvSpPr>
+          <p:nvPr/>
+        </p:nvSpPr>
+        <p:spPr>
+          <a:xfrm xmlns:a="http://schemas.openxmlformats.org/drawingml/2006/main">
+            <a:off x="4000500" y="2733675"/>
+            <a:ext cx="6667500" cy="457200"/>
+          </a:xfrm>
+          <a:prstGeom xmlns:a="http://schemas.openxmlformats.org/drawingml/2006/main" prst="roundRect">
+            <a:avLst>
+              <a:gd name="adj" fmla="val 16667"/>
+            </a:avLst>
+          </a:prstGeom>
+          <a:solidFill xmlns:a="http://schemas.openxmlformats.org/drawingml/2006/main">
+            <a:srgbClr val="FFFFFF"/>
+          </a:solidFill>
+          <a:ln xmlns:a="http://schemas.openxmlformats.org/drawingml/2006/main" w="9525">
+            <a:solidFill>
+              <a:srgbClr val="D6DDE2"/>
+            </a:solidFill>
+            <a:prstDash val="solid"/>
+          </a:ln>
+        </p:spPr>
+        <p:txBody>
+          <a:bodyPr xmlns:a="http://schemas.openxmlformats.org/drawingml/2006/main" lIns="76200" tIns="38100" rIns="76200" bIns="38100" anchor="ctr"/>
+          <a:lstStyle xmlns:a="http://schemas.openxmlformats.org/drawingml/2006/main"/>
+          <a:p xmlns:a="http://schemas.openxmlformats.org/drawingml/2006/main">
+            <a:pPr algn="l">
+              <a:defRPr sz="1425" b="1">
+                <a:solidFill>
+                  <a:srgbClr val="263746"/>
+                </a:solidFill>
+              </a:defRPr>
+            </a:pPr>
+            <a:r>
+              <a:rPr sz="1425" b="1">
+                <a:solidFill>
+                  <a:srgbClr val="263746"/>
+                </a:solidFill>
+                <a:latin typeface="Microsoft YaHei"/>
+                <a:ea typeface="Microsoft YaHei"/>
+                <a:cs typeface="Microsoft YaHei"/>
+              </a:rPr>
+              <a:t>回本课：问题重写 / 非例</a:t>
+            </a:r>
+          </a:p>
+        </p:txBody>
+      </p:sp>
+      <p:sp>
+        <p:nvSpPr>
+          <p:cNvPr id="15" name="p19-h2">
+            <a:extLst xmlns:a="http://schemas.openxmlformats.org/drawingml/2006/main">
+              <a:ext uri="{FF2B5EF4-FFF2-40B4-BE49-F238E27FC236}">
+                <a16:creationId xmlns:a16="http://schemas.microsoft.com/office/drawing/2014/main" id="{1F99E2FE-6697-493E-B7B7-196C7FD016D5}"/>
+              </a:ext>
+            </a:extLst>
+          </p:cNvPr>
+          <p:cNvSpPr>
+            <a:spLocks xmlns:a="http://schemas.openxmlformats.org/drawingml/2006/main" noGrp="1"/>
+          </p:cNvSpPr>
+          <p:nvPr/>
+        </p:nvSpPr>
+        <p:spPr>
+          <a:xfrm xmlns:a="http://schemas.openxmlformats.org/drawingml/2006/main">
+            <a:off x="714375" y="3324225"/>
+            <a:ext cx="2381250" cy="457200"/>
+          </a:xfrm>
+          <a:prstGeom xmlns:a="http://schemas.openxmlformats.org/drawingml/2006/main" prst="roundRect">
+            <a:avLst>
+              <a:gd name="adj" fmla="val 16667"/>
+            </a:avLst>
+          </a:prstGeom>
+          <a:solidFill xmlns:a="http://schemas.openxmlformats.org/drawingml/2006/main">
+            <a:srgbClr val="F8E9EA"/>
+          </a:solidFill>
+          <a:ln xmlns:a="http://schemas.openxmlformats.org/drawingml/2006/main" w="0">
+            <a:noFill/>
+            <a:prstDash val="solid"/>
+          </a:ln>
+        </p:spPr>
+        <p:txBody>
+          <a:bodyPr xmlns:a="http://schemas.openxmlformats.org/drawingml/2006/main" lIns="76200" tIns="38100" rIns="76200" bIns="38100" anchor="ctr"/>
+          <a:lstStyle xmlns:a="http://schemas.openxmlformats.org/drawingml/2006/main"/>
+          <a:p xmlns:a="http://schemas.openxmlformats.org/drawingml/2006/main">
+            <a:pPr algn="ctr">
+              <a:defRPr sz="1425" b="1">
+                <a:solidFill>
+                  <a:srgbClr val="C8161E"/>
+                </a:solidFill>
+              </a:defRPr>
+            </a:pPr>
+            <a:r>
+              <a:rPr sz="1425" b="1">
+                <a:solidFill>
+                  <a:srgbClr val="C8161E"/>
+                </a:solidFill>
+                <a:latin typeface="Microsoft YaHei"/>
+                <a:ea typeface="Microsoft YaHei"/>
+                <a:cs typeface="Microsoft YaHei"/>
+              </a:rPr>
+              <a:t>命题不可证伪</a:t>
+            </a:r>
+          </a:p>
+        </p:txBody>
+      </p:sp>
+      <p:sp>
+        <p:nvSpPr>
+          <p:cNvPr id="16" name="p19-a2">
+            <a:extLst xmlns:a="http://schemas.openxmlformats.org/drawingml/2006/main">
+              <a:ext uri="{FF2B5EF4-FFF2-40B4-BE49-F238E27FC236}">
+                <a16:creationId xmlns:a16="http://schemas.microsoft.com/office/drawing/2014/main" id="{3339ED96-4539-4260-9E48-9384410C7FFE}"/>
+              </a:ext>
+            </a:extLst>
+          </p:cNvPr>
+          <p:cNvSpPr>
+            <a:spLocks xmlns:a="http://schemas.openxmlformats.org/drawingml/2006/main" noGrp="1"/>
+          </p:cNvSpPr>
+          <p:nvPr/>
+        </p:nvSpPr>
+        <p:spPr>
+          <a:xfrm xmlns:a="http://schemas.openxmlformats.org/drawingml/2006/main">
+            <a:off x="3286125" y="3371850"/>
+            <a:ext cx="523875" cy="381000"/>
+          </a:xfrm>
+          <a:prstGeom xmlns:a="http://schemas.openxmlformats.org/drawingml/2006/main" prst="rect">
+            <a:avLst/>
+          </a:prstGeom>
+          <a:noFill xmlns:a="http://schemas.openxmlformats.org/drawingml/2006/main"/>
+          <a:ln xmlns:a="http://schemas.openxmlformats.org/drawingml/2006/main" w="0">
+            <a:noFill/>
+            <a:prstDash val="solid"/>
+          </a:ln>
+        </p:spPr>
+        <p:txBody>
+          <a:bodyPr xmlns:a="http://schemas.openxmlformats.org/drawingml/2006/main" lIns="76200" tIns="38100" rIns="76200" bIns="38100" anchor="ctr"/>
+          <a:lstStyle xmlns:a="http://schemas.openxmlformats.org/drawingml/2006/main"/>
+          <a:p xmlns:a="http://schemas.openxmlformats.org/drawingml/2006/main">
+            <a:pPr algn="ctr">
+              <a:defRPr sz="2175" b="1">
+                <a:solidFill>
+                  <a:srgbClr val="667684"/>
+                </a:solidFill>
+              </a:defRPr>
+            </a:pPr>
+            <a:r>
+              <a:rPr sz="2175" b="1">
+                <a:solidFill>
+                  <a:srgbClr val="667684"/>
+                </a:solidFill>
+                <a:latin typeface="Arial"/>
+                <a:ea typeface="Arial"/>
+                <a:cs typeface="Arial"/>
+              </a:rPr>
+              <a:t>→</a:t>
+            </a:r>
+          </a:p>
+        </p:txBody>
+      </p:sp>
+      <p:sp>
+        <p:nvSpPr>
+          <p:cNvPr id="17" name="p19-d2">
+            <a:extLst xmlns:a="http://schemas.openxmlformats.org/drawingml/2006/main">
+              <a:ext uri="{FF2B5EF4-FFF2-40B4-BE49-F238E27FC236}">
+                <a16:creationId xmlns:a16="http://schemas.microsoft.com/office/drawing/2014/main" id="{65908EFF-5A45-4BF3-8926-D72AA7D8F31F}"/>
+              </a:ext>
+            </a:extLst>
+          </p:cNvPr>
+          <p:cNvSpPr>
+            <a:spLocks xmlns:a="http://schemas.openxmlformats.org/drawingml/2006/main" noGrp="1"/>
+          </p:cNvSpPr>
+          <p:nvPr/>
+        </p:nvSpPr>
+        <p:spPr>
+          <a:xfrm xmlns:a="http://schemas.openxmlformats.org/drawingml/2006/main">
+            <a:off x="4000500" y="3324225"/>
+            <a:ext cx="6667500" cy="457200"/>
+          </a:xfrm>
+          <a:prstGeom xmlns:a="http://schemas.openxmlformats.org/drawingml/2006/main" prst="roundRect">
+            <a:avLst>
+              <a:gd name="adj" fmla="val 16667"/>
+            </a:avLst>
+          </a:prstGeom>
+          <a:solidFill xmlns:a="http://schemas.openxmlformats.org/drawingml/2006/main">
+            <a:srgbClr val="FFFFFF"/>
+          </a:solidFill>
+          <a:ln xmlns:a="http://schemas.openxmlformats.org/drawingml/2006/main" w="9525">
+            <a:solidFill>
+              <a:srgbClr val="D6DDE2"/>
+            </a:solidFill>
+            <a:prstDash val="solid"/>
+          </a:ln>
+        </p:spPr>
+        <p:txBody>
+          <a:bodyPr xmlns:a="http://schemas.openxmlformats.org/drawingml/2006/main" lIns="76200" tIns="38100" rIns="76200" bIns="38100" anchor="ctr"/>
+          <a:lstStyle xmlns:a="http://schemas.openxmlformats.org/drawingml/2006/main"/>
+          <a:p xmlns:a="http://schemas.openxmlformats.org/drawingml/2006/main">
+            <a:pPr algn="l">
+              <a:defRPr sz="1425" b="1">
+                <a:solidFill>
+                  <a:srgbClr val="263746"/>
+                </a:solidFill>
+              </a:defRPr>
+            </a:pPr>
+            <a:r>
+              <a:rPr sz="1425" b="1">
+                <a:solidFill>
+                  <a:srgbClr val="263746"/>
+                </a:solidFill>
+                <a:latin typeface="Microsoft YaHei"/>
+                <a:ea typeface="Microsoft YaHei"/>
+                <a:cs typeface="Microsoft YaHei"/>
+              </a:rPr>
+              <a:t>补对照 / 指标 / 推翻条件</a:t>
+            </a:r>
+          </a:p>
+        </p:txBody>
+      </p:sp>
+      <p:sp>
+        <p:nvSpPr>
+          <p:cNvPr id="18" name="p19-h3">
+            <a:extLst xmlns:a="http://schemas.openxmlformats.org/drawingml/2006/main">
+              <a:ext uri="{FF2B5EF4-FFF2-40B4-BE49-F238E27FC236}">
+                <a16:creationId xmlns:a16="http://schemas.microsoft.com/office/drawing/2014/main" id="{B5320B2A-581B-42E5-A256-F9E62B508008}"/>
+              </a:ext>
+            </a:extLst>
+          </p:cNvPr>
+          <p:cNvSpPr>
+            <a:spLocks xmlns:a="http://schemas.openxmlformats.org/drawingml/2006/main" noGrp="1"/>
+          </p:cNvSpPr>
+          <p:nvPr/>
+        </p:nvSpPr>
+        <p:spPr>
+          <a:xfrm xmlns:a="http://schemas.openxmlformats.org/drawingml/2006/main">
+            <a:off x="714375" y="3914775"/>
+            <a:ext cx="2381250" cy="457200"/>
+          </a:xfrm>
+          <a:prstGeom xmlns:a="http://schemas.openxmlformats.org/drawingml/2006/main" prst="roundRect">
+            <a:avLst>
+              <a:gd name="adj" fmla="val 16667"/>
+            </a:avLst>
+          </a:prstGeom>
+          <a:solidFill xmlns:a="http://schemas.openxmlformats.org/drawingml/2006/main">
+            <a:srgbClr val="F8E9EA"/>
+          </a:solidFill>
+          <a:ln xmlns:a="http://schemas.openxmlformats.org/drawingml/2006/main" w="0">
+            <a:noFill/>
+            <a:prstDash val="solid"/>
+          </a:ln>
+        </p:spPr>
+        <p:txBody>
+          <a:bodyPr xmlns:a="http://schemas.openxmlformats.org/drawingml/2006/main" lIns="76200" tIns="38100" rIns="76200" bIns="38100" anchor="ctr"/>
+          <a:lstStyle xmlns:a="http://schemas.openxmlformats.org/drawingml/2006/main"/>
+          <a:p xmlns:a="http://schemas.openxmlformats.org/drawingml/2006/main">
+            <a:pPr algn="ctr">
+              <a:defRPr sz="1425" b="1">
+                <a:solidFill>
+                  <a:srgbClr val="C8161E"/>
+                </a:solidFill>
+              </a:defRPr>
+            </a:pPr>
+            <a:r>
+              <a:rPr sz="1425" b="1">
+                <a:solidFill>
+                  <a:srgbClr val="C8161E"/>
+                </a:solidFill>
+                <a:latin typeface="Microsoft YaHei"/>
+                <a:ea typeface="Microsoft YaHei"/>
+                <a:cs typeface="Microsoft YaHei"/>
+              </a:rPr>
+              <a:t>推导脱离文献</a:t>
+            </a:r>
+          </a:p>
+        </p:txBody>
+      </p:sp>
+      <p:sp>
+        <p:nvSpPr>
+          <p:cNvPr id="19" name="p19-a3">
+            <a:extLst xmlns:a="http://schemas.openxmlformats.org/drawingml/2006/main">
+              <a:ext uri="{FF2B5EF4-FFF2-40B4-BE49-F238E27FC236}">
+                <a16:creationId xmlns:a16="http://schemas.microsoft.com/office/drawing/2014/main" id="{E20F850A-505D-487F-9D24-0B7E2A75C01A}"/>
+              </a:ext>
+            </a:extLst>
+          </p:cNvPr>
+          <p:cNvSpPr>
+            <a:spLocks xmlns:a="http://schemas.openxmlformats.org/drawingml/2006/main" noGrp="1"/>
+          </p:cNvSpPr>
+          <p:nvPr/>
+        </p:nvSpPr>
+        <p:spPr>
+          <a:xfrm xmlns:a="http://schemas.openxmlformats.org/drawingml/2006/main">
+            <a:off x="3286125" y="3962400"/>
+            <a:ext cx="523875" cy="381000"/>
+          </a:xfrm>
+          <a:prstGeom xmlns:a="http://schemas.openxmlformats.org/drawingml/2006/main" prst="rect">
+            <a:avLst/>
+          </a:prstGeom>
+          <a:noFill xmlns:a="http://schemas.openxmlformats.org/drawingml/2006/main"/>
+          <a:ln xmlns:a="http://schemas.openxmlformats.org/drawingml/2006/main" w="0">
+            <a:noFill/>
+            <a:prstDash val="solid"/>
+          </a:ln>
+        </p:spPr>
+        <p:txBody>
+          <a:bodyPr xmlns:a="http://schemas.openxmlformats.org/drawingml/2006/main" lIns="76200" tIns="38100" rIns="76200" bIns="38100" anchor="ctr"/>
+          <a:lstStyle xmlns:a="http://schemas.openxmlformats.org/drawingml/2006/main"/>
+          <a:p xmlns:a="http://schemas.openxmlformats.org/drawingml/2006/main">
+            <a:pPr algn="ctr">
+              <a:defRPr sz="2175" b="1">
+                <a:solidFill>
+                  <a:srgbClr val="667684"/>
+                </a:solidFill>
+              </a:defRPr>
+            </a:pPr>
+            <a:r>
+              <a:rPr sz="2175" b="1">
+                <a:solidFill>
+                  <a:srgbClr val="667684"/>
+                </a:solidFill>
+                <a:latin typeface="Arial"/>
+                <a:ea typeface="Arial"/>
+                <a:cs typeface="Arial"/>
+              </a:rPr>
+              <a:t>→</a:t>
+            </a:r>
+          </a:p>
+        </p:txBody>
+      </p:sp>
+      <p:sp>
+        <p:nvSpPr>
+          <p:cNvPr id="20" name="p19-d3">
+            <a:extLst xmlns:a="http://schemas.openxmlformats.org/drawingml/2006/main">
+              <a:ext uri="{FF2B5EF4-FFF2-40B4-BE49-F238E27FC236}">
+                <a16:creationId xmlns:a16="http://schemas.microsoft.com/office/drawing/2014/main" id="{2CABAB99-729E-4CE3-AECD-223037060B09}"/>
+              </a:ext>
+            </a:extLst>
+          </p:cNvPr>
+          <p:cNvSpPr>
+            <a:spLocks xmlns:a="http://schemas.openxmlformats.org/drawingml/2006/main" noGrp="1"/>
+          </p:cNvSpPr>
+          <p:nvPr/>
+        </p:nvSpPr>
+        <p:spPr>
+          <a:xfrm xmlns:a="http://schemas.openxmlformats.org/drawingml/2006/main">
+            <a:off x="4000500" y="3914775"/>
+            <a:ext cx="6667500" cy="457200"/>
+          </a:xfrm>
+          <a:prstGeom xmlns:a="http://schemas.openxmlformats.org/drawingml/2006/main" prst="roundRect">
+            <a:avLst>
+              <a:gd name="adj" fmla="val 16667"/>
+            </a:avLst>
+          </a:prstGeom>
+          <a:solidFill xmlns:a="http://schemas.openxmlformats.org/drawingml/2006/main">
+            <a:srgbClr val="FFFFFF"/>
+          </a:solidFill>
+          <a:ln xmlns:a="http://schemas.openxmlformats.org/drawingml/2006/main" w="9525">
+            <a:solidFill>
+              <a:srgbClr val="D6DDE2"/>
+            </a:solidFill>
+            <a:prstDash val="solid"/>
+          </a:ln>
+        </p:spPr>
+        <p:txBody>
+          <a:bodyPr xmlns:a="http://schemas.openxmlformats.org/drawingml/2006/main" lIns="76200" tIns="38100" rIns="76200" bIns="38100" anchor="ctr"/>
+          <a:lstStyle xmlns:a="http://schemas.openxmlformats.org/drawingml/2006/main"/>
+          <a:p xmlns:a="http://schemas.openxmlformats.org/drawingml/2006/main">
+            <a:pPr algn="l">
+              <a:defRPr sz="1425" b="1">
+                <a:solidFill>
+                  <a:srgbClr val="263746"/>
+                </a:solidFill>
+              </a:defRPr>
+            </a:pPr>
+            <a:r>
+              <a:rPr sz="1425" b="1">
+                <a:solidFill>
+                  <a:srgbClr val="263746"/>
+                </a:solidFill>
+                <a:latin typeface="Microsoft YaHei"/>
+                <a:ea typeface="Microsoft YaHei"/>
+                <a:cs typeface="Microsoft YaHei"/>
+              </a:rPr>
+              <a:t>回第 5 课证据地图</a:t>
+            </a:r>
+          </a:p>
+        </p:txBody>
+      </p:sp>
+      <p:sp>
+        <p:nvSpPr>
+          <p:cNvPr id="21" name="p19-h4">
+            <a:extLst xmlns:a="http://schemas.openxmlformats.org/drawingml/2006/main">
+              <a:ext uri="{FF2B5EF4-FFF2-40B4-BE49-F238E27FC236}">
+                <a16:creationId xmlns:a16="http://schemas.microsoft.com/office/drawing/2014/main" id="{3881FF0A-E67A-40ED-847E-E8D92D3F46A5}"/>
+              </a:ext>
+            </a:extLst>
+          </p:cNvPr>
+          <p:cNvSpPr>
+            <a:spLocks xmlns:a="http://schemas.openxmlformats.org/drawingml/2006/main" noGrp="1"/>
+          </p:cNvSpPr>
+          <p:nvPr/>
+        </p:nvSpPr>
+        <p:spPr>
+          <a:xfrm xmlns:a="http://schemas.openxmlformats.org/drawingml/2006/main">
+            <a:off x="714375" y="4505325"/>
+            <a:ext cx="2381250" cy="457200"/>
+          </a:xfrm>
+          <a:prstGeom xmlns:a="http://schemas.openxmlformats.org/drawingml/2006/main" prst="roundRect">
+            <a:avLst>
+              <a:gd name="adj" fmla="val 16667"/>
+            </a:avLst>
+          </a:prstGeom>
+          <a:solidFill xmlns:a="http://schemas.openxmlformats.org/drawingml/2006/main">
+            <a:srgbClr val="F8E9EA"/>
+          </a:solidFill>
+          <a:ln xmlns:a="http://schemas.openxmlformats.org/drawingml/2006/main" w="0">
+            <a:noFill/>
+            <a:prstDash val="solid"/>
+          </a:ln>
+        </p:spPr>
+        <p:txBody>
+          <a:bodyPr xmlns:a="http://schemas.openxmlformats.org/drawingml/2006/main" lIns="76200" tIns="38100" rIns="76200" bIns="38100" anchor="ctr"/>
+          <a:lstStyle xmlns:a="http://schemas.openxmlformats.org/drawingml/2006/main"/>
+          <a:p xmlns:a="http://schemas.openxmlformats.org/drawingml/2006/main">
+            <a:pPr algn="ctr">
+              <a:defRPr sz="1425" b="1">
+                <a:solidFill>
+                  <a:srgbClr val="C8161E"/>
+                </a:solidFill>
+              </a:defRPr>
+            </a:pPr>
+            <a:r>
+              <a:rPr sz="1425" b="1">
+                <a:solidFill>
+                  <a:srgbClr val="C8161E"/>
+                </a:solidFill>
+                <a:latin typeface="Microsoft YaHei"/>
+                <a:ea typeface="Microsoft YaHei"/>
+                <a:cs typeface="Microsoft YaHei"/>
+              </a:rPr>
+              <a:t>失败记录缺失</a:t>
+            </a:r>
+          </a:p>
+        </p:txBody>
+      </p:sp>
+      <p:sp>
+        <p:nvSpPr>
+          <p:cNvPr id="22" name="p19-a4">
+            <a:extLst xmlns:a="http://schemas.openxmlformats.org/drawingml/2006/main">
+              <a:ext uri="{FF2B5EF4-FFF2-40B4-BE49-F238E27FC236}">
+                <a16:creationId xmlns:a16="http://schemas.microsoft.com/office/drawing/2014/main" id="{BECED43F-5839-4962-938C-3909F8F4FA5A}"/>
+              </a:ext>
+            </a:extLst>
+          </p:cNvPr>
+          <p:cNvSpPr>
+            <a:spLocks xmlns:a="http://schemas.openxmlformats.org/drawingml/2006/main" noGrp="1"/>
+          </p:cNvSpPr>
+          <p:nvPr/>
+        </p:nvSpPr>
+        <p:spPr>
+          <a:xfrm xmlns:a="http://schemas.openxmlformats.org/drawingml/2006/main">
+            <a:off x="3286125" y="4552950"/>
+            <a:ext cx="523875" cy="381000"/>
+          </a:xfrm>
+          <a:prstGeom xmlns:a="http://schemas.openxmlformats.org/drawingml/2006/main" prst="rect">
+            <a:avLst/>
+          </a:prstGeom>
+          <a:noFill xmlns:a="http://schemas.openxmlformats.org/drawingml/2006/main"/>
+          <a:ln xmlns:a="http://schemas.openxmlformats.org/drawingml/2006/main" w="0">
+            <a:noFill/>
+            <a:prstDash val="solid"/>
+          </a:ln>
+        </p:spPr>
+        <p:txBody>
+          <a:bodyPr xmlns:a="http://schemas.openxmlformats.org/drawingml/2006/main" lIns="76200" tIns="38100" rIns="76200" bIns="38100" anchor="ctr"/>
+          <a:lstStyle xmlns:a="http://schemas.openxmlformats.org/drawingml/2006/main"/>
+          <a:p xmlns:a="http://schemas.openxmlformats.org/drawingml/2006/main">
+            <a:pPr algn="ctr">
+              <a:defRPr sz="2175" b="1">
+                <a:solidFill>
+                  <a:srgbClr val="667684"/>
+                </a:solidFill>
+              </a:defRPr>
+            </a:pPr>
+            <a:r>
+              <a:rPr sz="2175" b="1">
+                <a:solidFill>
+                  <a:srgbClr val="667684"/>
+                </a:solidFill>
+                <a:latin typeface="Arial"/>
+                <a:ea typeface="Arial"/>
+                <a:cs typeface="Arial"/>
+              </a:rPr>
+              <a:t>→</a:t>
+            </a:r>
+          </a:p>
+        </p:txBody>
+      </p:sp>
+      <p:sp>
+        <p:nvSpPr>
+          <p:cNvPr id="23" name="p19-d4">
+            <a:extLst xmlns:a="http://schemas.openxmlformats.org/drawingml/2006/main">
+              <a:ext uri="{FF2B5EF4-FFF2-40B4-BE49-F238E27FC236}">
+                <a16:creationId xmlns:a16="http://schemas.microsoft.com/office/drawing/2014/main" id="{93E30FE1-0C9A-45F9-8B56-1BF5C55A755C}"/>
+              </a:ext>
+            </a:extLst>
+          </p:cNvPr>
+          <p:cNvSpPr>
+            <a:spLocks xmlns:a="http://schemas.openxmlformats.org/drawingml/2006/main" noGrp="1"/>
+          </p:cNvSpPr>
+          <p:nvPr/>
+        </p:nvSpPr>
+        <p:spPr>
+          <a:xfrm xmlns:a="http://schemas.openxmlformats.org/drawingml/2006/main">
+            <a:off x="4000500" y="4505325"/>
+            <a:ext cx="6667500" cy="457200"/>
+          </a:xfrm>
+          <a:prstGeom xmlns:a="http://schemas.openxmlformats.org/drawingml/2006/main" prst="roundRect">
+            <a:avLst>
+              <a:gd name="adj" fmla="val 16667"/>
+            </a:avLst>
+          </a:prstGeom>
+          <a:solidFill xmlns:a="http://schemas.openxmlformats.org/drawingml/2006/main">
+            <a:srgbClr val="FFFFFF"/>
+          </a:solidFill>
+          <a:ln xmlns:a="http://schemas.openxmlformats.org/drawingml/2006/main" w="9525">
+            <a:solidFill>
+              <a:srgbClr val="D6DDE2"/>
+            </a:solidFill>
+            <a:prstDash val="solid"/>
+          </a:ln>
+        </p:spPr>
+        <p:txBody>
+          <a:bodyPr xmlns:a="http://schemas.openxmlformats.org/drawingml/2006/main" lIns="76200" tIns="38100" rIns="76200" bIns="38100" anchor="ctr"/>
+          <a:lstStyle xmlns:a="http://schemas.openxmlformats.org/drawingml/2006/main"/>
+          <a:p xmlns:a="http://schemas.openxmlformats.org/drawingml/2006/main">
+            <a:pPr algn="l">
+              <a:defRPr sz="1425" b="1">
+                <a:solidFill>
+                  <a:srgbClr val="263746"/>
+                </a:solidFill>
+              </a:defRPr>
+            </a:pPr>
+            <a:r>
+              <a:rPr sz="1425" b="1">
+                <a:solidFill>
+                  <a:srgbClr val="263746"/>
+                </a:solidFill>
+                <a:latin typeface="Microsoft YaHei"/>
+                <a:ea typeface="Microsoft YaHei"/>
+                <a:cs typeface="Microsoft YaHei"/>
+              </a:rPr>
+              <a:t>回真实过程：记录死路、处理与回写</a:t>
+            </a:r>
+          </a:p>
+        </p:txBody>
+      </p:sp>
+      <p:sp>
+        <p:nvSpPr>
+          <p:cNvPr id="24" name="p19-check">
+            <a:extLst xmlns:a="http://schemas.openxmlformats.org/drawingml/2006/main">
+              <a:ext uri="{FF2B5EF4-FFF2-40B4-BE49-F238E27FC236}">
+                <a16:creationId xmlns:a16="http://schemas.microsoft.com/office/drawing/2014/main" id="{37468A69-B831-4BBC-A736-CC96CDCD238A}"/>
+              </a:ext>
+            </a:extLst>
+          </p:cNvPr>
+          <p:cNvSpPr>
+            <a:spLocks xmlns:a="http://schemas.openxmlformats.org/drawingml/2006/main" noGrp="1"/>
+          </p:cNvSpPr>
+          <p:nvPr/>
+        </p:nvSpPr>
+        <p:spPr>
+          <a:xfrm xmlns:a="http://schemas.openxmlformats.org/drawingml/2006/main">
+            <a:off x="1047750" y="5191125"/>
+            <a:ext cx="10096500" cy="285750"/>
+          </a:xfrm>
+          <a:prstGeom xmlns:a="http://schemas.openxmlformats.org/drawingml/2006/main" prst="rect">
+            <a:avLst/>
+          </a:prstGeom>
+          <a:solidFill xmlns:a="http://schemas.openxmlformats.org/drawingml/2006/main">
+            <a:srgbClr val="E8F0F6"/>
+          </a:solidFill>
+          <a:ln xmlns:a="http://schemas.openxmlformats.org/drawingml/2006/main" w="0">
+            <a:noFill/>
+            <a:prstDash val="solid"/>
+          </a:ln>
+        </p:spPr>
+        <p:txBody>
+          <a:bodyPr xmlns:a="http://schemas.openxmlformats.org/drawingml/2006/main" lIns="76200" tIns="38100" rIns="76200" bIns="38100" anchor="ctr"/>
+          <a:lstStyle xmlns:a="http://schemas.openxmlformats.org/drawingml/2006/main"/>
+          <a:p xmlns:a="http://schemas.openxmlformats.org/drawingml/2006/main">
+            <a:pPr algn="ctr">
+              <a:defRPr sz="1350" b="1">
+                <a:solidFill>
+                  <a:srgbClr val="18354E"/>
+                </a:solidFill>
+              </a:defRPr>
+            </a:pPr>
+            <a:r>
+              <a:rPr sz="1350" b="1">
+                <a:solidFill>
+                  <a:srgbClr val="18354E"/>
+                </a:solidFill>
+                <a:latin typeface="Microsoft YaHei"/>
+                <a:ea typeface="Microsoft YaHei"/>
+                <a:cs typeface="Microsoft YaHei"/>
+              </a:rPr>
+              <a:t>提交核对：problem-definition.md + failure-log.md；候选题池与选题理由仍是课程扩展字段</a:t>
+            </a:r>
+          </a:p>
+        </p:txBody>
+      </p:sp>
+      <p:sp>
+        <p:nvSpPr>
+          <p:cNvPr id="25" name="p19-bottom">
+            <a:extLst xmlns:a="http://schemas.openxmlformats.org/drawingml/2006/main">
+              <a:ext uri="{FF2B5EF4-FFF2-40B4-BE49-F238E27FC236}">
+                <a16:creationId xmlns:a16="http://schemas.microsoft.com/office/drawing/2014/main" id="{82685FA7-4105-4912-BCC9-95C496794505}"/>
+              </a:ext>
+            </a:extLst>
+          </p:cNvPr>
+          <p:cNvSpPr>
+            <a:spLocks xmlns:a="http://schemas.openxmlformats.org/drawingml/2006/main" noGrp="1"/>
+          </p:cNvSpPr>
+          <p:nvPr/>
+        </p:nvSpPr>
+        <p:spPr>
+          <a:xfrm xmlns:a="http://schemas.openxmlformats.org/drawingml/2006/main">
+            <a:off x="1666875" y="5543550"/>
+            <a:ext cx="8858250" cy="266700"/>
+          </a:xfrm>
+          <a:prstGeom xmlns:a="http://schemas.openxmlformats.org/drawingml/2006/main" prst="rect">
+            <a:avLst/>
+          </a:prstGeom>
+          <a:noFill xmlns:a="http://schemas.openxmlformats.org/drawingml/2006/main"/>
+          <a:ln xmlns:a="http://schemas.openxmlformats.org/drawingml/2006/main" w="0">
+            <a:noFill/>
+            <a:prstDash val="solid"/>
+          </a:ln>
+        </p:spPr>
+        <p:txBody>
+          <a:bodyPr xmlns:a="http://schemas.openxmlformats.org/drawingml/2006/main" lIns="76200" tIns="38100" rIns="76200" bIns="38100" anchor="ctr"/>
+          <a:lstStyle xmlns:a="http://schemas.openxmlformats.org/drawingml/2006/main"/>
+          <a:p xmlns:a="http://schemas.openxmlformats.org/drawingml/2006/main">
+            <a:pPr algn="ctr">
+              <a:defRPr sz="1350" b="1">
+                <a:solidFill>
+                  <a:srgbClr val="C8161E"/>
+                </a:solidFill>
+              </a:defRPr>
+            </a:pPr>
+            <a:r>
+              <a:rPr sz="1350" b="1">
+                <a:solidFill>
+                  <a:srgbClr val="C8161E"/>
+                </a:solidFill>
+                <a:latin typeface="Microsoft YaHei"/>
+                <a:ea typeface="Microsoft YaHei"/>
+                <a:cs typeface="Microsoft YaHei"/>
+              </a:rPr>
+              <a:t>未通过：只修复缺失条件，一周内重新检查；不重交无关材料。</a:t>
+            </a:r>
+          </a:p>
+        </p:txBody>
+      </p:sp>
+    </p:spTree>
+    <p:extLst>
+      <p:ext uri="{BB962C8B-B14F-4D97-AF65-F5344CB8AC3E}">
+        <p14:creationId xmlns:p14="http://schemas.microsoft.com/office/powerpoint/2010/main" val="1443728403"/>
+      </p:ext>
+    </p:extLst>
+  </p:cSld>
+</p:sld>
+</file>
+
+<file path=ppt/slides/slide22.xml><?xml version="1.0" encoding="utf-8"?>
+<p:sld xmlns:p="http://schemas.openxmlformats.org/presentationml/2006/main">
+  <p:cSld>
+    <p:spTree>
+      <p:nvGrpSpPr>
+        <p:cNvPr id="1" name=""/>
+        <p:cNvGrpSpPr/>
+        <p:nvPr/>
+      </p:nvGrpSpPr>
+      <p:grpSpPr>
+        <a:xfrm xmlns:a="http://schemas.openxmlformats.org/drawingml/2006/main"/>
+      </p:grpSpPr>
+      <p:sp>
+        <p:nvSpPr>
+          <p:cNvPr id="4" name="Text Placeholder 3">
+            <a:extLst xmlns:a="http://schemas.openxmlformats.org/drawingml/2006/main">
+              <a:ext uri="{FF2B5EF4-FFF2-40B4-BE49-F238E27FC236}">
+                <a16:creationId xmlns:a16="http://schemas.microsoft.com/office/drawing/2014/main" id="{4D941B40-7A0A-534E-3563-CA11753C8E3F}"/>
+              </a:ext>
+            </a:extLst>
+          </p:cNvPr>
+          <p:cNvSpPr>
+            <a:spLocks xmlns:a="http://schemas.openxmlformats.org/drawingml/2006/main" noGrp="1"/>
+          </p:cNvSpPr>
+          <p:nvPr>
+            <p:ph type="body" idx="14"/>
+          </p:nvPr>
+        </p:nvSpPr>
+        <p:spPr>
+          <a:xfrm xmlns:a="http://schemas.openxmlformats.org/drawingml/2006/main">
+            <a:off x="1028700" y="28575"/>
+            <a:ext cx="10668000" cy="628650"/>
+          </a:xfrm>
+        </p:spPr>
+        <p:txBody>
+          <a:bodyPr xmlns:a="http://schemas.openxmlformats.org/drawingml/2006/main" lIns="76200" tIns="0" rIns="76200" bIns="0" anchor="ctr"/>
+          <a:lstStyle xmlns:a="http://schemas.openxmlformats.org/drawingml/2006/main"/>
+          <a:p xmlns:a="http://schemas.openxmlformats.org/drawingml/2006/main">
+            <a:pPr algn="l"/>
+            <a:r>
+              <a:rPr sz="2175" b="1">
+                <a:solidFill>
+                  <a:srgbClr val="FFFFFF"/>
+                </a:solidFill>
+                <a:latin typeface="Microsoft YaHei"/>
+                <a:ea typeface="Microsoft YaHei"/>
+                <a:cs typeface="Microsoft YaHei"/>
+              </a:rPr>
+              <a:t>退出卡与第 7 课预告</a:t>
+            </a:r>
+            <a:endParaRPr/>
+          </a:p>
+        </p:txBody>
+      </p:sp>
+      <p:sp>
+        <p:nvSpPr>
+          <p:cNvPr id="5" name="Slide Number Placeholder 4">
+            <a:extLst xmlns:a="http://schemas.openxmlformats.org/drawingml/2006/main">
+              <a:ext uri="{FF2B5EF4-FFF2-40B4-BE49-F238E27FC236}">
+                <a16:creationId xmlns:a16="http://schemas.microsoft.com/office/drawing/2014/main" id="{EBA5909F-738E-F60C-BE8C-B3F1D94548E5}"/>
+              </a:ext>
+            </a:extLst>
+          </p:cNvPr>
+          <p:cNvSpPr>
+            <a:spLocks xmlns:a="http://schemas.openxmlformats.org/drawingml/2006/main" noGrp="1"/>
+          </p:cNvSpPr>
+          <p:nvPr>
+            <p:ph type="sldNum" idx="10"/>
+          </p:nvPr>
+        </p:nvSpPr>
+        <p:spPr/>
+        <p:txBody>
+          <a:bodyPr xmlns:a="http://schemas.openxmlformats.org/drawingml/2006/main"/>
+          <a:lstStyle xmlns:a="http://schemas.openxmlformats.org/drawingml/2006/main"/>
+          <a:p xmlns:a="http://schemas.openxmlformats.org/drawingml/2006/main">
+            <a:fld id="{0BB18BA8-60F4-C50D-CD9B-1BB87D3E8506}" type="slidenum">
+              <a:t>22</a:t>
+            </a:fld>
+            <a:endParaRPr/>
+          </a:p>
+        </p:txBody>
+      </p:sp>
+      <p:sp>
+        <p:nvSpPr>
           <p:cNvPr id="6" name="p20-f0">
             <a:extLst xmlns:a="http://schemas.openxmlformats.org/drawingml/2006/main">
               <a:ext uri="{FF2B5EF4-FFF2-40B4-BE49-F238E27FC236}">
-                <a16:creationId xmlns:a16="http://schemas.microsoft.com/office/drawing/2014/main" id="{F3EDB6BA-83FA-4D6E-A922-40880D61553A}"/>
+                <a16:creationId xmlns:a16="http://schemas.microsoft.com/office/drawing/2014/main" id="{4D4D1122-BA6C-429A-8BF2-96C12D96E029}"/>
               </a:ext>
             </a:extLst>
           </p:cNvPr>
@@ -15502,7 +15905,7 @@
           <p:cNvPr id="7" name="p20-a0">
             <a:extLst xmlns:a="http://schemas.openxmlformats.org/drawingml/2006/main">
               <a:ext uri="{FF2B5EF4-FFF2-40B4-BE49-F238E27FC236}">
-                <a16:creationId xmlns:a16="http://schemas.microsoft.com/office/drawing/2014/main" id="{567B8B8B-EA2C-4E59-8DDF-10BEC08166AA}"/>
+                <a16:creationId xmlns:a16="http://schemas.microsoft.com/office/drawing/2014/main" id="{E2A2DFF4-F5D8-4069-AD4F-30DF9C1D9D21}"/>
               </a:ext>
             </a:extLst>
           </p:cNvPr>
@@ -15555,7 +15958,7 @@
           <p:cNvPr id="8" name="p20-f1">
             <a:extLst xmlns:a="http://schemas.openxmlformats.org/drawingml/2006/main">
               <a:ext uri="{FF2B5EF4-FFF2-40B4-BE49-F238E27FC236}">
-                <a16:creationId xmlns:a16="http://schemas.microsoft.com/office/drawing/2014/main" id="{B9EFF1B3-E2FB-41E8-95FC-2E282379949E}"/>
+                <a16:creationId xmlns:a16="http://schemas.microsoft.com/office/drawing/2014/main" id="{7041BEA2-7D92-45E3-8D64-BF9D7086443D}"/>
               </a:ext>
             </a:extLst>
           </p:cNvPr>
@@ -15614,7 +16017,7 @@
           <p:cNvPr id="9" name="p20-a1">
             <a:extLst xmlns:a="http://schemas.openxmlformats.org/drawingml/2006/main">
               <a:ext uri="{FF2B5EF4-FFF2-40B4-BE49-F238E27FC236}">
-                <a16:creationId xmlns:a16="http://schemas.microsoft.com/office/drawing/2014/main" id="{9AA69C22-107E-46F5-89CD-A2A91439A5AC}"/>
+                <a16:creationId xmlns:a16="http://schemas.microsoft.com/office/drawing/2014/main" id="{061C3446-3A94-45CB-B4F8-CC44DBE0EF7D}"/>
               </a:ext>
             </a:extLst>
           </p:cNvPr>
@@ -15667,7 +16070,7 @@
           <p:cNvPr id="10" name="p20-f2">
             <a:extLst xmlns:a="http://schemas.openxmlformats.org/drawingml/2006/main">
               <a:ext uri="{FF2B5EF4-FFF2-40B4-BE49-F238E27FC236}">
-                <a16:creationId xmlns:a16="http://schemas.microsoft.com/office/drawing/2014/main" id="{2A2E736D-91D6-4D48-81C2-792C5B075F1F}"/>
+                <a16:creationId xmlns:a16="http://schemas.microsoft.com/office/drawing/2014/main" id="{9699E9D1-AB3A-48A9-BDD0-90CD7DE50437}"/>
               </a:ext>
             </a:extLst>
           </p:cNvPr>
@@ -15746,7 +16149,7 @@
           <p:cNvPr id="11" name="p20-a2">
             <a:extLst xmlns:a="http://schemas.openxmlformats.org/drawingml/2006/main">
               <a:ext uri="{FF2B5EF4-FFF2-40B4-BE49-F238E27FC236}">
-                <a16:creationId xmlns:a16="http://schemas.microsoft.com/office/drawing/2014/main" id="{94CEE056-2B97-43B8-A5D8-00CC98E24452}"/>
+                <a16:creationId xmlns:a16="http://schemas.microsoft.com/office/drawing/2014/main" id="{0264D8F5-F38B-4C65-B7DE-5C643C6AE2A2}"/>
               </a:ext>
             </a:extLst>
           </p:cNvPr>
@@ -15799,7 +16202,7 @@
           <p:cNvPr id="12" name="p20-f3">
             <a:extLst xmlns:a="http://schemas.openxmlformats.org/drawingml/2006/main">
               <a:ext uri="{FF2B5EF4-FFF2-40B4-BE49-F238E27FC236}">
-                <a16:creationId xmlns:a16="http://schemas.microsoft.com/office/drawing/2014/main" id="{741AD7C5-1BD1-4E67-A799-11A07E41825D}"/>
+                <a16:creationId xmlns:a16="http://schemas.microsoft.com/office/drawing/2014/main" id="{21AF8003-4FB5-4B45-B2BE-8F29714CD15A}"/>
               </a:ext>
             </a:extLst>
           </p:cNvPr>
@@ -15878,7 +16281,7 @@
           <p:cNvPr id="13" name="p20-exit">
             <a:extLst xmlns:a="http://schemas.openxmlformats.org/drawingml/2006/main">
               <a:ext uri="{FF2B5EF4-FFF2-40B4-BE49-F238E27FC236}">
-                <a16:creationId xmlns:a16="http://schemas.microsoft.com/office/drawing/2014/main" id="{B0A291DF-2C24-48F8-BBA5-B22F77A8D4DC}"/>
+                <a16:creationId xmlns:a16="http://schemas.microsoft.com/office/drawing/2014/main" id="{CAB04C86-21FA-4462-91C5-FE643BEB3239}"/>
               </a:ext>
             </a:extLst>
           </p:cNvPr>
@@ -15935,7 +16338,7 @@
           <p:cNvPr id="14" name="p20-q0">
             <a:extLst xmlns:a="http://schemas.openxmlformats.org/drawingml/2006/main">
               <a:ext uri="{FF2B5EF4-FFF2-40B4-BE49-F238E27FC236}">
-                <a16:creationId xmlns:a16="http://schemas.microsoft.com/office/drawing/2014/main" id="{5E131D52-01DF-407D-ACE2-97BA4A85C230}"/>
+                <a16:creationId xmlns:a16="http://schemas.microsoft.com/office/drawing/2014/main" id="{E3702FAF-A482-4559-87CA-D94EFC06C5C5}"/>
               </a:ext>
             </a:extLst>
           </p:cNvPr>
@@ -15994,7 +16397,7 @@
           <p:cNvPr id="15" name="p20-q1">
             <a:extLst xmlns:a="http://schemas.openxmlformats.org/drawingml/2006/main">
               <a:ext uri="{FF2B5EF4-FFF2-40B4-BE49-F238E27FC236}">
-                <a16:creationId xmlns:a16="http://schemas.microsoft.com/office/drawing/2014/main" id="{421B23D0-53BB-4F76-A8DE-57142940231A}"/>
+                <a16:creationId xmlns:a16="http://schemas.microsoft.com/office/drawing/2014/main" id="{0399EC5A-6DEF-444D-8DA1-CE9B1C1D6A65}"/>
               </a:ext>
             </a:extLst>
           </p:cNvPr>
@@ -16053,7 +16456,7 @@
           <p:cNvPr id="16" name="p20-q2">
             <a:extLst xmlns:a="http://schemas.openxmlformats.org/drawingml/2006/main">
               <a:ext uri="{FF2B5EF4-FFF2-40B4-BE49-F238E27FC236}">
-                <a16:creationId xmlns:a16="http://schemas.microsoft.com/office/drawing/2014/main" id="{04091DFA-1B82-4051-9FAA-4DD6267D22E9}"/>
+                <a16:creationId xmlns:a16="http://schemas.microsoft.com/office/drawing/2014/main" id="{B09F799F-BA1D-4CE0-AF88-C0E87DA2F066}"/>
               </a:ext>
             </a:extLst>
           </p:cNvPr>
@@ -16112,7 +16515,7 @@
           <p:cNvPr id="17" name="p20-bottom">
             <a:extLst xmlns:a="http://schemas.openxmlformats.org/drawingml/2006/main">
               <a:ext uri="{FF2B5EF4-FFF2-40B4-BE49-F238E27FC236}">
-                <a16:creationId xmlns:a16="http://schemas.microsoft.com/office/drawing/2014/main" id="{00F7C20C-FD68-4B55-9CE5-114FE3175F8C}"/>
+                <a16:creationId xmlns:a16="http://schemas.microsoft.com/office/drawing/2014/main" id="{8550A8DC-BB6F-455F-BE89-02F80E71A50E}"/>
               </a:ext>
             </a:extLst>
           </p:cNvPr>
@@ -16257,7 +16660,7 @@
           <p:cNvPr id="6" name="p03-n0">
             <a:extLst xmlns:a="http://schemas.openxmlformats.org/drawingml/2006/main">
               <a:ext uri="{FF2B5EF4-FFF2-40B4-BE49-F238E27FC236}">
-                <a16:creationId xmlns:a16="http://schemas.microsoft.com/office/drawing/2014/main" id="{8353A045-658C-4CC3-801A-88237530DF9B}"/>
+                <a16:creationId xmlns:a16="http://schemas.microsoft.com/office/drawing/2014/main" id="{B48D9082-E244-4D6C-B3B0-5BD28349FE90}"/>
               </a:ext>
             </a:extLst>
           </p:cNvPr>
@@ -16314,7 +16717,7 @@
           <p:cNvPr id="7" name="p03-g0">
             <a:extLst xmlns:a="http://schemas.openxmlformats.org/drawingml/2006/main">
               <a:ext uri="{FF2B5EF4-FFF2-40B4-BE49-F238E27FC236}">
-                <a16:creationId xmlns:a16="http://schemas.microsoft.com/office/drawing/2014/main" id="{7689BE13-D075-4376-A6FE-95C908104274}"/>
+                <a16:creationId xmlns:a16="http://schemas.microsoft.com/office/drawing/2014/main" id="{4088AC41-3A13-4810-BEA1-B2F2AE98E84B}"/>
               </a:ext>
             </a:extLst>
           </p:cNvPr>
@@ -16373,7 +16776,7 @@
           <p:cNvPr id="8" name="p03-n1">
             <a:extLst xmlns:a="http://schemas.openxmlformats.org/drawingml/2006/main">
               <a:ext uri="{FF2B5EF4-FFF2-40B4-BE49-F238E27FC236}">
-                <a16:creationId xmlns:a16="http://schemas.microsoft.com/office/drawing/2014/main" id="{444680D7-8F42-47AA-8C97-E756CC228737}"/>
+                <a16:creationId xmlns:a16="http://schemas.microsoft.com/office/drawing/2014/main" id="{55CFE065-9AF6-4CA0-A914-47CBFCE96BB5}"/>
               </a:ext>
             </a:extLst>
           </p:cNvPr>
@@ -16430,7 +16833,7 @@
           <p:cNvPr id="9" name="p03-g1">
             <a:extLst xmlns:a="http://schemas.openxmlformats.org/drawingml/2006/main">
               <a:ext uri="{FF2B5EF4-FFF2-40B4-BE49-F238E27FC236}">
-                <a16:creationId xmlns:a16="http://schemas.microsoft.com/office/drawing/2014/main" id="{A5CAC177-7016-4CE9-9144-D5348211B1D8}"/>
+                <a16:creationId xmlns:a16="http://schemas.microsoft.com/office/drawing/2014/main" id="{ABC89F33-DE78-4D9F-8217-FB797518CE0B}"/>
               </a:ext>
             </a:extLst>
           </p:cNvPr>
@@ -16489,7 +16892,7 @@
           <p:cNvPr id="10" name="p03-n2">
             <a:extLst xmlns:a="http://schemas.openxmlformats.org/drawingml/2006/main">
               <a:ext uri="{FF2B5EF4-FFF2-40B4-BE49-F238E27FC236}">
-                <a16:creationId xmlns:a16="http://schemas.microsoft.com/office/drawing/2014/main" id="{790AE64C-E989-4177-ADF3-B33C8ADEBAAB}"/>
+                <a16:creationId xmlns:a16="http://schemas.microsoft.com/office/drawing/2014/main" id="{78240432-B74D-47E2-8CA6-35C1848D90D9}"/>
               </a:ext>
             </a:extLst>
           </p:cNvPr>
@@ -16546,7 +16949,7 @@
           <p:cNvPr id="11" name="p03-g2">
             <a:extLst xmlns:a="http://schemas.openxmlformats.org/drawingml/2006/main">
               <a:ext uri="{FF2B5EF4-FFF2-40B4-BE49-F238E27FC236}">
-                <a16:creationId xmlns:a16="http://schemas.microsoft.com/office/drawing/2014/main" id="{177CF235-FD64-414D-A352-102C30845688}"/>
+                <a16:creationId xmlns:a16="http://schemas.microsoft.com/office/drawing/2014/main" id="{46D917CF-D7C1-4777-8974-48A4280BC970}"/>
               </a:ext>
             </a:extLst>
           </p:cNvPr>
@@ -16605,7 +17008,7 @@
           <p:cNvPr id="12" name="p03-n3">
             <a:extLst xmlns:a="http://schemas.openxmlformats.org/drawingml/2006/main">
               <a:ext uri="{FF2B5EF4-FFF2-40B4-BE49-F238E27FC236}">
-                <a16:creationId xmlns:a16="http://schemas.microsoft.com/office/drawing/2014/main" id="{D43E5D61-F31A-4664-8160-ECE7F8FE3365}"/>
+                <a16:creationId xmlns:a16="http://schemas.microsoft.com/office/drawing/2014/main" id="{932D6DB9-EB0D-46B5-8C21-92653C377167}"/>
               </a:ext>
             </a:extLst>
           </p:cNvPr>
@@ -16662,7 +17065,7 @@
           <p:cNvPr id="13" name="p03-g3">
             <a:extLst xmlns:a="http://schemas.openxmlformats.org/drawingml/2006/main">
               <a:ext uri="{FF2B5EF4-FFF2-40B4-BE49-F238E27FC236}">
-                <a16:creationId xmlns:a16="http://schemas.microsoft.com/office/drawing/2014/main" id="{D6772FBF-7F1C-4CD1-85E5-C8AD73BC2F1F}"/>
+                <a16:creationId xmlns:a16="http://schemas.microsoft.com/office/drawing/2014/main" id="{33829251-72E7-4AEE-BDBD-E0BACD619B32}"/>
               </a:ext>
             </a:extLst>
           </p:cNvPr>
@@ -16721,7 +17124,7 @@
           <p:cNvPr id="14" name="p03-n4">
             <a:extLst xmlns:a="http://schemas.openxmlformats.org/drawingml/2006/main">
               <a:ext uri="{FF2B5EF4-FFF2-40B4-BE49-F238E27FC236}">
-                <a16:creationId xmlns:a16="http://schemas.microsoft.com/office/drawing/2014/main" id="{4955E1AA-BB9C-4F51-B963-4E58C0ADCD1E}"/>
+                <a16:creationId xmlns:a16="http://schemas.microsoft.com/office/drawing/2014/main" id="{A442ADE6-F9EA-4543-96CB-1F0E88EE5F2F}"/>
               </a:ext>
             </a:extLst>
           </p:cNvPr>
@@ -16778,7 +17181,7 @@
           <p:cNvPr id="15" name="p03-g4">
             <a:extLst xmlns:a="http://schemas.openxmlformats.org/drawingml/2006/main">
               <a:ext uri="{FF2B5EF4-FFF2-40B4-BE49-F238E27FC236}">
-                <a16:creationId xmlns:a16="http://schemas.microsoft.com/office/drawing/2014/main" id="{29FD33DF-EBC5-4108-8D52-7FDEB2BC9781}"/>
+                <a16:creationId xmlns:a16="http://schemas.microsoft.com/office/drawing/2014/main" id="{C439066D-FEFB-4FE7-AD10-5EA4B5911BBB}"/>
               </a:ext>
             </a:extLst>
           </p:cNvPr>
@@ -16837,7 +17240,7 @@
           <p:cNvPr id="16" name="p03-n5">
             <a:extLst xmlns:a="http://schemas.openxmlformats.org/drawingml/2006/main">
               <a:ext uri="{FF2B5EF4-FFF2-40B4-BE49-F238E27FC236}">
-                <a16:creationId xmlns:a16="http://schemas.microsoft.com/office/drawing/2014/main" id="{9B85D45A-6492-47EC-A593-7CF0E899AC86}"/>
+                <a16:creationId xmlns:a16="http://schemas.microsoft.com/office/drawing/2014/main" id="{8959CDBA-CB63-4D75-BA65-50705D9061CB}"/>
               </a:ext>
             </a:extLst>
           </p:cNvPr>
@@ -16894,7 +17297,7 @@
           <p:cNvPr id="17" name="p03-g5">
             <a:extLst xmlns:a="http://schemas.openxmlformats.org/drawingml/2006/main">
               <a:ext uri="{FF2B5EF4-FFF2-40B4-BE49-F238E27FC236}">
-                <a16:creationId xmlns:a16="http://schemas.microsoft.com/office/drawing/2014/main" id="{1D2BB731-30E0-45F8-85AE-F206F0B931BD}"/>
+                <a16:creationId xmlns:a16="http://schemas.microsoft.com/office/drawing/2014/main" id="{6AE52132-4AEA-414F-B1DC-2B7823F423D9}"/>
               </a:ext>
             </a:extLst>
           </p:cNvPr>
@@ -16953,7 +17356,7 @@
           <p:cNvPr id="18" name="p03-output">
             <a:extLst xmlns:a="http://schemas.openxmlformats.org/drawingml/2006/main">
               <a:ext uri="{FF2B5EF4-FFF2-40B4-BE49-F238E27FC236}">
-                <a16:creationId xmlns:a16="http://schemas.microsoft.com/office/drawing/2014/main" id="{2EA73621-74DA-46E4-B909-966398960EB1}"/>
+                <a16:creationId xmlns:a16="http://schemas.microsoft.com/office/drawing/2014/main" id="{D8B05BA4-F945-4C82-86E5-26D5CCF0465A}"/>
               </a:ext>
             </a:extLst>
           </p:cNvPr>
@@ -17086,7 +17489,7 @@
           <p:cNvPr id="19" name="p03-gate">
             <a:extLst xmlns:a="http://schemas.openxmlformats.org/drawingml/2006/main">
               <a:ext uri="{FF2B5EF4-FFF2-40B4-BE49-F238E27FC236}">
-                <a16:creationId xmlns:a16="http://schemas.microsoft.com/office/drawing/2014/main" id="{1BBA7D3C-8556-43F1-AA55-BE8BF0626A87}"/>
+                <a16:creationId xmlns:a16="http://schemas.microsoft.com/office/drawing/2014/main" id="{627F157D-7EE3-4C70-BD5D-39E3237DAAA2}"/>
               </a:ext>
             </a:extLst>
           </p:cNvPr>
@@ -17237,7 +17640,7 @@
           <p:cNvPr id="6" name="p04-h0">
             <a:extLst xmlns:a="http://schemas.openxmlformats.org/drawingml/2006/main">
               <a:ext uri="{FF2B5EF4-FFF2-40B4-BE49-F238E27FC236}">
-                <a16:creationId xmlns:a16="http://schemas.microsoft.com/office/drawing/2014/main" id="{DF7F5443-AEA4-4DC9-AC06-1EBB2D4C3AB7}"/>
+                <a16:creationId xmlns:a16="http://schemas.microsoft.com/office/drawing/2014/main" id="{ED6B65B1-B70C-46C5-A6E5-EABAFD84950C}"/>
               </a:ext>
             </a:extLst>
           </p:cNvPr>
@@ -17292,7 +17695,7 @@
           <p:cNvPr id="7" name="p04-h1">
             <a:extLst xmlns:a="http://schemas.openxmlformats.org/drawingml/2006/main">
               <a:ext uri="{FF2B5EF4-FFF2-40B4-BE49-F238E27FC236}">
-                <a16:creationId xmlns:a16="http://schemas.microsoft.com/office/drawing/2014/main" id="{88659DDD-663B-406E-BDF5-C0B1C81F25B1}"/>
+                <a16:creationId xmlns:a16="http://schemas.microsoft.com/office/drawing/2014/main" id="{8BA095A7-2C3A-4933-A898-6CF18809F7C8}"/>
               </a:ext>
             </a:extLst>
           </p:cNvPr>
@@ -17347,7 +17750,7 @@
           <p:cNvPr id="8" name="p04-h2">
             <a:extLst xmlns:a="http://schemas.openxmlformats.org/drawingml/2006/main">
               <a:ext uri="{FF2B5EF4-FFF2-40B4-BE49-F238E27FC236}">
-                <a16:creationId xmlns:a16="http://schemas.microsoft.com/office/drawing/2014/main" id="{DAB00CB6-9751-42A5-8A7F-023FFB6FDD4F}"/>
+                <a16:creationId xmlns:a16="http://schemas.microsoft.com/office/drawing/2014/main" id="{90392385-1B45-4775-9EB2-F25715AE36E0}"/>
               </a:ext>
             </a:extLst>
           </p:cNvPr>
@@ -17402,7 +17805,7 @@
           <p:cNvPr id="9" name="p04-r0-0">
             <a:extLst xmlns:a="http://schemas.openxmlformats.org/drawingml/2006/main">
               <a:ext uri="{FF2B5EF4-FFF2-40B4-BE49-F238E27FC236}">
-                <a16:creationId xmlns:a16="http://schemas.microsoft.com/office/drawing/2014/main" id="{098488B2-AAC3-49E9-8337-15A23972229F}"/>
+                <a16:creationId xmlns:a16="http://schemas.microsoft.com/office/drawing/2014/main" id="{1BDD651C-177B-4682-B460-B78183DA4D44}"/>
               </a:ext>
             </a:extLst>
           </p:cNvPr>
@@ -17463,7 +17866,7 @@
           <p:cNvPr id="10" name="p04-r0-1">
             <a:extLst xmlns:a="http://schemas.openxmlformats.org/drawingml/2006/main">
               <a:ext uri="{FF2B5EF4-FFF2-40B4-BE49-F238E27FC236}">
-                <a16:creationId xmlns:a16="http://schemas.microsoft.com/office/drawing/2014/main" id="{EB0CFDF8-BEA9-464B-9F9F-F0FF6CCA4864}"/>
+                <a16:creationId xmlns:a16="http://schemas.microsoft.com/office/drawing/2014/main" id="{0A6EEAB5-D094-4A66-ADC8-430FF7DC3CEC}"/>
               </a:ext>
             </a:extLst>
           </p:cNvPr>
@@ -17524,7 +17927,7 @@
           <p:cNvPr id="11" name="p04-r0-2">
             <a:extLst xmlns:a="http://schemas.openxmlformats.org/drawingml/2006/main">
               <a:ext uri="{FF2B5EF4-FFF2-40B4-BE49-F238E27FC236}">
-                <a16:creationId xmlns:a16="http://schemas.microsoft.com/office/drawing/2014/main" id="{955DD5AD-B2F0-41FF-9958-D19CC8B7B370}"/>
+                <a16:creationId xmlns:a16="http://schemas.microsoft.com/office/drawing/2014/main" id="{876392A8-4E13-4950-A7B6-018C57CDFE8E}"/>
               </a:ext>
             </a:extLst>
           </p:cNvPr>
@@ -17585,7 +17988,7 @@
           <p:cNvPr id="12" name="p04-r1-0">
             <a:extLst xmlns:a="http://schemas.openxmlformats.org/drawingml/2006/main">
               <a:ext uri="{FF2B5EF4-FFF2-40B4-BE49-F238E27FC236}">
-                <a16:creationId xmlns:a16="http://schemas.microsoft.com/office/drawing/2014/main" id="{330B9FF4-AB58-4355-854B-F464B50B6A10}"/>
+                <a16:creationId xmlns:a16="http://schemas.microsoft.com/office/drawing/2014/main" id="{092C74CE-FEA4-47C6-BEDC-4683F5DBD58A}"/>
               </a:ext>
             </a:extLst>
           </p:cNvPr>
@@ -17646,7 +18049,7 @@
           <p:cNvPr id="13" name="p04-r1-1">
             <a:extLst xmlns:a="http://schemas.openxmlformats.org/drawingml/2006/main">
               <a:ext uri="{FF2B5EF4-FFF2-40B4-BE49-F238E27FC236}">
-                <a16:creationId xmlns:a16="http://schemas.microsoft.com/office/drawing/2014/main" id="{BA74DD29-AFF7-4986-A5AC-D609BF9FD5F2}"/>
+                <a16:creationId xmlns:a16="http://schemas.microsoft.com/office/drawing/2014/main" id="{6C079FF6-407E-443F-9DF1-03308F71AAC4}"/>
               </a:ext>
             </a:extLst>
           </p:cNvPr>
@@ -17707,7 +18110,7 @@
           <p:cNvPr id="14" name="p04-r1-2">
             <a:extLst xmlns:a="http://schemas.openxmlformats.org/drawingml/2006/main">
               <a:ext uri="{FF2B5EF4-FFF2-40B4-BE49-F238E27FC236}">
-                <a16:creationId xmlns:a16="http://schemas.microsoft.com/office/drawing/2014/main" id="{FF5023E7-FB96-4D8B-8303-C5360749F8AD}"/>
+                <a16:creationId xmlns:a16="http://schemas.microsoft.com/office/drawing/2014/main" id="{55E0B21B-5C35-40E7-8E5A-76807B8D1868}"/>
               </a:ext>
             </a:extLst>
           </p:cNvPr>
@@ -17768,7 +18171,7 @@
           <p:cNvPr id="15" name="p04-r2-0">
             <a:extLst xmlns:a="http://schemas.openxmlformats.org/drawingml/2006/main">
               <a:ext uri="{FF2B5EF4-FFF2-40B4-BE49-F238E27FC236}">
-                <a16:creationId xmlns:a16="http://schemas.microsoft.com/office/drawing/2014/main" id="{E0DFE309-DF6E-4BCB-946F-216854111D19}"/>
+                <a16:creationId xmlns:a16="http://schemas.microsoft.com/office/drawing/2014/main" id="{B741DD37-9847-4BB1-85D3-47B40F95C6D1}"/>
               </a:ext>
             </a:extLst>
           </p:cNvPr>
@@ -17829,7 +18232,7 @@
           <p:cNvPr id="16" name="p04-r2-1">
             <a:extLst xmlns:a="http://schemas.openxmlformats.org/drawingml/2006/main">
               <a:ext uri="{FF2B5EF4-FFF2-40B4-BE49-F238E27FC236}">
-                <a16:creationId xmlns:a16="http://schemas.microsoft.com/office/drawing/2014/main" id="{094CB979-4A67-490E-9D87-F27BA1E362BE}"/>
+                <a16:creationId xmlns:a16="http://schemas.microsoft.com/office/drawing/2014/main" id="{E73A8C13-3E05-4354-8321-64CD846C8628}"/>
               </a:ext>
             </a:extLst>
           </p:cNvPr>
@@ -17890,7 +18293,7 @@
           <p:cNvPr id="17" name="p04-r2-2">
             <a:extLst xmlns:a="http://schemas.openxmlformats.org/drawingml/2006/main">
               <a:ext uri="{FF2B5EF4-FFF2-40B4-BE49-F238E27FC236}">
-                <a16:creationId xmlns:a16="http://schemas.microsoft.com/office/drawing/2014/main" id="{8A8B9CCE-4BEE-4F4F-9FD1-7E4F8650E158}"/>
+                <a16:creationId xmlns:a16="http://schemas.microsoft.com/office/drawing/2014/main" id="{81D0ACEC-95C9-4C8D-A319-5D1486AC5DB9}"/>
               </a:ext>
             </a:extLst>
           </p:cNvPr>
@@ -17951,7 +18354,7 @@
           <p:cNvPr id="18" name="p04-bottom">
             <a:extLst xmlns:a="http://schemas.openxmlformats.org/drawingml/2006/main">
               <a:ext uri="{FF2B5EF4-FFF2-40B4-BE49-F238E27FC236}">
-                <a16:creationId xmlns:a16="http://schemas.microsoft.com/office/drawing/2014/main" id="{CE45F7D0-DA1F-4E6B-9D5C-F172B87B6F45}"/>
+                <a16:creationId xmlns:a16="http://schemas.microsoft.com/office/drawing/2014/main" id="{1A0A4658-FFC7-4E84-BAC9-939AB4E05E97}"/>
               </a:ext>
             </a:extLst>
           </p:cNvPr>
@@ -18096,7 +18499,7 @@
           <p:cNvPr id="6" name="p05-virtual">
             <a:extLst xmlns:a="http://schemas.openxmlformats.org/drawingml/2006/main">
               <a:ext uri="{FF2B5EF4-FFF2-40B4-BE49-F238E27FC236}">
-                <a16:creationId xmlns:a16="http://schemas.microsoft.com/office/drawing/2014/main" id="{016D458E-1BB0-4471-82BA-5B45FB0C1FC5}"/>
+                <a16:creationId xmlns:a16="http://schemas.microsoft.com/office/drawing/2014/main" id="{0A79469A-62DD-4329-8035-AE6BD3D357CE}"/>
               </a:ext>
             </a:extLst>
           </p:cNvPr>
@@ -18153,7 +18556,7 @@
           <p:cNvPr id="7" name="p05-gap">
             <a:extLst xmlns:a="http://schemas.openxmlformats.org/drawingml/2006/main">
               <a:ext uri="{FF2B5EF4-FFF2-40B4-BE49-F238E27FC236}">
-                <a16:creationId xmlns:a16="http://schemas.microsoft.com/office/drawing/2014/main" id="{CE98D060-E63E-4843-AE59-0591A63283E4}"/>
+                <a16:creationId xmlns:a16="http://schemas.microsoft.com/office/drawing/2014/main" id="{668A0C46-FF4F-42A9-9ABA-3E9E8D61A399}"/>
               </a:ext>
             </a:extLst>
           </p:cNvPr>
@@ -18264,7 +18667,7 @@
           <p:cNvPr id="8" name="p05-a">
             <a:extLst xmlns:a="http://schemas.openxmlformats.org/drawingml/2006/main">
               <a:ext uri="{FF2B5EF4-FFF2-40B4-BE49-F238E27FC236}">
-                <a16:creationId xmlns:a16="http://schemas.microsoft.com/office/drawing/2014/main" id="{CB313D73-5795-4607-8D4C-F77B6A4B4949}"/>
+                <a16:creationId xmlns:a16="http://schemas.microsoft.com/office/drawing/2014/main" id="{391FE8A0-9593-47EB-9323-7FAED1544EBE}"/>
               </a:ext>
             </a:extLst>
           </p:cNvPr>
@@ -18317,7 +18720,7 @@
           <p:cNvPr id="9" name="p05-q">
             <a:extLst xmlns:a="http://schemas.openxmlformats.org/drawingml/2006/main">
               <a:ext uri="{FF2B5EF4-FFF2-40B4-BE49-F238E27FC236}">
-                <a16:creationId xmlns:a16="http://schemas.microsoft.com/office/drawing/2014/main" id="{92026DFA-C39F-4074-84B7-3D570A911DCE}"/>
+                <a16:creationId xmlns:a16="http://schemas.microsoft.com/office/drawing/2014/main" id="{1862FAB1-84F8-46E8-9A84-C6EC58C52CC4}"/>
               </a:ext>
             </a:extLst>
           </p:cNvPr>
@@ -18380,7 +18783,7 @@
           <p:cNvPr id="10" name="p05-e0">
             <a:extLst xmlns:a="http://schemas.openxmlformats.org/drawingml/2006/main">
               <a:ext uri="{FF2B5EF4-FFF2-40B4-BE49-F238E27FC236}">
-                <a16:creationId xmlns:a16="http://schemas.microsoft.com/office/drawing/2014/main" id="{46BE5660-80F7-4643-92AB-291A053F4498}"/>
+                <a16:creationId xmlns:a16="http://schemas.microsoft.com/office/drawing/2014/main" id="{08FC6322-074F-4746-AA2C-3272DBC383A3}"/>
               </a:ext>
             </a:extLst>
           </p:cNvPr>
@@ -18437,7 +18840,7 @@
           <p:cNvPr id="11" name="p05-e1">
             <a:extLst xmlns:a="http://schemas.openxmlformats.org/drawingml/2006/main">
               <a:ext uri="{FF2B5EF4-FFF2-40B4-BE49-F238E27FC236}">
-                <a16:creationId xmlns:a16="http://schemas.microsoft.com/office/drawing/2014/main" id="{647876C4-9B23-40ED-910F-178B917F3BDD}"/>
+                <a16:creationId xmlns:a16="http://schemas.microsoft.com/office/drawing/2014/main" id="{F2247807-76F4-4C84-916C-B6D1A920394D}"/>
               </a:ext>
             </a:extLst>
           </p:cNvPr>
@@ -18494,7 +18897,7 @@
           <p:cNvPr id="12" name="p05-e2">
             <a:extLst xmlns:a="http://schemas.openxmlformats.org/drawingml/2006/main">
               <a:ext uri="{FF2B5EF4-FFF2-40B4-BE49-F238E27FC236}">
-                <a16:creationId xmlns:a16="http://schemas.microsoft.com/office/drawing/2014/main" id="{0B848FF9-6BBB-4C13-B422-7A1C9E9D9C45}"/>
+                <a16:creationId xmlns:a16="http://schemas.microsoft.com/office/drawing/2014/main" id="{E704790F-4FA1-4085-BA45-21F355EFE8BB}"/>
               </a:ext>
             </a:extLst>
           </p:cNvPr>
@@ -18551,7 +18954,7 @@
           <p:cNvPr id="13" name="p05-e3">
             <a:extLst xmlns:a="http://schemas.openxmlformats.org/drawingml/2006/main">
               <a:ext uri="{FF2B5EF4-FFF2-40B4-BE49-F238E27FC236}">
-                <a16:creationId xmlns:a16="http://schemas.microsoft.com/office/drawing/2014/main" id="{83C94A63-D7E6-4D05-A379-592FF47A0B0F}"/>
+                <a16:creationId xmlns:a16="http://schemas.microsoft.com/office/drawing/2014/main" id="{BAB7BBCD-3D44-45C1-B6A8-E81BB67B83E7}"/>
               </a:ext>
             </a:extLst>
           </p:cNvPr>
@@ -18608,7 +19011,7 @@
           <p:cNvPr id="14" name="p05-e4">
             <a:extLst xmlns:a="http://schemas.openxmlformats.org/drawingml/2006/main">
               <a:ext uri="{FF2B5EF4-FFF2-40B4-BE49-F238E27FC236}">
-                <a16:creationId xmlns:a16="http://schemas.microsoft.com/office/drawing/2014/main" id="{0A633961-3B5B-4F2C-B433-01A93C568B17}"/>
+                <a16:creationId xmlns:a16="http://schemas.microsoft.com/office/drawing/2014/main" id="{74591210-845A-4950-BD6E-C9AA9B1993C1}"/>
               </a:ext>
             </a:extLst>
           </p:cNvPr>
@@ -18665,7 +19068,7 @@
           <p:cNvPr id="15" name="p05-bottom">
             <a:extLst xmlns:a="http://schemas.openxmlformats.org/drawingml/2006/main">
               <a:ext uri="{FF2B5EF4-FFF2-40B4-BE49-F238E27FC236}">
-                <a16:creationId xmlns:a16="http://schemas.microsoft.com/office/drawing/2014/main" id="{7E042700-6E8C-4BD3-879C-A41298FDA1F8}"/>
+                <a16:creationId xmlns:a16="http://schemas.microsoft.com/office/drawing/2014/main" id="{BB93495F-28D2-4280-A64B-A506D008D0BA}"/>
               </a:ext>
             </a:extLst>
           </p:cNvPr>
@@ -18810,7 +19213,7 @@
           <p:cNvPr id="6" name="p06-so-h">
             <a:extLst xmlns:a="http://schemas.openxmlformats.org/drawingml/2006/main">
               <a:ext uri="{FF2B5EF4-FFF2-40B4-BE49-F238E27FC236}">
-                <a16:creationId xmlns:a16="http://schemas.microsoft.com/office/drawing/2014/main" id="{E36EE3D2-56F6-4F62-95D6-522F2BD215C1}"/>
+                <a16:creationId xmlns:a16="http://schemas.microsoft.com/office/drawing/2014/main" id="{C4EC3A60-7FD4-49CD-911F-63FB9D17F1D1}"/>
               </a:ext>
             </a:extLst>
           </p:cNvPr>
@@ -18867,7 +19270,7 @@
           <p:cNvPr id="7" name="p06-so-d">
             <a:extLst xmlns:a="http://schemas.openxmlformats.org/drawingml/2006/main">
               <a:ext uri="{FF2B5EF4-FFF2-40B4-BE49-F238E27FC236}">
-                <a16:creationId xmlns:a16="http://schemas.microsoft.com/office/drawing/2014/main" id="{E730E954-5CA0-4084-BF6F-DFBB139DBEFD}"/>
+                <a16:creationId xmlns:a16="http://schemas.microsoft.com/office/drawing/2014/main" id="{0156AC28-FA9B-48A3-855F-109DB07A6B28}"/>
               </a:ext>
             </a:extLst>
           </p:cNvPr>
@@ -18959,7 +19362,7 @@
           <p:cNvPr id="8" name="p06-who-h">
             <a:extLst xmlns:a="http://schemas.openxmlformats.org/drawingml/2006/main">
               <a:ext uri="{FF2B5EF4-FFF2-40B4-BE49-F238E27FC236}">
-                <a16:creationId xmlns:a16="http://schemas.microsoft.com/office/drawing/2014/main" id="{DFA8364A-75B6-48D2-9BB8-9A091316AE6B}"/>
+                <a16:creationId xmlns:a16="http://schemas.microsoft.com/office/drawing/2014/main" id="{E878445B-3570-419D-A992-6BF5F261ACA2}"/>
               </a:ext>
             </a:extLst>
           </p:cNvPr>
@@ -19016,7 +19419,7 @@
           <p:cNvPr id="9" name="p06-who-d">
             <a:extLst xmlns:a="http://schemas.openxmlformats.org/drawingml/2006/main">
               <a:ext uri="{FF2B5EF4-FFF2-40B4-BE49-F238E27FC236}">
-                <a16:creationId xmlns:a16="http://schemas.microsoft.com/office/drawing/2014/main" id="{6CD7858E-D9E1-403A-AEA4-2F9AE5774EC7}"/>
+                <a16:creationId xmlns:a16="http://schemas.microsoft.com/office/drawing/2014/main" id="{1B3A435E-2917-44B6-A689-78271CC7857E}"/>
               </a:ext>
             </a:extLst>
           </p:cNvPr>
@@ -19108,7 +19511,7 @@
           <p:cNvPr id="10" name="p06-example">
             <a:extLst xmlns:a="http://schemas.openxmlformats.org/drawingml/2006/main">
               <a:ext uri="{FF2B5EF4-FFF2-40B4-BE49-F238E27FC236}">
-                <a16:creationId xmlns:a16="http://schemas.microsoft.com/office/drawing/2014/main" id="{2E98AF0C-1654-4635-A1EC-F6291D9586A4}"/>
+                <a16:creationId xmlns:a16="http://schemas.microsoft.com/office/drawing/2014/main" id="{7AC76F9E-7FF1-43D6-8262-692FE03F398C}"/>
               </a:ext>
             </a:extLst>
           </p:cNvPr>
@@ -19259,7 +19662,7 @@
           <p:cNvPr id="6" name="p07-ask">
             <a:extLst xmlns:a="http://schemas.openxmlformats.org/drawingml/2006/main">
               <a:ext uri="{FF2B5EF4-FFF2-40B4-BE49-F238E27FC236}">
-                <a16:creationId xmlns:a16="http://schemas.microsoft.com/office/drawing/2014/main" id="{0840CEA6-9BB6-447B-BAEB-33B5A717C76F}"/>
+                <a16:creationId xmlns:a16="http://schemas.microsoft.com/office/drawing/2014/main" id="{497087FC-6313-4149-9E3C-2FAFD05C5264}"/>
               </a:ext>
             </a:extLst>
           </p:cNvPr>
@@ -19322,7 +19725,7 @@
           <p:cNvPr id="7" name="p07-branch0-h">
             <a:extLst xmlns:a="http://schemas.openxmlformats.org/drawingml/2006/main">
               <a:ext uri="{FF2B5EF4-FFF2-40B4-BE49-F238E27FC236}">
-                <a16:creationId xmlns:a16="http://schemas.microsoft.com/office/drawing/2014/main" id="{E66263FF-E4BF-41D5-B0E8-70F74DDF2C9A}"/>
+                <a16:creationId xmlns:a16="http://schemas.microsoft.com/office/drawing/2014/main" id="{359C7287-E246-4F98-9530-03FBEE942AB5}"/>
               </a:ext>
             </a:extLst>
           </p:cNvPr>
@@ -19379,7 +19782,7 @@
           <p:cNvPr id="8" name="p07-branch0-d">
             <a:extLst xmlns:a="http://schemas.openxmlformats.org/drawingml/2006/main">
               <a:ext uri="{FF2B5EF4-FFF2-40B4-BE49-F238E27FC236}">
-                <a16:creationId xmlns:a16="http://schemas.microsoft.com/office/drawing/2014/main" id="{2F935ACE-22B5-4EBB-AA9F-97B05F13D57E}"/>
+                <a16:creationId xmlns:a16="http://schemas.microsoft.com/office/drawing/2014/main" id="{7100F5EB-A74A-42F9-8220-F6BC6ED83F50}"/>
               </a:ext>
             </a:extLst>
           </p:cNvPr>
@@ -19438,7 +19841,7 @@
           <p:cNvPr id="9" name="p07-branch1-h">
             <a:extLst xmlns:a="http://schemas.openxmlformats.org/drawingml/2006/main">
               <a:ext uri="{FF2B5EF4-FFF2-40B4-BE49-F238E27FC236}">
-                <a16:creationId xmlns:a16="http://schemas.microsoft.com/office/drawing/2014/main" id="{19D4419C-15B9-49E7-924E-ED69A7C1317F}"/>
+                <a16:creationId xmlns:a16="http://schemas.microsoft.com/office/drawing/2014/main" id="{79D40DFF-8462-4628-95B8-08BABC20C620}"/>
               </a:ext>
             </a:extLst>
           </p:cNvPr>
@@ -19495,7 +19898,7 @@
           <p:cNvPr id="10" name="p07-branch1-d">
             <a:extLst xmlns:a="http://schemas.openxmlformats.org/drawingml/2006/main">
               <a:ext uri="{FF2B5EF4-FFF2-40B4-BE49-F238E27FC236}">
-                <a16:creationId xmlns:a16="http://schemas.microsoft.com/office/drawing/2014/main" id="{07BE1D09-6A2C-4CD5-9EFB-E765E947EB1F}"/>
+                <a16:creationId xmlns:a16="http://schemas.microsoft.com/office/drawing/2014/main" id="{11D5827A-B349-4B16-9B1A-B978D86D4A46}"/>
               </a:ext>
             </a:extLst>
           </p:cNvPr>
@@ -19554,7 +19957,7 @@
           <p:cNvPr id="11" name="p07-card-h">
             <a:extLst xmlns:a="http://schemas.openxmlformats.org/drawingml/2006/main">
               <a:ext uri="{FF2B5EF4-FFF2-40B4-BE49-F238E27FC236}">
-                <a16:creationId xmlns:a16="http://schemas.microsoft.com/office/drawing/2014/main" id="{C23A928D-AAE4-48FE-8733-2D7440E7621A}"/>
+                <a16:creationId xmlns:a16="http://schemas.microsoft.com/office/drawing/2014/main" id="{EBBC5A8B-3956-4916-A47F-AD7D4D397CD2}"/>
               </a:ext>
             </a:extLst>
           </p:cNvPr>
@@ -19609,7 +20012,7 @@
           <p:cNvPr id="12" name="p07-d0-h">
             <a:extLst xmlns:a="http://schemas.openxmlformats.org/drawingml/2006/main">
               <a:ext uri="{FF2B5EF4-FFF2-40B4-BE49-F238E27FC236}">
-                <a16:creationId xmlns:a16="http://schemas.microsoft.com/office/drawing/2014/main" id="{4BDFD840-17F9-4A41-B41B-6499F96C52FB}"/>
+                <a16:creationId xmlns:a16="http://schemas.microsoft.com/office/drawing/2014/main" id="{8F97F062-0794-449A-8587-7BB99887135F}"/>
               </a:ext>
             </a:extLst>
           </p:cNvPr>
@@ -19668,7 +20071,7 @@
           <p:cNvPr id="13" name="p07-d0-d">
             <a:extLst xmlns:a="http://schemas.openxmlformats.org/drawingml/2006/main">
               <a:ext uri="{FF2B5EF4-FFF2-40B4-BE49-F238E27FC236}">
-                <a16:creationId xmlns:a16="http://schemas.microsoft.com/office/drawing/2014/main" id="{4F5C9E7B-5412-42A8-8709-A86886A8C087}"/>
+                <a16:creationId xmlns:a16="http://schemas.microsoft.com/office/drawing/2014/main" id="{105EE412-A06B-42A0-A020-DACE1D04BF84}"/>
               </a:ext>
             </a:extLst>
           </p:cNvPr>
@@ -19731,7 +20134,7 @@
           <p:cNvPr id="14" name="p07-d1-h">
             <a:extLst xmlns:a="http://schemas.openxmlformats.org/drawingml/2006/main">
               <a:ext uri="{FF2B5EF4-FFF2-40B4-BE49-F238E27FC236}">
-                <a16:creationId xmlns:a16="http://schemas.microsoft.com/office/drawing/2014/main" id="{BF2036C2-676F-4988-956D-470F18F457DA}"/>
+                <a16:creationId xmlns:a16="http://schemas.microsoft.com/office/drawing/2014/main" id="{5180923C-F7A3-4401-96C2-85E104A8B535}"/>
               </a:ext>
             </a:extLst>
           </p:cNvPr>
@@ -19790,7 +20193,7 @@
           <p:cNvPr id="15" name="p07-d1-d">
             <a:extLst xmlns:a="http://schemas.openxmlformats.org/drawingml/2006/main">
               <a:ext uri="{FF2B5EF4-FFF2-40B4-BE49-F238E27FC236}">
-                <a16:creationId xmlns:a16="http://schemas.microsoft.com/office/drawing/2014/main" id="{C3902026-89F2-40A5-9A9E-C344A61987B9}"/>
+                <a16:creationId xmlns:a16="http://schemas.microsoft.com/office/drawing/2014/main" id="{2C159385-3774-491E-8D31-9C1D99F9D8DB}"/>
               </a:ext>
             </a:extLst>
           </p:cNvPr>
@@ -19853,7 +20256,7 @@
           <p:cNvPr id="16" name="p07-d2-h">
             <a:extLst xmlns:a="http://schemas.openxmlformats.org/drawingml/2006/main">
               <a:ext uri="{FF2B5EF4-FFF2-40B4-BE49-F238E27FC236}">
-                <a16:creationId xmlns:a16="http://schemas.microsoft.com/office/drawing/2014/main" id="{F1262938-8855-44F7-9EAD-B1866D5F90FA}"/>
+                <a16:creationId xmlns:a16="http://schemas.microsoft.com/office/drawing/2014/main" id="{E565063F-4C2F-4BEE-8B39-D8AB568559DA}"/>
               </a:ext>
             </a:extLst>
           </p:cNvPr>
@@ -19912,7 +20315,7 @@
           <p:cNvPr id="17" name="p07-d2-d">
             <a:extLst xmlns:a="http://schemas.openxmlformats.org/drawingml/2006/main">
               <a:ext uri="{FF2B5EF4-FFF2-40B4-BE49-F238E27FC236}">
-                <a16:creationId xmlns:a16="http://schemas.microsoft.com/office/drawing/2014/main" id="{DD132873-5E61-4990-A5F3-0B0E40B8EE80}"/>
+                <a16:creationId xmlns:a16="http://schemas.microsoft.com/office/drawing/2014/main" id="{0F80D55B-93DC-4093-9D85-BD0076F55F56}"/>
               </a:ext>
             </a:extLst>
           </p:cNvPr>
@@ -19975,7 +20378,7 @@
           <p:cNvPr id="18" name="p07-d3-h">
             <a:extLst xmlns:a="http://schemas.openxmlformats.org/drawingml/2006/main">
               <a:ext uri="{FF2B5EF4-FFF2-40B4-BE49-F238E27FC236}">
-                <a16:creationId xmlns:a16="http://schemas.microsoft.com/office/drawing/2014/main" id="{246C1FF6-DC1D-4F0B-90A7-34402A76D187}"/>
+                <a16:creationId xmlns:a16="http://schemas.microsoft.com/office/drawing/2014/main" id="{00F4BF20-C70B-41FB-BAD6-C62E4610F330}"/>
               </a:ext>
             </a:extLst>
           </p:cNvPr>
@@ -20034,7 +20437,7 @@
           <p:cNvPr id="19" name="p07-d3-d">
             <a:extLst xmlns:a="http://schemas.openxmlformats.org/drawingml/2006/main">
               <a:ext uri="{FF2B5EF4-FFF2-40B4-BE49-F238E27FC236}">
-                <a16:creationId xmlns:a16="http://schemas.microsoft.com/office/drawing/2014/main" id="{E46B999E-F6D8-4D02-BA74-D32AA0CBFFC3}"/>
+                <a16:creationId xmlns:a16="http://schemas.microsoft.com/office/drawing/2014/main" id="{75E6B579-D713-41F2-9E14-D7176148B4ED}"/>
               </a:ext>
             </a:extLst>
           </p:cNvPr>
@@ -20097,7 +20500,7 @@
           <p:cNvPr id="20" name="p07-novel0">
             <a:extLst xmlns:a="http://schemas.openxmlformats.org/drawingml/2006/main">
               <a:ext uri="{FF2B5EF4-FFF2-40B4-BE49-F238E27FC236}">
-                <a16:creationId xmlns:a16="http://schemas.microsoft.com/office/drawing/2014/main" id="{BAC0DE3C-3799-4413-B1C9-47E848E0F749}"/>
+                <a16:creationId xmlns:a16="http://schemas.microsoft.com/office/drawing/2014/main" id="{460411E0-A7CF-48A1-AA13-E75402BFEA82}"/>
               </a:ext>
             </a:extLst>
           </p:cNvPr>
@@ -20154,7 +20557,7 @@
           <p:cNvPr id="21" name="p07-novel1">
             <a:extLst xmlns:a="http://schemas.openxmlformats.org/drawingml/2006/main">
               <a:ext uri="{FF2B5EF4-FFF2-40B4-BE49-F238E27FC236}">
-                <a16:creationId xmlns:a16="http://schemas.microsoft.com/office/drawing/2014/main" id="{74B07AC2-04EB-44EC-9309-37E09798487D}"/>
+                <a16:creationId xmlns:a16="http://schemas.microsoft.com/office/drawing/2014/main" id="{E1E4BC1C-8325-4C78-90F9-FAA0A4A7F2BF}"/>
               </a:ext>
             </a:extLst>
           </p:cNvPr>
@@ -20211,7 +20614,7 @@
           <p:cNvPr id="22" name="p07-novel2">
             <a:extLst xmlns:a="http://schemas.openxmlformats.org/drawingml/2006/main">
               <a:ext uri="{FF2B5EF4-FFF2-40B4-BE49-F238E27FC236}">
-                <a16:creationId xmlns:a16="http://schemas.microsoft.com/office/drawing/2014/main" id="{0B2F8D6D-F789-4A28-928B-C37374B52D91}"/>
+                <a16:creationId xmlns:a16="http://schemas.microsoft.com/office/drawing/2014/main" id="{D70EEA8F-B747-4E33-A264-6EBEF94BD928}"/>
               </a:ext>
             </a:extLst>
           </p:cNvPr>
@@ -20268,7 +20671,7 @@
           <p:cNvPr id="23" name="p07-bottom">
             <a:extLst xmlns:a="http://schemas.openxmlformats.org/drawingml/2006/main">
               <a:ext uri="{FF2B5EF4-FFF2-40B4-BE49-F238E27FC236}">
-                <a16:creationId xmlns:a16="http://schemas.microsoft.com/office/drawing/2014/main" id="{27C8022E-7D7A-4581-A812-6A1FE5F0D331}"/>
+                <a16:creationId xmlns:a16="http://schemas.microsoft.com/office/drawing/2014/main" id="{340FA7B0-E091-4CBC-95B2-084AFB855A3C}"/>
               </a:ext>
             </a:extLst>
           </p:cNvPr>
@@ -20413,7 +20816,7 @@
           <p:cNvPr id="6" name="p07-scope">
             <a:extLst xmlns:a="http://schemas.openxmlformats.org/drawingml/2006/main">
               <a:ext uri="{FF2B5EF4-FFF2-40B4-BE49-F238E27FC236}">
-                <a16:creationId xmlns:a16="http://schemas.microsoft.com/office/drawing/2014/main" id="{3F097D13-3B33-4116-80AF-6FD5787C467C}"/>
+                <a16:creationId xmlns:a16="http://schemas.microsoft.com/office/drawing/2014/main" id="{1C147EE8-41A7-4A44-A51A-D13D066DF054}"/>
               </a:ext>
             </a:extLst>
           </p:cNvPr>
@@ -20468,7 +20871,7 @@
           <p:cNvPr id="7" name="p07-in0">
             <a:extLst xmlns:a="http://schemas.openxmlformats.org/drawingml/2006/main">
               <a:ext uri="{FF2B5EF4-FFF2-40B4-BE49-F238E27FC236}">
-                <a16:creationId xmlns:a16="http://schemas.microsoft.com/office/drawing/2014/main" id="{DE3F052C-B8FA-48B1-989C-E71AB5D499F6}"/>
+                <a16:creationId xmlns:a16="http://schemas.microsoft.com/office/drawing/2014/main" id="{2595AB61-6664-49CF-939F-AB80F15D6F29}"/>
               </a:ext>
             </a:extLst>
           </p:cNvPr>
@@ -20527,7 +20930,7 @@
           <p:cNvPr id="8" name="p07-in1">
             <a:extLst xmlns:a="http://schemas.openxmlformats.org/drawingml/2006/main">
               <a:ext uri="{FF2B5EF4-FFF2-40B4-BE49-F238E27FC236}">
-                <a16:creationId xmlns:a16="http://schemas.microsoft.com/office/drawing/2014/main" id="{41B10B18-5416-4CB6-9059-D9B8D4BCC097}"/>
+                <a16:creationId xmlns:a16="http://schemas.microsoft.com/office/drawing/2014/main" id="{4871B96B-FEF3-4160-A7EB-A98C9B551583}"/>
               </a:ext>
             </a:extLst>
           </p:cNvPr>
@@ -20586,7 +20989,7 @@
           <p:cNvPr id="9" name="p07-in2">
             <a:extLst xmlns:a="http://schemas.openxmlformats.org/drawingml/2006/main">
               <a:ext uri="{FF2B5EF4-FFF2-40B4-BE49-F238E27FC236}">
-                <a16:creationId xmlns:a16="http://schemas.microsoft.com/office/drawing/2014/main" id="{14F19C32-E6AA-4550-B509-B511C75A1C4A}"/>
+                <a16:creationId xmlns:a16="http://schemas.microsoft.com/office/drawing/2014/main" id="{C9805058-0347-44BB-9D40-C25020FC37E9}"/>
               </a:ext>
             </a:extLst>
           </p:cNvPr>
@@ -20645,7 +21048,7 @@
           <p:cNvPr id="10" name="p07-non">
             <a:extLst xmlns:a="http://schemas.openxmlformats.org/drawingml/2006/main">
               <a:ext uri="{FF2B5EF4-FFF2-40B4-BE49-F238E27FC236}">
-                <a16:creationId xmlns:a16="http://schemas.microsoft.com/office/drawing/2014/main" id="{B54A9AE8-609E-4A8D-A625-8BA5D7A46537}"/>
+                <a16:creationId xmlns:a16="http://schemas.microsoft.com/office/drawing/2014/main" id="{A04F6D25-61D8-4624-A03E-9F43AAD52922}"/>
               </a:ext>
             </a:extLst>
           </p:cNvPr>
@@ -20700,7 +21103,7 @@
           <p:cNvPr id="11" name="p07-out0">
             <a:extLst xmlns:a="http://schemas.openxmlformats.org/drawingml/2006/main">
               <a:ext uri="{FF2B5EF4-FFF2-40B4-BE49-F238E27FC236}">
-                <a16:creationId xmlns:a16="http://schemas.microsoft.com/office/drawing/2014/main" id="{07D4B901-6191-4051-A965-BC4E1FD471D7}"/>
+                <a16:creationId xmlns:a16="http://schemas.microsoft.com/office/drawing/2014/main" id="{BB45F42F-2F05-47D6-8118-0503D894004E}"/>
               </a:ext>
             </a:extLst>
           </p:cNvPr>
@@ -20759,7 +21162,7 @@
           <p:cNvPr id="12" name="p07-out1">
             <a:extLst xmlns:a="http://schemas.openxmlformats.org/drawingml/2006/main">
               <a:ext uri="{FF2B5EF4-FFF2-40B4-BE49-F238E27FC236}">
-                <a16:creationId xmlns:a16="http://schemas.microsoft.com/office/drawing/2014/main" id="{71C1304C-604F-45BC-812F-DE4DAFAF81EC}"/>
+                <a16:creationId xmlns:a16="http://schemas.microsoft.com/office/drawing/2014/main" id="{8F222E13-71B6-4C5F-9A6B-D1F907D09E47}"/>
               </a:ext>
             </a:extLst>
           </p:cNvPr>
@@ -20818,7 +21221,7 @@
           <p:cNvPr id="13" name="p07-out2">
             <a:extLst xmlns:a="http://schemas.openxmlformats.org/drawingml/2006/main">
               <a:ext uri="{FF2B5EF4-FFF2-40B4-BE49-F238E27FC236}">
-                <a16:creationId xmlns:a16="http://schemas.microsoft.com/office/drawing/2014/main" id="{A2D2C03A-81E6-485F-8DA0-D84E27621077}"/>
+                <a16:creationId xmlns:a16="http://schemas.microsoft.com/office/drawing/2014/main" id="{43BC6EEA-6030-4489-AE9E-2F4339B79140}"/>
               </a:ext>
             </a:extLst>
           </p:cNvPr>
@@ -20877,7 +21280,7 @@
           <p:cNvPr id="14" name="p07-boundary">
             <a:extLst xmlns:a="http://schemas.openxmlformats.org/drawingml/2006/main">
               <a:ext uri="{FF2B5EF4-FFF2-40B4-BE49-F238E27FC236}">
-                <a16:creationId xmlns:a16="http://schemas.microsoft.com/office/drawing/2014/main" id="{C3186824-2507-43C9-9532-80440F0DA781}"/>
+                <a16:creationId xmlns:a16="http://schemas.microsoft.com/office/drawing/2014/main" id="{5E0D3FD3-74D3-41EB-94CD-AE12F0684561}"/>
               </a:ext>
             </a:extLst>
           </p:cNvPr>
@@ -20934,7 +21337,7 @@
           <p:cNvPr id="15" name="p07-bottom">
             <a:extLst xmlns:a="http://schemas.openxmlformats.org/drawingml/2006/main">
               <a:ext uri="{FF2B5EF4-FFF2-40B4-BE49-F238E27FC236}">
-                <a16:creationId xmlns:a16="http://schemas.microsoft.com/office/drawing/2014/main" id="{2EB0F286-0EFF-46AA-8F40-C3D01B3BE051}"/>
+                <a16:creationId xmlns:a16="http://schemas.microsoft.com/office/drawing/2014/main" id="{06481405-EA5E-4BAB-B4D4-47DC1A408408}"/>
               </a:ext>
             </a:extLst>
           </p:cNvPr>
@@ -21079,7 +21482,7 @@
           <p:cNvPr id="6" name="p08-0-h">
             <a:extLst xmlns:a="http://schemas.openxmlformats.org/drawingml/2006/main">
               <a:ext uri="{FF2B5EF4-FFF2-40B4-BE49-F238E27FC236}">
-                <a16:creationId xmlns:a16="http://schemas.microsoft.com/office/drawing/2014/main" id="{3E9F7CE4-3CCD-47F8-92E3-D126FEDDAB9E}"/>
+                <a16:creationId xmlns:a16="http://schemas.microsoft.com/office/drawing/2014/main" id="{06D939AB-44A5-45D2-9F08-A3E4FD611C57}"/>
               </a:ext>
             </a:extLst>
           </p:cNvPr>
@@ -21136,7 +21539,7 @@
           <p:cNvPr id="7" name="p08-0-d">
             <a:extLst xmlns:a="http://schemas.openxmlformats.org/drawingml/2006/main">
               <a:ext uri="{FF2B5EF4-FFF2-40B4-BE49-F238E27FC236}">
-                <a16:creationId xmlns:a16="http://schemas.microsoft.com/office/drawing/2014/main" id="{D51DF16B-966C-4218-9005-BA9B5561BE1F}"/>
+                <a16:creationId xmlns:a16="http://schemas.microsoft.com/office/drawing/2014/main" id="{1649EAA5-868A-4BD3-995C-285A1D7396DB}"/>
               </a:ext>
             </a:extLst>
           </p:cNvPr>
@@ -21228,7 +21631,7 @@
           <p:cNvPr id="8" name="p08-1-h">
             <a:extLst xmlns:a="http://schemas.openxmlformats.org/drawingml/2006/main">
               <a:ext uri="{FF2B5EF4-FFF2-40B4-BE49-F238E27FC236}">
-                <a16:creationId xmlns:a16="http://schemas.microsoft.com/office/drawing/2014/main" id="{3DC24690-8EA6-4387-AC43-1A0A7ABF1A4C}"/>
+                <a16:creationId xmlns:a16="http://schemas.microsoft.com/office/drawing/2014/main" id="{7E68CF86-ECEC-4121-B8CD-6DFC53276B81}"/>
               </a:ext>
             </a:extLst>
           </p:cNvPr>
@@ -21285,7 +21688,7 @@
           <p:cNvPr id="9" name="p08-1-d">
             <a:extLst xmlns:a="http://schemas.openxmlformats.org/drawingml/2006/main">
               <a:ext uri="{FF2B5EF4-FFF2-40B4-BE49-F238E27FC236}">
-                <a16:creationId xmlns:a16="http://schemas.microsoft.com/office/drawing/2014/main" id="{A09533EC-104C-4FDC-B11E-BD590FDB64FF}"/>
+                <a16:creationId xmlns:a16="http://schemas.microsoft.com/office/drawing/2014/main" id="{86D76467-2CA4-4068-AA25-868BEE4F61F8}"/>
               </a:ext>
             </a:extLst>
           </p:cNvPr>
@@ -21377,7 +21780,7 @@
           <p:cNvPr id="10" name="p08-2-h">
             <a:extLst xmlns:a="http://schemas.openxmlformats.org/drawingml/2006/main">
               <a:ext uri="{FF2B5EF4-FFF2-40B4-BE49-F238E27FC236}">
-                <a16:creationId xmlns:a16="http://schemas.microsoft.com/office/drawing/2014/main" id="{EAF66119-329A-4346-BAD1-2CEC839DCD4B}"/>
+                <a16:creationId xmlns:a16="http://schemas.microsoft.com/office/drawing/2014/main" id="{6C4D2CB3-2F68-4046-8BB9-AC2D72331D0C}"/>
               </a:ext>
             </a:extLst>
           </p:cNvPr>
@@ -21434,7 +21837,7 @@
           <p:cNvPr id="11" name="p08-2-d">
             <a:extLst xmlns:a="http://schemas.openxmlformats.org/drawingml/2006/main">
               <a:ext uri="{FF2B5EF4-FFF2-40B4-BE49-F238E27FC236}">
-                <a16:creationId xmlns:a16="http://schemas.microsoft.com/office/drawing/2014/main" id="{5CF97150-DE8C-4744-9867-AF344BD8D5EC}"/>
+                <a16:creationId xmlns:a16="http://schemas.microsoft.com/office/drawing/2014/main" id="{5E90D83B-33AD-47AF-BC3C-DA4ABECF4B18}"/>
               </a:ext>
             </a:extLst>
           </p:cNvPr>
@@ -21526,7 +21929,7 @@
           <p:cNvPr id="12" name="p08-test">
             <a:extLst xmlns:a="http://schemas.openxmlformats.org/drawingml/2006/main">
               <a:ext uri="{FF2B5EF4-FFF2-40B4-BE49-F238E27FC236}">
-                <a16:creationId xmlns:a16="http://schemas.microsoft.com/office/drawing/2014/main" id="{103B0117-B39B-4143-B1E1-9066443B01DD}"/>
+                <a16:creationId xmlns:a16="http://schemas.microsoft.com/office/drawing/2014/main" id="{D1977FA1-0C3C-4643-BCF4-5B591949A02F}"/>
               </a:ext>
             </a:extLst>
           </p:cNvPr>
